--- a/MyOwnPresentations/pptx/Min_Span_Tree_Shortest_Path_X.pptx
+++ b/MyOwnPresentations/pptx/Min_Span_Tree_Shortest_Path_X.pptx
@@ -10,7 +10,20 @@
     <p:sldId id="257" r:id="rId4"/>
     <p:sldId id="260" r:id="rId5"/>
     <p:sldId id="258" r:id="rId6"/>
-    <p:sldId id="259" r:id="rId7"/>
+    <p:sldId id="261" r:id="rId7"/>
+    <p:sldId id="259" r:id="rId8"/>
+    <p:sldId id="262" r:id="rId9"/>
+    <p:sldId id="263" r:id="rId10"/>
+    <p:sldId id="264" r:id="rId11"/>
+    <p:sldId id="267" r:id="rId12"/>
+    <p:sldId id="268" r:id="rId13"/>
+    <p:sldId id="269" r:id="rId14"/>
+    <p:sldId id="270" r:id="rId15"/>
+    <p:sldId id="271" r:id="rId16"/>
+    <p:sldId id="272" r:id="rId17"/>
+    <p:sldId id="273" r:id="rId18"/>
+    <p:sldId id="274" r:id="rId19"/>
+    <p:sldId id="265" r:id="rId20"/>
   </p:sldIdLst>
   <p:sldSz cx="12192000" cy="6858000"/>
   <p:notesSz cx="6858000" cy="9144000"/>
@@ -109,7 +122,3286 @@
       </a:defRPr>
     </a:lvl9pPr>
   </p:defaultTextStyle>
+  <p:extLst>
+    <p:ext uri="{EFAFB233-063F-42B5-8137-9DF3F51BA10A}">
+      <p15:sldGuideLst xmlns:p15="http://schemas.microsoft.com/office/powerpoint/2012/main"/>
+    </p:ext>
+  </p:extLst>
 </p:presentation>
+</file>
+
+<file path=ppt/diagrams/colors1.xml><?xml version="1.0" encoding="utf-8"?>
+<dgm:colorsDef xmlns:dgm="http://schemas.openxmlformats.org/drawingml/2006/diagram" xmlns:a="http://schemas.openxmlformats.org/drawingml/2006/main" uniqueId="urn:microsoft.com/office/officeart/2018/5/colors/Iconchunking_coloredtext_colorful1">
+  <dgm:title val=""/>
+  <dgm:desc val=""/>
+  <dgm:catLst>
+    <dgm:cat type="colorful" pri="10100"/>
+  </dgm:catLst>
+  <dgm:styleLbl name="node0">
+    <dgm:fillClrLst meth="repeat">
+      <a:schemeClr val="accent1"/>
+    </dgm:fillClrLst>
+    <dgm:linClrLst meth="repeat">
+      <a:schemeClr val="lt1"/>
+    </dgm:linClrLst>
+    <dgm:effectClrLst/>
+    <dgm:txLinClrLst/>
+    <dgm:txFillClrLst/>
+    <dgm:txEffectClrLst/>
+  </dgm:styleLbl>
+  <dgm:styleLbl name="node1">
+    <dgm:fillClrLst meth="repeat">
+      <a:schemeClr val="bg1"/>
+    </dgm:fillClrLst>
+    <dgm:linClrLst meth="repeat">
+      <a:schemeClr val="lt1">
+        <a:alpha val="0"/>
+      </a:schemeClr>
+    </dgm:linClrLst>
+    <dgm:effectClrLst/>
+    <dgm:txLinClrLst/>
+    <dgm:txFillClrLst meth="repeat">
+      <a:schemeClr val="dk1"/>
+    </dgm:txFillClrLst>
+    <dgm:txEffectClrLst/>
+  </dgm:styleLbl>
+  <dgm:styleLbl name="alignNode1">
+    <dgm:fillClrLst meth="repeat">
+      <a:schemeClr val="accent2"/>
+      <a:schemeClr val="accent3"/>
+      <a:schemeClr val="accent4"/>
+      <a:schemeClr val="accent5"/>
+      <a:schemeClr val="accent6"/>
+    </dgm:fillClrLst>
+    <dgm:linClrLst meth="repeat">
+      <a:schemeClr val="accent2"/>
+      <a:schemeClr val="accent3"/>
+      <a:schemeClr val="accent4"/>
+      <a:schemeClr val="accent5"/>
+      <a:schemeClr val="accent6"/>
+    </dgm:linClrLst>
+    <dgm:effectClrLst/>
+    <dgm:txLinClrLst/>
+    <dgm:txFillClrLst/>
+    <dgm:txEffectClrLst/>
+  </dgm:styleLbl>
+  <dgm:styleLbl name="lnNode1">
+    <dgm:fillClrLst meth="repeat">
+      <a:schemeClr val="accent2"/>
+      <a:schemeClr val="accent3"/>
+      <a:schemeClr val="accent4"/>
+      <a:schemeClr val="accent5"/>
+      <a:schemeClr val="accent6"/>
+    </dgm:fillClrLst>
+    <dgm:linClrLst meth="repeat">
+      <a:schemeClr val="lt1"/>
+    </dgm:linClrLst>
+    <dgm:effectClrLst/>
+    <dgm:txLinClrLst/>
+    <dgm:txFillClrLst/>
+    <dgm:txEffectClrLst/>
+  </dgm:styleLbl>
+  <dgm:styleLbl name="vennNode1">
+    <dgm:fillClrLst meth="repeat">
+      <a:schemeClr val="accent2">
+        <a:alpha val="50000"/>
+      </a:schemeClr>
+      <a:schemeClr val="accent3">
+        <a:alpha val="50000"/>
+      </a:schemeClr>
+      <a:schemeClr val="accent4">
+        <a:alpha val="50000"/>
+      </a:schemeClr>
+      <a:schemeClr val="accent5">
+        <a:alpha val="50000"/>
+      </a:schemeClr>
+      <a:schemeClr val="accent6">
+        <a:alpha val="50000"/>
+      </a:schemeClr>
+    </dgm:fillClrLst>
+    <dgm:linClrLst meth="repeat">
+      <a:schemeClr val="lt1"/>
+    </dgm:linClrLst>
+    <dgm:effectClrLst/>
+    <dgm:txLinClrLst/>
+    <dgm:txFillClrLst/>
+    <dgm:txEffectClrLst/>
+  </dgm:styleLbl>
+  <dgm:styleLbl name="node2">
+    <dgm:fillClrLst>
+      <a:schemeClr val="accent2"/>
+    </dgm:fillClrLst>
+    <dgm:linClrLst meth="repeat">
+      <a:schemeClr val="lt1"/>
+    </dgm:linClrLst>
+    <dgm:effectClrLst/>
+    <dgm:txLinClrLst/>
+    <dgm:txFillClrLst/>
+    <dgm:txEffectClrLst/>
+  </dgm:styleLbl>
+  <dgm:styleLbl name="node3">
+    <dgm:fillClrLst>
+      <a:schemeClr val="accent3"/>
+    </dgm:fillClrLst>
+    <dgm:linClrLst meth="repeat">
+      <a:schemeClr val="lt1"/>
+    </dgm:linClrLst>
+    <dgm:effectClrLst/>
+    <dgm:txLinClrLst/>
+    <dgm:txFillClrLst/>
+    <dgm:txEffectClrLst/>
+  </dgm:styleLbl>
+  <dgm:styleLbl name="node4">
+    <dgm:fillClrLst>
+      <a:schemeClr val="accent4"/>
+    </dgm:fillClrLst>
+    <dgm:linClrLst meth="repeat">
+      <a:schemeClr val="lt1"/>
+    </dgm:linClrLst>
+    <dgm:effectClrLst/>
+    <dgm:txLinClrLst/>
+    <dgm:txFillClrLst/>
+    <dgm:txEffectClrLst/>
+  </dgm:styleLbl>
+  <dgm:styleLbl name="fgImgPlace1">
+    <dgm:fillClrLst meth="repeat">
+      <a:schemeClr val="accent2">
+        <a:tint val="50000"/>
+      </a:schemeClr>
+      <a:schemeClr val="accent3">
+        <a:tint val="50000"/>
+      </a:schemeClr>
+      <a:schemeClr val="accent4">
+        <a:tint val="50000"/>
+      </a:schemeClr>
+      <a:schemeClr val="accent5">
+        <a:tint val="50000"/>
+      </a:schemeClr>
+      <a:schemeClr val="accent6">
+        <a:tint val="50000"/>
+      </a:schemeClr>
+    </dgm:fillClrLst>
+    <dgm:linClrLst meth="repeat">
+      <a:schemeClr val="lt1"/>
+    </dgm:linClrLst>
+    <dgm:effectClrLst/>
+    <dgm:txLinClrLst/>
+    <dgm:txFillClrLst meth="repeat">
+      <a:schemeClr val="lt1"/>
+    </dgm:txFillClrLst>
+    <dgm:txEffectClrLst/>
+  </dgm:styleLbl>
+  <dgm:styleLbl name="alignImgPlace1">
+    <dgm:fillClrLst>
+      <a:schemeClr val="accent1">
+        <a:tint val="50000"/>
+      </a:schemeClr>
+      <a:schemeClr val="accent2">
+        <a:tint val="20000"/>
+      </a:schemeClr>
+    </dgm:fillClrLst>
+    <dgm:linClrLst meth="repeat">
+      <a:schemeClr val="lt1"/>
+    </dgm:linClrLst>
+    <dgm:effectClrLst/>
+    <dgm:txLinClrLst/>
+    <dgm:txFillClrLst meth="repeat">
+      <a:schemeClr val="lt1"/>
+    </dgm:txFillClrLst>
+    <dgm:txEffectClrLst/>
+  </dgm:styleLbl>
+  <dgm:styleLbl name="bgImgPlace1">
+    <dgm:fillClrLst>
+      <a:schemeClr val="accent1">
+        <a:tint val="50000"/>
+      </a:schemeClr>
+      <a:schemeClr val="accent2">
+        <a:tint val="20000"/>
+      </a:schemeClr>
+    </dgm:fillClrLst>
+    <dgm:linClrLst meth="repeat">
+      <a:schemeClr val="lt1"/>
+    </dgm:linClrLst>
+    <dgm:effectClrLst/>
+    <dgm:txLinClrLst/>
+    <dgm:txFillClrLst meth="repeat">
+      <a:schemeClr val="lt1"/>
+    </dgm:txFillClrLst>
+    <dgm:txEffectClrLst/>
+  </dgm:styleLbl>
+  <dgm:styleLbl name="sibTrans2D1">
+    <dgm:fillClrLst meth="repeat">
+      <a:schemeClr val="accent2"/>
+      <a:schemeClr val="accent3"/>
+      <a:schemeClr val="accent4"/>
+      <a:schemeClr val="accent5"/>
+      <a:schemeClr val="accent6"/>
+    </dgm:fillClrLst>
+    <dgm:linClrLst meth="cycle">
+      <a:schemeClr val="lt1"/>
+    </dgm:linClrLst>
+    <dgm:effectClrLst/>
+    <dgm:txLinClrLst/>
+    <dgm:txFillClrLst/>
+    <dgm:txEffectClrLst/>
+  </dgm:styleLbl>
+  <dgm:styleLbl name="fgSibTrans2D1">
+    <dgm:fillClrLst meth="repeat">
+      <a:schemeClr val="accent2"/>
+      <a:schemeClr val="accent3"/>
+      <a:schemeClr val="accent4"/>
+      <a:schemeClr val="accent5"/>
+      <a:schemeClr val="accent6"/>
+    </dgm:fillClrLst>
+    <dgm:linClrLst meth="cycle">
+      <a:schemeClr val="lt1"/>
+    </dgm:linClrLst>
+    <dgm:effectClrLst/>
+    <dgm:txLinClrLst/>
+    <dgm:txFillClrLst meth="repeat">
+      <a:schemeClr val="lt1"/>
+    </dgm:txFillClrLst>
+    <dgm:txEffectClrLst/>
+  </dgm:styleLbl>
+  <dgm:styleLbl name="bgSibTrans2D1">
+    <dgm:fillClrLst meth="repeat">
+      <a:schemeClr val="accent2"/>
+      <a:schemeClr val="accent3"/>
+      <a:schemeClr val="accent4"/>
+      <a:schemeClr val="accent5"/>
+      <a:schemeClr val="accent6"/>
+    </dgm:fillClrLst>
+    <dgm:linClrLst meth="cycle">
+      <a:schemeClr val="lt1"/>
+    </dgm:linClrLst>
+    <dgm:effectClrLst/>
+    <dgm:txLinClrLst/>
+    <dgm:txFillClrLst meth="repeat">
+      <a:schemeClr val="lt1"/>
+    </dgm:txFillClrLst>
+    <dgm:txEffectClrLst/>
+  </dgm:styleLbl>
+  <dgm:styleLbl name="sibTrans1D1">
+    <dgm:fillClrLst meth="repeat">
+      <a:schemeClr val="accent2"/>
+      <a:schemeClr val="accent3"/>
+      <a:schemeClr val="accent4"/>
+      <a:schemeClr val="accent5"/>
+      <a:schemeClr val="accent6"/>
+    </dgm:fillClrLst>
+    <dgm:linClrLst meth="repeat">
+      <a:schemeClr val="accent2"/>
+      <a:schemeClr val="accent3"/>
+      <a:schemeClr val="accent4"/>
+      <a:schemeClr val="accent5"/>
+      <a:schemeClr val="accent6"/>
+    </dgm:linClrLst>
+    <dgm:effectClrLst/>
+    <dgm:txLinClrLst/>
+    <dgm:txFillClrLst meth="repeat">
+      <a:schemeClr val="tx1"/>
+    </dgm:txFillClrLst>
+    <dgm:txEffectClrLst/>
+  </dgm:styleLbl>
+  <dgm:styleLbl name="callout">
+    <dgm:fillClrLst meth="repeat">
+      <a:schemeClr val="accent2"/>
+    </dgm:fillClrLst>
+    <dgm:linClrLst meth="repeat">
+      <a:schemeClr val="accent2">
+        <a:tint val="50000"/>
+      </a:schemeClr>
+    </dgm:linClrLst>
+    <dgm:effectClrLst/>
+    <dgm:txLinClrLst/>
+    <dgm:txFillClrLst meth="repeat">
+      <a:schemeClr val="tx1"/>
+    </dgm:txFillClrLst>
+    <dgm:txEffectClrLst/>
+  </dgm:styleLbl>
+  <dgm:styleLbl name="asst0">
+    <dgm:fillClrLst meth="repeat">
+      <a:schemeClr val="accent1"/>
+    </dgm:fillClrLst>
+    <dgm:linClrLst meth="repeat">
+      <a:schemeClr val="lt1"/>
+    </dgm:linClrLst>
+    <dgm:effectClrLst/>
+    <dgm:txLinClrLst/>
+    <dgm:txFillClrLst/>
+    <dgm:txEffectClrLst/>
+  </dgm:styleLbl>
+  <dgm:styleLbl name="asst1">
+    <dgm:fillClrLst meth="repeat">
+      <a:schemeClr val="accent2"/>
+    </dgm:fillClrLst>
+    <dgm:linClrLst meth="repeat">
+      <a:schemeClr val="lt1"/>
+    </dgm:linClrLst>
+    <dgm:effectClrLst/>
+    <dgm:txLinClrLst/>
+    <dgm:txFillClrLst/>
+    <dgm:txEffectClrLst/>
+  </dgm:styleLbl>
+  <dgm:styleLbl name="asst2">
+    <dgm:fillClrLst>
+      <a:schemeClr val="accent3"/>
+    </dgm:fillClrLst>
+    <dgm:linClrLst meth="repeat">
+      <a:schemeClr val="lt1"/>
+    </dgm:linClrLst>
+    <dgm:effectClrLst/>
+    <dgm:txLinClrLst/>
+    <dgm:txFillClrLst/>
+    <dgm:txEffectClrLst/>
+  </dgm:styleLbl>
+  <dgm:styleLbl name="asst3">
+    <dgm:fillClrLst>
+      <a:schemeClr val="accent4"/>
+    </dgm:fillClrLst>
+    <dgm:linClrLst meth="repeat">
+      <a:schemeClr val="lt1"/>
+    </dgm:linClrLst>
+    <dgm:effectClrLst/>
+    <dgm:txLinClrLst/>
+    <dgm:txFillClrLst/>
+    <dgm:txEffectClrLst/>
+  </dgm:styleLbl>
+  <dgm:styleLbl name="asst4">
+    <dgm:fillClrLst>
+      <a:schemeClr val="accent5"/>
+    </dgm:fillClrLst>
+    <dgm:linClrLst meth="repeat">
+      <a:schemeClr val="lt1"/>
+    </dgm:linClrLst>
+    <dgm:effectClrLst/>
+    <dgm:txLinClrLst/>
+    <dgm:txFillClrLst/>
+    <dgm:txEffectClrLst/>
+  </dgm:styleLbl>
+  <dgm:styleLbl name="parChTrans2D1">
+    <dgm:fillClrLst meth="repeat">
+      <a:schemeClr val="accent2"/>
+    </dgm:fillClrLst>
+    <dgm:linClrLst meth="repeat">
+      <a:schemeClr val="lt1"/>
+    </dgm:linClrLst>
+    <dgm:effectClrLst/>
+    <dgm:txLinClrLst/>
+    <dgm:txFillClrLst meth="repeat">
+      <a:schemeClr val="lt1"/>
+    </dgm:txFillClrLst>
+    <dgm:txEffectClrLst/>
+  </dgm:styleLbl>
+  <dgm:styleLbl name="parChTrans2D2">
+    <dgm:fillClrLst meth="repeat">
+      <a:schemeClr val="accent3"/>
+    </dgm:fillClrLst>
+    <dgm:linClrLst meth="repeat">
+      <a:schemeClr val="lt1"/>
+    </dgm:linClrLst>
+    <dgm:effectClrLst/>
+    <dgm:txLinClrLst/>
+    <dgm:txFillClrLst/>
+    <dgm:txEffectClrLst/>
+  </dgm:styleLbl>
+  <dgm:styleLbl name="parChTrans2D3">
+    <dgm:fillClrLst meth="repeat">
+      <a:schemeClr val="accent4"/>
+    </dgm:fillClrLst>
+    <dgm:linClrLst meth="repeat">
+      <a:schemeClr val="lt1"/>
+    </dgm:linClrLst>
+    <dgm:effectClrLst/>
+    <dgm:txLinClrLst/>
+    <dgm:txFillClrLst/>
+    <dgm:txEffectClrLst/>
+  </dgm:styleLbl>
+  <dgm:styleLbl name="parChTrans2D4">
+    <dgm:fillClrLst meth="repeat">
+      <a:schemeClr val="accent5"/>
+    </dgm:fillClrLst>
+    <dgm:linClrLst meth="repeat">
+      <a:schemeClr val="lt1"/>
+    </dgm:linClrLst>
+    <dgm:effectClrLst/>
+    <dgm:txLinClrLst/>
+    <dgm:txFillClrLst meth="repeat">
+      <a:schemeClr val="lt1"/>
+    </dgm:txFillClrLst>
+    <dgm:txEffectClrLst/>
+  </dgm:styleLbl>
+  <dgm:styleLbl name="parChTrans1D1">
+    <dgm:fillClrLst meth="repeat">
+      <a:schemeClr val="accent2"/>
+    </dgm:fillClrLst>
+    <dgm:linClrLst meth="repeat">
+      <a:schemeClr val="accent1"/>
+    </dgm:linClrLst>
+    <dgm:effectClrLst/>
+    <dgm:txLinClrLst/>
+    <dgm:txFillClrLst meth="repeat">
+      <a:schemeClr val="tx1"/>
+    </dgm:txFillClrLst>
+    <dgm:txEffectClrLst/>
+  </dgm:styleLbl>
+  <dgm:styleLbl name="parChTrans1D2">
+    <dgm:fillClrLst meth="repeat">
+      <a:schemeClr val="accent3">
+        <a:tint val="90000"/>
+      </a:schemeClr>
+    </dgm:fillClrLst>
+    <dgm:linClrLst meth="repeat">
+      <a:schemeClr val="accent2"/>
+    </dgm:linClrLst>
+    <dgm:effectClrLst/>
+    <dgm:txLinClrLst/>
+    <dgm:txFillClrLst meth="repeat">
+      <a:schemeClr val="tx1"/>
+    </dgm:txFillClrLst>
+    <dgm:txEffectClrLst/>
+  </dgm:styleLbl>
+  <dgm:styleLbl name="parChTrans1D3">
+    <dgm:fillClrLst meth="repeat">
+      <a:schemeClr val="accent4">
+        <a:tint val="70000"/>
+      </a:schemeClr>
+    </dgm:fillClrLst>
+    <dgm:linClrLst meth="repeat">
+      <a:schemeClr val="accent3"/>
+    </dgm:linClrLst>
+    <dgm:effectClrLst/>
+    <dgm:txLinClrLst/>
+    <dgm:txFillClrLst meth="repeat">
+      <a:schemeClr val="tx1"/>
+    </dgm:txFillClrLst>
+    <dgm:txEffectClrLst/>
+  </dgm:styleLbl>
+  <dgm:styleLbl name="parChTrans1D4">
+    <dgm:fillClrLst meth="repeat">
+      <a:schemeClr val="accent5">
+        <a:tint val="50000"/>
+      </a:schemeClr>
+    </dgm:fillClrLst>
+    <dgm:linClrLst meth="repeat">
+      <a:schemeClr val="accent4"/>
+    </dgm:linClrLst>
+    <dgm:effectClrLst/>
+    <dgm:txLinClrLst/>
+    <dgm:txFillClrLst meth="repeat">
+      <a:schemeClr val="tx1"/>
+    </dgm:txFillClrLst>
+    <dgm:txEffectClrLst/>
+  </dgm:styleLbl>
+  <dgm:styleLbl name="fgAcc1">
+    <dgm:fillClrLst meth="repeat">
+      <a:schemeClr val="lt1">
+        <a:alpha val="90000"/>
+      </a:schemeClr>
+    </dgm:fillClrLst>
+    <dgm:linClrLst meth="repeat">
+      <a:schemeClr val="accent2"/>
+      <a:schemeClr val="accent3"/>
+      <a:schemeClr val="accent4"/>
+      <a:schemeClr val="accent5"/>
+      <a:schemeClr val="accent6"/>
+    </dgm:linClrLst>
+    <dgm:effectClrLst/>
+    <dgm:txLinClrLst/>
+    <dgm:txFillClrLst meth="repeat">
+      <a:schemeClr val="dk1"/>
+    </dgm:txFillClrLst>
+    <dgm:txEffectClrLst/>
+  </dgm:styleLbl>
+  <dgm:styleLbl name="conFgAcc1">
+    <dgm:fillClrLst meth="repeat">
+      <a:schemeClr val="lt1">
+        <a:alpha val="90000"/>
+      </a:schemeClr>
+    </dgm:fillClrLst>
+    <dgm:linClrLst meth="repeat">
+      <a:schemeClr val="accent2"/>
+      <a:schemeClr val="accent3"/>
+      <a:schemeClr val="accent4"/>
+      <a:schemeClr val="accent5"/>
+      <a:schemeClr val="accent6"/>
+    </dgm:linClrLst>
+    <dgm:effectClrLst/>
+    <dgm:txLinClrLst/>
+    <dgm:txFillClrLst meth="repeat">
+      <a:schemeClr val="dk1"/>
+    </dgm:txFillClrLst>
+    <dgm:txEffectClrLst/>
+  </dgm:styleLbl>
+  <dgm:styleLbl name="alignAcc1">
+    <dgm:fillClrLst meth="repeat">
+      <a:schemeClr val="lt1">
+        <a:alpha val="90000"/>
+      </a:schemeClr>
+    </dgm:fillClrLst>
+    <dgm:linClrLst meth="repeat">
+      <a:schemeClr val="accent2"/>
+      <a:schemeClr val="accent3"/>
+      <a:schemeClr val="accent4"/>
+      <a:schemeClr val="accent5"/>
+      <a:schemeClr val="accent6"/>
+    </dgm:linClrLst>
+    <dgm:effectClrLst/>
+    <dgm:txLinClrLst/>
+    <dgm:txFillClrLst meth="repeat">
+      <a:schemeClr val="dk1"/>
+    </dgm:txFillClrLst>
+    <dgm:txEffectClrLst/>
+  </dgm:styleLbl>
+  <dgm:styleLbl name="trAlignAcc1">
+    <dgm:fillClrLst meth="repeat">
+      <a:schemeClr val="lt1">
+        <a:alpha val="0"/>
+      </a:schemeClr>
+    </dgm:fillClrLst>
+    <dgm:linClrLst meth="repeat">
+      <a:schemeClr val="accent2"/>
+      <a:schemeClr val="accent3"/>
+      <a:schemeClr val="accent4"/>
+      <a:schemeClr val="accent5"/>
+      <a:schemeClr val="accent6"/>
+    </dgm:linClrLst>
+    <dgm:effectClrLst/>
+    <dgm:txLinClrLst/>
+    <dgm:txFillClrLst meth="repeat">
+      <a:schemeClr val="dk1"/>
+    </dgm:txFillClrLst>
+    <dgm:txEffectClrLst/>
+  </dgm:styleLbl>
+  <dgm:styleLbl name="bgAcc1">
+    <dgm:fillClrLst meth="repeat">
+      <a:schemeClr val="lt1">
+        <a:alpha val="90000"/>
+      </a:schemeClr>
+    </dgm:fillClrLst>
+    <dgm:linClrLst meth="repeat">
+      <a:schemeClr val="accent2"/>
+      <a:schemeClr val="accent3"/>
+      <a:schemeClr val="accent4"/>
+      <a:schemeClr val="accent5"/>
+      <a:schemeClr val="accent6"/>
+    </dgm:linClrLst>
+    <dgm:effectClrLst/>
+    <dgm:txLinClrLst/>
+    <dgm:txFillClrLst meth="repeat">
+      <a:schemeClr val="dk1"/>
+    </dgm:txFillClrLst>
+    <dgm:txEffectClrLst/>
+  </dgm:styleLbl>
+  <dgm:styleLbl name="solidFgAcc1">
+    <dgm:fillClrLst meth="repeat">
+      <a:schemeClr val="lt1"/>
+    </dgm:fillClrLst>
+    <dgm:linClrLst meth="repeat">
+      <a:schemeClr val="accent2"/>
+      <a:schemeClr val="accent3"/>
+      <a:schemeClr val="accent4"/>
+      <a:schemeClr val="accent5"/>
+      <a:schemeClr val="accent6"/>
+    </dgm:linClrLst>
+    <dgm:effectClrLst/>
+    <dgm:txLinClrLst/>
+    <dgm:txFillClrLst meth="repeat">
+      <a:schemeClr val="dk1"/>
+    </dgm:txFillClrLst>
+    <dgm:txEffectClrLst/>
+  </dgm:styleLbl>
+  <dgm:styleLbl name="solidAlignAcc1">
+    <dgm:fillClrLst meth="repeat">
+      <a:schemeClr val="lt1"/>
+    </dgm:fillClrLst>
+    <dgm:linClrLst meth="repeat">
+      <a:schemeClr val="accent2"/>
+      <a:schemeClr val="accent3"/>
+      <a:schemeClr val="accent4"/>
+      <a:schemeClr val="accent5"/>
+      <a:schemeClr val="accent6"/>
+    </dgm:linClrLst>
+    <dgm:effectClrLst/>
+    <dgm:txLinClrLst/>
+    <dgm:txFillClrLst meth="repeat">
+      <a:schemeClr val="dk1"/>
+    </dgm:txFillClrLst>
+    <dgm:txEffectClrLst/>
+  </dgm:styleLbl>
+  <dgm:styleLbl name="solidBgAcc1">
+    <dgm:fillClrLst meth="repeat">
+      <a:schemeClr val="lt1"/>
+    </dgm:fillClrLst>
+    <dgm:linClrLst meth="repeat">
+      <a:schemeClr val="accent2"/>
+      <a:schemeClr val="accent3"/>
+      <a:schemeClr val="accent4"/>
+      <a:schemeClr val="accent5"/>
+      <a:schemeClr val="accent6"/>
+    </dgm:linClrLst>
+    <dgm:effectClrLst/>
+    <dgm:txLinClrLst/>
+    <dgm:txFillClrLst meth="repeat">
+      <a:schemeClr val="dk1"/>
+    </dgm:txFillClrLst>
+    <dgm:txEffectClrLst/>
+  </dgm:styleLbl>
+  <dgm:styleLbl name="fgAccFollowNode1">
+    <dgm:fillClrLst meth="repeat">
+      <a:schemeClr val="accent2">
+        <a:tint val="40000"/>
+        <a:alpha val="90000"/>
+      </a:schemeClr>
+      <a:schemeClr val="accent3">
+        <a:tint val="40000"/>
+        <a:alpha val="90000"/>
+      </a:schemeClr>
+      <a:schemeClr val="accent4">
+        <a:tint val="40000"/>
+        <a:alpha val="90000"/>
+      </a:schemeClr>
+      <a:schemeClr val="accent5">
+        <a:tint val="40000"/>
+        <a:alpha val="90000"/>
+      </a:schemeClr>
+      <a:schemeClr val="accent6">
+        <a:tint val="40000"/>
+        <a:alpha val="90000"/>
+      </a:schemeClr>
+    </dgm:fillClrLst>
+    <dgm:linClrLst meth="repeat">
+      <a:schemeClr val="accent2">
+        <a:tint val="40000"/>
+        <a:alpha val="90000"/>
+      </a:schemeClr>
+      <a:schemeClr val="accent3">
+        <a:tint val="40000"/>
+        <a:alpha val="90000"/>
+      </a:schemeClr>
+      <a:schemeClr val="accent4">
+        <a:tint val="40000"/>
+        <a:alpha val="90000"/>
+      </a:schemeClr>
+      <a:schemeClr val="accent5">
+        <a:tint val="40000"/>
+        <a:alpha val="90000"/>
+      </a:schemeClr>
+      <a:schemeClr val="accent6">
+        <a:tint val="40000"/>
+        <a:alpha val="90000"/>
+      </a:schemeClr>
+    </dgm:linClrLst>
+    <dgm:effectClrLst/>
+    <dgm:txLinClrLst/>
+    <dgm:txFillClrLst meth="repeat">
+      <a:schemeClr val="dk1"/>
+    </dgm:txFillClrLst>
+    <dgm:txEffectClrLst/>
+  </dgm:styleLbl>
+  <dgm:styleLbl name="alignAccFollowNode1">
+    <dgm:fillClrLst meth="repeat">
+      <a:schemeClr val="accent2">
+        <a:tint val="40000"/>
+        <a:alpha val="90000"/>
+      </a:schemeClr>
+      <a:schemeClr val="accent3">
+        <a:tint val="40000"/>
+        <a:alpha val="90000"/>
+      </a:schemeClr>
+      <a:schemeClr val="accent4">
+        <a:tint val="40000"/>
+        <a:alpha val="90000"/>
+      </a:schemeClr>
+      <a:schemeClr val="accent5">
+        <a:tint val="40000"/>
+        <a:alpha val="90000"/>
+      </a:schemeClr>
+      <a:schemeClr val="accent6">
+        <a:tint val="40000"/>
+        <a:alpha val="90000"/>
+      </a:schemeClr>
+    </dgm:fillClrLst>
+    <dgm:linClrLst meth="repeat">
+      <a:schemeClr val="accent2">
+        <a:tint val="40000"/>
+        <a:alpha val="90000"/>
+      </a:schemeClr>
+      <a:schemeClr val="accent3">
+        <a:tint val="40000"/>
+        <a:alpha val="90000"/>
+      </a:schemeClr>
+      <a:schemeClr val="accent4">
+        <a:tint val="40000"/>
+        <a:alpha val="90000"/>
+      </a:schemeClr>
+      <a:schemeClr val="accent5">
+        <a:tint val="40000"/>
+        <a:alpha val="90000"/>
+      </a:schemeClr>
+      <a:schemeClr val="accent6">
+        <a:tint val="40000"/>
+        <a:alpha val="90000"/>
+      </a:schemeClr>
+    </dgm:linClrLst>
+    <dgm:effectClrLst/>
+    <dgm:txLinClrLst/>
+    <dgm:txFillClrLst meth="repeat">
+      <a:schemeClr val="dk1"/>
+    </dgm:txFillClrLst>
+    <dgm:txEffectClrLst/>
+  </dgm:styleLbl>
+  <dgm:styleLbl name="bgAccFollowNode1">
+    <dgm:fillClrLst meth="repeat">
+      <a:schemeClr val="accent2">
+        <a:tint val="40000"/>
+        <a:alpha val="90000"/>
+      </a:schemeClr>
+      <a:schemeClr val="accent3">
+        <a:tint val="40000"/>
+        <a:alpha val="90000"/>
+      </a:schemeClr>
+      <a:schemeClr val="accent4">
+        <a:tint val="40000"/>
+        <a:alpha val="90000"/>
+      </a:schemeClr>
+      <a:schemeClr val="accent5">
+        <a:tint val="40000"/>
+        <a:alpha val="90000"/>
+      </a:schemeClr>
+      <a:schemeClr val="accent6">
+        <a:tint val="40000"/>
+        <a:alpha val="90000"/>
+      </a:schemeClr>
+    </dgm:fillClrLst>
+    <dgm:linClrLst meth="repeat">
+      <a:schemeClr val="accent2">
+        <a:tint val="40000"/>
+        <a:alpha val="90000"/>
+      </a:schemeClr>
+      <a:schemeClr val="accent3">
+        <a:tint val="40000"/>
+        <a:alpha val="90000"/>
+      </a:schemeClr>
+      <a:schemeClr val="accent4">
+        <a:tint val="40000"/>
+        <a:alpha val="90000"/>
+      </a:schemeClr>
+      <a:schemeClr val="accent5">
+        <a:tint val="40000"/>
+        <a:alpha val="90000"/>
+      </a:schemeClr>
+      <a:schemeClr val="accent6">
+        <a:tint val="40000"/>
+        <a:alpha val="90000"/>
+      </a:schemeClr>
+    </dgm:linClrLst>
+    <dgm:effectClrLst/>
+    <dgm:txLinClrLst/>
+    <dgm:txFillClrLst meth="repeat">
+      <a:schemeClr val="dk1"/>
+    </dgm:txFillClrLst>
+    <dgm:txEffectClrLst/>
+  </dgm:styleLbl>
+  <dgm:styleLbl name="fgAcc0">
+    <dgm:fillClrLst meth="repeat">
+      <a:schemeClr val="lt1">
+        <a:alpha val="90000"/>
+      </a:schemeClr>
+    </dgm:fillClrLst>
+    <dgm:linClrLst>
+      <a:schemeClr val="accent1"/>
+    </dgm:linClrLst>
+    <dgm:effectClrLst/>
+    <dgm:txLinClrLst/>
+    <dgm:txFillClrLst meth="repeat">
+      <a:schemeClr val="dk1"/>
+    </dgm:txFillClrLst>
+    <dgm:txEffectClrLst/>
+  </dgm:styleLbl>
+  <dgm:styleLbl name="fgAcc2">
+    <dgm:fillClrLst meth="repeat">
+      <a:schemeClr val="lt1">
+        <a:alpha val="90000"/>
+      </a:schemeClr>
+    </dgm:fillClrLst>
+    <dgm:linClrLst>
+      <a:schemeClr val="accent2"/>
+    </dgm:linClrLst>
+    <dgm:effectClrLst/>
+    <dgm:txLinClrLst/>
+    <dgm:txFillClrLst meth="repeat">
+      <a:schemeClr val="dk1"/>
+    </dgm:txFillClrLst>
+    <dgm:txEffectClrLst/>
+  </dgm:styleLbl>
+  <dgm:styleLbl name="fgAcc3">
+    <dgm:fillClrLst meth="repeat">
+      <a:schemeClr val="lt1">
+        <a:alpha val="90000"/>
+      </a:schemeClr>
+    </dgm:fillClrLst>
+    <dgm:linClrLst>
+      <a:schemeClr val="accent3"/>
+    </dgm:linClrLst>
+    <dgm:effectClrLst/>
+    <dgm:txLinClrLst/>
+    <dgm:txFillClrLst meth="repeat">
+      <a:schemeClr val="dk1"/>
+    </dgm:txFillClrLst>
+    <dgm:txEffectClrLst/>
+  </dgm:styleLbl>
+  <dgm:styleLbl name="fgAcc4">
+    <dgm:fillClrLst meth="repeat">
+      <a:schemeClr val="lt1">
+        <a:alpha val="90000"/>
+      </a:schemeClr>
+    </dgm:fillClrLst>
+    <dgm:linClrLst>
+      <a:schemeClr val="accent4"/>
+    </dgm:linClrLst>
+    <dgm:effectClrLst/>
+    <dgm:txLinClrLst/>
+    <dgm:txFillClrLst meth="repeat">
+      <a:schemeClr val="dk1"/>
+    </dgm:txFillClrLst>
+    <dgm:txEffectClrLst/>
+  </dgm:styleLbl>
+  <dgm:styleLbl name="bgShp">
+    <dgm:fillClrLst meth="repeat">
+      <a:schemeClr val="accent2"/>
+      <a:schemeClr val="accent3"/>
+      <a:schemeClr val="accent4"/>
+      <a:schemeClr val="accent5"/>
+      <a:schemeClr val="accent6"/>
+    </dgm:fillClrLst>
+    <dgm:linClrLst meth="repeat">
+      <a:schemeClr val="lt1">
+        <a:alpha val="0"/>
+      </a:schemeClr>
+    </dgm:linClrLst>
+    <dgm:effectClrLst/>
+    <dgm:txLinClrLst/>
+    <dgm:txFillClrLst/>
+    <dgm:txEffectClrLst/>
+  </dgm:styleLbl>
+  <dgm:styleLbl name="dkBgShp">
+    <dgm:fillClrLst meth="repeat">
+      <a:schemeClr val="accent2">
+        <a:shade val="90000"/>
+      </a:schemeClr>
+    </dgm:fillClrLst>
+    <dgm:linClrLst meth="repeat">
+      <a:schemeClr val="dk1"/>
+    </dgm:linClrLst>
+    <dgm:effectClrLst/>
+    <dgm:txLinClrLst/>
+    <dgm:txFillClrLst meth="repeat">
+      <a:schemeClr val="lt1"/>
+    </dgm:txFillClrLst>
+    <dgm:txEffectClrLst/>
+  </dgm:styleLbl>
+  <dgm:styleLbl name="trBgShp">
+    <dgm:fillClrLst meth="repeat">
+      <a:schemeClr val="accent1">
+        <a:tint val="50000"/>
+        <a:alpha val="40000"/>
+      </a:schemeClr>
+    </dgm:fillClrLst>
+    <dgm:linClrLst meth="repeat">
+      <a:schemeClr val="accent2"/>
+    </dgm:linClrLst>
+    <dgm:effectClrLst/>
+    <dgm:txLinClrLst/>
+    <dgm:txFillClrLst meth="repeat">
+      <a:schemeClr val="lt1"/>
+    </dgm:txFillClrLst>
+    <dgm:txEffectClrLst/>
+  </dgm:styleLbl>
+  <dgm:styleLbl name="fgShp">
+    <dgm:fillClrLst meth="repeat">
+      <a:schemeClr val="accent2">
+        <a:tint val="40000"/>
+      </a:schemeClr>
+    </dgm:fillClrLst>
+    <dgm:linClrLst meth="repeat">
+      <a:schemeClr val="lt1"/>
+    </dgm:linClrLst>
+    <dgm:effectClrLst/>
+    <dgm:txLinClrLst/>
+    <dgm:txFillClrLst meth="repeat">
+      <a:schemeClr val="dk1"/>
+    </dgm:txFillClrLst>
+    <dgm:txEffectClrLst/>
+  </dgm:styleLbl>
+  <dgm:styleLbl name="revTx">
+    <dgm:fillClrLst meth="repeat">
+      <a:schemeClr val="accent2">
+        <a:alpha val="0"/>
+      </a:schemeClr>
+    </dgm:fillClrLst>
+    <dgm:linClrLst meth="repeat">
+      <a:schemeClr val="accent2">
+        <a:alpha val="0"/>
+      </a:schemeClr>
+    </dgm:linClrLst>
+    <dgm:effectClrLst/>
+    <dgm:txLinClrLst/>
+    <dgm:txFillClrLst meth="repeat">
+      <a:schemeClr val="accent2"/>
+      <a:schemeClr val="accent3"/>
+      <a:schemeClr val="accent4"/>
+      <a:schemeClr val="accent5"/>
+      <a:schemeClr val="accent6"/>
+    </dgm:txFillClrLst>
+    <dgm:txEffectClrLst/>
+  </dgm:styleLbl>
+</dgm:colorsDef>
+</file>
+
+<file path=ppt/diagrams/data1.xml><?xml version="1.0" encoding="utf-8"?>
+<dgm:dataModel xmlns:dgm="http://schemas.openxmlformats.org/drawingml/2006/diagram" xmlns:a="http://schemas.openxmlformats.org/drawingml/2006/main">
+  <dgm:ptLst>
+    <dgm:pt modelId="{8CFC34C8-A50E-48B4-9C88-0CB909173EDE}" type="doc">
+      <dgm:prSet loTypeId="urn:microsoft.com/office/officeart/2018/5/layout/IconLeafLabelList" loCatId="icon" qsTypeId="urn:microsoft.com/office/officeart/2005/8/quickstyle/simple1" qsCatId="simple" csTypeId="urn:microsoft.com/office/officeart/2018/5/colors/Iconchunking_coloredtext_colorful1" csCatId="colorful" phldr="1"/>
+      <dgm:spPr/>
+      <dgm:t>
+        <a:bodyPr/>
+        <a:lstStyle/>
+        <a:p>
+          <a:endParaRPr lang="en-US"/>
+        </a:p>
+      </dgm:t>
+    </dgm:pt>
+    <dgm:pt modelId="{092DCD78-995E-4AD3-9A03-2BE02BC57B55}">
+      <dgm:prSet custT="1"/>
+      <dgm:spPr/>
+      <dgm:t>
+        <a:bodyPr/>
+        <a:lstStyle/>
+        <a:p>
+          <a:pPr>
+            <a:defRPr cap="all"/>
+          </a:pPr>
+          <a:r>
+            <a:rPr lang="en-US" sz="2000" b="1" dirty="0"/>
+            <a:t>Telecommunication networks</a:t>
+          </a:r>
+        </a:p>
+      </dgm:t>
+    </dgm:pt>
+    <dgm:pt modelId="{5B90DCC7-7C16-462B-81DA-D4DED5DFA693}" type="parTrans" cxnId="{799B0D17-6D3D-4EE4-97AF-B3A06EB93353}">
+      <dgm:prSet/>
+      <dgm:spPr/>
+      <dgm:t>
+        <a:bodyPr/>
+        <a:lstStyle/>
+        <a:p>
+          <a:endParaRPr lang="en-US" sz="2000" b="1"/>
+        </a:p>
+      </dgm:t>
+    </dgm:pt>
+    <dgm:pt modelId="{DD89640D-14BE-458B-B6B8-0B703B23C435}" type="sibTrans" cxnId="{799B0D17-6D3D-4EE4-97AF-B3A06EB93353}">
+      <dgm:prSet/>
+      <dgm:spPr/>
+      <dgm:t>
+        <a:bodyPr/>
+        <a:lstStyle/>
+        <a:p>
+          <a:endParaRPr lang="en-US" sz="2000" b="1"/>
+        </a:p>
+      </dgm:t>
+    </dgm:pt>
+    <dgm:pt modelId="{5BB958D4-1C51-4026-8AFA-626617649476}">
+      <dgm:prSet custT="1"/>
+      <dgm:spPr/>
+      <dgm:t>
+        <a:bodyPr/>
+        <a:lstStyle/>
+        <a:p>
+          <a:pPr>
+            <a:defRPr cap="all"/>
+          </a:pPr>
+          <a:r>
+            <a:rPr lang="en-US" sz="2000" b="1" dirty="0"/>
+            <a:t>Transportation networks</a:t>
+          </a:r>
+        </a:p>
+      </dgm:t>
+    </dgm:pt>
+    <dgm:pt modelId="{5351AA72-B4D7-4EFE-A921-3211E7EFADF0}" type="parTrans" cxnId="{8B4558EE-FD08-417C-B63A-0CEF12ADC070}">
+      <dgm:prSet/>
+      <dgm:spPr/>
+      <dgm:t>
+        <a:bodyPr/>
+        <a:lstStyle/>
+        <a:p>
+          <a:endParaRPr lang="en-US" sz="2000" b="1"/>
+        </a:p>
+      </dgm:t>
+    </dgm:pt>
+    <dgm:pt modelId="{E8E7CD07-0D7B-4BCF-97F5-C7CE6BD1E543}" type="sibTrans" cxnId="{8B4558EE-FD08-417C-B63A-0CEF12ADC070}">
+      <dgm:prSet/>
+      <dgm:spPr/>
+      <dgm:t>
+        <a:bodyPr/>
+        <a:lstStyle/>
+        <a:p>
+          <a:endParaRPr lang="en-US" sz="2000" b="1"/>
+        </a:p>
+      </dgm:t>
+    </dgm:pt>
+    <dgm:pt modelId="{3C1F278C-3C53-4562-84A0-626D53D60268}">
+      <dgm:prSet custT="1"/>
+      <dgm:spPr/>
+      <dgm:t>
+        <a:bodyPr/>
+        <a:lstStyle/>
+        <a:p>
+          <a:pPr>
+            <a:defRPr cap="all"/>
+          </a:pPr>
+          <a:r>
+            <a:rPr lang="en-US" sz="2000" b="1"/>
+            <a:t>Water supply networks</a:t>
+          </a:r>
+        </a:p>
+      </dgm:t>
+    </dgm:pt>
+    <dgm:pt modelId="{2C7CCE1C-8E6B-4DBF-89AF-39892A961B81}" type="parTrans" cxnId="{4AD302E0-2266-44FF-ACD2-ABACB6F2E9FC}">
+      <dgm:prSet/>
+      <dgm:spPr/>
+      <dgm:t>
+        <a:bodyPr/>
+        <a:lstStyle/>
+        <a:p>
+          <a:endParaRPr lang="en-US" sz="2000" b="1"/>
+        </a:p>
+      </dgm:t>
+    </dgm:pt>
+    <dgm:pt modelId="{F57E2F59-CFFB-4719-B669-610DB2B9203A}" type="sibTrans" cxnId="{4AD302E0-2266-44FF-ACD2-ABACB6F2E9FC}">
+      <dgm:prSet/>
+      <dgm:spPr/>
+      <dgm:t>
+        <a:bodyPr/>
+        <a:lstStyle/>
+        <a:p>
+          <a:endParaRPr lang="en-US" sz="2000" b="1"/>
+        </a:p>
+      </dgm:t>
+    </dgm:pt>
+    <dgm:pt modelId="{2E036750-ACCC-4000-B571-002F3BC3AC28}">
+      <dgm:prSet custT="1"/>
+      <dgm:spPr/>
+      <dgm:t>
+        <a:bodyPr/>
+        <a:lstStyle/>
+        <a:p>
+          <a:pPr>
+            <a:defRPr cap="all"/>
+          </a:pPr>
+          <a:r>
+            <a:rPr lang="en-US" sz="2000" b="1"/>
+            <a:t>Electrical grids</a:t>
+          </a:r>
+        </a:p>
+      </dgm:t>
+    </dgm:pt>
+    <dgm:pt modelId="{25C2E08C-39BA-4566-965B-9F132CA35878}" type="parTrans" cxnId="{EDCB0E09-A1F7-454D-BD3D-AF1BE2F2A56C}">
+      <dgm:prSet/>
+      <dgm:spPr/>
+      <dgm:t>
+        <a:bodyPr/>
+        <a:lstStyle/>
+        <a:p>
+          <a:endParaRPr lang="en-US" sz="2000" b="1"/>
+        </a:p>
+      </dgm:t>
+    </dgm:pt>
+    <dgm:pt modelId="{FEC0AD7A-9912-4784-877A-49782F3AA09B}" type="sibTrans" cxnId="{EDCB0E09-A1F7-454D-BD3D-AF1BE2F2A56C}">
+      <dgm:prSet/>
+      <dgm:spPr/>
+      <dgm:t>
+        <a:bodyPr/>
+        <a:lstStyle/>
+        <a:p>
+          <a:endParaRPr lang="en-US" sz="2000" b="1"/>
+        </a:p>
+      </dgm:t>
+    </dgm:pt>
+    <dgm:pt modelId="{A75AC3D6-37CE-49FB-B97E-9C915BFDED07}" type="pres">
+      <dgm:prSet presAssocID="{8CFC34C8-A50E-48B4-9C88-0CB909173EDE}" presName="root" presStyleCnt="0">
+        <dgm:presLayoutVars>
+          <dgm:dir/>
+          <dgm:resizeHandles val="exact"/>
+        </dgm:presLayoutVars>
+      </dgm:prSet>
+      <dgm:spPr/>
+    </dgm:pt>
+    <dgm:pt modelId="{EB717744-5F90-4E11-A80B-214B93F1B43D}" type="pres">
+      <dgm:prSet presAssocID="{092DCD78-995E-4AD3-9A03-2BE02BC57B55}" presName="compNode" presStyleCnt="0"/>
+      <dgm:spPr/>
+    </dgm:pt>
+    <dgm:pt modelId="{848010E0-1476-4AC0-8B58-F324FB3A9E9F}" type="pres">
+      <dgm:prSet presAssocID="{092DCD78-995E-4AD3-9A03-2BE02BC57B55}" presName="iconBgRect" presStyleLbl="bgShp" presStyleIdx="0" presStyleCnt="4"/>
+      <dgm:spPr>
+        <a:prstGeom prst="round2DiagRect">
+          <a:avLst>
+            <a:gd name="adj1" fmla="val 29727"/>
+            <a:gd name="adj2" fmla="val 0"/>
+          </a:avLst>
+        </a:prstGeom>
+      </dgm:spPr>
+    </dgm:pt>
+    <dgm:pt modelId="{514EA6D1-DAE1-4902-A3B4-4F813DDAE5F6}" type="pres">
+      <dgm:prSet presAssocID="{092DCD78-995E-4AD3-9A03-2BE02BC57B55}" presName="iconRect" presStyleLbl="node1" presStyleIdx="0" presStyleCnt="4"/>
+      <dgm:spPr>
+        <a:blipFill>
+          <a:blip xmlns:r="http://schemas.openxmlformats.org/officeDocument/2006/relationships" r:embed="rId1">
+            <a:extLst>
+              <a:ext uri="{28A0092B-C50C-407E-A947-70E740481C1C}">
+                <a14:useLocalDpi xmlns:a14="http://schemas.microsoft.com/office/drawing/2010/main" val="0"/>
+              </a:ext>
+              <a:ext uri="{96DAC541-7B7A-43D3-8B79-37D633B846F1}">
+                <asvg:svgBlip xmlns:asvg="http://schemas.microsoft.com/office/drawing/2016/SVG/main" r:embed="rId2"/>
+              </a:ext>
+            </a:extLst>
+          </a:blip>
+          <a:stretch>
+            <a:fillRect/>
+          </a:stretch>
+        </a:blipFill>
+        <a:ln>
+          <a:noFill/>
+        </a:ln>
+      </dgm:spPr>
+      <dgm:extLst>
+        <a:ext uri="{E40237B7-FDA0-4F09-8148-C483321AD2D9}">
+          <dgm14:cNvPr xmlns:dgm14="http://schemas.microsoft.com/office/drawing/2010/diagram" id="0" name="" descr="Telephone"/>
+        </a:ext>
+      </dgm:extLst>
+    </dgm:pt>
+    <dgm:pt modelId="{8A7E4068-AAC8-4497-9542-4C2587DA8645}" type="pres">
+      <dgm:prSet presAssocID="{092DCD78-995E-4AD3-9A03-2BE02BC57B55}" presName="spaceRect" presStyleCnt="0"/>
+      <dgm:spPr/>
+    </dgm:pt>
+    <dgm:pt modelId="{DECDDAD5-5578-4620-8D22-4AAB47EA3C9E}" type="pres">
+      <dgm:prSet presAssocID="{092DCD78-995E-4AD3-9A03-2BE02BC57B55}" presName="textRect" presStyleLbl="revTx" presStyleIdx="0" presStyleCnt="4" custScaleX="130619">
+        <dgm:presLayoutVars>
+          <dgm:chMax val="1"/>
+          <dgm:chPref val="1"/>
+        </dgm:presLayoutVars>
+      </dgm:prSet>
+      <dgm:spPr/>
+    </dgm:pt>
+    <dgm:pt modelId="{B9A9B1BF-1919-4588-995F-EC9DA8A17469}" type="pres">
+      <dgm:prSet presAssocID="{DD89640D-14BE-458B-B6B8-0B703B23C435}" presName="sibTrans" presStyleCnt="0"/>
+      <dgm:spPr/>
+    </dgm:pt>
+    <dgm:pt modelId="{8BD47C88-76F7-413E-A3EB-2F921D1A44D3}" type="pres">
+      <dgm:prSet presAssocID="{5BB958D4-1C51-4026-8AFA-626617649476}" presName="compNode" presStyleCnt="0"/>
+      <dgm:spPr/>
+    </dgm:pt>
+    <dgm:pt modelId="{480F1437-F17C-4C58-BB96-74A31B5EEC24}" type="pres">
+      <dgm:prSet presAssocID="{5BB958D4-1C51-4026-8AFA-626617649476}" presName="iconBgRect" presStyleLbl="bgShp" presStyleIdx="1" presStyleCnt="4"/>
+      <dgm:spPr>
+        <a:prstGeom prst="round2DiagRect">
+          <a:avLst>
+            <a:gd name="adj1" fmla="val 29727"/>
+            <a:gd name="adj2" fmla="val 0"/>
+          </a:avLst>
+        </a:prstGeom>
+      </dgm:spPr>
+    </dgm:pt>
+    <dgm:pt modelId="{45AE9C67-4E0E-4985-9906-4AC3B4D148D7}" type="pres">
+      <dgm:prSet presAssocID="{5BB958D4-1C51-4026-8AFA-626617649476}" presName="iconRect" presStyleLbl="node1" presStyleIdx="1" presStyleCnt="4"/>
+      <dgm:spPr>
+        <a:blipFill>
+          <a:blip xmlns:r="http://schemas.openxmlformats.org/officeDocument/2006/relationships" r:embed="rId3">
+            <a:extLst>
+              <a:ext uri="{28A0092B-C50C-407E-A947-70E740481C1C}">
+                <a14:useLocalDpi xmlns:a14="http://schemas.microsoft.com/office/drawing/2010/main" val="0"/>
+              </a:ext>
+              <a:ext uri="{96DAC541-7B7A-43D3-8B79-37D633B846F1}">
+                <asvg:svgBlip xmlns:asvg="http://schemas.microsoft.com/office/drawing/2016/SVG/main" r:embed="rId4"/>
+              </a:ext>
+            </a:extLst>
+          </a:blip>
+          <a:stretch>
+            <a:fillRect/>
+          </a:stretch>
+        </a:blipFill>
+        <a:ln>
+          <a:noFill/>
+        </a:ln>
+      </dgm:spPr>
+      <dgm:extLst>
+        <a:ext uri="{E40237B7-FDA0-4F09-8148-C483321AD2D9}">
+          <dgm14:cNvPr xmlns:dgm14="http://schemas.microsoft.com/office/drawing/2010/diagram" id="0" name="" descr="Bus"/>
+        </a:ext>
+      </dgm:extLst>
+    </dgm:pt>
+    <dgm:pt modelId="{5D1FE0E7-F845-41A9-9C50-128BB6268FED}" type="pres">
+      <dgm:prSet presAssocID="{5BB958D4-1C51-4026-8AFA-626617649476}" presName="spaceRect" presStyleCnt="0"/>
+      <dgm:spPr/>
+    </dgm:pt>
+    <dgm:pt modelId="{22DFA8EF-47F3-4F8A-99F8-DA75587DD7FC}" type="pres">
+      <dgm:prSet presAssocID="{5BB958D4-1C51-4026-8AFA-626617649476}" presName="textRect" presStyleLbl="revTx" presStyleIdx="1" presStyleCnt="4" custScaleX="108389">
+        <dgm:presLayoutVars>
+          <dgm:chMax val="1"/>
+          <dgm:chPref val="1"/>
+        </dgm:presLayoutVars>
+      </dgm:prSet>
+      <dgm:spPr/>
+    </dgm:pt>
+    <dgm:pt modelId="{CB502CB1-7EEB-4DDA-B2A9-7C34ED9A119C}" type="pres">
+      <dgm:prSet presAssocID="{E8E7CD07-0D7B-4BCF-97F5-C7CE6BD1E543}" presName="sibTrans" presStyleCnt="0"/>
+      <dgm:spPr/>
+    </dgm:pt>
+    <dgm:pt modelId="{D6209A4E-AF3E-4DE0-BCCB-D480A5426D81}" type="pres">
+      <dgm:prSet presAssocID="{3C1F278C-3C53-4562-84A0-626D53D60268}" presName="compNode" presStyleCnt="0"/>
+      <dgm:spPr/>
+    </dgm:pt>
+    <dgm:pt modelId="{267C0D64-11C1-4551-9398-AA8C265A7738}" type="pres">
+      <dgm:prSet presAssocID="{3C1F278C-3C53-4562-84A0-626D53D60268}" presName="iconBgRect" presStyleLbl="bgShp" presStyleIdx="2" presStyleCnt="4"/>
+      <dgm:spPr>
+        <a:prstGeom prst="round2DiagRect">
+          <a:avLst>
+            <a:gd name="adj1" fmla="val 29727"/>
+            <a:gd name="adj2" fmla="val 0"/>
+          </a:avLst>
+        </a:prstGeom>
+      </dgm:spPr>
+    </dgm:pt>
+    <dgm:pt modelId="{C08317F6-2BD6-4EE7-9FEB-BD7B1CE6C712}" type="pres">
+      <dgm:prSet presAssocID="{3C1F278C-3C53-4562-84A0-626D53D60268}" presName="iconRect" presStyleLbl="node1" presStyleIdx="2" presStyleCnt="4"/>
+      <dgm:spPr>
+        <a:blipFill>
+          <a:blip xmlns:r="http://schemas.openxmlformats.org/officeDocument/2006/relationships" r:embed="rId5">
+            <a:extLst>
+              <a:ext uri="{28A0092B-C50C-407E-A947-70E740481C1C}">
+                <a14:useLocalDpi xmlns:a14="http://schemas.microsoft.com/office/drawing/2010/main" val="0"/>
+              </a:ext>
+              <a:ext uri="{96DAC541-7B7A-43D3-8B79-37D633B846F1}">
+                <asvg:svgBlip xmlns:asvg="http://schemas.microsoft.com/office/drawing/2016/SVG/main" r:embed="rId6"/>
+              </a:ext>
+            </a:extLst>
+          </a:blip>
+          <a:stretch>
+            <a:fillRect/>
+          </a:stretch>
+        </a:blipFill>
+        <a:ln>
+          <a:noFill/>
+        </a:ln>
+      </dgm:spPr>
+      <dgm:extLst>
+        <a:ext uri="{E40237B7-FDA0-4F09-8148-C483321AD2D9}">
+          <dgm14:cNvPr xmlns:dgm14="http://schemas.microsoft.com/office/drawing/2010/diagram" id="0" name="" descr="Water"/>
+        </a:ext>
+      </dgm:extLst>
+    </dgm:pt>
+    <dgm:pt modelId="{58942A1D-6A69-411A-9E1F-5DC1CEC12A05}" type="pres">
+      <dgm:prSet presAssocID="{3C1F278C-3C53-4562-84A0-626D53D60268}" presName="spaceRect" presStyleCnt="0"/>
+      <dgm:spPr/>
+    </dgm:pt>
+    <dgm:pt modelId="{B2A79036-0833-4C61-A093-E6ADF08C982E}" type="pres">
+      <dgm:prSet presAssocID="{3C1F278C-3C53-4562-84A0-626D53D60268}" presName="textRect" presStyleLbl="revTx" presStyleIdx="2" presStyleCnt="4">
+        <dgm:presLayoutVars>
+          <dgm:chMax val="1"/>
+          <dgm:chPref val="1"/>
+        </dgm:presLayoutVars>
+      </dgm:prSet>
+      <dgm:spPr/>
+    </dgm:pt>
+    <dgm:pt modelId="{C67ABE4F-A472-47CB-B217-16EE82E5D477}" type="pres">
+      <dgm:prSet presAssocID="{F57E2F59-CFFB-4719-B669-610DB2B9203A}" presName="sibTrans" presStyleCnt="0"/>
+      <dgm:spPr/>
+    </dgm:pt>
+    <dgm:pt modelId="{808DC293-CFA6-485B-AB91-502963A9D023}" type="pres">
+      <dgm:prSet presAssocID="{2E036750-ACCC-4000-B571-002F3BC3AC28}" presName="compNode" presStyleCnt="0"/>
+      <dgm:spPr/>
+    </dgm:pt>
+    <dgm:pt modelId="{67948D8F-FC72-45F1-AF58-5E53B551EA4F}" type="pres">
+      <dgm:prSet presAssocID="{2E036750-ACCC-4000-B571-002F3BC3AC28}" presName="iconBgRect" presStyleLbl="bgShp" presStyleIdx="3" presStyleCnt="4"/>
+      <dgm:spPr>
+        <a:prstGeom prst="round2DiagRect">
+          <a:avLst>
+            <a:gd name="adj1" fmla="val 29727"/>
+            <a:gd name="adj2" fmla="val 0"/>
+          </a:avLst>
+        </a:prstGeom>
+      </dgm:spPr>
+    </dgm:pt>
+    <dgm:pt modelId="{DF282795-EC3B-4111-B09C-20F9131F061D}" type="pres">
+      <dgm:prSet presAssocID="{2E036750-ACCC-4000-B571-002F3BC3AC28}" presName="iconRect" presStyleLbl="node1" presStyleIdx="3" presStyleCnt="4"/>
+      <dgm:spPr>
+        <a:blipFill>
+          <a:blip xmlns:r="http://schemas.openxmlformats.org/officeDocument/2006/relationships" r:embed="rId7">
+            <a:extLst>
+              <a:ext uri="{28A0092B-C50C-407E-A947-70E740481C1C}">
+                <a14:useLocalDpi xmlns:a14="http://schemas.microsoft.com/office/drawing/2010/main" val="0"/>
+              </a:ext>
+              <a:ext uri="{96DAC541-7B7A-43D3-8B79-37D633B846F1}">
+                <asvg:svgBlip xmlns:asvg="http://schemas.microsoft.com/office/drawing/2016/SVG/main" r:embed="rId8"/>
+              </a:ext>
+            </a:extLst>
+          </a:blip>
+          <a:stretch>
+            <a:fillRect/>
+          </a:stretch>
+        </a:blipFill>
+        <a:ln>
+          <a:noFill/>
+        </a:ln>
+      </dgm:spPr>
+      <dgm:extLst>
+        <a:ext uri="{E40237B7-FDA0-4F09-8148-C483321AD2D9}">
+          <dgm14:cNvPr xmlns:dgm14="http://schemas.microsoft.com/office/drawing/2010/diagram" id="0" name="" descr="High Voltage"/>
+        </a:ext>
+      </dgm:extLst>
+    </dgm:pt>
+    <dgm:pt modelId="{AEDFF65C-4C3E-4D48-9551-7CB8450956EB}" type="pres">
+      <dgm:prSet presAssocID="{2E036750-ACCC-4000-B571-002F3BC3AC28}" presName="spaceRect" presStyleCnt="0"/>
+      <dgm:spPr/>
+    </dgm:pt>
+    <dgm:pt modelId="{C77FEB97-8E1B-4699-83F9-F9EAA5AC5DF4}" type="pres">
+      <dgm:prSet presAssocID="{2E036750-ACCC-4000-B571-002F3BC3AC28}" presName="textRect" presStyleLbl="revTx" presStyleIdx="3" presStyleCnt="4">
+        <dgm:presLayoutVars>
+          <dgm:chMax val="1"/>
+          <dgm:chPref val="1"/>
+        </dgm:presLayoutVars>
+      </dgm:prSet>
+      <dgm:spPr/>
+    </dgm:pt>
+  </dgm:ptLst>
+  <dgm:cxnLst>
+    <dgm:cxn modelId="{EDCB0E09-A1F7-454D-BD3D-AF1BE2F2A56C}" srcId="{8CFC34C8-A50E-48B4-9C88-0CB909173EDE}" destId="{2E036750-ACCC-4000-B571-002F3BC3AC28}" srcOrd="3" destOrd="0" parTransId="{25C2E08C-39BA-4566-965B-9F132CA35878}" sibTransId="{FEC0AD7A-9912-4784-877A-49782F3AA09B}"/>
+    <dgm:cxn modelId="{799B0D17-6D3D-4EE4-97AF-B3A06EB93353}" srcId="{8CFC34C8-A50E-48B4-9C88-0CB909173EDE}" destId="{092DCD78-995E-4AD3-9A03-2BE02BC57B55}" srcOrd="0" destOrd="0" parTransId="{5B90DCC7-7C16-462B-81DA-D4DED5DFA693}" sibTransId="{DD89640D-14BE-458B-B6B8-0B703B23C435}"/>
+    <dgm:cxn modelId="{A0529D19-3C2E-404D-ADF3-DA5EE6171DE9}" type="presOf" srcId="{8CFC34C8-A50E-48B4-9C88-0CB909173EDE}" destId="{A75AC3D6-37CE-49FB-B97E-9C915BFDED07}" srcOrd="0" destOrd="0" presId="urn:microsoft.com/office/officeart/2018/5/layout/IconLeafLabelList"/>
+    <dgm:cxn modelId="{54E9CF40-4DBE-4B2E-B962-581038E511CA}" type="presOf" srcId="{092DCD78-995E-4AD3-9A03-2BE02BC57B55}" destId="{DECDDAD5-5578-4620-8D22-4AAB47EA3C9E}" srcOrd="0" destOrd="0" presId="urn:microsoft.com/office/officeart/2018/5/layout/IconLeafLabelList"/>
+    <dgm:cxn modelId="{9125C771-78F4-423D-960A-AB4F6A349DFD}" type="presOf" srcId="{3C1F278C-3C53-4562-84A0-626D53D60268}" destId="{B2A79036-0833-4C61-A093-E6ADF08C982E}" srcOrd="0" destOrd="0" presId="urn:microsoft.com/office/officeart/2018/5/layout/IconLeafLabelList"/>
+    <dgm:cxn modelId="{81A4108B-8E31-493C-9D70-C4A1D265218B}" type="presOf" srcId="{5BB958D4-1C51-4026-8AFA-626617649476}" destId="{22DFA8EF-47F3-4F8A-99F8-DA75587DD7FC}" srcOrd="0" destOrd="0" presId="urn:microsoft.com/office/officeart/2018/5/layout/IconLeafLabelList"/>
+    <dgm:cxn modelId="{B0A40FB8-047F-4AAE-80B8-CE0D97DE34F4}" type="presOf" srcId="{2E036750-ACCC-4000-B571-002F3BC3AC28}" destId="{C77FEB97-8E1B-4699-83F9-F9EAA5AC5DF4}" srcOrd="0" destOrd="0" presId="urn:microsoft.com/office/officeart/2018/5/layout/IconLeafLabelList"/>
+    <dgm:cxn modelId="{4AD302E0-2266-44FF-ACD2-ABACB6F2E9FC}" srcId="{8CFC34C8-A50E-48B4-9C88-0CB909173EDE}" destId="{3C1F278C-3C53-4562-84A0-626D53D60268}" srcOrd="2" destOrd="0" parTransId="{2C7CCE1C-8E6B-4DBF-89AF-39892A961B81}" sibTransId="{F57E2F59-CFFB-4719-B669-610DB2B9203A}"/>
+    <dgm:cxn modelId="{8B4558EE-FD08-417C-B63A-0CEF12ADC070}" srcId="{8CFC34C8-A50E-48B4-9C88-0CB909173EDE}" destId="{5BB958D4-1C51-4026-8AFA-626617649476}" srcOrd="1" destOrd="0" parTransId="{5351AA72-B4D7-4EFE-A921-3211E7EFADF0}" sibTransId="{E8E7CD07-0D7B-4BCF-97F5-C7CE6BD1E543}"/>
+    <dgm:cxn modelId="{E11F69A8-8082-4CD2-8DD8-DD3D2C3F53ED}" type="presParOf" srcId="{A75AC3D6-37CE-49FB-B97E-9C915BFDED07}" destId="{EB717744-5F90-4E11-A80B-214B93F1B43D}" srcOrd="0" destOrd="0" presId="urn:microsoft.com/office/officeart/2018/5/layout/IconLeafLabelList"/>
+    <dgm:cxn modelId="{15BA9CF2-AD95-48EB-98CF-B3A455FE5E50}" type="presParOf" srcId="{EB717744-5F90-4E11-A80B-214B93F1B43D}" destId="{848010E0-1476-4AC0-8B58-F324FB3A9E9F}" srcOrd="0" destOrd="0" presId="urn:microsoft.com/office/officeart/2018/5/layout/IconLeafLabelList"/>
+    <dgm:cxn modelId="{9B88BBE9-84A0-4B93-B7C7-3F86613C9A66}" type="presParOf" srcId="{EB717744-5F90-4E11-A80B-214B93F1B43D}" destId="{514EA6D1-DAE1-4902-A3B4-4F813DDAE5F6}" srcOrd="1" destOrd="0" presId="urn:microsoft.com/office/officeart/2018/5/layout/IconLeafLabelList"/>
+    <dgm:cxn modelId="{6DA109C4-BDED-4A6A-9A92-7FD27ED891DA}" type="presParOf" srcId="{EB717744-5F90-4E11-A80B-214B93F1B43D}" destId="{8A7E4068-AAC8-4497-9542-4C2587DA8645}" srcOrd="2" destOrd="0" presId="urn:microsoft.com/office/officeart/2018/5/layout/IconLeafLabelList"/>
+    <dgm:cxn modelId="{C39A952B-5051-4D06-93CC-4E3FD3A6F0E6}" type="presParOf" srcId="{EB717744-5F90-4E11-A80B-214B93F1B43D}" destId="{DECDDAD5-5578-4620-8D22-4AAB47EA3C9E}" srcOrd="3" destOrd="0" presId="urn:microsoft.com/office/officeart/2018/5/layout/IconLeafLabelList"/>
+    <dgm:cxn modelId="{D6B0B4A8-E237-4ED8-BE09-EC2A9276E7E7}" type="presParOf" srcId="{A75AC3D6-37CE-49FB-B97E-9C915BFDED07}" destId="{B9A9B1BF-1919-4588-995F-EC9DA8A17469}" srcOrd="1" destOrd="0" presId="urn:microsoft.com/office/officeart/2018/5/layout/IconLeafLabelList"/>
+    <dgm:cxn modelId="{5CE0208E-11F1-4950-9FDC-62AB1DF2BB9E}" type="presParOf" srcId="{A75AC3D6-37CE-49FB-B97E-9C915BFDED07}" destId="{8BD47C88-76F7-413E-A3EB-2F921D1A44D3}" srcOrd="2" destOrd="0" presId="urn:microsoft.com/office/officeart/2018/5/layout/IconLeafLabelList"/>
+    <dgm:cxn modelId="{A60BC47C-0AA0-407C-9A66-5BCABE85BC3C}" type="presParOf" srcId="{8BD47C88-76F7-413E-A3EB-2F921D1A44D3}" destId="{480F1437-F17C-4C58-BB96-74A31B5EEC24}" srcOrd="0" destOrd="0" presId="urn:microsoft.com/office/officeart/2018/5/layout/IconLeafLabelList"/>
+    <dgm:cxn modelId="{34046D0D-5C0C-4150-9811-A717CBCF67CD}" type="presParOf" srcId="{8BD47C88-76F7-413E-A3EB-2F921D1A44D3}" destId="{45AE9C67-4E0E-4985-9906-4AC3B4D148D7}" srcOrd="1" destOrd="0" presId="urn:microsoft.com/office/officeart/2018/5/layout/IconLeafLabelList"/>
+    <dgm:cxn modelId="{2FB24148-2B11-403B-8338-E8F47D072765}" type="presParOf" srcId="{8BD47C88-76F7-413E-A3EB-2F921D1A44D3}" destId="{5D1FE0E7-F845-41A9-9C50-128BB6268FED}" srcOrd="2" destOrd="0" presId="urn:microsoft.com/office/officeart/2018/5/layout/IconLeafLabelList"/>
+    <dgm:cxn modelId="{9256E86D-357A-4265-9690-8B9D5DB8447E}" type="presParOf" srcId="{8BD47C88-76F7-413E-A3EB-2F921D1A44D3}" destId="{22DFA8EF-47F3-4F8A-99F8-DA75587DD7FC}" srcOrd="3" destOrd="0" presId="urn:microsoft.com/office/officeart/2018/5/layout/IconLeafLabelList"/>
+    <dgm:cxn modelId="{569B791B-B830-42D4-9A49-4AA32BD616FB}" type="presParOf" srcId="{A75AC3D6-37CE-49FB-B97E-9C915BFDED07}" destId="{CB502CB1-7EEB-4DDA-B2A9-7C34ED9A119C}" srcOrd="3" destOrd="0" presId="urn:microsoft.com/office/officeart/2018/5/layout/IconLeafLabelList"/>
+    <dgm:cxn modelId="{1EA0EEDA-C5EE-4C79-9804-F205C22ABB73}" type="presParOf" srcId="{A75AC3D6-37CE-49FB-B97E-9C915BFDED07}" destId="{D6209A4E-AF3E-4DE0-BCCB-D480A5426D81}" srcOrd="4" destOrd="0" presId="urn:microsoft.com/office/officeart/2018/5/layout/IconLeafLabelList"/>
+    <dgm:cxn modelId="{9D02C1AC-4BFE-4E9D-B596-FFC7E7356679}" type="presParOf" srcId="{D6209A4E-AF3E-4DE0-BCCB-D480A5426D81}" destId="{267C0D64-11C1-4551-9398-AA8C265A7738}" srcOrd="0" destOrd="0" presId="urn:microsoft.com/office/officeart/2018/5/layout/IconLeafLabelList"/>
+    <dgm:cxn modelId="{11AEE17E-6299-4B18-A40A-6044FE2AADBD}" type="presParOf" srcId="{D6209A4E-AF3E-4DE0-BCCB-D480A5426D81}" destId="{C08317F6-2BD6-4EE7-9FEB-BD7B1CE6C712}" srcOrd="1" destOrd="0" presId="urn:microsoft.com/office/officeart/2018/5/layout/IconLeafLabelList"/>
+    <dgm:cxn modelId="{F77C6645-BEE0-4BF8-9F13-B39CE43FF4E5}" type="presParOf" srcId="{D6209A4E-AF3E-4DE0-BCCB-D480A5426D81}" destId="{58942A1D-6A69-411A-9E1F-5DC1CEC12A05}" srcOrd="2" destOrd="0" presId="urn:microsoft.com/office/officeart/2018/5/layout/IconLeafLabelList"/>
+    <dgm:cxn modelId="{AA56887A-62AE-4257-84E0-9C304CBE65C5}" type="presParOf" srcId="{D6209A4E-AF3E-4DE0-BCCB-D480A5426D81}" destId="{B2A79036-0833-4C61-A093-E6ADF08C982E}" srcOrd="3" destOrd="0" presId="urn:microsoft.com/office/officeart/2018/5/layout/IconLeafLabelList"/>
+    <dgm:cxn modelId="{90D756E5-6378-4458-BF0B-58E127F38F81}" type="presParOf" srcId="{A75AC3D6-37CE-49FB-B97E-9C915BFDED07}" destId="{C67ABE4F-A472-47CB-B217-16EE82E5D477}" srcOrd="5" destOrd="0" presId="urn:microsoft.com/office/officeart/2018/5/layout/IconLeafLabelList"/>
+    <dgm:cxn modelId="{731FFED1-2201-44DF-9B34-855129DCD910}" type="presParOf" srcId="{A75AC3D6-37CE-49FB-B97E-9C915BFDED07}" destId="{808DC293-CFA6-485B-AB91-502963A9D023}" srcOrd="6" destOrd="0" presId="urn:microsoft.com/office/officeart/2018/5/layout/IconLeafLabelList"/>
+    <dgm:cxn modelId="{E7AAF916-8D07-4911-B8B4-4E8F566EBAC2}" type="presParOf" srcId="{808DC293-CFA6-485B-AB91-502963A9D023}" destId="{67948D8F-FC72-45F1-AF58-5E53B551EA4F}" srcOrd="0" destOrd="0" presId="urn:microsoft.com/office/officeart/2018/5/layout/IconLeafLabelList"/>
+    <dgm:cxn modelId="{AFF1B4B7-C992-4165-A414-F8A6F8010AEE}" type="presParOf" srcId="{808DC293-CFA6-485B-AB91-502963A9D023}" destId="{DF282795-EC3B-4111-B09C-20F9131F061D}" srcOrd="1" destOrd="0" presId="urn:microsoft.com/office/officeart/2018/5/layout/IconLeafLabelList"/>
+    <dgm:cxn modelId="{2FC67F03-9002-4495-86D7-D61E51DDDBE5}" type="presParOf" srcId="{808DC293-CFA6-485B-AB91-502963A9D023}" destId="{AEDFF65C-4C3E-4D48-9551-7CB8450956EB}" srcOrd="2" destOrd="0" presId="urn:microsoft.com/office/officeart/2018/5/layout/IconLeafLabelList"/>
+    <dgm:cxn modelId="{0F237AEA-A822-4B41-AAA6-84493F1B8F9C}" type="presParOf" srcId="{808DC293-CFA6-485B-AB91-502963A9D023}" destId="{C77FEB97-8E1B-4699-83F9-F9EAA5AC5DF4}" srcOrd="3" destOrd="0" presId="urn:microsoft.com/office/officeart/2018/5/layout/IconLeafLabelList"/>
+  </dgm:cxnLst>
+  <dgm:bg/>
+  <dgm:whole/>
+  <dgm:extLst>
+    <a:ext uri="http://schemas.microsoft.com/office/drawing/2008/diagram">
+      <dsp:dataModelExt xmlns:dsp="http://schemas.microsoft.com/office/drawing/2008/diagram" relId="rId6" minVer="http://schemas.openxmlformats.org/drawingml/2006/diagram"/>
+    </a:ext>
+  </dgm:extLst>
+</dgm:dataModel>
+</file>
+
+<file path=ppt/diagrams/drawing1.xml><?xml version="1.0" encoding="utf-8"?>
+<dsp:drawing xmlns:dgm="http://schemas.openxmlformats.org/drawingml/2006/diagram" xmlns:dsp="http://schemas.microsoft.com/office/drawing/2008/diagram" xmlns:a="http://schemas.openxmlformats.org/drawingml/2006/main">
+  <dsp:spTree>
+    <dsp:nvGrpSpPr>
+      <dsp:cNvPr id="0" name=""/>
+      <dsp:cNvGrpSpPr/>
+    </dsp:nvGrpSpPr>
+    <dsp:grpSpPr/>
+    <dsp:sp modelId="{848010E0-1476-4AC0-8B58-F324FB3A9E9F}">
+      <dsp:nvSpPr>
+        <dsp:cNvPr id="0" name=""/>
+        <dsp:cNvSpPr/>
+      </dsp:nvSpPr>
+      <dsp:spPr>
+        <a:xfrm>
+          <a:off x="1065205" y="891054"/>
+          <a:ext cx="1271999" cy="1271999"/>
+        </a:xfrm>
+        <a:prstGeom prst="round2DiagRect">
+          <a:avLst>
+            <a:gd name="adj1" fmla="val 29727"/>
+            <a:gd name="adj2" fmla="val 0"/>
+          </a:avLst>
+        </a:prstGeom>
+        <a:solidFill>
+          <a:schemeClr val="accent2">
+            <a:hueOff val="0"/>
+            <a:satOff val="0"/>
+            <a:lumOff val="0"/>
+            <a:alphaOff val="0"/>
+          </a:schemeClr>
+        </a:solidFill>
+        <a:ln>
+          <a:noFill/>
+        </a:ln>
+        <a:effectLst/>
+      </dsp:spPr>
+      <dsp:style>
+        <a:lnRef idx="0">
+          <a:scrgbClr r="0" g="0" b="0"/>
+        </a:lnRef>
+        <a:fillRef idx="1">
+          <a:scrgbClr r="0" g="0" b="0"/>
+        </a:fillRef>
+        <a:effectRef idx="0">
+          <a:scrgbClr r="0" g="0" b="0"/>
+        </a:effectRef>
+        <a:fontRef idx="minor"/>
+      </dsp:style>
+    </dsp:sp>
+    <dsp:sp modelId="{514EA6D1-DAE1-4902-A3B4-4F813DDAE5F6}">
+      <dsp:nvSpPr>
+        <dsp:cNvPr id="0" name=""/>
+        <dsp:cNvSpPr/>
+      </dsp:nvSpPr>
+      <dsp:spPr>
+        <a:xfrm>
+          <a:off x="1336287" y="1162136"/>
+          <a:ext cx="729835" cy="729835"/>
+        </a:xfrm>
+        <a:prstGeom prst="rect">
+          <a:avLst/>
+        </a:prstGeom>
+        <a:blipFill>
+          <a:blip xmlns:r="http://schemas.openxmlformats.org/officeDocument/2006/relationships" r:embed="rId1">
+            <a:extLst>
+              <a:ext uri="{28A0092B-C50C-407E-A947-70E740481C1C}">
+                <a14:useLocalDpi xmlns:a14="http://schemas.microsoft.com/office/drawing/2010/main" val="0"/>
+              </a:ext>
+              <a:ext uri="{96DAC541-7B7A-43D3-8B79-37D633B846F1}">
+                <asvg:svgBlip xmlns:asvg="http://schemas.microsoft.com/office/drawing/2016/SVG/main" r:embed="rId2"/>
+              </a:ext>
+            </a:extLst>
+          </a:blip>
+          <a:stretch>
+            <a:fillRect/>
+          </a:stretch>
+        </a:blipFill>
+        <a:ln w="19050" cap="flat" cmpd="sng" algn="ctr">
+          <a:noFill/>
+          <a:prstDash val="solid"/>
+          <a:miter lim="800000"/>
+        </a:ln>
+        <a:effectLst/>
+      </dsp:spPr>
+      <dsp:style>
+        <a:lnRef idx="2">
+          <a:scrgbClr r="0" g="0" b="0"/>
+        </a:lnRef>
+        <a:fillRef idx="1">
+          <a:scrgbClr r="0" g="0" b="0"/>
+        </a:fillRef>
+        <a:effectRef idx="0">
+          <a:scrgbClr r="0" g="0" b="0"/>
+        </a:effectRef>
+        <a:fontRef idx="minor">
+          <a:schemeClr val="lt1"/>
+        </a:fontRef>
+      </dsp:style>
+    </dsp:sp>
+    <dsp:sp modelId="{DECDDAD5-5578-4620-8D22-4AAB47EA3C9E}">
+      <dsp:nvSpPr>
+        <dsp:cNvPr id="0" name=""/>
+        <dsp:cNvSpPr/>
+      </dsp:nvSpPr>
+      <dsp:spPr>
+        <a:xfrm>
+          <a:off x="339342" y="2559250"/>
+          <a:ext cx="2723725" cy="742500"/>
+        </a:xfrm>
+        <a:prstGeom prst="rect">
+          <a:avLst/>
+        </a:prstGeom>
+        <a:noFill/>
+        <a:ln>
+          <a:noFill/>
+        </a:ln>
+        <a:effectLst/>
+      </dsp:spPr>
+      <dsp:style>
+        <a:lnRef idx="0">
+          <a:scrgbClr r="0" g="0" b="0"/>
+        </a:lnRef>
+        <a:fillRef idx="0">
+          <a:scrgbClr r="0" g="0" b="0"/>
+        </a:fillRef>
+        <a:effectRef idx="0">
+          <a:scrgbClr r="0" g="0" b="0"/>
+        </a:effectRef>
+        <a:fontRef idx="minor"/>
+      </dsp:style>
+      <dsp:txBody>
+        <a:bodyPr spcFirstLastPara="0" vert="horz" wrap="square" lIns="0" tIns="0" rIns="0" bIns="0" numCol="1" spcCol="1270" anchor="t" anchorCtr="0">
+          <a:noAutofit/>
+        </a:bodyPr>
+        <a:lstStyle/>
+        <a:p>
+          <a:pPr marL="0" lvl="0" indent="0" algn="ctr" defTabSz="889000">
+            <a:lnSpc>
+              <a:spcPct val="90000"/>
+            </a:lnSpc>
+            <a:spcBef>
+              <a:spcPct val="0"/>
+            </a:spcBef>
+            <a:spcAft>
+              <a:spcPct val="35000"/>
+            </a:spcAft>
+            <a:buNone/>
+            <a:defRPr cap="all"/>
+          </a:pPr>
+          <a:r>
+            <a:rPr lang="en-US" sz="2000" b="1" kern="1200" dirty="0"/>
+            <a:t>Telecommunication networks</a:t>
+          </a:r>
+        </a:p>
+      </dsp:txBody>
+      <dsp:txXfrm>
+        <a:off x="339342" y="2559250"/>
+        <a:ext cx="2723725" cy="742500"/>
+      </dsp:txXfrm>
+    </dsp:sp>
+    <dsp:sp modelId="{480F1437-F17C-4C58-BB96-74A31B5EEC24}">
+      <dsp:nvSpPr>
+        <dsp:cNvPr id="0" name=""/>
+        <dsp:cNvSpPr/>
+      </dsp:nvSpPr>
+      <dsp:spPr>
+        <a:xfrm>
+          <a:off x="3922074" y="891054"/>
+          <a:ext cx="1271999" cy="1271999"/>
+        </a:xfrm>
+        <a:prstGeom prst="round2DiagRect">
+          <a:avLst>
+            <a:gd name="adj1" fmla="val 29727"/>
+            <a:gd name="adj2" fmla="val 0"/>
+          </a:avLst>
+        </a:prstGeom>
+        <a:solidFill>
+          <a:schemeClr val="accent3">
+            <a:hueOff val="0"/>
+            <a:satOff val="0"/>
+            <a:lumOff val="0"/>
+            <a:alphaOff val="0"/>
+          </a:schemeClr>
+        </a:solidFill>
+        <a:ln>
+          <a:noFill/>
+        </a:ln>
+        <a:effectLst/>
+      </dsp:spPr>
+      <dsp:style>
+        <a:lnRef idx="0">
+          <a:scrgbClr r="0" g="0" b="0"/>
+        </a:lnRef>
+        <a:fillRef idx="1">
+          <a:scrgbClr r="0" g="0" b="0"/>
+        </a:fillRef>
+        <a:effectRef idx="0">
+          <a:scrgbClr r="0" g="0" b="0"/>
+        </a:effectRef>
+        <a:fontRef idx="minor"/>
+      </dsp:style>
+    </dsp:sp>
+    <dsp:sp modelId="{45AE9C67-4E0E-4985-9906-4AC3B4D148D7}">
+      <dsp:nvSpPr>
+        <dsp:cNvPr id="0" name=""/>
+        <dsp:cNvSpPr/>
+      </dsp:nvSpPr>
+      <dsp:spPr>
+        <a:xfrm>
+          <a:off x="4193155" y="1162136"/>
+          <a:ext cx="729835" cy="729835"/>
+        </a:xfrm>
+        <a:prstGeom prst="rect">
+          <a:avLst/>
+        </a:prstGeom>
+        <a:blipFill>
+          <a:blip xmlns:r="http://schemas.openxmlformats.org/officeDocument/2006/relationships" r:embed="rId3">
+            <a:extLst>
+              <a:ext uri="{28A0092B-C50C-407E-A947-70E740481C1C}">
+                <a14:useLocalDpi xmlns:a14="http://schemas.microsoft.com/office/drawing/2010/main" val="0"/>
+              </a:ext>
+              <a:ext uri="{96DAC541-7B7A-43D3-8B79-37D633B846F1}">
+                <asvg:svgBlip xmlns:asvg="http://schemas.microsoft.com/office/drawing/2016/SVG/main" r:embed="rId4"/>
+              </a:ext>
+            </a:extLst>
+          </a:blip>
+          <a:stretch>
+            <a:fillRect/>
+          </a:stretch>
+        </a:blipFill>
+        <a:ln w="19050" cap="flat" cmpd="sng" algn="ctr">
+          <a:noFill/>
+          <a:prstDash val="solid"/>
+          <a:miter lim="800000"/>
+        </a:ln>
+        <a:effectLst/>
+      </dsp:spPr>
+      <dsp:style>
+        <a:lnRef idx="2">
+          <a:scrgbClr r="0" g="0" b="0"/>
+        </a:lnRef>
+        <a:fillRef idx="1">
+          <a:scrgbClr r="0" g="0" b="0"/>
+        </a:fillRef>
+        <a:effectRef idx="0">
+          <a:scrgbClr r="0" g="0" b="0"/>
+        </a:effectRef>
+        <a:fontRef idx="minor">
+          <a:schemeClr val="lt1"/>
+        </a:fontRef>
+      </dsp:style>
+    </dsp:sp>
+    <dsp:sp modelId="{22DFA8EF-47F3-4F8A-99F8-DA75587DD7FC}">
+      <dsp:nvSpPr>
+        <dsp:cNvPr id="0" name=""/>
+        <dsp:cNvSpPr/>
+      </dsp:nvSpPr>
+      <dsp:spPr>
+        <a:xfrm>
+          <a:off x="3427985" y="2559250"/>
+          <a:ext cx="2260175" cy="742500"/>
+        </a:xfrm>
+        <a:prstGeom prst="rect">
+          <a:avLst/>
+        </a:prstGeom>
+        <a:noFill/>
+        <a:ln>
+          <a:noFill/>
+        </a:ln>
+        <a:effectLst/>
+      </dsp:spPr>
+      <dsp:style>
+        <a:lnRef idx="0">
+          <a:scrgbClr r="0" g="0" b="0"/>
+        </a:lnRef>
+        <a:fillRef idx="0">
+          <a:scrgbClr r="0" g="0" b="0"/>
+        </a:fillRef>
+        <a:effectRef idx="0">
+          <a:scrgbClr r="0" g="0" b="0"/>
+        </a:effectRef>
+        <a:fontRef idx="minor"/>
+      </dsp:style>
+      <dsp:txBody>
+        <a:bodyPr spcFirstLastPara="0" vert="horz" wrap="square" lIns="0" tIns="0" rIns="0" bIns="0" numCol="1" spcCol="1270" anchor="t" anchorCtr="0">
+          <a:noAutofit/>
+        </a:bodyPr>
+        <a:lstStyle/>
+        <a:p>
+          <a:pPr marL="0" lvl="0" indent="0" algn="ctr" defTabSz="889000">
+            <a:lnSpc>
+              <a:spcPct val="90000"/>
+            </a:lnSpc>
+            <a:spcBef>
+              <a:spcPct val="0"/>
+            </a:spcBef>
+            <a:spcAft>
+              <a:spcPct val="35000"/>
+            </a:spcAft>
+            <a:buNone/>
+            <a:defRPr cap="all"/>
+          </a:pPr>
+          <a:r>
+            <a:rPr lang="en-US" sz="2000" b="1" kern="1200" dirty="0"/>
+            <a:t>Transportation networks</a:t>
+          </a:r>
+        </a:p>
+      </dsp:txBody>
+      <dsp:txXfrm>
+        <a:off x="3427985" y="2559250"/>
+        <a:ext cx="2260175" cy="742500"/>
+      </dsp:txXfrm>
+    </dsp:sp>
+    <dsp:sp modelId="{267C0D64-11C1-4551-9398-AA8C265A7738}">
+      <dsp:nvSpPr>
+        <dsp:cNvPr id="0" name=""/>
+        <dsp:cNvSpPr/>
+      </dsp:nvSpPr>
+      <dsp:spPr>
+        <a:xfrm>
+          <a:off x="6459702" y="891054"/>
+          <a:ext cx="1271999" cy="1271999"/>
+        </a:xfrm>
+        <a:prstGeom prst="round2DiagRect">
+          <a:avLst>
+            <a:gd name="adj1" fmla="val 29727"/>
+            <a:gd name="adj2" fmla="val 0"/>
+          </a:avLst>
+        </a:prstGeom>
+        <a:solidFill>
+          <a:schemeClr val="accent4">
+            <a:hueOff val="0"/>
+            <a:satOff val="0"/>
+            <a:lumOff val="0"/>
+            <a:alphaOff val="0"/>
+          </a:schemeClr>
+        </a:solidFill>
+        <a:ln>
+          <a:noFill/>
+        </a:ln>
+        <a:effectLst/>
+      </dsp:spPr>
+      <dsp:style>
+        <a:lnRef idx="0">
+          <a:scrgbClr r="0" g="0" b="0"/>
+        </a:lnRef>
+        <a:fillRef idx="1">
+          <a:scrgbClr r="0" g="0" b="0"/>
+        </a:fillRef>
+        <a:effectRef idx="0">
+          <a:scrgbClr r="0" g="0" b="0"/>
+        </a:effectRef>
+        <a:fontRef idx="minor"/>
+      </dsp:style>
+    </dsp:sp>
+    <dsp:sp modelId="{C08317F6-2BD6-4EE7-9FEB-BD7B1CE6C712}">
+      <dsp:nvSpPr>
+        <dsp:cNvPr id="0" name=""/>
+        <dsp:cNvSpPr/>
+      </dsp:nvSpPr>
+      <dsp:spPr>
+        <a:xfrm>
+          <a:off x="6730784" y="1162136"/>
+          <a:ext cx="729835" cy="729835"/>
+        </a:xfrm>
+        <a:prstGeom prst="rect">
+          <a:avLst/>
+        </a:prstGeom>
+        <a:blipFill>
+          <a:blip xmlns:r="http://schemas.openxmlformats.org/officeDocument/2006/relationships" r:embed="rId5">
+            <a:extLst>
+              <a:ext uri="{28A0092B-C50C-407E-A947-70E740481C1C}">
+                <a14:useLocalDpi xmlns:a14="http://schemas.microsoft.com/office/drawing/2010/main" val="0"/>
+              </a:ext>
+              <a:ext uri="{96DAC541-7B7A-43D3-8B79-37D633B846F1}">
+                <asvg:svgBlip xmlns:asvg="http://schemas.microsoft.com/office/drawing/2016/SVG/main" r:embed="rId6"/>
+              </a:ext>
+            </a:extLst>
+          </a:blip>
+          <a:stretch>
+            <a:fillRect/>
+          </a:stretch>
+        </a:blipFill>
+        <a:ln w="19050" cap="flat" cmpd="sng" algn="ctr">
+          <a:noFill/>
+          <a:prstDash val="solid"/>
+          <a:miter lim="800000"/>
+        </a:ln>
+        <a:effectLst/>
+      </dsp:spPr>
+      <dsp:style>
+        <a:lnRef idx="2">
+          <a:scrgbClr r="0" g="0" b="0"/>
+        </a:lnRef>
+        <a:fillRef idx="1">
+          <a:scrgbClr r="0" g="0" b="0"/>
+        </a:fillRef>
+        <a:effectRef idx="0">
+          <a:scrgbClr r="0" g="0" b="0"/>
+        </a:effectRef>
+        <a:fontRef idx="minor">
+          <a:schemeClr val="lt1"/>
+        </a:fontRef>
+      </dsp:style>
+    </dsp:sp>
+    <dsp:sp modelId="{B2A79036-0833-4C61-A093-E6ADF08C982E}">
+      <dsp:nvSpPr>
+        <dsp:cNvPr id="0" name=""/>
+        <dsp:cNvSpPr/>
+      </dsp:nvSpPr>
+      <dsp:spPr>
+        <a:xfrm>
+          <a:off x="6053079" y="2559250"/>
+          <a:ext cx="2085244" cy="742500"/>
+        </a:xfrm>
+        <a:prstGeom prst="rect">
+          <a:avLst/>
+        </a:prstGeom>
+        <a:noFill/>
+        <a:ln>
+          <a:noFill/>
+        </a:ln>
+        <a:effectLst/>
+      </dsp:spPr>
+      <dsp:style>
+        <a:lnRef idx="0">
+          <a:scrgbClr r="0" g="0" b="0"/>
+        </a:lnRef>
+        <a:fillRef idx="0">
+          <a:scrgbClr r="0" g="0" b="0"/>
+        </a:fillRef>
+        <a:effectRef idx="0">
+          <a:scrgbClr r="0" g="0" b="0"/>
+        </a:effectRef>
+        <a:fontRef idx="minor"/>
+      </dsp:style>
+      <dsp:txBody>
+        <a:bodyPr spcFirstLastPara="0" vert="horz" wrap="square" lIns="0" tIns="0" rIns="0" bIns="0" numCol="1" spcCol="1270" anchor="t" anchorCtr="0">
+          <a:noAutofit/>
+        </a:bodyPr>
+        <a:lstStyle/>
+        <a:p>
+          <a:pPr marL="0" lvl="0" indent="0" algn="ctr" defTabSz="889000">
+            <a:lnSpc>
+              <a:spcPct val="90000"/>
+            </a:lnSpc>
+            <a:spcBef>
+              <a:spcPct val="0"/>
+            </a:spcBef>
+            <a:spcAft>
+              <a:spcPct val="35000"/>
+            </a:spcAft>
+            <a:buNone/>
+            <a:defRPr cap="all"/>
+          </a:pPr>
+          <a:r>
+            <a:rPr lang="en-US" sz="2000" b="1" kern="1200"/>
+            <a:t>Water supply networks</a:t>
+          </a:r>
+        </a:p>
+      </dsp:txBody>
+      <dsp:txXfrm>
+        <a:off x="6053079" y="2559250"/>
+        <a:ext cx="2085244" cy="742500"/>
+      </dsp:txXfrm>
+    </dsp:sp>
+    <dsp:sp modelId="{67948D8F-FC72-45F1-AF58-5E53B551EA4F}">
+      <dsp:nvSpPr>
+        <dsp:cNvPr id="0" name=""/>
+        <dsp:cNvSpPr/>
+      </dsp:nvSpPr>
+      <dsp:spPr>
+        <a:xfrm>
+          <a:off x="8909864" y="891054"/>
+          <a:ext cx="1271999" cy="1271999"/>
+        </a:xfrm>
+        <a:prstGeom prst="round2DiagRect">
+          <a:avLst>
+            <a:gd name="adj1" fmla="val 29727"/>
+            <a:gd name="adj2" fmla="val 0"/>
+          </a:avLst>
+        </a:prstGeom>
+        <a:solidFill>
+          <a:schemeClr val="accent5">
+            <a:hueOff val="0"/>
+            <a:satOff val="0"/>
+            <a:lumOff val="0"/>
+            <a:alphaOff val="0"/>
+          </a:schemeClr>
+        </a:solidFill>
+        <a:ln>
+          <a:noFill/>
+        </a:ln>
+        <a:effectLst/>
+      </dsp:spPr>
+      <dsp:style>
+        <a:lnRef idx="0">
+          <a:scrgbClr r="0" g="0" b="0"/>
+        </a:lnRef>
+        <a:fillRef idx="1">
+          <a:scrgbClr r="0" g="0" b="0"/>
+        </a:fillRef>
+        <a:effectRef idx="0">
+          <a:scrgbClr r="0" g="0" b="0"/>
+        </a:effectRef>
+        <a:fontRef idx="minor"/>
+      </dsp:style>
+    </dsp:sp>
+    <dsp:sp modelId="{DF282795-EC3B-4111-B09C-20F9131F061D}">
+      <dsp:nvSpPr>
+        <dsp:cNvPr id="0" name=""/>
+        <dsp:cNvSpPr/>
+      </dsp:nvSpPr>
+      <dsp:spPr>
+        <a:xfrm>
+          <a:off x="9180946" y="1162136"/>
+          <a:ext cx="729835" cy="729835"/>
+        </a:xfrm>
+        <a:prstGeom prst="rect">
+          <a:avLst/>
+        </a:prstGeom>
+        <a:blipFill>
+          <a:blip xmlns:r="http://schemas.openxmlformats.org/officeDocument/2006/relationships" r:embed="rId7">
+            <a:extLst>
+              <a:ext uri="{28A0092B-C50C-407E-A947-70E740481C1C}">
+                <a14:useLocalDpi xmlns:a14="http://schemas.microsoft.com/office/drawing/2010/main" val="0"/>
+              </a:ext>
+              <a:ext uri="{96DAC541-7B7A-43D3-8B79-37D633B846F1}">
+                <asvg:svgBlip xmlns:asvg="http://schemas.microsoft.com/office/drawing/2016/SVG/main" r:embed="rId8"/>
+              </a:ext>
+            </a:extLst>
+          </a:blip>
+          <a:stretch>
+            <a:fillRect/>
+          </a:stretch>
+        </a:blipFill>
+        <a:ln w="19050" cap="flat" cmpd="sng" algn="ctr">
+          <a:noFill/>
+          <a:prstDash val="solid"/>
+          <a:miter lim="800000"/>
+        </a:ln>
+        <a:effectLst/>
+      </dsp:spPr>
+      <dsp:style>
+        <a:lnRef idx="2">
+          <a:scrgbClr r="0" g="0" b="0"/>
+        </a:lnRef>
+        <a:fillRef idx="1">
+          <a:scrgbClr r="0" g="0" b="0"/>
+        </a:fillRef>
+        <a:effectRef idx="0">
+          <a:scrgbClr r="0" g="0" b="0"/>
+        </a:effectRef>
+        <a:fontRef idx="minor">
+          <a:schemeClr val="lt1"/>
+        </a:fontRef>
+      </dsp:style>
+    </dsp:sp>
+    <dsp:sp modelId="{C77FEB97-8E1B-4699-83F9-F9EAA5AC5DF4}">
+      <dsp:nvSpPr>
+        <dsp:cNvPr id="0" name=""/>
+        <dsp:cNvSpPr/>
+      </dsp:nvSpPr>
+      <dsp:spPr>
+        <a:xfrm>
+          <a:off x="8503241" y="2559250"/>
+          <a:ext cx="2085244" cy="742500"/>
+        </a:xfrm>
+        <a:prstGeom prst="rect">
+          <a:avLst/>
+        </a:prstGeom>
+        <a:noFill/>
+        <a:ln>
+          <a:noFill/>
+        </a:ln>
+        <a:effectLst/>
+      </dsp:spPr>
+      <dsp:style>
+        <a:lnRef idx="0">
+          <a:scrgbClr r="0" g="0" b="0"/>
+        </a:lnRef>
+        <a:fillRef idx="0">
+          <a:scrgbClr r="0" g="0" b="0"/>
+        </a:fillRef>
+        <a:effectRef idx="0">
+          <a:scrgbClr r="0" g="0" b="0"/>
+        </a:effectRef>
+        <a:fontRef idx="minor"/>
+      </dsp:style>
+      <dsp:txBody>
+        <a:bodyPr spcFirstLastPara="0" vert="horz" wrap="square" lIns="0" tIns="0" rIns="0" bIns="0" numCol="1" spcCol="1270" anchor="t" anchorCtr="0">
+          <a:noAutofit/>
+        </a:bodyPr>
+        <a:lstStyle/>
+        <a:p>
+          <a:pPr marL="0" lvl="0" indent="0" algn="ctr" defTabSz="889000">
+            <a:lnSpc>
+              <a:spcPct val="90000"/>
+            </a:lnSpc>
+            <a:spcBef>
+              <a:spcPct val="0"/>
+            </a:spcBef>
+            <a:spcAft>
+              <a:spcPct val="35000"/>
+            </a:spcAft>
+            <a:buNone/>
+            <a:defRPr cap="all"/>
+          </a:pPr>
+          <a:r>
+            <a:rPr lang="en-US" sz="2000" b="1" kern="1200"/>
+            <a:t>Electrical grids</a:t>
+          </a:r>
+        </a:p>
+      </dsp:txBody>
+      <dsp:txXfrm>
+        <a:off x="8503241" y="2559250"/>
+        <a:ext cx="2085244" cy="742500"/>
+      </dsp:txXfrm>
+    </dsp:sp>
+  </dsp:spTree>
+</dsp:drawing>
+</file>
+
+<file path=ppt/diagrams/layout1.xml><?xml version="1.0" encoding="utf-8"?>
+<dgm:layoutDef xmlns:dgm="http://schemas.openxmlformats.org/drawingml/2006/diagram" xmlns:a="http://schemas.openxmlformats.org/drawingml/2006/main" uniqueId="urn:microsoft.com/office/officeart/2018/5/layout/IconLeafLabelList">
+  <dgm:title val="Icon Leaf Label List"/>
+  <dgm:desc val="Use to show non-sequential or grouped chunks of information accompanied by a related visuals. Works best with icons or small pictures with short text captions."/>
+  <dgm:catLst>
+    <dgm:cat type="icon" pri="500"/>
+  </dgm:catLst>
+  <dgm:sampData useDef="1">
+    <dgm:dataModel>
+      <dgm:ptLst/>
+      <dgm:bg/>
+      <dgm:whole/>
+    </dgm:dataModel>
+  </dgm:sampData>
+  <dgm:styleData useDef="1">
+    <dgm:dataModel>
+      <dgm:ptLst/>
+      <dgm:bg/>
+      <dgm:whole/>
+    </dgm:dataModel>
+  </dgm:styleData>
+  <dgm:clrData useDef="1">
+    <dgm:dataModel>
+      <dgm:ptLst/>
+      <dgm:bg/>
+      <dgm:whole/>
+    </dgm:dataModel>
+  </dgm:clrData>
+  <dgm:layoutNode name="root">
+    <dgm:varLst>
+      <dgm:dir/>
+      <dgm:resizeHandles val="exact"/>
+    </dgm:varLst>
+    <dgm:choose name="Name0">
+      <dgm:if name="Name1" axis="self" func="var" arg="dir" op="equ" val="norm">
+        <dgm:alg type="snake">
+          <dgm:param type="grDir" val="tL"/>
+          <dgm:param type="flowDir" val="row"/>
+          <dgm:param type="contDir" val="sameDir"/>
+          <dgm:param type="off" val="ctr"/>
+          <dgm:param type="vertAlign" val="mid"/>
+          <dgm:param type="horzAlign" val="ctr"/>
+        </dgm:alg>
+      </dgm:if>
+      <dgm:else name="Name2">
+        <dgm:alg type="snake">
+          <dgm:param type="grDir" val="tR"/>
+          <dgm:param type="flowDir" val="row"/>
+          <dgm:param type="contDir" val="sameDir"/>
+          <dgm:param type="off" val="ctr"/>
+          <dgm:param type="vertAlign" val="mid"/>
+          <dgm:param type="horzAlign" val="ctr"/>
+        </dgm:alg>
+      </dgm:else>
+    </dgm:choose>
+    <dgm:shape xmlns:r="http://schemas.openxmlformats.org/officeDocument/2006/relationships" r:blip="">
+      <dgm:adjLst/>
+    </dgm:shape>
+    <dgm:presOf/>
+    <dgm:choose name="Name3">
+      <dgm:if name="Name4" axis="ch" ptType="node" func="cnt" op="lte" val="2">
+        <dgm:constrLst>
+          <dgm:constr type="h" for="ch" forName="compNode" refType="h" fact="0.4"/>
+          <dgm:constr type="w" for="ch" forName="compNode" val="100"/>
+          <dgm:constr type="w" for="ch" forName="sibTrans" refType="w" refFor="ch" refForName="compNode" fact="0.175"/>
+          <dgm:constr type="sp" refType="w" refFor="ch" refForName="compNode" op="equ" fact="0.25"/>
+          <dgm:constr type="primFontSz" for="des" ptType="node" op="equ" val="44"/>
+          <dgm:constr type="h" for="des" forName="compNode" op="equ"/>
+          <dgm:constr type="h" for="des" forName="textRect" op="equ"/>
+        </dgm:constrLst>
+      </dgm:if>
+      <dgm:if name="Name5" axis="ch" ptType="node" func="cnt" op="lte" val="3">
+        <dgm:constrLst>
+          <dgm:constr type="h" for="ch" forName="compNode" refType="h" fact="0.4"/>
+          <dgm:constr type="w" for="ch" forName="compNode" val="100"/>
+          <dgm:constr type="w" for="ch" forName="sibTrans" refType="w" refFor="ch" refForName="compNode" fact="0.175"/>
+          <dgm:constr type="sp" refType="w" refFor="ch" refForName="compNode" op="equ" fact="0.25"/>
+          <dgm:constr type="primFontSz" for="des" ptType="node" op="equ" val="40"/>
+          <dgm:constr type="h" for="des" forName="compNode" op="equ"/>
+          <dgm:constr type="h" for="des" forName="textRect" op="equ"/>
+        </dgm:constrLst>
+      </dgm:if>
+      <dgm:if name="Name6" axis="ch" ptType="node" func="cnt" op="lte" val="4">
+        <dgm:constrLst>
+          <dgm:constr type="h" for="ch" forName="compNode" refType="h" fact="0.4"/>
+          <dgm:constr type="w" for="ch" forName="compNode" refType="w"/>
+          <dgm:constr type="w" for="ch" forName="sibTrans" refType="w" refFor="ch" refForName="compNode" fact="0.175"/>
+          <dgm:constr type="sp" refType="w" refFor="ch" refForName="compNode" op="equ" fact="0.25"/>
+          <dgm:constr type="primFontSz" for="des" ptType="node" op="equ" val="32"/>
+          <dgm:constr type="h" for="des" forName="compNode" op="equ"/>
+          <dgm:constr type="h" for="des" forName="textRect" op="equ"/>
+        </dgm:constrLst>
+      </dgm:if>
+      <dgm:else name="Name7">
+        <dgm:constrLst>
+          <dgm:constr type="h" for="ch" forName="compNode" refType="h" fact="0.4"/>
+          <dgm:constr type="w" for="ch" forName="compNode" refType="w"/>
+          <dgm:constr type="w" for="ch" forName="sibTrans" refType="w" refFor="ch" refForName="compNode" fact="0.175"/>
+          <dgm:constr type="sp" refType="w" refFor="ch" refForName="compNode" op="equ" fact="0.25"/>
+          <dgm:constr type="primFontSz" for="des" ptType="node" op="equ" val="24"/>
+          <dgm:constr type="h" for="des" forName="compNode" op="equ"/>
+          <dgm:constr type="h" for="des" forName="textRect" op="equ"/>
+        </dgm:constrLst>
+      </dgm:else>
+    </dgm:choose>
+    <dgm:ruleLst>
+      <dgm:rule type="w" for="ch" forName="compNode" val="50" fact="NaN" max="NaN"/>
+    </dgm:ruleLst>
+    <dgm:forEach name="Name8" axis="ch" ptType="node">
+      <dgm:layoutNode name="compNode">
+        <dgm:alg type="composite"/>
+        <dgm:shape xmlns:r="http://schemas.openxmlformats.org/officeDocument/2006/relationships" r:blip="">
+          <dgm:adjLst/>
+        </dgm:shape>
+        <dgm:presOf axis="self"/>
+        <dgm:constrLst>
+          <dgm:constr type="w" for="ch" forName="iconBgRect" refType="w" fact="0.61"/>
+          <dgm:constr type="h" for="ch" forName="iconBgRect" refType="w" refFor="ch" refForName="iconBgRect"/>
+          <dgm:constr type="t" for="ch" forName="iconBgRect"/>
+          <dgm:constr type="ctrX" for="ch" forName="iconBgRect" refType="w" fact="0.5"/>
+          <dgm:constr type="w" for="ch" forName="iconRect" refType="w" fact="0.35"/>
+          <dgm:constr type="h" for="ch" forName="iconRect" refType="w" refFor="ch" refForName="iconRect"/>
+          <dgm:constr type="ctrX" for="ch" forName="iconRect" refType="ctrX" refFor="ch" refForName="iconBgRect"/>
+          <dgm:constr type="ctrY" for="ch" forName="iconRect" refType="ctrY" refFor="ch" refForName="iconBgRect"/>
+          <dgm:constr type="h" for="ch" forName="spaceRect" refType="w" fact="0.19"/>
+          <dgm:constr type="w" for="ch" forName="spaceRect" refType="w"/>
+          <dgm:constr type="l" for="ch" forName="spaceRect"/>
+          <dgm:constr type="t" for="ch" forName="spaceRect" refType="b" refFor="ch" refForName="iconBgRect"/>
+          <dgm:constr type="h" for="ch" forName="textRect" val="20"/>
+          <dgm:constr type="w" for="ch" forName="textRect" refType="w"/>
+          <dgm:constr type="l" for="ch" forName="textRect"/>
+          <dgm:constr type="t" for="ch" forName="textRect" refType="b" refFor="ch" refForName="spaceRect"/>
+        </dgm:constrLst>
+        <dgm:ruleLst>
+          <dgm:rule type="h" val="INF" fact="NaN" max="NaN"/>
+        </dgm:ruleLst>
+        <dgm:layoutNode name="iconBgRect" styleLbl="bgShp">
+          <dgm:alg type="sp"/>
+          <dgm:shape xmlns:r="http://schemas.openxmlformats.org/officeDocument/2006/relationships" type="round2DiagRect" r:blip="">
+            <dgm:adjLst/>
+            <dgm:extLst>
+              <a:ext uri="{B698B0E9-8C71-41B9-8309-B3DCBF30829C}">
+                <dgm1612:spPr xmlns:dgm1612="http://schemas.microsoft.com/office/drawing/2016/12/diagram">
+                  <a:prstGeom prst="round2DiagRect">
+                    <a:avLst>
+                      <a:gd name="adj1" fmla="val 29727"/>
+                      <a:gd name="adj2" fmla="val 0"/>
+                    </a:avLst>
+                  </a:prstGeom>
+                </dgm1612:spPr>
+              </a:ext>
+            </dgm:extLst>
+          </dgm:shape>
+          <dgm:presOf/>
+          <dgm:constrLst/>
+          <dgm:ruleLst/>
+        </dgm:layoutNode>
+        <dgm:layoutNode name="iconRect" styleLbl="node1">
+          <dgm:alg type="sp"/>
+          <dgm:shape xmlns:r="http://schemas.openxmlformats.org/officeDocument/2006/relationships" type="rect" r:blip="" blipPhldr="1">
+            <dgm:adjLst/>
+          </dgm:shape>
+          <dgm:presOf/>
+          <dgm:constrLst/>
+          <dgm:ruleLst/>
+        </dgm:layoutNode>
+        <dgm:layoutNode name="spaceRect">
+          <dgm:alg type="sp"/>
+          <dgm:shape xmlns:r="http://schemas.openxmlformats.org/officeDocument/2006/relationships" r:blip="">
+            <dgm:adjLst/>
+          </dgm:shape>
+          <dgm:presOf/>
+          <dgm:constrLst/>
+          <dgm:ruleLst/>
+        </dgm:layoutNode>
+        <dgm:layoutNode name="textRect" styleLbl="revTx">
+          <dgm:varLst>
+            <dgm:chMax val="1"/>
+            <dgm:chPref val="1"/>
+          </dgm:varLst>
+          <dgm:alg type="tx">
+            <dgm:param type="txAnchorVert" val="t"/>
+          </dgm:alg>
+          <dgm:shape xmlns:r="http://schemas.openxmlformats.org/officeDocument/2006/relationships" type="rect" r:blip="">
+            <dgm:adjLst/>
+          </dgm:shape>
+          <dgm:presOf axis="self" ptType="node"/>
+          <dgm:constrLst>
+            <dgm:constr type="lMarg"/>
+            <dgm:constr type="rMarg"/>
+            <dgm:constr type="tMarg"/>
+            <dgm:constr type="bMarg"/>
+          </dgm:constrLst>
+          <dgm:ruleLst>
+            <dgm:rule type="primFontSz" val="11" fact="NaN" max="NaN"/>
+            <dgm:rule type="h" val="INF" fact="NaN" max="NaN"/>
+          </dgm:ruleLst>
+        </dgm:layoutNode>
+      </dgm:layoutNode>
+      <dgm:forEach name="Name9" axis="followSib" ptType="sibTrans" cnt="1">
+        <dgm:layoutNode name="sibTrans">
+          <dgm:alg type="sp"/>
+          <dgm:shape xmlns:r="http://schemas.openxmlformats.org/officeDocument/2006/relationships" r:blip="">
+            <dgm:adjLst/>
+          </dgm:shape>
+          <dgm:presOf axis="self"/>
+          <dgm:constrLst/>
+          <dgm:ruleLst/>
+        </dgm:layoutNode>
+      </dgm:forEach>
+    </dgm:forEach>
+  </dgm:layoutNode>
+  <dgm:extLst>
+    <a:ext uri="{68A01E43-0DF5-4B5B-8FA6-DAF915123BFB}">
+      <dgm1612:lstStyle xmlns:dgm1612="http://schemas.microsoft.com/office/drawing/2016/12/diagram">
+        <a:lvl1pPr>
+          <a:lnSpc>
+            <a:spcPct val="100000"/>
+          </a:lnSpc>
+          <a:defRPr cap="all"/>
+        </a:lvl1pPr>
+      </dgm1612:lstStyle>
+    </a:ext>
+  </dgm:extLst>
+</dgm:layoutDef>
+</file>
+
+<file path=ppt/diagrams/quickStyle1.xml><?xml version="1.0" encoding="utf-8"?>
+<dgm:styleDef xmlns:dgm="http://schemas.openxmlformats.org/drawingml/2006/diagram" xmlns:a="http://schemas.openxmlformats.org/drawingml/2006/main" uniqueId="urn:microsoft.com/office/officeart/2005/8/quickstyle/simple1">
+  <dgm:title val=""/>
+  <dgm:desc val=""/>
+  <dgm:catLst>
+    <dgm:cat type="simple" pri="10100"/>
+  </dgm:catLst>
+  <dgm:scene3d>
+    <a:camera prst="orthographicFront"/>
+    <a:lightRig rig="threePt" dir="t"/>
+  </dgm:scene3d>
+  <dgm:styleLbl name="node0">
+    <dgm:scene3d>
+      <a:camera prst="orthographicFront"/>
+      <a:lightRig rig="threePt" dir="t"/>
+    </dgm:scene3d>
+    <dgm:sp3d/>
+    <dgm:txPr/>
+    <dgm:style>
+      <a:lnRef idx="2">
+        <a:scrgbClr r="0" g="0" b="0"/>
+      </a:lnRef>
+      <a:fillRef idx="1">
+        <a:scrgbClr r="0" g="0" b="0"/>
+      </a:fillRef>
+      <a:effectRef idx="0">
+        <a:scrgbClr r="0" g="0" b="0"/>
+      </a:effectRef>
+      <a:fontRef idx="minor">
+        <a:schemeClr val="lt1"/>
+      </a:fontRef>
+    </dgm:style>
+  </dgm:styleLbl>
+  <dgm:styleLbl name="lnNode1">
+    <dgm:scene3d>
+      <a:camera prst="orthographicFront"/>
+      <a:lightRig rig="threePt" dir="t"/>
+    </dgm:scene3d>
+    <dgm:sp3d/>
+    <dgm:txPr/>
+    <dgm:style>
+      <a:lnRef idx="2">
+        <a:scrgbClr r="0" g="0" b="0"/>
+      </a:lnRef>
+      <a:fillRef idx="1">
+        <a:scrgbClr r="0" g="0" b="0"/>
+      </a:fillRef>
+      <a:effectRef idx="0">
+        <a:scrgbClr r="0" g="0" b="0"/>
+      </a:effectRef>
+      <a:fontRef idx="minor">
+        <a:schemeClr val="lt1"/>
+      </a:fontRef>
+    </dgm:style>
+  </dgm:styleLbl>
+  <dgm:styleLbl name="vennNode1">
+    <dgm:scene3d>
+      <a:camera prst="orthographicFront"/>
+      <a:lightRig rig="threePt" dir="t"/>
+    </dgm:scene3d>
+    <dgm:sp3d/>
+    <dgm:txPr/>
+    <dgm:style>
+      <a:lnRef idx="2">
+        <a:scrgbClr r="0" g="0" b="0"/>
+      </a:lnRef>
+      <a:fillRef idx="1">
+        <a:scrgbClr r="0" g="0" b="0"/>
+      </a:fillRef>
+      <a:effectRef idx="0">
+        <a:scrgbClr r="0" g="0" b="0"/>
+      </a:effectRef>
+      <a:fontRef idx="minor">
+        <a:schemeClr val="tx1"/>
+      </a:fontRef>
+    </dgm:style>
+  </dgm:styleLbl>
+  <dgm:styleLbl name="alignNode1">
+    <dgm:scene3d>
+      <a:camera prst="orthographicFront"/>
+      <a:lightRig rig="threePt" dir="t"/>
+    </dgm:scene3d>
+    <dgm:sp3d/>
+    <dgm:txPr/>
+    <dgm:style>
+      <a:lnRef idx="2">
+        <a:scrgbClr r="0" g="0" b="0"/>
+      </a:lnRef>
+      <a:fillRef idx="1">
+        <a:scrgbClr r="0" g="0" b="0"/>
+      </a:fillRef>
+      <a:effectRef idx="0">
+        <a:scrgbClr r="0" g="0" b="0"/>
+      </a:effectRef>
+      <a:fontRef idx="minor">
+        <a:schemeClr val="lt1"/>
+      </a:fontRef>
+    </dgm:style>
+  </dgm:styleLbl>
+  <dgm:styleLbl name="node1">
+    <dgm:scene3d>
+      <a:camera prst="orthographicFront"/>
+      <a:lightRig rig="threePt" dir="t"/>
+    </dgm:scene3d>
+    <dgm:sp3d/>
+    <dgm:txPr/>
+    <dgm:style>
+      <a:lnRef idx="2">
+        <a:scrgbClr r="0" g="0" b="0"/>
+      </a:lnRef>
+      <a:fillRef idx="1">
+        <a:scrgbClr r="0" g="0" b="0"/>
+      </a:fillRef>
+      <a:effectRef idx="0">
+        <a:scrgbClr r="0" g="0" b="0"/>
+      </a:effectRef>
+      <a:fontRef idx="minor">
+        <a:schemeClr val="lt1"/>
+      </a:fontRef>
+    </dgm:style>
+  </dgm:styleLbl>
+  <dgm:styleLbl name="node2">
+    <dgm:scene3d>
+      <a:camera prst="orthographicFront"/>
+      <a:lightRig rig="threePt" dir="t"/>
+    </dgm:scene3d>
+    <dgm:sp3d/>
+    <dgm:txPr/>
+    <dgm:style>
+      <a:lnRef idx="2">
+        <a:scrgbClr r="0" g="0" b="0"/>
+      </a:lnRef>
+      <a:fillRef idx="1">
+        <a:scrgbClr r="0" g="0" b="0"/>
+      </a:fillRef>
+      <a:effectRef idx="0">
+        <a:scrgbClr r="0" g="0" b="0"/>
+      </a:effectRef>
+      <a:fontRef idx="minor">
+        <a:schemeClr val="lt1"/>
+      </a:fontRef>
+    </dgm:style>
+  </dgm:styleLbl>
+  <dgm:styleLbl name="node3">
+    <dgm:scene3d>
+      <a:camera prst="orthographicFront"/>
+      <a:lightRig rig="threePt" dir="t"/>
+    </dgm:scene3d>
+    <dgm:sp3d/>
+    <dgm:txPr/>
+    <dgm:style>
+      <a:lnRef idx="2">
+        <a:scrgbClr r="0" g="0" b="0"/>
+      </a:lnRef>
+      <a:fillRef idx="1">
+        <a:scrgbClr r="0" g="0" b="0"/>
+      </a:fillRef>
+      <a:effectRef idx="0">
+        <a:scrgbClr r="0" g="0" b="0"/>
+      </a:effectRef>
+      <a:fontRef idx="minor">
+        <a:schemeClr val="lt1"/>
+      </a:fontRef>
+    </dgm:style>
+  </dgm:styleLbl>
+  <dgm:styleLbl name="node4">
+    <dgm:scene3d>
+      <a:camera prst="orthographicFront"/>
+      <a:lightRig rig="threePt" dir="t"/>
+    </dgm:scene3d>
+    <dgm:sp3d/>
+    <dgm:txPr/>
+    <dgm:style>
+      <a:lnRef idx="2">
+        <a:scrgbClr r="0" g="0" b="0"/>
+      </a:lnRef>
+      <a:fillRef idx="1">
+        <a:scrgbClr r="0" g="0" b="0"/>
+      </a:fillRef>
+      <a:effectRef idx="0">
+        <a:scrgbClr r="0" g="0" b="0"/>
+      </a:effectRef>
+      <a:fontRef idx="minor">
+        <a:schemeClr val="lt1"/>
+      </a:fontRef>
+    </dgm:style>
+  </dgm:styleLbl>
+  <dgm:styleLbl name="fgImgPlace1">
+    <dgm:scene3d>
+      <a:camera prst="orthographicFront"/>
+      <a:lightRig rig="threePt" dir="t"/>
+    </dgm:scene3d>
+    <dgm:sp3d/>
+    <dgm:txPr/>
+    <dgm:style>
+      <a:lnRef idx="2">
+        <a:scrgbClr r="0" g="0" b="0"/>
+      </a:lnRef>
+      <a:fillRef idx="1">
+        <a:scrgbClr r="0" g="0" b="0"/>
+      </a:fillRef>
+      <a:effectRef idx="0">
+        <a:scrgbClr r="0" g="0" b="0"/>
+      </a:effectRef>
+      <a:fontRef idx="minor"/>
+    </dgm:style>
+  </dgm:styleLbl>
+  <dgm:styleLbl name="alignImgPlace1">
+    <dgm:scene3d>
+      <a:camera prst="orthographicFront"/>
+      <a:lightRig rig="threePt" dir="t"/>
+    </dgm:scene3d>
+    <dgm:sp3d/>
+    <dgm:txPr/>
+    <dgm:style>
+      <a:lnRef idx="2">
+        <a:scrgbClr r="0" g="0" b="0"/>
+      </a:lnRef>
+      <a:fillRef idx="1">
+        <a:scrgbClr r="0" g="0" b="0"/>
+      </a:fillRef>
+      <a:effectRef idx="0">
+        <a:scrgbClr r="0" g="0" b="0"/>
+      </a:effectRef>
+      <a:fontRef idx="minor"/>
+    </dgm:style>
+  </dgm:styleLbl>
+  <dgm:styleLbl name="bgImgPlace1">
+    <dgm:scene3d>
+      <a:camera prst="orthographicFront"/>
+      <a:lightRig rig="threePt" dir="t"/>
+    </dgm:scene3d>
+    <dgm:sp3d/>
+    <dgm:txPr/>
+    <dgm:style>
+      <a:lnRef idx="2">
+        <a:scrgbClr r="0" g="0" b="0"/>
+      </a:lnRef>
+      <a:fillRef idx="1">
+        <a:scrgbClr r="0" g="0" b="0"/>
+      </a:fillRef>
+      <a:effectRef idx="0">
+        <a:scrgbClr r="0" g="0" b="0"/>
+      </a:effectRef>
+      <a:fontRef idx="minor"/>
+    </dgm:style>
+  </dgm:styleLbl>
+  <dgm:styleLbl name="sibTrans2D1">
+    <dgm:scene3d>
+      <a:camera prst="orthographicFront"/>
+      <a:lightRig rig="threePt" dir="t"/>
+    </dgm:scene3d>
+    <dgm:sp3d/>
+    <dgm:txPr/>
+    <dgm:style>
+      <a:lnRef idx="0">
+        <a:scrgbClr r="0" g="0" b="0"/>
+      </a:lnRef>
+      <a:fillRef idx="1">
+        <a:scrgbClr r="0" g="0" b="0"/>
+      </a:fillRef>
+      <a:effectRef idx="0">
+        <a:scrgbClr r="0" g="0" b="0"/>
+      </a:effectRef>
+      <a:fontRef idx="minor">
+        <a:schemeClr val="lt1"/>
+      </a:fontRef>
+    </dgm:style>
+  </dgm:styleLbl>
+  <dgm:styleLbl name="fgSibTrans2D1">
+    <dgm:scene3d>
+      <a:camera prst="orthographicFront"/>
+      <a:lightRig rig="threePt" dir="t"/>
+    </dgm:scene3d>
+    <dgm:sp3d/>
+    <dgm:txPr/>
+    <dgm:style>
+      <a:lnRef idx="0">
+        <a:scrgbClr r="0" g="0" b="0"/>
+      </a:lnRef>
+      <a:fillRef idx="1">
+        <a:scrgbClr r="0" g="0" b="0"/>
+      </a:fillRef>
+      <a:effectRef idx="0">
+        <a:scrgbClr r="0" g="0" b="0"/>
+      </a:effectRef>
+      <a:fontRef idx="minor">
+        <a:schemeClr val="lt1"/>
+      </a:fontRef>
+    </dgm:style>
+  </dgm:styleLbl>
+  <dgm:styleLbl name="bgSibTrans2D1">
+    <dgm:scene3d>
+      <a:camera prst="orthographicFront"/>
+      <a:lightRig rig="threePt" dir="t"/>
+    </dgm:scene3d>
+    <dgm:sp3d/>
+    <dgm:txPr/>
+    <dgm:style>
+      <a:lnRef idx="0">
+        <a:scrgbClr r="0" g="0" b="0"/>
+      </a:lnRef>
+      <a:fillRef idx="1">
+        <a:scrgbClr r="0" g="0" b="0"/>
+      </a:fillRef>
+      <a:effectRef idx="0">
+        <a:scrgbClr r="0" g="0" b="0"/>
+      </a:effectRef>
+      <a:fontRef idx="minor">
+        <a:schemeClr val="lt1"/>
+      </a:fontRef>
+    </dgm:style>
+  </dgm:styleLbl>
+  <dgm:styleLbl name="sibTrans1D1">
+    <dgm:scene3d>
+      <a:camera prst="orthographicFront"/>
+      <a:lightRig rig="threePt" dir="t"/>
+    </dgm:scene3d>
+    <dgm:sp3d/>
+    <dgm:txPr/>
+    <dgm:style>
+      <a:lnRef idx="1">
+        <a:scrgbClr r="0" g="0" b="0"/>
+      </a:lnRef>
+      <a:fillRef idx="0">
+        <a:scrgbClr r="0" g="0" b="0"/>
+      </a:fillRef>
+      <a:effectRef idx="0">
+        <a:scrgbClr r="0" g="0" b="0"/>
+      </a:effectRef>
+      <a:fontRef idx="minor"/>
+    </dgm:style>
+  </dgm:styleLbl>
+  <dgm:styleLbl name="callout">
+    <dgm:scene3d>
+      <a:camera prst="orthographicFront"/>
+      <a:lightRig rig="threePt" dir="t"/>
+    </dgm:scene3d>
+    <dgm:sp3d/>
+    <dgm:txPr/>
+    <dgm:style>
+      <a:lnRef idx="2">
+        <a:scrgbClr r="0" g="0" b="0"/>
+      </a:lnRef>
+      <a:fillRef idx="1">
+        <a:scrgbClr r="0" g="0" b="0"/>
+      </a:fillRef>
+      <a:effectRef idx="0">
+        <a:scrgbClr r="0" g="0" b="0"/>
+      </a:effectRef>
+      <a:fontRef idx="minor"/>
+    </dgm:style>
+  </dgm:styleLbl>
+  <dgm:styleLbl name="asst0">
+    <dgm:scene3d>
+      <a:camera prst="orthographicFront"/>
+      <a:lightRig rig="threePt" dir="t"/>
+    </dgm:scene3d>
+    <dgm:sp3d/>
+    <dgm:txPr/>
+    <dgm:style>
+      <a:lnRef idx="2">
+        <a:scrgbClr r="0" g="0" b="0"/>
+      </a:lnRef>
+      <a:fillRef idx="1">
+        <a:scrgbClr r="0" g="0" b="0"/>
+      </a:fillRef>
+      <a:effectRef idx="0">
+        <a:scrgbClr r="0" g="0" b="0"/>
+      </a:effectRef>
+      <a:fontRef idx="minor">
+        <a:schemeClr val="lt1"/>
+      </a:fontRef>
+    </dgm:style>
+  </dgm:styleLbl>
+  <dgm:styleLbl name="asst1">
+    <dgm:scene3d>
+      <a:camera prst="orthographicFront"/>
+      <a:lightRig rig="threePt" dir="t"/>
+    </dgm:scene3d>
+    <dgm:sp3d/>
+    <dgm:txPr/>
+    <dgm:style>
+      <a:lnRef idx="2">
+        <a:scrgbClr r="0" g="0" b="0"/>
+      </a:lnRef>
+      <a:fillRef idx="1">
+        <a:scrgbClr r="0" g="0" b="0"/>
+      </a:fillRef>
+      <a:effectRef idx="0">
+        <a:scrgbClr r="0" g="0" b="0"/>
+      </a:effectRef>
+      <a:fontRef idx="minor">
+        <a:schemeClr val="lt1"/>
+      </a:fontRef>
+    </dgm:style>
+  </dgm:styleLbl>
+  <dgm:styleLbl name="asst2">
+    <dgm:scene3d>
+      <a:camera prst="orthographicFront"/>
+      <a:lightRig rig="threePt" dir="t"/>
+    </dgm:scene3d>
+    <dgm:sp3d/>
+    <dgm:txPr/>
+    <dgm:style>
+      <a:lnRef idx="2">
+        <a:scrgbClr r="0" g="0" b="0"/>
+      </a:lnRef>
+      <a:fillRef idx="1">
+        <a:scrgbClr r="0" g="0" b="0"/>
+      </a:fillRef>
+      <a:effectRef idx="0">
+        <a:scrgbClr r="0" g="0" b="0"/>
+      </a:effectRef>
+      <a:fontRef idx="minor">
+        <a:schemeClr val="lt1"/>
+      </a:fontRef>
+    </dgm:style>
+  </dgm:styleLbl>
+  <dgm:styleLbl name="asst3">
+    <dgm:scene3d>
+      <a:camera prst="orthographicFront"/>
+      <a:lightRig rig="threePt" dir="t"/>
+    </dgm:scene3d>
+    <dgm:sp3d/>
+    <dgm:txPr/>
+    <dgm:style>
+      <a:lnRef idx="2">
+        <a:scrgbClr r="0" g="0" b="0"/>
+      </a:lnRef>
+      <a:fillRef idx="1">
+        <a:scrgbClr r="0" g="0" b="0"/>
+      </a:fillRef>
+      <a:effectRef idx="0">
+        <a:scrgbClr r="0" g="0" b="0"/>
+      </a:effectRef>
+      <a:fontRef idx="minor">
+        <a:schemeClr val="lt1"/>
+      </a:fontRef>
+    </dgm:style>
+  </dgm:styleLbl>
+  <dgm:styleLbl name="asst4">
+    <dgm:scene3d>
+      <a:camera prst="orthographicFront"/>
+      <a:lightRig rig="threePt" dir="t"/>
+    </dgm:scene3d>
+    <dgm:sp3d/>
+    <dgm:txPr/>
+    <dgm:style>
+      <a:lnRef idx="2">
+        <a:scrgbClr r="0" g="0" b="0"/>
+      </a:lnRef>
+      <a:fillRef idx="1">
+        <a:scrgbClr r="0" g="0" b="0"/>
+      </a:fillRef>
+      <a:effectRef idx="0">
+        <a:scrgbClr r="0" g="0" b="0"/>
+      </a:effectRef>
+      <a:fontRef idx="minor">
+        <a:schemeClr val="lt1"/>
+      </a:fontRef>
+    </dgm:style>
+  </dgm:styleLbl>
+  <dgm:styleLbl name="parChTrans2D1">
+    <dgm:scene3d>
+      <a:camera prst="orthographicFront"/>
+      <a:lightRig rig="threePt" dir="t"/>
+    </dgm:scene3d>
+    <dgm:sp3d/>
+    <dgm:txPr/>
+    <dgm:style>
+      <a:lnRef idx="2">
+        <a:scrgbClr r="0" g="0" b="0"/>
+      </a:lnRef>
+      <a:fillRef idx="1">
+        <a:scrgbClr r="0" g="0" b="0"/>
+      </a:fillRef>
+      <a:effectRef idx="0">
+        <a:scrgbClr r="0" g="0" b="0"/>
+      </a:effectRef>
+      <a:fontRef idx="minor">
+        <a:schemeClr val="lt1"/>
+      </a:fontRef>
+    </dgm:style>
+  </dgm:styleLbl>
+  <dgm:styleLbl name="parChTrans2D2">
+    <dgm:scene3d>
+      <a:camera prst="orthographicFront"/>
+      <a:lightRig rig="threePt" dir="t"/>
+    </dgm:scene3d>
+    <dgm:sp3d/>
+    <dgm:txPr/>
+    <dgm:style>
+      <a:lnRef idx="2">
+        <a:scrgbClr r="0" g="0" b="0"/>
+      </a:lnRef>
+      <a:fillRef idx="1">
+        <a:scrgbClr r="0" g="0" b="0"/>
+      </a:fillRef>
+      <a:effectRef idx="0">
+        <a:scrgbClr r="0" g="0" b="0"/>
+      </a:effectRef>
+      <a:fontRef idx="minor">
+        <a:schemeClr val="lt1"/>
+      </a:fontRef>
+    </dgm:style>
+  </dgm:styleLbl>
+  <dgm:styleLbl name="parChTrans2D3">
+    <dgm:scene3d>
+      <a:camera prst="orthographicFront"/>
+      <a:lightRig rig="threePt" dir="t"/>
+    </dgm:scene3d>
+    <dgm:sp3d/>
+    <dgm:txPr/>
+    <dgm:style>
+      <a:lnRef idx="2">
+        <a:scrgbClr r="0" g="0" b="0"/>
+      </a:lnRef>
+      <a:fillRef idx="1">
+        <a:scrgbClr r="0" g="0" b="0"/>
+      </a:fillRef>
+      <a:effectRef idx="0">
+        <a:scrgbClr r="0" g="0" b="0"/>
+      </a:effectRef>
+      <a:fontRef idx="minor">
+        <a:schemeClr val="lt1"/>
+      </a:fontRef>
+    </dgm:style>
+  </dgm:styleLbl>
+  <dgm:styleLbl name="parChTrans2D4">
+    <dgm:scene3d>
+      <a:camera prst="orthographicFront"/>
+      <a:lightRig rig="threePt" dir="t"/>
+    </dgm:scene3d>
+    <dgm:sp3d/>
+    <dgm:txPr/>
+    <dgm:style>
+      <a:lnRef idx="2">
+        <a:scrgbClr r="0" g="0" b="0"/>
+      </a:lnRef>
+      <a:fillRef idx="1">
+        <a:scrgbClr r="0" g="0" b="0"/>
+      </a:fillRef>
+      <a:effectRef idx="0">
+        <a:scrgbClr r="0" g="0" b="0"/>
+      </a:effectRef>
+      <a:fontRef idx="minor">
+        <a:schemeClr val="lt1"/>
+      </a:fontRef>
+    </dgm:style>
+  </dgm:styleLbl>
+  <dgm:styleLbl name="parChTrans1D1">
+    <dgm:scene3d>
+      <a:camera prst="orthographicFront"/>
+      <a:lightRig rig="threePt" dir="t"/>
+    </dgm:scene3d>
+    <dgm:sp3d/>
+    <dgm:txPr/>
+    <dgm:style>
+      <a:lnRef idx="2">
+        <a:scrgbClr r="0" g="0" b="0"/>
+      </a:lnRef>
+      <a:fillRef idx="0">
+        <a:scrgbClr r="0" g="0" b="0"/>
+      </a:fillRef>
+      <a:effectRef idx="0">
+        <a:scrgbClr r="0" g="0" b="0"/>
+      </a:effectRef>
+      <a:fontRef idx="minor"/>
+    </dgm:style>
+  </dgm:styleLbl>
+  <dgm:styleLbl name="parChTrans1D2">
+    <dgm:scene3d>
+      <a:camera prst="orthographicFront"/>
+      <a:lightRig rig="threePt" dir="t"/>
+    </dgm:scene3d>
+    <dgm:sp3d/>
+    <dgm:txPr/>
+    <dgm:style>
+      <a:lnRef idx="2">
+        <a:scrgbClr r="0" g="0" b="0"/>
+      </a:lnRef>
+      <a:fillRef idx="0">
+        <a:scrgbClr r="0" g="0" b="0"/>
+      </a:fillRef>
+      <a:effectRef idx="0">
+        <a:scrgbClr r="0" g="0" b="0"/>
+      </a:effectRef>
+      <a:fontRef idx="minor"/>
+    </dgm:style>
+  </dgm:styleLbl>
+  <dgm:styleLbl name="parChTrans1D3">
+    <dgm:scene3d>
+      <a:camera prst="orthographicFront"/>
+      <a:lightRig rig="threePt" dir="t"/>
+    </dgm:scene3d>
+    <dgm:sp3d/>
+    <dgm:txPr/>
+    <dgm:style>
+      <a:lnRef idx="2">
+        <a:scrgbClr r="0" g="0" b="0"/>
+      </a:lnRef>
+      <a:fillRef idx="0">
+        <a:scrgbClr r="0" g="0" b="0"/>
+      </a:fillRef>
+      <a:effectRef idx="0">
+        <a:scrgbClr r="0" g="0" b="0"/>
+      </a:effectRef>
+      <a:fontRef idx="minor"/>
+    </dgm:style>
+  </dgm:styleLbl>
+  <dgm:styleLbl name="parChTrans1D4">
+    <dgm:scene3d>
+      <a:camera prst="orthographicFront"/>
+      <a:lightRig rig="threePt" dir="t"/>
+    </dgm:scene3d>
+    <dgm:sp3d/>
+    <dgm:txPr/>
+    <dgm:style>
+      <a:lnRef idx="2">
+        <a:scrgbClr r="0" g="0" b="0"/>
+      </a:lnRef>
+      <a:fillRef idx="0">
+        <a:scrgbClr r="0" g="0" b="0"/>
+      </a:fillRef>
+      <a:effectRef idx="0">
+        <a:scrgbClr r="0" g="0" b="0"/>
+      </a:effectRef>
+      <a:fontRef idx="minor"/>
+    </dgm:style>
+  </dgm:styleLbl>
+  <dgm:styleLbl name="fgAcc1">
+    <dgm:scene3d>
+      <a:camera prst="orthographicFront"/>
+      <a:lightRig rig="threePt" dir="t"/>
+    </dgm:scene3d>
+    <dgm:sp3d/>
+    <dgm:txPr/>
+    <dgm:style>
+      <a:lnRef idx="2">
+        <a:scrgbClr r="0" g="0" b="0"/>
+      </a:lnRef>
+      <a:fillRef idx="1">
+        <a:scrgbClr r="0" g="0" b="0"/>
+      </a:fillRef>
+      <a:effectRef idx="0">
+        <a:scrgbClr r="0" g="0" b="0"/>
+      </a:effectRef>
+      <a:fontRef idx="minor"/>
+    </dgm:style>
+  </dgm:styleLbl>
+  <dgm:styleLbl name="conFgAcc1">
+    <dgm:scene3d>
+      <a:camera prst="orthographicFront"/>
+      <a:lightRig rig="threePt" dir="t"/>
+    </dgm:scene3d>
+    <dgm:sp3d/>
+    <dgm:txPr/>
+    <dgm:style>
+      <a:lnRef idx="2">
+        <a:scrgbClr r="0" g="0" b="0"/>
+      </a:lnRef>
+      <a:fillRef idx="1">
+        <a:scrgbClr r="0" g="0" b="0"/>
+      </a:fillRef>
+      <a:effectRef idx="0">
+        <a:scrgbClr r="0" g="0" b="0"/>
+      </a:effectRef>
+      <a:fontRef idx="minor"/>
+    </dgm:style>
+  </dgm:styleLbl>
+  <dgm:styleLbl name="alignAcc1">
+    <dgm:scene3d>
+      <a:camera prst="orthographicFront"/>
+      <a:lightRig rig="threePt" dir="t"/>
+    </dgm:scene3d>
+    <dgm:sp3d/>
+    <dgm:txPr/>
+    <dgm:style>
+      <a:lnRef idx="2">
+        <a:scrgbClr r="0" g="0" b="0"/>
+      </a:lnRef>
+      <a:fillRef idx="1">
+        <a:scrgbClr r="0" g="0" b="0"/>
+      </a:fillRef>
+      <a:effectRef idx="0">
+        <a:scrgbClr r="0" g="0" b="0"/>
+      </a:effectRef>
+      <a:fontRef idx="minor"/>
+    </dgm:style>
+  </dgm:styleLbl>
+  <dgm:styleLbl name="trAlignAcc1">
+    <dgm:scene3d>
+      <a:camera prst="orthographicFront"/>
+      <a:lightRig rig="threePt" dir="t"/>
+    </dgm:scene3d>
+    <dgm:sp3d/>
+    <dgm:txPr/>
+    <dgm:style>
+      <a:lnRef idx="1">
+        <a:scrgbClr r="0" g="0" b="0"/>
+      </a:lnRef>
+      <a:fillRef idx="1">
+        <a:scrgbClr r="0" g="0" b="0"/>
+      </a:fillRef>
+      <a:effectRef idx="0">
+        <a:scrgbClr r="0" g="0" b="0"/>
+      </a:effectRef>
+      <a:fontRef idx="minor"/>
+    </dgm:style>
+  </dgm:styleLbl>
+  <dgm:styleLbl name="bgAcc1">
+    <dgm:scene3d>
+      <a:camera prst="orthographicFront"/>
+      <a:lightRig rig="threePt" dir="t"/>
+    </dgm:scene3d>
+    <dgm:sp3d/>
+    <dgm:txPr/>
+    <dgm:style>
+      <a:lnRef idx="2">
+        <a:scrgbClr r="0" g="0" b="0"/>
+      </a:lnRef>
+      <a:fillRef idx="1">
+        <a:scrgbClr r="0" g="0" b="0"/>
+      </a:fillRef>
+      <a:effectRef idx="0">
+        <a:scrgbClr r="0" g="0" b="0"/>
+      </a:effectRef>
+      <a:fontRef idx="minor"/>
+    </dgm:style>
+  </dgm:styleLbl>
+  <dgm:styleLbl name="solidFgAcc1">
+    <dgm:scene3d>
+      <a:camera prst="orthographicFront"/>
+      <a:lightRig rig="threePt" dir="t"/>
+    </dgm:scene3d>
+    <dgm:sp3d/>
+    <dgm:txPr/>
+    <dgm:style>
+      <a:lnRef idx="2">
+        <a:scrgbClr r="0" g="0" b="0"/>
+      </a:lnRef>
+      <a:fillRef idx="1">
+        <a:scrgbClr r="0" g="0" b="0"/>
+      </a:fillRef>
+      <a:effectRef idx="0">
+        <a:scrgbClr r="0" g="0" b="0"/>
+      </a:effectRef>
+      <a:fontRef idx="minor"/>
+    </dgm:style>
+  </dgm:styleLbl>
+  <dgm:styleLbl name="solidAlignAcc1">
+    <dgm:scene3d>
+      <a:camera prst="orthographicFront"/>
+      <a:lightRig rig="threePt" dir="t"/>
+    </dgm:scene3d>
+    <dgm:sp3d/>
+    <dgm:txPr/>
+    <dgm:style>
+      <a:lnRef idx="2">
+        <a:scrgbClr r="0" g="0" b="0"/>
+      </a:lnRef>
+      <a:fillRef idx="1">
+        <a:scrgbClr r="0" g="0" b="0"/>
+      </a:fillRef>
+      <a:effectRef idx="0">
+        <a:scrgbClr r="0" g="0" b="0"/>
+      </a:effectRef>
+      <a:fontRef idx="minor"/>
+    </dgm:style>
+  </dgm:styleLbl>
+  <dgm:styleLbl name="solidBgAcc1">
+    <dgm:scene3d>
+      <a:camera prst="orthographicFront"/>
+      <a:lightRig rig="threePt" dir="t"/>
+    </dgm:scene3d>
+    <dgm:sp3d/>
+    <dgm:txPr/>
+    <dgm:style>
+      <a:lnRef idx="2">
+        <a:scrgbClr r="0" g="0" b="0"/>
+      </a:lnRef>
+      <a:fillRef idx="1">
+        <a:scrgbClr r="0" g="0" b="0"/>
+      </a:fillRef>
+      <a:effectRef idx="0">
+        <a:scrgbClr r="0" g="0" b="0"/>
+      </a:effectRef>
+      <a:fontRef idx="minor"/>
+    </dgm:style>
+  </dgm:styleLbl>
+  <dgm:styleLbl name="fgAccFollowNode1">
+    <dgm:scene3d>
+      <a:camera prst="orthographicFront"/>
+      <a:lightRig rig="threePt" dir="t"/>
+    </dgm:scene3d>
+    <dgm:sp3d/>
+    <dgm:txPr/>
+    <dgm:style>
+      <a:lnRef idx="2">
+        <a:scrgbClr r="0" g="0" b="0"/>
+      </a:lnRef>
+      <a:fillRef idx="1">
+        <a:scrgbClr r="0" g="0" b="0"/>
+      </a:fillRef>
+      <a:effectRef idx="0">
+        <a:scrgbClr r="0" g="0" b="0"/>
+      </a:effectRef>
+      <a:fontRef idx="minor"/>
+    </dgm:style>
+  </dgm:styleLbl>
+  <dgm:styleLbl name="alignAccFollowNode1">
+    <dgm:scene3d>
+      <a:camera prst="orthographicFront"/>
+      <a:lightRig rig="threePt" dir="t"/>
+    </dgm:scene3d>
+    <dgm:sp3d/>
+    <dgm:txPr/>
+    <dgm:style>
+      <a:lnRef idx="2">
+        <a:scrgbClr r="0" g="0" b="0"/>
+      </a:lnRef>
+      <a:fillRef idx="1">
+        <a:scrgbClr r="0" g="0" b="0"/>
+      </a:fillRef>
+      <a:effectRef idx="0">
+        <a:scrgbClr r="0" g="0" b="0"/>
+      </a:effectRef>
+      <a:fontRef idx="minor"/>
+    </dgm:style>
+  </dgm:styleLbl>
+  <dgm:styleLbl name="bgAccFollowNode1">
+    <dgm:scene3d>
+      <a:camera prst="orthographicFront"/>
+      <a:lightRig rig="threePt" dir="t"/>
+    </dgm:scene3d>
+    <dgm:sp3d/>
+    <dgm:txPr/>
+    <dgm:style>
+      <a:lnRef idx="2">
+        <a:scrgbClr r="0" g="0" b="0"/>
+      </a:lnRef>
+      <a:fillRef idx="1">
+        <a:scrgbClr r="0" g="0" b="0"/>
+      </a:fillRef>
+      <a:effectRef idx="0">
+        <a:scrgbClr r="0" g="0" b="0"/>
+      </a:effectRef>
+      <a:fontRef idx="minor"/>
+    </dgm:style>
+  </dgm:styleLbl>
+  <dgm:styleLbl name="fgAcc0">
+    <dgm:scene3d>
+      <a:camera prst="orthographicFront"/>
+      <a:lightRig rig="threePt" dir="t"/>
+    </dgm:scene3d>
+    <dgm:sp3d/>
+    <dgm:txPr/>
+    <dgm:style>
+      <a:lnRef idx="2">
+        <a:scrgbClr r="0" g="0" b="0"/>
+      </a:lnRef>
+      <a:fillRef idx="1">
+        <a:scrgbClr r="0" g="0" b="0"/>
+      </a:fillRef>
+      <a:effectRef idx="0">
+        <a:scrgbClr r="0" g="0" b="0"/>
+      </a:effectRef>
+      <a:fontRef idx="minor"/>
+    </dgm:style>
+  </dgm:styleLbl>
+  <dgm:styleLbl name="fgAcc2">
+    <dgm:scene3d>
+      <a:camera prst="orthographicFront"/>
+      <a:lightRig rig="threePt" dir="t"/>
+    </dgm:scene3d>
+    <dgm:sp3d/>
+    <dgm:txPr/>
+    <dgm:style>
+      <a:lnRef idx="2">
+        <a:scrgbClr r="0" g="0" b="0"/>
+      </a:lnRef>
+      <a:fillRef idx="1">
+        <a:scrgbClr r="0" g="0" b="0"/>
+      </a:fillRef>
+      <a:effectRef idx="0">
+        <a:scrgbClr r="0" g="0" b="0"/>
+      </a:effectRef>
+      <a:fontRef idx="minor"/>
+    </dgm:style>
+  </dgm:styleLbl>
+  <dgm:styleLbl name="fgAcc3">
+    <dgm:scene3d>
+      <a:camera prst="orthographicFront"/>
+      <a:lightRig rig="threePt" dir="t"/>
+    </dgm:scene3d>
+    <dgm:sp3d/>
+    <dgm:txPr/>
+    <dgm:style>
+      <a:lnRef idx="2">
+        <a:scrgbClr r="0" g="0" b="0"/>
+      </a:lnRef>
+      <a:fillRef idx="1">
+        <a:scrgbClr r="0" g="0" b="0"/>
+      </a:fillRef>
+      <a:effectRef idx="0">
+        <a:scrgbClr r="0" g="0" b="0"/>
+      </a:effectRef>
+      <a:fontRef idx="minor"/>
+    </dgm:style>
+  </dgm:styleLbl>
+  <dgm:styleLbl name="fgAcc4">
+    <dgm:scene3d>
+      <a:camera prst="orthographicFront"/>
+      <a:lightRig rig="threePt" dir="t"/>
+    </dgm:scene3d>
+    <dgm:sp3d/>
+    <dgm:txPr/>
+    <dgm:style>
+      <a:lnRef idx="2">
+        <a:scrgbClr r="0" g="0" b="0"/>
+      </a:lnRef>
+      <a:fillRef idx="1">
+        <a:scrgbClr r="0" g="0" b="0"/>
+      </a:fillRef>
+      <a:effectRef idx="0">
+        <a:scrgbClr r="0" g="0" b="0"/>
+      </a:effectRef>
+      <a:fontRef idx="minor"/>
+    </dgm:style>
+  </dgm:styleLbl>
+  <dgm:styleLbl name="bgShp">
+    <dgm:scene3d>
+      <a:camera prst="orthographicFront"/>
+      <a:lightRig rig="threePt" dir="t"/>
+    </dgm:scene3d>
+    <dgm:sp3d/>
+    <dgm:txPr/>
+    <dgm:style>
+      <a:lnRef idx="0">
+        <a:scrgbClr r="0" g="0" b="0"/>
+      </a:lnRef>
+      <a:fillRef idx="1">
+        <a:scrgbClr r="0" g="0" b="0"/>
+      </a:fillRef>
+      <a:effectRef idx="0">
+        <a:scrgbClr r="0" g="0" b="0"/>
+      </a:effectRef>
+      <a:fontRef idx="minor"/>
+    </dgm:style>
+  </dgm:styleLbl>
+  <dgm:styleLbl name="dkBgShp">
+    <dgm:scene3d>
+      <a:camera prst="orthographicFront"/>
+      <a:lightRig rig="threePt" dir="t"/>
+    </dgm:scene3d>
+    <dgm:sp3d/>
+    <dgm:txPr/>
+    <dgm:style>
+      <a:lnRef idx="0">
+        <a:scrgbClr r="0" g="0" b="0"/>
+      </a:lnRef>
+      <a:fillRef idx="1">
+        <a:scrgbClr r="0" g="0" b="0"/>
+      </a:fillRef>
+      <a:effectRef idx="0">
+        <a:scrgbClr r="0" g="0" b="0"/>
+      </a:effectRef>
+      <a:fontRef idx="minor"/>
+    </dgm:style>
+  </dgm:styleLbl>
+  <dgm:styleLbl name="trBgShp">
+    <dgm:scene3d>
+      <a:camera prst="orthographicFront"/>
+      <a:lightRig rig="threePt" dir="t"/>
+    </dgm:scene3d>
+    <dgm:sp3d/>
+    <dgm:txPr/>
+    <dgm:style>
+      <a:lnRef idx="0">
+        <a:scrgbClr r="0" g="0" b="0"/>
+      </a:lnRef>
+      <a:fillRef idx="1">
+        <a:scrgbClr r="0" g="0" b="0"/>
+      </a:fillRef>
+      <a:effectRef idx="0">
+        <a:scrgbClr r="0" g="0" b="0"/>
+      </a:effectRef>
+      <a:fontRef idx="minor"/>
+    </dgm:style>
+  </dgm:styleLbl>
+  <dgm:styleLbl name="fgShp">
+    <dgm:scene3d>
+      <a:camera prst="orthographicFront"/>
+      <a:lightRig rig="threePt" dir="t"/>
+    </dgm:scene3d>
+    <dgm:sp3d/>
+    <dgm:txPr/>
+    <dgm:style>
+      <a:lnRef idx="2">
+        <a:scrgbClr r="0" g="0" b="0"/>
+      </a:lnRef>
+      <a:fillRef idx="1">
+        <a:scrgbClr r="0" g="0" b="0"/>
+      </a:fillRef>
+      <a:effectRef idx="0">
+        <a:scrgbClr r="0" g="0" b="0"/>
+      </a:effectRef>
+      <a:fontRef idx="minor"/>
+    </dgm:style>
+  </dgm:styleLbl>
+  <dgm:styleLbl name="revTx">
+    <dgm:scene3d>
+      <a:camera prst="orthographicFront"/>
+      <a:lightRig rig="threePt" dir="t"/>
+    </dgm:scene3d>
+    <dgm:sp3d/>
+    <dgm:txPr/>
+    <dgm:style>
+      <a:lnRef idx="0">
+        <a:scrgbClr r="0" g="0" b="0"/>
+      </a:lnRef>
+      <a:fillRef idx="0">
+        <a:scrgbClr r="0" g="0" b="0"/>
+      </a:fillRef>
+      <a:effectRef idx="0">
+        <a:scrgbClr r="0" g="0" b="0"/>
+      </a:effectRef>
+      <a:fontRef idx="minor"/>
+    </dgm:style>
+  </dgm:styleLbl>
+</dgm:styleDef>
 </file>
 
 <file path=ppt/slideLayouts/slideLayout1.xml><?xml version="1.0" encoding="utf-8"?>
@@ -259,7 +3551,7 @@
           <a:p>
             <a:fld id="{9884AE41-8EDF-47E8-B64C-F9046FF5481A}" type="datetimeFigureOut">
               <a:rPr lang="en-US" smtClean="0"/>
-              <a:t>9/7/2025</a:t>
+              <a:t>9/14/2025</a:t>
             </a:fld>
             <a:endParaRPr lang="en-US"/>
           </a:p>
@@ -457,7 +3749,7 @@
           <a:p>
             <a:fld id="{9884AE41-8EDF-47E8-B64C-F9046FF5481A}" type="datetimeFigureOut">
               <a:rPr lang="en-US" smtClean="0"/>
-              <a:t>9/7/2025</a:t>
+              <a:t>9/14/2025</a:t>
             </a:fld>
             <a:endParaRPr lang="en-US"/>
           </a:p>
@@ -665,7 +3957,7 @@
           <a:p>
             <a:fld id="{9884AE41-8EDF-47E8-B64C-F9046FF5481A}" type="datetimeFigureOut">
               <a:rPr lang="en-US" smtClean="0"/>
-              <a:t>9/7/2025</a:t>
+              <a:t>9/14/2025</a:t>
             </a:fld>
             <a:endParaRPr lang="en-US"/>
           </a:p>
@@ -885,7 +4177,7 @@
           <a:p>
             <a:fld id="{5C041930-F8FC-4542-827E-E504F4750562}" type="datetimeFigureOut">
               <a:rPr lang="en-US" smtClean="0"/>
-              <a:t>9/7/2025</a:t>
+              <a:t>9/14/2025</a:t>
             </a:fld>
             <a:endParaRPr lang="en-US"/>
           </a:p>
@@ -1083,7 +4375,7 @@
           <a:p>
             <a:fld id="{5C041930-F8FC-4542-827E-E504F4750562}" type="datetimeFigureOut">
               <a:rPr lang="en-US" smtClean="0"/>
-              <a:t>9/7/2025</a:t>
+              <a:t>9/14/2025</a:t>
             </a:fld>
             <a:endParaRPr lang="en-US"/>
           </a:p>
@@ -1358,7 +4650,7 @@
           <a:p>
             <a:fld id="{5C041930-F8FC-4542-827E-E504F4750562}" type="datetimeFigureOut">
               <a:rPr lang="en-US" smtClean="0"/>
-              <a:t>9/7/2025</a:t>
+              <a:t>9/14/2025</a:t>
             </a:fld>
             <a:endParaRPr lang="en-US"/>
           </a:p>
@@ -1623,7 +4915,7 @@
           <a:p>
             <a:fld id="{5C041930-F8FC-4542-827E-E504F4750562}" type="datetimeFigureOut">
               <a:rPr lang="en-US" smtClean="0"/>
-              <a:t>9/7/2025</a:t>
+              <a:t>9/14/2025</a:t>
             </a:fld>
             <a:endParaRPr lang="en-US"/>
           </a:p>
@@ -2035,7 +5327,7 @@
           <a:p>
             <a:fld id="{5C041930-F8FC-4542-827E-E504F4750562}" type="datetimeFigureOut">
               <a:rPr lang="en-US" smtClean="0"/>
-              <a:t>9/7/2025</a:t>
+              <a:t>9/14/2025</a:t>
             </a:fld>
             <a:endParaRPr lang="en-US"/>
           </a:p>
@@ -2176,7 +5468,7 @@
           <a:p>
             <a:fld id="{5C041930-F8FC-4542-827E-E504F4750562}" type="datetimeFigureOut">
               <a:rPr lang="en-US" smtClean="0"/>
-              <a:t>9/7/2025</a:t>
+              <a:t>9/14/2025</a:t>
             </a:fld>
             <a:endParaRPr lang="en-US"/>
           </a:p>
@@ -2289,7 +5581,7 @@
           <a:p>
             <a:fld id="{5C041930-F8FC-4542-827E-E504F4750562}" type="datetimeFigureOut">
               <a:rPr lang="en-US" smtClean="0"/>
-              <a:t>9/7/2025</a:t>
+              <a:t>9/14/2025</a:t>
             </a:fld>
             <a:endParaRPr lang="en-US"/>
           </a:p>
@@ -2600,7 +5892,7 @@
           <a:p>
             <a:fld id="{5C041930-F8FC-4542-827E-E504F4750562}" type="datetimeFigureOut">
               <a:rPr lang="en-US" smtClean="0"/>
-              <a:t>9/7/2025</a:t>
+              <a:t>9/14/2025</a:t>
             </a:fld>
             <a:endParaRPr lang="en-US"/>
           </a:p>
@@ -2798,7 +6090,7 @@
           <a:p>
             <a:fld id="{9884AE41-8EDF-47E8-B64C-F9046FF5481A}" type="datetimeFigureOut">
               <a:rPr lang="en-US" smtClean="0"/>
-              <a:t>9/7/2025</a:t>
+              <a:t>9/14/2025</a:t>
             </a:fld>
             <a:endParaRPr lang="en-US"/>
           </a:p>
@@ -3086,7 +6378,7 @@
           <a:p>
             <a:fld id="{5C041930-F8FC-4542-827E-E504F4750562}" type="datetimeFigureOut">
               <a:rPr lang="en-US" smtClean="0"/>
-              <a:t>9/7/2025</a:t>
+              <a:t>9/14/2025</a:t>
             </a:fld>
             <a:endParaRPr lang="en-US"/>
           </a:p>
@@ -3284,7 +6576,7 @@
           <a:p>
             <a:fld id="{5C041930-F8FC-4542-827E-E504F4750562}" type="datetimeFigureOut">
               <a:rPr lang="en-US" smtClean="0"/>
-              <a:t>9/7/2025</a:t>
+              <a:t>9/14/2025</a:t>
             </a:fld>
             <a:endParaRPr lang="en-US"/>
           </a:p>
@@ -3492,7 +6784,7 @@
           <a:p>
             <a:fld id="{5C041930-F8FC-4542-827E-E504F4750562}" type="datetimeFigureOut">
               <a:rPr lang="en-US" smtClean="0"/>
-              <a:t>9/7/2025</a:t>
+              <a:t>9/14/2025</a:t>
             </a:fld>
             <a:endParaRPr lang="en-US"/>
           </a:p>
@@ -3767,7 +7059,7 @@
           <a:p>
             <a:fld id="{9884AE41-8EDF-47E8-B64C-F9046FF5481A}" type="datetimeFigureOut">
               <a:rPr lang="en-US" smtClean="0"/>
-              <a:t>9/7/2025</a:t>
+              <a:t>9/14/2025</a:t>
             </a:fld>
             <a:endParaRPr lang="en-US"/>
           </a:p>
@@ -4032,7 +7324,7 @@
           <a:p>
             <a:fld id="{9884AE41-8EDF-47E8-B64C-F9046FF5481A}" type="datetimeFigureOut">
               <a:rPr lang="en-US" smtClean="0"/>
-              <a:t>9/7/2025</a:t>
+              <a:t>9/14/2025</a:t>
             </a:fld>
             <a:endParaRPr lang="en-US"/>
           </a:p>
@@ -4444,7 +7736,7 @@
           <a:p>
             <a:fld id="{9884AE41-8EDF-47E8-B64C-F9046FF5481A}" type="datetimeFigureOut">
               <a:rPr lang="en-US" smtClean="0"/>
-              <a:t>9/7/2025</a:t>
+              <a:t>9/14/2025</a:t>
             </a:fld>
             <a:endParaRPr lang="en-US"/>
           </a:p>
@@ -4585,7 +7877,7 @@
           <a:p>
             <a:fld id="{9884AE41-8EDF-47E8-B64C-F9046FF5481A}" type="datetimeFigureOut">
               <a:rPr lang="en-US" smtClean="0"/>
-              <a:t>9/7/2025</a:t>
+              <a:t>9/14/2025</a:t>
             </a:fld>
             <a:endParaRPr lang="en-US"/>
           </a:p>
@@ -4698,7 +7990,7 @@
           <a:p>
             <a:fld id="{9884AE41-8EDF-47E8-B64C-F9046FF5481A}" type="datetimeFigureOut">
               <a:rPr lang="en-US" smtClean="0"/>
-              <a:t>9/7/2025</a:t>
+              <a:t>9/14/2025</a:t>
             </a:fld>
             <a:endParaRPr lang="en-US"/>
           </a:p>
@@ -5009,7 +8301,7 @@
           <a:p>
             <a:fld id="{9884AE41-8EDF-47E8-B64C-F9046FF5481A}" type="datetimeFigureOut">
               <a:rPr lang="en-US" smtClean="0"/>
-              <a:t>9/7/2025</a:t>
+              <a:t>9/14/2025</a:t>
             </a:fld>
             <a:endParaRPr lang="en-US"/>
           </a:p>
@@ -5297,7 +8589,7 @@
           <a:p>
             <a:fld id="{9884AE41-8EDF-47E8-B64C-F9046FF5481A}" type="datetimeFigureOut">
               <a:rPr lang="en-US" smtClean="0"/>
-              <a:t>9/7/2025</a:t>
+              <a:t>9/14/2025</a:t>
             </a:fld>
             <a:endParaRPr lang="en-US"/>
           </a:p>
@@ -5538,7 +8830,7 @@
           <a:p>
             <a:fld id="{9884AE41-8EDF-47E8-B64C-F9046FF5481A}" type="datetimeFigureOut">
               <a:rPr lang="en-US" smtClean="0"/>
-              <a:t>9/7/2025</a:t>
+              <a:t>9/14/2025</a:t>
             </a:fld>
             <a:endParaRPr lang="en-US"/>
           </a:p>
@@ -6106,7 +9398,7 @@
           <a:p>
             <a:fld id="{5C041930-F8FC-4542-827E-E504F4750562}" type="datetimeFigureOut">
               <a:rPr lang="en-US" smtClean="0"/>
-              <a:t>9/7/2025</a:t>
+              <a:t>9/14/2025</a:t>
             </a:fld>
             <a:endParaRPr lang="en-US"/>
           </a:p>
@@ -7919,6 +11211,1408 @@
 </p:sld>
 </file>
 
+<file path=ppt/slides/slide10.xml><?xml version="1.0" encoding="utf-8"?>
+<p:sld xmlns:a="http://schemas.openxmlformats.org/drawingml/2006/main" xmlns:r="http://schemas.openxmlformats.org/officeDocument/2006/relationships" xmlns:p="http://schemas.openxmlformats.org/presentationml/2006/main">
+  <p:cSld>
+    <p:spTree>
+      <p:nvGrpSpPr>
+        <p:cNvPr id="1" name="">
+          <a:extLst>
+            <a:ext uri="{FF2B5EF4-FFF2-40B4-BE49-F238E27FC236}">
+              <a16:creationId xmlns:a16="http://schemas.microsoft.com/office/drawing/2014/main" id="{F416E4CF-430B-806E-EA21-A6D6619BABCD}"/>
+            </a:ext>
+          </a:extLst>
+        </p:cNvPr>
+        <p:cNvGrpSpPr/>
+        <p:nvPr/>
+      </p:nvGrpSpPr>
+      <p:grpSpPr>
+        <a:xfrm>
+          <a:off x="0" y="0"/>
+          <a:ext cx="0" cy="0"/>
+          <a:chOff x="0" y="0"/>
+          <a:chExt cx="0" cy="0"/>
+        </a:xfrm>
+      </p:grpSpPr>
+      <p:pic>
+        <p:nvPicPr>
+          <p:cNvPr id="5" name="Content Placeholder 4">
+            <a:extLst>
+              <a:ext uri="{FF2B5EF4-FFF2-40B4-BE49-F238E27FC236}">
+                <a16:creationId xmlns:a16="http://schemas.microsoft.com/office/drawing/2014/main" id="{54B56CFE-A743-101A-A271-EC0E0655BF53}"/>
+              </a:ext>
+            </a:extLst>
+          </p:cNvPr>
+          <p:cNvPicPr>
+            <a:picLocks noGrp="1" noChangeAspect="1"/>
+          </p:cNvPicPr>
+          <p:nvPr>
+            <p:ph idx="1"/>
+          </p:nvPr>
+        </p:nvPicPr>
+        <p:blipFill>
+          <a:blip r:embed="rId2">
+            <a:extLst>
+              <a:ext uri="{28A0092B-C50C-407E-A947-70E740481C1C}">
+                <a14:useLocalDpi xmlns:a14="http://schemas.microsoft.com/office/drawing/2010/main" val="0"/>
+              </a:ext>
+            </a:extLst>
+          </a:blip>
+          <a:srcRect/>
+          <a:stretch/>
+        </p:blipFill>
+        <p:spPr>
+          <a:xfrm>
+            <a:off x="808132" y="569862"/>
+            <a:ext cx="10575735" cy="6064757"/>
+          </a:xfrm>
+        </p:spPr>
+      </p:pic>
+      <p:sp>
+        <p:nvSpPr>
+          <p:cNvPr id="9" name="TextBox 8">
+            <a:extLst>
+              <a:ext uri="{FF2B5EF4-FFF2-40B4-BE49-F238E27FC236}">
+                <a16:creationId xmlns:a16="http://schemas.microsoft.com/office/drawing/2014/main" id="{AF0E2A08-8C29-1643-1E96-EFB12F0A691C}"/>
+              </a:ext>
+            </a:extLst>
+          </p:cNvPr>
+          <p:cNvSpPr txBox="1"/>
+          <p:nvPr/>
+        </p:nvSpPr>
+        <p:spPr>
+          <a:xfrm>
+            <a:off x="3531034" y="170110"/>
+            <a:ext cx="5129930" cy="646331"/>
+          </a:xfrm>
+          <a:prstGeom prst="rect">
+            <a:avLst/>
+          </a:prstGeom>
+          <a:noFill/>
+        </p:spPr>
+        <p:txBody>
+          <a:bodyPr wrap="none" rtlCol="0">
+            <a:spAutoFit/>
+          </a:bodyPr>
+          <a:lstStyle/>
+          <a:p>
+            <a:r>
+              <a:rPr lang="en-US" dirty="0">
+                <a:hlinkClick r:id="rId3"/>
+              </a:rPr>
+              <a:t>https://www.youtube.com/watch?v=JZBQLXgSGfs</a:t>
+            </a:r>
+            <a:endParaRPr lang="en-US" dirty="0"/>
+          </a:p>
+          <a:p>
+            <a:endParaRPr lang="en-US" dirty="0"/>
+          </a:p>
+        </p:txBody>
+      </p:sp>
+      <p:sp>
+        <p:nvSpPr>
+          <p:cNvPr id="10" name="Rectangle 9">
+            <a:extLst>
+              <a:ext uri="{FF2B5EF4-FFF2-40B4-BE49-F238E27FC236}">
+                <a16:creationId xmlns:a16="http://schemas.microsoft.com/office/drawing/2014/main" id="{9B04E499-0587-1316-418A-F14FC9C57DC2}"/>
+              </a:ext>
+            </a:extLst>
+          </p:cNvPr>
+          <p:cNvSpPr/>
+          <p:nvPr/>
+        </p:nvSpPr>
+        <p:spPr>
+          <a:xfrm>
+            <a:off x="6637867" y="569862"/>
+            <a:ext cx="2472267" cy="386871"/>
+          </a:xfrm>
+          <a:prstGeom prst="rect">
+            <a:avLst/>
+          </a:prstGeom>
+          <a:solidFill>
+            <a:schemeClr val="tx1"/>
+          </a:solidFill>
+          <a:ln>
+            <a:noFill/>
+          </a:ln>
+        </p:spPr>
+        <p:style>
+          <a:lnRef idx="2">
+            <a:schemeClr val="accent1">
+              <a:shade val="15000"/>
+            </a:schemeClr>
+          </a:lnRef>
+          <a:fillRef idx="1">
+            <a:schemeClr val="accent1"/>
+          </a:fillRef>
+          <a:effectRef idx="0">
+            <a:schemeClr val="accent1"/>
+          </a:effectRef>
+          <a:fontRef idx="minor">
+            <a:schemeClr val="lt1"/>
+          </a:fontRef>
+        </p:style>
+        <p:txBody>
+          <a:bodyPr rtlCol="0" anchor="ctr"/>
+          <a:lstStyle/>
+          <a:p>
+            <a:pPr algn="ctr"/>
+            <a:endParaRPr lang="en-US"/>
+          </a:p>
+        </p:txBody>
+      </p:sp>
+    </p:spTree>
+    <p:extLst>
+      <p:ext uri="{BB962C8B-B14F-4D97-AF65-F5344CB8AC3E}">
+        <p14:creationId xmlns:p14="http://schemas.microsoft.com/office/powerpoint/2010/main" val="3432300416"/>
+      </p:ext>
+    </p:extLst>
+  </p:cSld>
+  <p:clrMapOvr>
+    <a:masterClrMapping/>
+  </p:clrMapOvr>
+</p:sld>
+</file>
+
+<file path=ppt/slides/slide11.xml><?xml version="1.0" encoding="utf-8"?>
+<p:sld xmlns:a="http://schemas.openxmlformats.org/drawingml/2006/main" xmlns:r="http://schemas.openxmlformats.org/officeDocument/2006/relationships" xmlns:p="http://schemas.openxmlformats.org/presentationml/2006/main">
+  <p:cSld>
+    <p:spTree>
+      <p:nvGrpSpPr>
+        <p:cNvPr id="1" name="">
+          <a:extLst>
+            <a:ext uri="{FF2B5EF4-FFF2-40B4-BE49-F238E27FC236}">
+              <a16:creationId xmlns:a16="http://schemas.microsoft.com/office/drawing/2014/main" id="{21E48A08-2772-AF5D-FFB5-C1C22564D47F}"/>
+            </a:ext>
+          </a:extLst>
+        </p:cNvPr>
+        <p:cNvGrpSpPr/>
+        <p:nvPr/>
+      </p:nvGrpSpPr>
+      <p:grpSpPr>
+        <a:xfrm>
+          <a:off x="0" y="0"/>
+          <a:ext cx="0" cy="0"/>
+          <a:chOff x="0" y="0"/>
+          <a:chExt cx="0" cy="0"/>
+        </a:xfrm>
+      </p:grpSpPr>
+      <p:pic>
+        <p:nvPicPr>
+          <p:cNvPr id="5" name="Content Placeholder 4">
+            <a:extLst>
+              <a:ext uri="{FF2B5EF4-FFF2-40B4-BE49-F238E27FC236}">
+                <a16:creationId xmlns:a16="http://schemas.microsoft.com/office/drawing/2014/main" id="{87CACDF9-64D1-7808-5FEA-7AEA8CC5EE5B}"/>
+              </a:ext>
+            </a:extLst>
+          </p:cNvPr>
+          <p:cNvPicPr>
+            <a:picLocks noGrp="1" noChangeAspect="1"/>
+          </p:cNvPicPr>
+          <p:nvPr>
+            <p:ph idx="1"/>
+          </p:nvPr>
+        </p:nvPicPr>
+        <p:blipFill>
+          <a:blip r:embed="rId2">
+            <a:extLst>
+              <a:ext uri="{28A0092B-C50C-407E-A947-70E740481C1C}">
+                <a14:useLocalDpi xmlns:a14="http://schemas.microsoft.com/office/drawing/2010/main" val="0"/>
+              </a:ext>
+            </a:extLst>
+          </a:blip>
+          <a:srcRect/>
+          <a:stretch/>
+        </p:blipFill>
+        <p:spPr>
+          <a:xfrm>
+            <a:off x="808132" y="569862"/>
+            <a:ext cx="10575735" cy="6064757"/>
+          </a:xfrm>
+        </p:spPr>
+      </p:pic>
+      <p:sp>
+        <p:nvSpPr>
+          <p:cNvPr id="9" name="TextBox 8">
+            <a:extLst>
+              <a:ext uri="{FF2B5EF4-FFF2-40B4-BE49-F238E27FC236}">
+                <a16:creationId xmlns:a16="http://schemas.microsoft.com/office/drawing/2014/main" id="{3A33C523-CD72-917E-75E5-C140211DDF10}"/>
+              </a:ext>
+            </a:extLst>
+          </p:cNvPr>
+          <p:cNvSpPr txBox="1"/>
+          <p:nvPr/>
+        </p:nvSpPr>
+        <p:spPr>
+          <a:xfrm>
+            <a:off x="3531034" y="170110"/>
+            <a:ext cx="5129930" cy="646331"/>
+          </a:xfrm>
+          <a:prstGeom prst="rect">
+            <a:avLst/>
+          </a:prstGeom>
+          <a:noFill/>
+        </p:spPr>
+        <p:txBody>
+          <a:bodyPr wrap="none" rtlCol="0">
+            <a:spAutoFit/>
+          </a:bodyPr>
+          <a:lstStyle/>
+          <a:p>
+            <a:r>
+              <a:rPr lang="en-US" dirty="0">
+                <a:hlinkClick r:id="rId3"/>
+              </a:rPr>
+              <a:t>https://www.youtube.com/watch?v=JZBQLXgSGfs</a:t>
+            </a:r>
+            <a:endParaRPr lang="en-US" dirty="0"/>
+          </a:p>
+          <a:p>
+            <a:endParaRPr lang="en-US" dirty="0"/>
+          </a:p>
+        </p:txBody>
+      </p:sp>
+      <p:sp>
+        <p:nvSpPr>
+          <p:cNvPr id="10" name="Rectangle 9">
+            <a:extLst>
+              <a:ext uri="{FF2B5EF4-FFF2-40B4-BE49-F238E27FC236}">
+                <a16:creationId xmlns:a16="http://schemas.microsoft.com/office/drawing/2014/main" id="{5B7861FD-BEF3-8DFB-8D6C-3B2746A9BDCD}"/>
+              </a:ext>
+            </a:extLst>
+          </p:cNvPr>
+          <p:cNvSpPr/>
+          <p:nvPr/>
+        </p:nvSpPr>
+        <p:spPr>
+          <a:xfrm>
+            <a:off x="6637867" y="569862"/>
+            <a:ext cx="2472267" cy="386871"/>
+          </a:xfrm>
+          <a:prstGeom prst="rect">
+            <a:avLst/>
+          </a:prstGeom>
+          <a:solidFill>
+            <a:schemeClr val="tx1"/>
+          </a:solidFill>
+          <a:ln>
+            <a:noFill/>
+          </a:ln>
+        </p:spPr>
+        <p:style>
+          <a:lnRef idx="2">
+            <a:schemeClr val="accent1">
+              <a:shade val="15000"/>
+            </a:schemeClr>
+          </a:lnRef>
+          <a:fillRef idx="1">
+            <a:schemeClr val="accent1"/>
+          </a:fillRef>
+          <a:effectRef idx="0">
+            <a:schemeClr val="accent1"/>
+          </a:effectRef>
+          <a:fontRef idx="minor">
+            <a:schemeClr val="lt1"/>
+          </a:fontRef>
+        </p:style>
+        <p:txBody>
+          <a:bodyPr rtlCol="0" anchor="ctr"/>
+          <a:lstStyle/>
+          <a:p>
+            <a:pPr algn="ctr"/>
+            <a:endParaRPr lang="en-US"/>
+          </a:p>
+        </p:txBody>
+      </p:sp>
+    </p:spTree>
+    <p:extLst>
+      <p:ext uri="{BB962C8B-B14F-4D97-AF65-F5344CB8AC3E}">
+        <p14:creationId xmlns:p14="http://schemas.microsoft.com/office/powerpoint/2010/main" val="2879771970"/>
+      </p:ext>
+    </p:extLst>
+  </p:cSld>
+  <p:clrMapOvr>
+    <a:masterClrMapping/>
+  </p:clrMapOvr>
+</p:sld>
+</file>
+
+<file path=ppt/slides/slide12.xml><?xml version="1.0" encoding="utf-8"?>
+<p:sld xmlns:a="http://schemas.openxmlformats.org/drawingml/2006/main" xmlns:r="http://schemas.openxmlformats.org/officeDocument/2006/relationships" xmlns:p="http://schemas.openxmlformats.org/presentationml/2006/main">
+  <p:cSld>
+    <p:spTree>
+      <p:nvGrpSpPr>
+        <p:cNvPr id="1" name="">
+          <a:extLst>
+            <a:ext uri="{FF2B5EF4-FFF2-40B4-BE49-F238E27FC236}">
+              <a16:creationId xmlns:a16="http://schemas.microsoft.com/office/drawing/2014/main" id="{DC15DC67-2744-FCF7-A3E8-E448305879E6}"/>
+            </a:ext>
+          </a:extLst>
+        </p:cNvPr>
+        <p:cNvGrpSpPr/>
+        <p:nvPr/>
+      </p:nvGrpSpPr>
+      <p:grpSpPr>
+        <a:xfrm>
+          <a:off x="0" y="0"/>
+          <a:ext cx="0" cy="0"/>
+          <a:chOff x="0" y="0"/>
+          <a:chExt cx="0" cy="0"/>
+        </a:xfrm>
+      </p:grpSpPr>
+      <p:pic>
+        <p:nvPicPr>
+          <p:cNvPr id="5" name="Content Placeholder 4">
+            <a:extLst>
+              <a:ext uri="{FF2B5EF4-FFF2-40B4-BE49-F238E27FC236}">
+                <a16:creationId xmlns:a16="http://schemas.microsoft.com/office/drawing/2014/main" id="{BC553C58-962D-19DF-783A-1B95276DA3E0}"/>
+              </a:ext>
+            </a:extLst>
+          </p:cNvPr>
+          <p:cNvPicPr>
+            <a:picLocks noGrp="1" noChangeAspect="1"/>
+          </p:cNvPicPr>
+          <p:nvPr>
+            <p:ph idx="1"/>
+          </p:nvPr>
+        </p:nvPicPr>
+        <p:blipFill>
+          <a:blip r:embed="rId2">
+            <a:extLst>
+              <a:ext uri="{28A0092B-C50C-407E-A947-70E740481C1C}">
+                <a14:useLocalDpi xmlns:a14="http://schemas.microsoft.com/office/drawing/2010/main" val="0"/>
+              </a:ext>
+            </a:extLst>
+          </a:blip>
+          <a:srcRect/>
+          <a:stretch/>
+        </p:blipFill>
+        <p:spPr>
+          <a:xfrm>
+            <a:off x="808132" y="569862"/>
+            <a:ext cx="10575735" cy="6064757"/>
+          </a:xfrm>
+        </p:spPr>
+      </p:pic>
+      <p:sp>
+        <p:nvSpPr>
+          <p:cNvPr id="9" name="TextBox 8">
+            <a:extLst>
+              <a:ext uri="{FF2B5EF4-FFF2-40B4-BE49-F238E27FC236}">
+                <a16:creationId xmlns:a16="http://schemas.microsoft.com/office/drawing/2014/main" id="{814EA117-A59B-AAF6-12EC-1F328D3D6173}"/>
+              </a:ext>
+            </a:extLst>
+          </p:cNvPr>
+          <p:cNvSpPr txBox="1"/>
+          <p:nvPr/>
+        </p:nvSpPr>
+        <p:spPr>
+          <a:xfrm>
+            <a:off x="3531034" y="170110"/>
+            <a:ext cx="5129930" cy="646331"/>
+          </a:xfrm>
+          <a:prstGeom prst="rect">
+            <a:avLst/>
+          </a:prstGeom>
+          <a:noFill/>
+        </p:spPr>
+        <p:txBody>
+          <a:bodyPr wrap="none" rtlCol="0">
+            <a:spAutoFit/>
+          </a:bodyPr>
+          <a:lstStyle/>
+          <a:p>
+            <a:r>
+              <a:rPr lang="en-US" dirty="0">
+                <a:hlinkClick r:id="rId3"/>
+              </a:rPr>
+              <a:t>https://www.youtube.com/watch?v=JZBQLXgSGfs</a:t>
+            </a:r>
+            <a:endParaRPr lang="en-US" dirty="0"/>
+          </a:p>
+          <a:p>
+            <a:endParaRPr lang="en-US" dirty="0"/>
+          </a:p>
+        </p:txBody>
+      </p:sp>
+      <p:sp>
+        <p:nvSpPr>
+          <p:cNvPr id="10" name="Rectangle 9">
+            <a:extLst>
+              <a:ext uri="{FF2B5EF4-FFF2-40B4-BE49-F238E27FC236}">
+                <a16:creationId xmlns:a16="http://schemas.microsoft.com/office/drawing/2014/main" id="{CC4CBFE1-2289-DA12-361F-7D52FB8CF195}"/>
+              </a:ext>
+            </a:extLst>
+          </p:cNvPr>
+          <p:cNvSpPr/>
+          <p:nvPr/>
+        </p:nvSpPr>
+        <p:spPr>
+          <a:xfrm>
+            <a:off x="6637867" y="569862"/>
+            <a:ext cx="2472267" cy="386871"/>
+          </a:xfrm>
+          <a:prstGeom prst="rect">
+            <a:avLst/>
+          </a:prstGeom>
+          <a:solidFill>
+            <a:schemeClr val="tx1"/>
+          </a:solidFill>
+          <a:ln>
+            <a:noFill/>
+          </a:ln>
+        </p:spPr>
+        <p:style>
+          <a:lnRef idx="2">
+            <a:schemeClr val="accent1">
+              <a:shade val="15000"/>
+            </a:schemeClr>
+          </a:lnRef>
+          <a:fillRef idx="1">
+            <a:schemeClr val="accent1"/>
+          </a:fillRef>
+          <a:effectRef idx="0">
+            <a:schemeClr val="accent1"/>
+          </a:effectRef>
+          <a:fontRef idx="minor">
+            <a:schemeClr val="lt1"/>
+          </a:fontRef>
+        </p:style>
+        <p:txBody>
+          <a:bodyPr rtlCol="0" anchor="ctr"/>
+          <a:lstStyle/>
+          <a:p>
+            <a:pPr algn="ctr"/>
+            <a:endParaRPr lang="en-US"/>
+          </a:p>
+        </p:txBody>
+      </p:sp>
+    </p:spTree>
+    <p:extLst>
+      <p:ext uri="{BB962C8B-B14F-4D97-AF65-F5344CB8AC3E}">
+        <p14:creationId xmlns:p14="http://schemas.microsoft.com/office/powerpoint/2010/main" val="1891795340"/>
+      </p:ext>
+    </p:extLst>
+  </p:cSld>
+  <p:clrMapOvr>
+    <a:masterClrMapping/>
+  </p:clrMapOvr>
+</p:sld>
+</file>
+
+<file path=ppt/slides/slide13.xml><?xml version="1.0" encoding="utf-8"?>
+<p:sld xmlns:a="http://schemas.openxmlformats.org/drawingml/2006/main" xmlns:r="http://schemas.openxmlformats.org/officeDocument/2006/relationships" xmlns:p="http://schemas.openxmlformats.org/presentationml/2006/main">
+  <p:cSld>
+    <p:spTree>
+      <p:nvGrpSpPr>
+        <p:cNvPr id="1" name="">
+          <a:extLst>
+            <a:ext uri="{FF2B5EF4-FFF2-40B4-BE49-F238E27FC236}">
+              <a16:creationId xmlns:a16="http://schemas.microsoft.com/office/drawing/2014/main" id="{AE3E575C-1987-1F3B-5EE3-ADD51AAF3CED}"/>
+            </a:ext>
+          </a:extLst>
+        </p:cNvPr>
+        <p:cNvGrpSpPr/>
+        <p:nvPr/>
+      </p:nvGrpSpPr>
+      <p:grpSpPr>
+        <a:xfrm>
+          <a:off x="0" y="0"/>
+          <a:ext cx="0" cy="0"/>
+          <a:chOff x="0" y="0"/>
+          <a:chExt cx="0" cy="0"/>
+        </a:xfrm>
+      </p:grpSpPr>
+      <p:pic>
+        <p:nvPicPr>
+          <p:cNvPr id="5" name="Content Placeholder 4">
+            <a:extLst>
+              <a:ext uri="{FF2B5EF4-FFF2-40B4-BE49-F238E27FC236}">
+                <a16:creationId xmlns:a16="http://schemas.microsoft.com/office/drawing/2014/main" id="{66493A0E-B4C4-9B69-CCC1-0230223DD58D}"/>
+              </a:ext>
+            </a:extLst>
+          </p:cNvPr>
+          <p:cNvPicPr>
+            <a:picLocks noGrp="1" noChangeAspect="1"/>
+          </p:cNvPicPr>
+          <p:nvPr>
+            <p:ph idx="1"/>
+          </p:nvPr>
+        </p:nvPicPr>
+        <p:blipFill>
+          <a:blip r:embed="rId2">
+            <a:extLst>
+              <a:ext uri="{28A0092B-C50C-407E-A947-70E740481C1C}">
+                <a14:useLocalDpi xmlns:a14="http://schemas.microsoft.com/office/drawing/2010/main" val="0"/>
+              </a:ext>
+            </a:extLst>
+          </a:blip>
+          <a:srcRect/>
+          <a:stretch/>
+        </p:blipFill>
+        <p:spPr>
+          <a:xfrm>
+            <a:off x="808132" y="569862"/>
+            <a:ext cx="10575735" cy="6064757"/>
+          </a:xfrm>
+        </p:spPr>
+      </p:pic>
+      <p:sp>
+        <p:nvSpPr>
+          <p:cNvPr id="9" name="TextBox 8">
+            <a:extLst>
+              <a:ext uri="{FF2B5EF4-FFF2-40B4-BE49-F238E27FC236}">
+                <a16:creationId xmlns:a16="http://schemas.microsoft.com/office/drawing/2014/main" id="{89B73229-7D04-0510-B278-1758FEA47022}"/>
+              </a:ext>
+            </a:extLst>
+          </p:cNvPr>
+          <p:cNvSpPr txBox="1"/>
+          <p:nvPr/>
+        </p:nvSpPr>
+        <p:spPr>
+          <a:xfrm>
+            <a:off x="3531034" y="170110"/>
+            <a:ext cx="5129930" cy="646331"/>
+          </a:xfrm>
+          <a:prstGeom prst="rect">
+            <a:avLst/>
+          </a:prstGeom>
+          <a:noFill/>
+        </p:spPr>
+        <p:txBody>
+          <a:bodyPr wrap="none" rtlCol="0">
+            <a:spAutoFit/>
+          </a:bodyPr>
+          <a:lstStyle/>
+          <a:p>
+            <a:r>
+              <a:rPr lang="en-US" dirty="0">
+                <a:hlinkClick r:id="rId3"/>
+              </a:rPr>
+              <a:t>https://www.youtube.com/watch?v=JZBQLXgSGfs</a:t>
+            </a:r>
+            <a:endParaRPr lang="en-US" dirty="0"/>
+          </a:p>
+          <a:p>
+            <a:endParaRPr lang="en-US" dirty="0"/>
+          </a:p>
+        </p:txBody>
+      </p:sp>
+      <p:sp>
+        <p:nvSpPr>
+          <p:cNvPr id="10" name="Rectangle 9">
+            <a:extLst>
+              <a:ext uri="{FF2B5EF4-FFF2-40B4-BE49-F238E27FC236}">
+                <a16:creationId xmlns:a16="http://schemas.microsoft.com/office/drawing/2014/main" id="{ED281310-9BFF-2997-67F5-38767873167C}"/>
+              </a:ext>
+            </a:extLst>
+          </p:cNvPr>
+          <p:cNvSpPr/>
+          <p:nvPr/>
+        </p:nvSpPr>
+        <p:spPr>
+          <a:xfrm>
+            <a:off x="6637867" y="569862"/>
+            <a:ext cx="2472267" cy="386871"/>
+          </a:xfrm>
+          <a:prstGeom prst="rect">
+            <a:avLst/>
+          </a:prstGeom>
+          <a:solidFill>
+            <a:schemeClr val="tx1"/>
+          </a:solidFill>
+          <a:ln>
+            <a:noFill/>
+          </a:ln>
+        </p:spPr>
+        <p:style>
+          <a:lnRef idx="2">
+            <a:schemeClr val="accent1">
+              <a:shade val="15000"/>
+            </a:schemeClr>
+          </a:lnRef>
+          <a:fillRef idx="1">
+            <a:schemeClr val="accent1"/>
+          </a:fillRef>
+          <a:effectRef idx="0">
+            <a:schemeClr val="accent1"/>
+          </a:effectRef>
+          <a:fontRef idx="minor">
+            <a:schemeClr val="lt1"/>
+          </a:fontRef>
+        </p:style>
+        <p:txBody>
+          <a:bodyPr rtlCol="0" anchor="ctr"/>
+          <a:lstStyle/>
+          <a:p>
+            <a:pPr algn="ctr"/>
+            <a:endParaRPr lang="en-US"/>
+          </a:p>
+        </p:txBody>
+      </p:sp>
+    </p:spTree>
+    <p:extLst>
+      <p:ext uri="{BB962C8B-B14F-4D97-AF65-F5344CB8AC3E}">
+        <p14:creationId xmlns:p14="http://schemas.microsoft.com/office/powerpoint/2010/main" val="1172915191"/>
+      </p:ext>
+    </p:extLst>
+  </p:cSld>
+  <p:clrMapOvr>
+    <a:masterClrMapping/>
+  </p:clrMapOvr>
+</p:sld>
+</file>
+
+<file path=ppt/slides/slide14.xml><?xml version="1.0" encoding="utf-8"?>
+<p:sld xmlns:a="http://schemas.openxmlformats.org/drawingml/2006/main" xmlns:r="http://schemas.openxmlformats.org/officeDocument/2006/relationships" xmlns:p="http://schemas.openxmlformats.org/presentationml/2006/main">
+  <p:cSld>
+    <p:spTree>
+      <p:nvGrpSpPr>
+        <p:cNvPr id="1" name="">
+          <a:extLst>
+            <a:ext uri="{FF2B5EF4-FFF2-40B4-BE49-F238E27FC236}">
+              <a16:creationId xmlns:a16="http://schemas.microsoft.com/office/drawing/2014/main" id="{2FDD0B04-9B0E-C917-F6D3-7DF7B59ED6BB}"/>
+            </a:ext>
+          </a:extLst>
+        </p:cNvPr>
+        <p:cNvGrpSpPr/>
+        <p:nvPr/>
+      </p:nvGrpSpPr>
+      <p:grpSpPr>
+        <a:xfrm>
+          <a:off x="0" y="0"/>
+          <a:ext cx="0" cy="0"/>
+          <a:chOff x="0" y="0"/>
+          <a:chExt cx="0" cy="0"/>
+        </a:xfrm>
+      </p:grpSpPr>
+      <p:pic>
+        <p:nvPicPr>
+          <p:cNvPr id="5" name="Content Placeholder 4">
+            <a:extLst>
+              <a:ext uri="{FF2B5EF4-FFF2-40B4-BE49-F238E27FC236}">
+                <a16:creationId xmlns:a16="http://schemas.microsoft.com/office/drawing/2014/main" id="{B1B15CB3-5C62-1A56-8D88-5DF6EB0A5F56}"/>
+              </a:ext>
+            </a:extLst>
+          </p:cNvPr>
+          <p:cNvPicPr>
+            <a:picLocks noGrp="1" noChangeAspect="1"/>
+          </p:cNvPicPr>
+          <p:nvPr>
+            <p:ph idx="1"/>
+          </p:nvPr>
+        </p:nvPicPr>
+        <p:blipFill>
+          <a:blip r:embed="rId2">
+            <a:extLst>
+              <a:ext uri="{28A0092B-C50C-407E-A947-70E740481C1C}">
+                <a14:useLocalDpi xmlns:a14="http://schemas.microsoft.com/office/drawing/2010/main" val="0"/>
+              </a:ext>
+            </a:extLst>
+          </a:blip>
+          <a:srcRect/>
+          <a:stretch/>
+        </p:blipFill>
+        <p:spPr>
+          <a:xfrm>
+            <a:off x="808132" y="569862"/>
+            <a:ext cx="10575735" cy="6064757"/>
+          </a:xfrm>
+        </p:spPr>
+      </p:pic>
+      <p:sp>
+        <p:nvSpPr>
+          <p:cNvPr id="9" name="TextBox 8">
+            <a:extLst>
+              <a:ext uri="{FF2B5EF4-FFF2-40B4-BE49-F238E27FC236}">
+                <a16:creationId xmlns:a16="http://schemas.microsoft.com/office/drawing/2014/main" id="{CFAF630D-2195-5225-7513-E7282B8EF287}"/>
+              </a:ext>
+            </a:extLst>
+          </p:cNvPr>
+          <p:cNvSpPr txBox="1"/>
+          <p:nvPr/>
+        </p:nvSpPr>
+        <p:spPr>
+          <a:xfrm>
+            <a:off x="3531034" y="170110"/>
+            <a:ext cx="5129930" cy="646331"/>
+          </a:xfrm>
+          <a:prstGeom prst="rect">
+            <a:avLst/>
+          </a:prstGeom>
+          <a:noFill/>
+        </p:spPr>
+        <p:txBody>
+          <a:bodyPr wrap="none" rtlCol="0">
+            <a:spAutoFit/>
+          </a:bodyPr>
+          <a:lstStyle/>
+          <a:p>
+            <a:r>
+              <a:rPr lang="en-US" dirty="0">
+                <a:hlinkClick r:id="rId3"/>
+              </a:rPr>
+              <a:t>https://www.youtube.com/watch?v=JZBQLXgSGfs</a:t>
+            </a:r>
+            <a:endParaRPr lang="en-US" dirty="0"/>
+          </a:p>
+          <a:p>
+            <a:endParaRPr lang="en-US" dirty="0"/>
+          </a:p>
+        </p:txBody>
+      </p:sp>
+      <p:sp>
+        <p:nvSpPr>
+          <p:cNvPr id="10" name="Rectangle 9">
+            <a:extLst>
+              <a:ext uri="{FF2B5EF4-FFF2-40B4-BE49-F238E27FC236}">
+                <a16:creationId xmlns:a16="http://schemas.microsoft.com/office/drawing/2014/main" id="{2E28F793-8623-10D7-6691-E71501968F0B}"/>
+              </a:ext>
+            </a:extLst>
+          </p:cNvPr>
+          <p:cNvSpPr/>
+          <p:nvPr/>
+        </p:nvSpPr>
+        <p:spPr>
+          <a:xfrm>
+            <a:off x="6637867" y="569862"/>
+            <a:ext cx="2472267" cy="386871"/>
+          </a:xfrm>
+          <a:prstGeom prst="rect">
+            <a:avLst/>
+          </a:prstGeom>
+          <a:solidFill>
+            <a:schemeClr val="tx1"/>
+          </a:solidFill>
+          <a:ln>
+            <a:noFill/>
+          </a:ln>
+        </p:spPr>
+        <p:style>
+          <a:lnRef idx="2">
+            <a:schemeClr val="accent1">
+              <a:shade val="15000"/>
+            </a:schemeClr>
+          </a:lnRef>
+          <a:fillRef idx="1">
+            <a:schemeClr val="accent1"/>
+          </a:fillRef>
+          <a:effectRef idx="0">
+            <a:schemeClr val="accent1"/>
+          </a:effectRef>
+          <a:fontRef idx="minor">
+            <a:schemeClr val="lt1"/>
+          </a:fontRef>
+        </p:style>
+        <p:txBody>
+          <a:bodyPr rtlCol="0" anchor="ctr"/>
+          <a:lstStyle/>
+          <a:p>
+            <a:pPr algn="ctr"/>
+            <a:endParaRPr lang="en-US"/>
+          </a:p>
+        </p:txBody>
+      </p:sp>
+    </p:spTree>
+    <p:extLst>
+      <p:ext uri="{BB962C8B-B14F-4D97-AF65-F5344CB8AC3E}">
+        <p14:creationId xmlns:p14="http://schemas.microsoft.com/office/powerpoint/2010/main" val="3248756898"/>
+      </p:ext>
+    </p:extLst>
+  </p:cSld>
+  <p:clrMapOvr>
+    <a:masterClrMapping/>
+  </p:clrMapOvr>
+</p:sld>
+</file>
+
+<file path=ppt/slides/slide15.xml><?xml version="1.0" encoding="utf-8"?>
+<p:sld xmlns:a="http://schemas.openxmlformats.org/drawingml/2006/main" xmlns:r="http://schemas.openxmlformats.org/officeDocument/2006/relationships" xmlns:p="http://schemas.openxmlformats.org/presentationml/2006/main">
+  <p:cSld>
+    <p:spTree>
+      <p:nvGrpSpPr>
+        <p:cNvPr id="1" name="">
+          <a:extLst>
+            <a:ext uri="{FF2B5EF4-FFF2-40B4-BE49-F238E27FC236}">
+              <a16:creationId xmlns:a16="http://schemas.microsoft.com/office/drawing/2014/main" id="{445D6681-D07A-A3DB-01B9-98CC3CFBF17D}"/>
+            </a:ext>
+          </a:extLst>
+        </p:cNvPr>
+        <p:cNvGrpSpPr/>
+        <p:nvPr/>
+      </p:nvGrpSpPr>
+      <p:grpSpPr>
+        <a:xfrm>
+          <a:off x="0" y="0"/>
+          <a:ext cx="0" cy="0"/>
+          <a:chOff x="0" y="0"/>
+          <a:chExt cx="0" cy="0"/>
+        </a:xfrm>
+      </p:grpSpPr>
+      <p:pic>
+        <p:nvPicPr>
+          <p:cNvPr id="5" name="Content Placeholder 4">
+            <a:extLst>
+              <a:ext uri="{FF2B5EF4-FFF2-40B4-BE49-F238E27FC236}">
+                <a16:creationId xmlns:a16="http://schemas.microsoft.com/office/drawing/2014/main" id="{C6C5B9AF-2407-A20B-5A6B-39BAACC93FBE}"/>
+              </a:ext>
+            </a:extLst>
+          </p:cNvPr>
+          <p:cNvPicPr>
+            <a:picLocks noGrp="1" noChangeAspect="1"/>
+          </p:cNvPicPr>
+          <p:nvPr>
+            <p:ph idx="1"/>
+          </p:nvPr>
+        </p:nvPicPr>
+        <p:blipFill>
+          <a:blip r:embed="rId2">
+            <a:extLst>
+              <a:ext uri="{28A0092B-C50C-407E-A947-70E740481C1C}">
+                <a14:useLocalDpi xmlns:a14="http://schemas.microsoft.com/office/drawing/2010/main" val="0"/>
+              </a:ext>
+            </a:extLst>
+          </a:blip>
+          <a:srcRect/>
+          <a:stretch/>
+        </p:blipFill>
+        <p:spPr>
+          <a:xfrm>
+            <a:off x="808132" y="569862"/>
+            <a:ext cx="10575735" cy="6064757"/>
+          </a:xfrm>
+        </p:spPr>
+      </p:pic>
+      <p:sp>
+        <p:nvSpPr>
+          <p:cNvPr id="9" name="TextBox 8">
+            <a:extLst>
+              <a:ext uri="{FF2B5EF4-FFF2-40B4-BE49-F238E27FC236}">
+                <a16:creationId xmlns:a16="http://schemas.microsoft.com/office/drawing/2014/main" id="{E6282ED8-D622-CD03-AB49-3A8CA1A07BB9}"/>
+              </a:ext>
+            </a:extLst>
+          </p:cNvPr>
+          <p:cNvSpPr txBox="1"/>
+          <p:nvPr/>
+        </p:nvSpPr>
+        <p:spPr>
+          <a:xfrm>
+            <a:off x="3531034" y="170110"/>
+            <a:ext cx="5129930" cy="646331"/>
+          </a:xfrm>
+          <a:prstGeom prst="rect">
+            <a:avLst/>
+          </a:prstGeom>
+          <a:noFill/>
+        </p:spPr>
+        <p:txBody>
+          <a:bodyPr wrap="none" rtlCol="0">
+            <a:spAutoFit/>
+          </a:bodyPr>
+          <a:lstStyle/>
+          <a:p>
+            <a:r>
+              <a:rPr lang="en-US" dirty="0">
+                <a:hlinkClick r:id="rId3"/>
+              </a:rPr>
+              <a:t>https://www.youtube.com/watch?v=JZBQLXgSGfs</a:t>
+            </a:r>
+            <a:endParaRPr lang="en-US" dirty="0"/>
+          </a:p>
+          <a:p>
+            <a:endParaRPr lang="en-US" dirty="0"/>
+          </a:p>
+        </p:txBody>
+      </p:sp>
+      <p:sp>
+        <p:nvSpPr>
+          <p:cNvPr id="10" name="Rectangle 9">
+            <a:extLst>
+              <a:ext uri="{FF2B5EF4-FFF2-40B4-BE49-F238E27FC236}">
+                <a16:creationId xmlns:a16="http://schemas.microsoft.com/office/drawing/2014/main" id="{3754077F-38D4-0CC3-1898-59DBA3ECE660}"/>
+              </a:ext>
+            </a:extLst>
+          </p:cNvPr>
+          <p:cNvSpPr/>
+          <p:nvPr/>
+        </p:nvSpPr>
+        <p:spPr>
+          <a:xfrm>
+            <a:off x="6637867" y="569862"/>
+            <a:ext cx="2810933" cy="386871"/>
+          </a:xfrm>
+          <a:prstGeom prst="rect">
+            <a:avLst/>
+          </a:prstGeom>
+          <a:solidFill>
+            <a:schemeClr val="tx1"/>
+          </a:solidFill>
+          <a:ln>
+            <a:noFill/>
+          </a:ln>
+        </p:spPr>
+        <p:style>
+          <a:lnRef idx="2">
+            <a:schemeClr val="accent1">
+              <a:shade val="15000"/>
+            </a:schemeClr>
+          </a:lnRef>
+          <a:fillRef idx="1">
+            <a:schemeClr val="accent1"/>
+          </a:fillRef>
+          <a:effectRef idx="0">
+            <a:schemeClr val="accent1"/>
+          </a:effectRef>
+          <a:fontRef idx="minor">
+            <a:schemeClr val="lt1"/>
+          </a:fontRef>
+        </p:style>
+        <p:txBody>
+          <a:bodyPr rtlCol="0" anchor="ctr"/>
+          <a:lstStyle/>
+          <a:p>
+            <a:pPr algn="ctr"/>
+            <a:endParaRPr lang="en-US"/>
+          </a:p>
+        </p:txBody>
+      </p:sp>
+    </p:spTree>
+    <p:extLst>
+      <p:ext uri="{BB962C8B-B14F-4D97-AF65-F5344CB8AC3E}">
+        <p14:creationId xmlns:p14="http://schemas.microsoft.com/office/powerpoint/2010/main" val="1490854608"/>
+      </p:ext>
+    </p:extLst>
+  </p:cSld>
+  <p:clrMapOvr>
+    <a:masterClrMapping/>
+  </p:clrMapOvr>
+</p:sld>
+</file>
+
+<file path=ppt/slides/slide16.xml><?xml version="1.0" encoding="utf-8"?>
+<p:sld xmlns:a="http://schemas.openxmlformats.org/drawingml/2006/main" xmlns:r="http://schemas.openxmlformats.org/officeDocument/2006/relationships" xmlns:p="http://schemas.openxmlformats.org/presentationml/2006/main">
+  <p:cSld>
+    <p:spTree>
+      <p:nvGrpSpPr>
+        <p:cNvPr id="1" name="">
+          <a:extLst>
+            <a:ext uri="{FF2B5EF4-FFF2-40B4-BE49-F238E27FC236}">
+              <a16:creationId xmlns:a16="http://schemas.microsoft.com/office/drawing/2014/main" id="{1F5A5E98-6420-E7F3-C0B9-F5FEBB458EAE}"/>
+            </a:ext>
+          </a:extLst>
+        </p:cNvPr>
+        <p:cNvGrpSpPr/>
+        <p:nvPr/>
+      </p:nvGrpSpPr>
+      <p:grpSpPr>
+        <a:xfrm>
+          <a:off x="0" y="0"/>
+          <a:ext cx="0" cy="0"/>
+          <a:chOff x="0" y="0"/>
+          <a:chExt cx="0" cy="0"/>
+        </a:xfrm>
+      </p:grpSpPr>
+      <p:pic>
+        <p:nvPicPr>
+          <p:cNvPr id="5" name="Content Placeholder 4">
+            <a:extLst>
+              <a:ext uri="{FF2B5EF4-FFF2-40B4-BE49-F238E27FC236}">
+                <a16:creationId xmlns:a16="http://schemas.microsoft.com/office/drawing/2014/main" id="{6C17EB76-B0F8-77A6-9274-D92D9D4BDB35}"/>
+              </a:ext>
+            </a:extLst>
+          </p:cNvPr>
+          <p:cNvPicPr>
+            <a:picLocks noGrp="1" noChangeAspect="1"/>
+          </p:cNvPicPr>
+          <p:nvPr>
+            <p:ph idx="1"/>
+          </p:nvPr>
+        </p:nvPicPr>
+        <p:blipFill>
+          <a:blip r:embed="rId2">
+            <a:extLst>
+              <a:ext uri="{28A0092B-C50C-407E-A947-70E740481C1C}">
+                <a14:useLocalDpi xmlns:a14="http://schemas.microsoft.com/office/drawing/2010/main" val="0"/>
+              </a:ext>
+            </a:extLst>
+          </a:blip>
+          <a:srcRect/>
+          <a:stretch/>
+        </p:blipFill>
+        <p:spPr>
+          <a:xfrm>
+            <a:off x="808132" y="569862"/>
+            <a:ext cx="10575735" cy="6064757"/>
+          </a:xfrm>
+        </p:spPr>
+      </p:pic>
+      <p:sp>
+        <p:nvSpPr>
+          <p:cNvPr id="9" name="TextBox 8">
+            <a:extLst>
+              <a:ext uri="{FF2B5EF4-FFF2-40B4-BE49-F238E27FC236}">
+                <a16:creationId xmlns:a16="http://schemas.microsoft.com/office/drawing/2014/main" id="{12CAC723-FB02-5268-9144-D55003629EB2}"/>
+              </a:ext>
+            </a:extLst>
+          </p:cNvPr>
+          <p:cNvSpPr txBox="1"/>
+          <p:nvPr/>
+        </p:nvSpPr>
+        <p:spPr>
+          <a:xfrm>
+            <a:off x="3531034" y="170110"/>
+            <a:ext cx="5129930" cy="646331"/>
+          </a:xfrm>
+          <a:prstGeom prst="rect">
+            <a:avLst/>
+          </a:prstGeom>
+          <a:noFill/>
+        </p:spPr>
+        <p:txBody>
+          <a:bodyPr wrap="none" rtlCol="0">
+            <a:spAutoFit/>
+          </a:bodyPr>
+          <a:lstStyle/>
+          <a:p>
+            <a:r>
+              <a:rPr lang="en-US" dirty="0">
+                <a:hlinkClick r:id="rId3"/>
+              </a:rPr>
+              <a:t>https://www.youtube.com/watch?v=JZBQLXgSGfs</a:t>
+            </a:r>
+            <a:endParaRPr lang="en-US" dirty="0"/>
+          </a:p>
+          <a:p>
+            <a:endParaRPr lang="en-US" dirty="0"/>
+          </a:p>
+        </p:txBody>
+      </p:sp>
+      <p:sp>
+        <p:nvSpPr>
+          <p:cNvPr id="10" name="Rectangle 9">
+            <a:extLst>
+              <a:ext uri="{FF2B5EF4-FFF2-40B4-BE49-F238E27FC236}">
+                <a16:creationId xmlns:a16="http://schemas.microsoft.com/office/drawing/2014/main" id="{E5751760-8B95-D2DA-A38C-881D03F807CB}"/>
+              </a:ext>
+            </a:extLst>
+          </p:cNvPr>
+          <p:cNvSpPr/>
+          <p:nvPr/>
+        </p:nvSpPr>
+        <p:spPr>
+          <a:xfrm>
+            <a:off x="6637867" y="569862"/>
+            <a:ext cx="2810933" cy="386871"/>
+          </a:xfrm>
+          <a:prstGeom prst="rect">
+            <a:avLst/>
+          </a:prstGeom>
+          <a:solidFill>
+            <a:schemeClr val="tx1"/>
+          </a:solidFill>
+          <a:ln>
+            <a:noFill/>
+          </a:ln>
+        </p:spPr>
+        <p:style>
+          <a:lnRef idx="2">
+            <a:schemeClr val="accent1">
+              <a:shade val="15000"/>
+            </a:schemeClr>
+          </a:lnRef>
+          <a:fillRef idx="1">
+            <a:schemeClr val="accent1"/>
+          </a:fillRef>
+          <a:effectRef idx="0">
+            <a:schemeClr val="accent1"/>
+          </a:effectRef>
+          <a:fontRef idx="minor">
+            <a:schemeClr val="lt1"/>
+          </a:fontRef>
+        </p:style>
+        <p:txBody>
+          <a:bodyPr rtlCol="0" anchor="ctr"/>
+          <a:lstStyle/>
+          <a:p>
+            <a:pPr algn="ctr"/>
+            <a:endParaRPr lang="en-US"/>
+          </a:p>
+        </p:txBody>
+      </p:sp>
+    </p:spTree>
+    <p:extLst>
+      <p:ext uri="{BB962C8B-B14F-4D97-AF65-F5344CB8AC3E}">
+        <p14:creationId xmlns:p14="http://schemas.microsoft.com/office/powerpoint/2010/main" val="918242378"/>
+      </p:ext>
+    </p:extLst>
+  </p:cSld>
+  <p:clrMapOvr>
+    <a:masterClrMapping/>
+  </p:clrMapOvr>
+</p:sld>
+</file>
+
+<file path=ppt/slides/slide17.xml><?xml version="1.0" encoding="utf-8"?>
+<p:sld xmlns:a="http://schemas.openxmlformats.org/drawingml/2006/main" xmlns:r="http://schemas.openxmlformats.org/officeDocument/2006/relationships" xmlns:p="http://schemas.openxmlformats.org/presentationml/2006/main">
+  <p:cSld>
+    <p:spTree>
+      <p:nvGrpSpPr>
+        <p:cNvPr id="1" name="">
+          <a:extLst>
+            <a:ext uri="{FF2B5EF4-FFF2-40B4-BE49-F238E27FC236}">
+              <a16:creationId xmlns:a16="http://schemas.microsoft.com/office/drawing/2014/main" id="{3C7B1F14-5552-4366-B460-D7B490F71E1D}"/>
+            </a:ext>
+          </a:extLst>
+        </p:cNvPr>
+        <p:cNvGrpSpPr/>
+        <p:nvPr/>
+      </p:nvGrpSpPr>
+      <p:grpSpPr>
+        <a:xfrm>
+          <a:off x="0" y="0"/>
+          <a:ext cx="0" cy="0"/>
+          <a:chOff x="0" y="0"/>
+          <a:chExt cx="0" cy="0"/>
+        </a:xfrm>
+      </p:grpSpPr>
+      <p:pic>
+        <p:nvPicPr>
+          <p:cNvPr id="5" name="Content Placeholder 4">
+            <a:extLst>
+              <a:ext uri="{FF2B5EF4-FFF2-40B4-BE49-F238E27FC236}">
+                <a16:creationId xmlns:a16="http://schemas.microsoft.com/office/drawing/2014/main" id="{D896083E-0EAC-B2C8-165B-6D43955AB804}"/>
+              </a:ext>
+            </a:extLst>
+          </p:cNvPr>
+          <p:cNvPicPr>
+            <a:picLocks noGrp="1" noChangeAspect="1"/>
+          </p:cNvPicPr>
+          <p:nvPr>
+            <p:ph idx="1"/>
+          </p:nvPr>
+        </p:nvPicPr>
+        <p:blipFill>
+          <a:blip r:embed="rId2">
+            <a:extLst>
+              <a:ext uri="{28A0092B-C50C-407E-A947-70E740481C1C}">
+                <a14:useLocalDpi xmlns:a14="http://schemas.microsoft.com/office/drawing/2010/main" val="0"/>
+              </a:ext>
+            </a:extLst>
+          </a:blip>
+          <a:srcRect/>
+          <a:stretch/>
+        </p:blipFill>
+        <p:spPr>
+          <a:xfrm>
+            <a:off x="808132" y="569862"/>
+            <a:ext cx="10575735" cy="6064757"/>
+          </a:xfrm>
+        </p:spPr>
+      </p:pic>
+      <p:sp>
+        <p:nvSpPr>
+          <p:cNvPr id="9" name="TextBox 8">
+            <a:extLst>
+              <a:ext uri="{FF2B5EF4-FFF2-40B4-BE49-F238E27FC236}">
+                <a16:creationId xmlns:a16="http://schemas.microsoft.com/office/drawing/2014/main" id="{C653F89E-CE66-B86D-2018-0DDAAE6F69B3}"/>
+              </a:ext>
+            </a:extLst>
+          </p:cNvPr>
+          <p:cNvSpPr txBox="1"/>
+          <p:nvPr/>
+        </p:nvSpPr>
+        <p:spPr>
+          <a:xfrm>
+            <a:off x="3531034" y="170110"/>
+            <a:ext cx="5129930" cy="646331"/>
+          </a:xfrm>
+          <a:prstGeom prst="rect">
+            <a:avLst/>
+          </a:prstGeom>
+          <a:noFill/>
+        </p:spPr>
+        <p:txBody>
+          <a:bodyPr wrap="none" rtlCol="0">
+            <a:spAutoFit/>
+          </a:bodyPr>
+          <a:lstStyle/>
+          <a:p>
+            <a:r>
+              <a:rPr lang="en-US" dirty="0">
+                <a:hlinkClick r:id="rId3"/>
+              </a:rPr>
+              <a:t>https://www.youtube.com/watch?v=JZBQLXgSGfs</a:t>
+            </a:r>
+            <a:endParaRPr lang="en-US" dirty="0"/>
+          </a:p>
+          <a:p>
+            <a:endParaRPr lang="en-US" dirty="0"/>
+          </a:p>
+        </p:txBody>
+      </p:sp>
+      <p:sp>
+        <p:nvSpPr>
+          <p:cNvPr id="10" name="Rectangle 9">
+            <a:extLst>
+              <a:ext uri="{FF2B5EF4-FFF2-40B4-BE49-F238E27FC236}">
+                <a16:creationId xmlns:a16="http://schemas.microsoft.com/office/drawing/2014/main" id="{6F2148C6-87C4-8A4E-EC29-AFFC73FC7E1A}"/>
+              </a:ext>
+            </a:extLst>
+          </p:cNvPr>
+          <p:cNvSpPr/>
+          <p:nvPr/>
+        </p:nvSpPr>
+        <p:spPr>
+          <a:xfrm>
+            <a:off x="6637867" y="569862"/>
+            <a:ext cx="2810933" cy="386871"/>
+          </a:xfrm>
+          <a:prstGeom prst="rect">
+            <a:avLst/>
+          </a:prstGeom>
+          <a:solidFill>
+            <a:schemeClr val="tx1"/>
+          </a:solidFill>
+          <a:ln>
+            <a:noFill/>
+          </a:ln>
+        </p:spPr>
+        <p:style>
+          <a:lnRef idx="2">
+            <a:schemeClr val="accent1">
+              <a:shade val="15000"/>
+            </a:schemeClr>
+          </a:lnRef>
+          <a:fillRef idx="1">
+            <a:schemeClr val="accent1"/>
+          </a:fillRef>
+          <a:effectRef idx="0">
+            <a:schemeClr val="accent1"/>
+          </a:effectRef>
+          <a:fontRef idx="minor">
+            <a:schemeClr val="lt1"/>
+          </a:fontRef>
+        </p:style>
+        <p:txBody>
+          <a:bodyPr rtlCol="0" anchor="ctr"/>
+          <a:lstStyle/>
+          <a:p>
+            <a:pPr algn="ctr"/>
+            <a:endParaRPr lang="en-US"/>
+          </a:p>
+        </p:txBody>
+      </p:sp>
+    </p:spTree>
+    <p:extLst>
+      <p:ext uri="{BB962C8B-B14F-4D97-AF65-F5344CB8AC3E}">
+        <p14:creationId xmlns:p14="http://schemas.microsoft.com/office/powerpoint/2010/main" val="916657792"/>
+      </p:ext>
+    </p:extLst>
+  </p:cSld>
+  <p:clrMapOvr>
+    <a:masterClrMapping/>
+  </p:clrMapOvr>
+</p:sld>
+</file>
+
+<file path=ppt/slides/slide18.xml><?xml version="1.0" encoding="utf-8"?>
+<p:sld xmlns:a="http://schemas.openxmlformats.org/drawingml/2006/main" xmlns:r="http://schemas.openxmlformats.org/officeDocument/2006/relationships" xmlns:p="http://schemas.openxmlformats.org/presentationml/2006/main">
+  <p:cSld>
+    <p:spTree>
+      <p:nvGrpSpPr>
+        <p:cNvPr id="1" name=""/>
+        <p:cNvGrpSpPr/>
+        <p:nvPr/>
+      </p:nvGrpSpPr>
+      <p:grpSpPr>
+        <a:xfrm>
+          <a:off x="0" y="0"/>
+          <a:ext cx="0" cy="0"/>
+          <a:chOff x="0" y="0"/>
+          <a:chExt cx="0" cy="0"/>
+        </a:xfrm>
+      </p:grpSpPr>
+      <p:sp>
+        <p:nvSpPr>
+          <p:cNvPr id="2" name="Title 1">
+            <a:extLst>
+              <a:ext uri="{FF2B5EF4-FFF2-40B4-BE49-F238E27FC236}">
+                <a16:creationId xmlns:a16="http://schemas.microsoft.com/office/drawing/2014/main" id="{E63FAA5A-37D9-74BF-E736-B01B8AF711FD}"/>
+              </a:ext>
+            </a:extLst>
+          </p:cNvPr>
+          <p:cNvSpPr>
+            <a:spLocks noGrp="1"/>
+          </p:cNvSpPr>
+          <p:nvPr>
+            <p:ph type="title"/>
+          </p:nvPr>
+        </p:nvSpPr>
+        <p:spPr/>
+        <p:txBody>
+          <a:bodyPr/>
+          <a:lstStyle/>
+          <a:p>
+            <a:r>
+              <a:rPr lang="en-US" dirty="0"/>
+              <a:t>Prim’s algorithm</a:t>
+            </a:r>
+          </a:p>
+        </p:txBody>
+      </p:sp>
+      <p:sp>
+        <p:nvSpPr>
+          <p:cNvPr id="3" name="Content Placeholder 2">
+            <a:extLst>
+              <a:ext uri="{FF2B5EF4-FFF2-40B4-BE49-F238E27FC236}">
+                <a16:creationId xmlns:a16="http://schemas.microsoft.com/office/drawing/2014/main" id="{0E49F7C0-68BD-7A1B-880A-099840BF0BA4}"/>
+              </a:ext>
+            </a:extLst>
+          </p:cNvPr>
+          <p:cNvSpPr>
+            <a:spLocks noGrp="1"/>
+          </p:cNvSpPr>
+          <p:nvPr>
+            <p:ph idx="1"/>
+          </p:nvPr>
+        </p:nvSpPr>
+        <p:spPr/>
+        <p:txBody>
+          <a:bodyPr/>
+          <a:lstStyle/>
+          <a:p>
+            <a:r>
+              <a:rPr lang="en-US" dirty="0">
+                <a:hlinkClick r:id="rId2"/>
+              </a:rPr>
+              <a:t>https://www.geeksforgeeks.org/dsa/</a:t>
+            </a:r>
+            <a:r>
+              <a:rPr lang="en-US">
+                <a:hlinkClick r:id="rId2"/>
+              </a:rPr>
+              <a:t>prims-minimum-spanning-tree-mst-greedy-algo-5/</a:t>
+            </a:r>
+            <a:endParaRPr lang="en-US"/>
+          </a:p>
+          <a:p>
+            <a:endParaRPr lang="en-US" dirty="0"/>
+          </a:p>
+        </p:txBody>
+      </p:sp>
+    </p:spTree>
+    <p:extLst>
+      <p:ext uri="{BB962C8B-B14F-4D97-AF65-F5344CB8AC3E}">
+        <p14:creationId xmlns:p14="http://schemas.microsoft.com/office/powerpoint/2010/main" val="409665394"/>
+      </p:ext>
+    </p:extLst>
+  </p:cSld>
+  <p:clrMapOvr>
+    <a:masterClrMapping/>
+  </p:clrMapOvr>
+</p:sld>
+</file>
+
 <file path=ppt/slides/slide2.xml><?xml version="1.0" encoding="utf-8"?>
 <p:sld xmlns:a="http://schemas.openxmlformats.org/drawingml/2006/main" xmlns:r="http://schemas.openxmlformats.org/officeDocument/2006/relationships" xmlns:p="http://schemas.openxmlformats.org/presentationml/2006/main">
   <p:cSld>
@@ -8762,6 +13456,14 @@
 <file path=ppt/slides/slide5.xml><?xml version="1.0" encoding="utf-8"?>
 <p:sld xmlns:a="http://schemas.openxmlformats.org/drawingml/2006/main" xmlns:r="http://schemas.openxmlformats.org/officeDocument/2006/relationships" xmlns:p="http://schemas.openxmlformats.org/presentationml/2006/main">
   <p:cSld>
+    <p:bg>
+      <p:bgPr>
+        <a:solidFill>
+          <a:schemeClr val="bg1"/>
+        </a:solidFill>
+        <a:effectLst/>
+      </p:bgPr>
+    </p:bg>
     <p:spTree>
       <p:nvGrpSpPr>
         <p:cNvPr id="1" name=""/>
@@ -8776,6 +13478,408 @@
           <a:chExt cx="0" cy="0"/>
         </a:xfrm>
       </p:grpSpPr>
+      <p:sp useBgFill="1">
+        <p:nvSpPr>
+          <p:cNvPr id="9" name="Rectangle 8">
+            <a:extLst>
+              <a:ext uri="{FF2B5EF4-FFF2-40B4-BE49-F238E27FC236}">
+                <a16:creationId xmlns:a16="http://schemas.microsoft.com/office/drawing/2014/main" id="{BACC6370-2D7E-4714-9D71-7542949D7D5D}"/>
+              </a:ext>
+              <a:ext uri="{C183D7F6-B498-43B3-948B-1728B52AA6E4}">
+                <adec:decorative xmlns:adec="http://schemas.microsoft.com/office/drawing/2017/decorative" val="1"/>
+              </a:ext>
+            </a:extLst>
+          </p:cNvPr>
+          <p:cNvSpPr>
+            <a:spLocks noGrp="1" noRot="1" noChangeAspect="1" noMove="1" noResize="1" noEditPoints="1" noAdjustHandles="1" noChangeArrowheads="1" noChangeShapeType="1" noTextEdit="1"/>
+          </p:cNvSpPr>
+          <p:nvPr>
+            <p:extLst>
+              <p:ext uri="{386F3935-93C4-4BCD-93E2-E3B085C9AB24}">
+                <p16:designElem xmlns:p16="http://schemas.microsoft.com/office/powerpoint/2015/main" val="1"/>
+              </p:ext>
+            </p:extLst>
+          </p:nvPr>
+        </p:nvSpPr>
+        <p:spPr>
+          <a:xfrm>
+            <a:off x="0" y="0"/>
+            <a:ext cx="12192000" cy="6858000"/>
+          </a:xfrm>
+          <a:prstGeom prst="rect">
+            <a:avLst/>
+          </a:prstGeom>
+          <a:ln w="12700" cap="flat" cmpd="sng" algn="ctr">
+            <a:noFill/>
+            <a:prstDash val="solid"/>
+            <a:miter lim="800000"/>
+          </a:ln>
+          <a:effectLst/>
+          <a:extLst>
+            <a:ext uri="{91240B29-F687-4F45-9708-019B960494DF}">
+              <a14:hiddenLine xmlns:a14="http://schemas.microsoft.com/office/drawing/2010/main" w="12700" cap="flat" cmpd="sng" algn="ctr">
+                <a:solidFill>
+                  <a:schemeClr val="accent1">
+                    <a:shade val="50000"/>
+                  </a:schemeClr>
+                </a:solidFill>
+                <a:prstDash val="solid"/>
+                <a:miter lim="800000"/>
+              </a14:hiddenLine>
+            </a:ext>
+          </a:extLst>
+        </p:spPr>
+        <p:style>
+          <a:lnRef idx="2">
+            <a:schemeClr val="accent1">
+              <a:shade val="50000"/>
+            </a:schemeClr>
+          </a:lnRef>
+          <a:fillRef idx="1">
+            <a:schemeClr val="accent1"/>
+          </a:fillRef>
+          <a:effectRef idx="0">
+            <a:schemeClr val="accent1"/>
+          </a:effectRef>
+          <a:fontRef idx="minor">
+            <a:schemeClr val="lt1"/>
+          </a:fontRef>
+        </p:style>
+        <p:txBody>
+          <a:bodyPr rtlCol="0" anchor="ctr"/>
+          <a:lstStyle/>
+          <a:p>
+            <a:pPr algn="ctr"/>
+            <a:endParaRPr lang="en-US"/>
+          </a:p>
+        </p:txBody>
+      </p:sp>
+      <p:sp>
+        <p:nvSpPr>
+          <p:cNvPr id="11" name="Rectangle 10">
+            <a:extLst>
+              <a:ext uri="{FF2B5EF4-FFF2-40B4-BE49-F238E27FC236}">
+                <a16:creationId xmlns:a16="http://schemas.microsoft.com/office/drawing/2014/main" id="{F68B3F68-107C-434F-AA38-110D5EA91B85}"/>
+              </a:ext>
+              <a:ext uri="{C183D7F6-B498-43B3-948B-1728B52AA6E4}">
+                <adec:decorative xmlns:adec="http://schemas.microsoft.com/office/drawing/2017/decorative" val="1"/>
+              </a:ext>
+            </a:extLst>
+          </p:cNvPr>
+          <p:cNvSpPr>
+            <a:spLocks noGrp="1" noRot="1" noChangeAspect="1" noMove="1" noResize="1" noEditPoints="1" noAdjustHandles="1" noChangeArrowheads="1" noChangeShapeType="1" noTextEdit="1"/>
+          </p:cNvSpPr>
+          <p:nvPr>
+            <p:extLst>
+              <p:ext uri="{386F3935-93C4-4BCD-93E2-E3B085C9AB24}">
+                <p16:designElem xmlns:p16="http://schemas.microsoft.com/office/powerpoint/2015/main" val="1"/>
+              </p:ext>
+            </p:extLst>
+          </p:nvPr>
+        </p:nvSpPr>
+        <p:spPr>
+          <a:xfrm flipH="1">
+            <a:off x="2" y="0"/>
+            <a:ext cx="12191998" cy="1575955"/>
+          </a:xfrm>
+          <a:prstGeom prst="rect">
+            <a:avLst/>
+          </a:prstGeom>
+          <a:gradFill>
+            <a:gsLst>
+              <a:gs pos="0">
+                <a:srgbClr val="000000">
+                  <a:alpha val="96000"/>
+                </a:srgbClr>
+              </a:gs>
+              <a:gs pos="100000">
+                <a:schemeClr val="accent1">
+                  <a:lumMod val="75000"/>
+                </a:schemeClr>
+              </a:gs>
+            </a:gsLst>
+            <a:lin ang="8400000" scaled="0"/>
+          </a:gradFill>
+          <a:ln>
+            <a:noFill/>
+          </a:ln>
+        </p:spPr>
+        <p:style>
+          <a:lnRef idx="2">
+            <a:schemeClr val="accent1">
+              <a:shade val="50000"/>
+            </a:schemeClr>
+          </a:lnRef>
+          <a:fillRef idx="1">
+            <a:schemeClr val="accent1"/>
+          </a:fillRef>
+          <a:effectRef idx="0">
+            <a:schemeClr val="accent1"/>
+          </a:effectRef>
+          <a:fontRef idx="minor">
+            <a:schemeClr val="lt1"/>
+          </a:fontRef>
+        </p:style>
+        <p:txBody>
+          <a:bodyPr rtlCol="0" anchor="ctr"/>
+          <a:lstStyle/>
+          <a:p>
+            <a:pPr algn="ctr"/>
+            <a:endParaRPr lang="en-US"/>
+          </a:p>
+        </p:txBody>
+      </p:sp>
+      <p:sp>
+        <p:nvSpPr>
+          <p:cNvPr id="13" name="Rectangle 12">
+            <a:extLst>
+              <a:ext uri="{FF2B5EF4-FFF2-40B4-BE49-F238E27FC236}">
+                <a16:creationId xmlns:a16="http://schemas.microsoft.com/office/drawing/2014/main" id="{AAD0DBB9-1A4B-4391-81D4-CB19F9AB918A}"/>
+              </a:ext>
+              <a:ext uri="{C183D7F6-B498-43B3-948B-1728B52AA6E4}">
+                <adec:decorative xmlns:adec="http://schemas.microsoft.com/office/drawing/2017/decorative" val="1"/>
+              </a:ext>
+            </a:extLst>
+          </p:cNvPr>
+          <p:cNvSpPr>
+            <a:spLocks noGrp="1" noRot="1" noChangeAspect="1" noMove="1" noResize="1" noEditPoints="1" noAdjustHandles="1" noChangeArrowheads="1" noChangeShapeType="1" noTextEdit="1"/>
+          </p:cNvSpPr>
+          <p:nvPr>
+            <p:extLst>
+              <p:ext uri="{386F3935-93C4-4BCD-93E2-E3B085C9AB24}">
+                <p16:designElem xmlns:p16="http://schemas.microsoft.com/office/powerpoint/2015/main" val="1"/>
+              </p:ext>
+            </p:extLst>
+          </p:nvPr>
+        </p:nvSpPr>
+        <p:spPr>
+          <a:xfrm rot="10800000" flipH="1">
+            <a:off x="8128857" y="0"/>
+            <a:ext cx="4063143" cy="1576412"/>
+          </a:xfrm>
+          <a:prstGeom prst="rect">
+            <a:avLst/>
+          </a:prstGeom>
+          <a:gradFill>
+            <a:gsLst>
+              <a:gs pos="19000">
+                <a:schemeClr val="accent1">
+                  <a:lumMod val="50000"/>
+                  <a:alpha val="68000"/>
+                </a:schemeClr>
+              </a:gs>
+              <a:gs pos="100000">
+                <a:schemeClr val="accent1">
+                  <a:alpha val="79000"/>
+                </a:schemeClr>
+              </a:gs>
+            </a:gsLst>
+            <a:lin ang="19200000" scaled="0"/>
+          </a:gradFill>
+          <a:ln>
+            <a:noFill/>
+          </a:ln>
+        </p:spPr>
+        <p:style>
+          <a:lnRef idx="2">
+            <a:schemeClr val="accent1">
+              <a:shade val="50000"/>
+            </a:schemeClr>
+          </a:lnRef>
+          <a:fillRef idx="1">
+            <a:schemeClr val="accent1"/>
+          </a:fillRef>
+          <a:effectRef idx="0">
+            <a:schemeClr val="accent1"/>
+          </a:effectRef>
+          <a:fontRef idx="minor">
+            <a:schemeClr val="lt1"/>
+          </a:fontRef>
+        </p:style>
+        <p:txBody>
+          <a:bodyPr rtlCol="0" anchor="ctr"/>
+          <a:lstStyle/>
+          <a:p>
+            <a:pPr algn="ctr"/>
+            <a:endParaRPr lang="en-US"/>
+          </a:p>
+        </p:txBody>
+      </p:sp>
+      <p:sp>
+        <p:nvSpPr>
+          <p:cNvPr id="15" name="Rectangle 14">
+            <a:extLst>
+              <a:ext uri="{FF2B5EF4-FFF2-40B4-BE49-F238E27FC236}">
+                <a16:creationId xmlns:a16="http://schemas.microsoft.com/office/drawing/2014/main" id="{063BBA22-50EA-4C4D-BE05-F1CE4E63AA56}"/>
+              </a:ext>
+              <a:ext uri="{C183D7F6-B498-43B3-948B-1728B52AA6E4}">
+                <adec:decorative xmlns:adec="http://schemas.microsoft.com/office/drawing/2017/decorative" val="1"/>
+              </a:ext>
+            </a:extLst>
+          </p:cNvPr>
+          <p:cNvSpPr>
+            <a:spLocks noGrp="1" noRot="1" noChangeAspect="1" noMove="1" noResize="1" noEditPoints="1" noAdjustHandles="1" noChangeArrowheads="1" noChangeShapeType="1" noTextEdit="1"/>
+          </p:cNvSpPr>
+          <p:nvPr>
+            <p:extLst>
+              <p:ext uri="{386F3935-93C4-4BCD-93E2-E3B085C9AB24}">
+                <p16:designElem xmlns:p16="http://schemas.microsoft.com/office/powerpoint/2015/main" val="1"/>
+              </p:ext>
+            </p:extLst>
+          </p:nvPr>
+        </p:nvSpPr>
+        <p:spPr>
+          <a:xfrm rot="5400000">
+            <a:off x="5307777" y="-5307778"/>
+            <a:ext cx="1576446" cy="12192002"/>
+          </a:xfrm>
+          <a:prstGeom prst="rect">
+            <a:avLst/>
+          </a:prstGeom>
+          <a:gradFill>
+            <a:gsLst>
+              <a:gs pos="23000">
+                <a:schemeClr val="accent1">
+                  <a:alpha val="0"/>
+                </a:schemeClr>
+              </a:gs>
+              <a:gs pos="99000">
+                <a:srgbClr val="000000">
+                  <a:alpha val="74000"/>
+                </a:srgbClr>
+              </a:gs>
+            </a:gsLst>
+            <a:lin ang="20400000" scaled="0"/>
+          </a:gradFill>
+          <a:ln>
+            <a:noFill/>
+          </a:ln>
+        </p:spPr>
+        <p:style>
+          <a:lnRef idx="2">
+            <a:schemeClr val="accent1">
+              <a:shade val="50000"/>
+            </a:schemeClr>
+          </a:lnRef>
+          <a:fillRef idx="1">
+            <a:schemeClr val="accent1"/>
+          </a:fillRef>
+          <a:effectRef idx="0">
+            <a:schemeClr val="accent1"/>
+          </a:effectRef>
+          <a:fontRef idx="minor">
+            <a:schemeClr val="lt1"/>
+          </a:fontRef>
+        </p:style>
+        <p:txBody>
+          <a:bodyPr rtlCol="0" anchor="ctr"/>
+          <a:lstStyle/>
+          <a:p>
+            <a:pPr algn="ctr"/>
+            <a:endParaRPr lang="en-US" dirty="0"/>
+          </a:p>
+        </p:txBody>
+      </p:sp>
+      <p:sp>
+        <p:nvSpPr>
+          <p:cNvPr id="2" name="Title 1">
+            <a:extLst>
+              <a:ext uri="{FF2B5EF4-FFF2-40B4-BE49-F238E27FC236}">
+                <a16:creationId xmlns:a16="http://schemas.microsoft.com/office/drawing/2014/main" id="{AAAF05D4-C676-563B-919A-F919150C86A6}"/>
+              </a:ext>
+            </a:extLst>
+          </p:cNvPr>
+          <p:cNvSpPr>
+            <a:spLocks noGrp="1"/>
+          </p:cNvSpPr>
+          <p:nvPr>
+            <p:ph type="title"/>
+          </p:nvPr>
+        </p:nvSpPr>
+        <p:spPr>
+          <a:xfrm>
+            <a:off x="1371597" y="348865"/>
+            <a:ext cx="10044023" cy="877729"/>
+          </a:xfrm>
+        </p:spPr>
+        <p:txBody>
+          <a:bodyPr anchor="ctr">
+            <a:normAutofit/>
+          </a:bodyPr>
+          <a:lstStyle/>
+          <a:p>
+            <a:r>
+              <a:rPr lang="en-US" sz="4000">
+                <a:solidFill>
+                  <a:srgbClr val="FFFFFF"/>
+                </a:solidFill>
+              </a:rPr>
+              <a:t>Real world usage</a:t>
+            </a:r>
+          </a:p>
+        </p:txBody>
+      </p:sp>
+      <p:graphicFrame>
+        <p:nvGraphicFramePr>
+          <p:cNvPr id="5" name="Content Placeholder 2">
+            <a:extLst>
+              <a:ext uri="{FF2B5EF4-FFF2-40B4-BE49-F238E27FC236}">
+                <a16:creationId xmlns:a16="http://schemas.microsoft.com/office/drawing/2014/main" id="{FA6461F5-9001-F6DC-62CA-DBB50A269A89}"/>
+              </a:ext>
+            </a:extLst>
+          </p:cNvPr>
+          <p:cNvGraphicFramePr>
+            <a:graphicFrameLocks noGrp="1"/>
+          </p:cNvGraphicFramePr>
+          <p:nvPr>
+            <p:ph idx="1"/>
+            <p:extLst>
+              <p:ext uri="{D42A27DB-BD31-4B8C-83A1-F6EECF244321}">
+                <p14:modId xmlns:p14="http://schemas.microsoft.com/office/powerpoint/2010/main" val="2691273916"/>
+              </p:ext>
+            </p:extLst>
+          </p:nvPr>
+        </p:nvGraphicFramePr>
+        <p:xfrm>
+          <a:off x="644056" y="2112579"/>
+          <a:ext cx="10927829" cy="4192805"/>
+        </p:xfrm>
+        <a:graphic>
+          <a:graphicData uri="http://schemas.openxmlformats.org/drawingml/2006/diagram">
+            <dgm:relIds xmlns:dgm="http://schemas.openxmlformats.org/drawingml/2006/diagram" xmlns:r="http://schemas.openxmlformats.org/officeDocument/2006/relationships" r:dm="rId2" r:lo="rId3" r:qs="rId4" r:cs="rId5"/>
+          </a:graphicData>
+        </a:graphic>
+      </p:graphicFrame>
+    </p:spTree>
+    <p:extLst>
+      <p:ext uri="{BB962C8B-B14F-4D97-AF65-F5344CB8AC3E}">
+        <p14:creationId xmlns:p14="http://schemas.microsoft.com/office/powerpoint/2010/main" val="2983979703"/>
+      </p:ext>
+    </p:extLst>
+  </p:cSld>
+  <p:clrMapOvr>
+    <a:masterClrMapping/>
+  </p:clrMapOvr>
+</p:sld>
+</file>
+
+<file path=ppt/slides/slide6.xml><?xml version="1.0" encoding="utf-8"?>
+<p:sld xmlns:a="http://schemas.openxmlformats.org/drawingml/2006/main" xmlns:r="http://schemas.openxmlformats.org/officeDocument/2006/relationships" xmlns:p="http://schemas.openxmlformats.org/presentationml/2006/main">
+  <p:cSld>
+    <p:spTree>
+      <p:nvGrpSpPr>
+        <p:cNvPr id="1" name=""/>
+        <p:cNvGrpSpPr/>
+        <p:nvPr/>
+      </p:nvGrpSpPr>
+      <p:grpSpPr>
+        <a:xfrm>
+          <a:off x="0" y="0"/>
+          <a:ext cx="0" cy="0"/>
+          <a:chOff x="0" y="0"/>
+          <a:chExt cx="0" cy="0"/>
+        </a:xfrm>
+      </p:grpSpPr>
       <p:sp>
         <p:nvSpPr>
           <p:cNvPr id="2" name="Title 1">
@@ -8825,7 +13929,17 @@
           <a:bodyPr/>
           <a:lstStyle/>
           <a:p>
-            <a:endParaRPr lang="en-US"/>
+            <a:pPr marL="514350" indent="-514350">
+              <a:buFont typeface="+mj-lt"/>
+              <a:buAutoNum type="arabicPeriod"/>
+            </a:pPr>
+            <a:r>
+              <a:rPr lang="en-US" dirty="0"/>
+              <a:t>Sort the edges</a:t>
+            </a:r>
+          </a:p>
+          <a:p>
+            <a:endParaRPr lang="en-US" dirty="0"/>
           </a:p>
         </p:txBody>
       </p:sp>
@@ -8833,6 +13947,392 @@
     <p:extLst>
       <p:ext uri="{BB962C8B-B14F-4D97-AF65-F5344CB8AC3E}">
         <p14:creationId xmlns:p14="http://schemas.microsoft.com/office/powerpoint/2010/main" val="4251488544"/>
+      </p:ext>
+    </p:extLst>
+  </p:cSld>
+  <p:clrMapOvr>
+    <a:masterClrMapping/>
+  </p:clrMapOvr>
+</p:sld>
+</file>
+
+<file path=ppt/slides/slide7.xml><?xml version="1.0" encoding="utf-8"?>
+<p:sld xmlns:a="http://schemas.openxmlformats.org/drawingml/2006/main" xmlns:r="http://schemas.openxmlformats.org/officeDocument/2006/relationships" xmlns:p="http://schemas.openxmlformats.org/presentationml/2006/main">
+  <p:cSld>
+    <p:spTree>
+      <p:nvGrpSpPr>
+        <p:cNvPr id="1" name="">
+          <a:extLst>
+            <a:ext uri="{FF2B5EF4-FFF2-40B4-BE49-F238E27FC236}">
+              <a16:creationId xmlns:a16="http://schemas.microsoft.com/office/drawing/2014/main" id="{DC03CAB3-EC47-195E-1AA3-AE5AD028AFAF}"/>
+            </a:ext>
+          </a:extLst>
+        </p:cNvPr>
+        <p:cNvGrpSpPr/>
+        <p:nvPr/>
+      </p:nvGrpSpPr>
+      <p:grpSpPr>
+        <a:xfrm>
+          <a:off x="0" y="0"/>
+          <a:ext cx="0" cy="0"/>
+          <a:chOff x="0" y="0"/>
+          <a:chExt cx="0" cy="0"/>
+        </a:xfrm>
+      </p:grpSpPr>
+      <p:sp>
+        <p:nvSpPr>
+          <p:cNvPr id="2" name="Title 1">
+            <a:extLst>
+              <a:ext uri="{FF2B5EF4-FFF2-40B4-BE49-F238E27FC236}">
+                <a16:creationId xmlns:a16="http://schemas.microsoft.com/office/drawing/2014/main" id="{CBC78D2E-55CC-3770-55D2-15B44D092919}"/>
+              </a:ext>
+            </a:extLst>
+          </p:cNvPr>
+          <p:cNvSpPr>
+            <a:spLocks noGrp="1"/>
+          </p:cNvSpPr>
+          <p:nvPr>
+            <p:ph type="title"/>
+          </p:nvPr>
+        </p:nvSpPr>
+        <p:spPr/>
+        <p:txBody>
+          <a:bodyPr/>
+          <a:lstStyle/>
+          <a:p>
+            <a:r>
+              <a:rPr lang="en-US"/>
+              <a:t>Kruskal’s algorithm</a:t>
+            </a:r>
+          </a:p>
+        </p:txBody>
+      </p:sp>
+      <p:sp>
+        <p:nvSpPr>
+          <p:cNvPr id="3" name="Content Placeholder 2">
+            <a:extLst>
+              <a:ext uri="{FF2B5EF4-FFF2-40B4-BE49-F238E27FC236}">
+                <a16:creationId xmlns:a16="http://schemas.microsoft.com/office/drawing/2014/main" id="{62740357-05F0-1535-8062-A1AA4604C830}"/>
+              </a:ext>
+            </a:extLst>
+          </p:cNvPr>
+          <p:cNvSpPr>
+            <a:spLocks noGrp="1"/>
+          </p:cNvSpPr>
+          <p:nvPr>
+            <p:ph idx="1"/>
+          </p:nvPr>
+        </p:nvSpPr>
+        <p:spPr/>
+        <p:txBody>
+          <a:bodyPr/>
+          <a:lstStyle/>
+          <a:p>
+            <a:pPr marL="514350" indent="-514350">
+              <a:buFont typeface="+mj-lt"/>
+              <a:buAutoNum type="arabicPeriod"/>
+            </a:pPr>
+            <a:r>
+              <a:rPr lang="en-US" dirty="0"/>
+              <a:t>Sort the edges</a:t>
+            </a:r>
+          </a:p>
+          <a:p>
+            <a:pPr marL="514350" indent="-514350">
+              <a:buFont typeface="+mj-lt"/>
+              <a:buAutoNum type="arabicPeriod"/>
+            </a:pPr>
+            <a:r>
+              <a:rPr lang="en-US" dirty="0"/>
+              <a:t>Start with the cheapest</a:t>
+            </a:r>
+          </a:p>
+          <a:p>
+            <a:endParaRPr lang="en-US" dirty="0"/>
+          </a:p>
+        </p:txBody>
+      </p:sp>
+    </p:spTree>
+    <p:extLst>
+      <p:ext uri="{BB962C8B-B14F-4D97-AF65-F5344CB8AC3E}">
+        <p14:creationId xmlns:p14="http://schemas.microsoft.com/office/powerpoint/2010/main" val="2317825852"/>
+      </p:ext>
+    </p:extLst>
+  </p:cSld>
+  <p:clrMapOvr>
+    <a:masterClrMapping/>
+  </p:clrMapOvr>
+</p:sld>
+</file>
+
+<file path=ppt/slides/slide8.xml><?xml version="1.0" encoding="utf-8"?>
+<p:sld xmlns:a="http://schemas.openxmlformats.org/drawingml/2006/main" xmlns:r="http://schemas.openxmlformats.org/officeDocument/2006/relationships" xmlns:p="http://schemas.openxmlformats.org/presentationml/2006/main">
+  <p:cSld>
+    <p:spTree>
+      <p:nvGrpSpPr>
+        <p:cNvPr id="1" name="">
+          <a:extLst>
+            <a:ext uri="{FF2B5EF4-FFF2-40B4-BE49-F238E27FC236}">
+              <a16:creationId xmlns:a16="http://schemas.microsoft.com/office/drawing/2014/main" id="{7ECCB0E9-5CD4-F186-7B18-9C817FF3B263}"/>
+            </a:ext>
+          </a:extLst>
+        </p:cNvPr>
+        <p:cNvGrpSpPr/>
+        <p:nvPr/>
+      </p:nvGrpSpPr>
+      <p:grpSpPr>
+        <a:xfrm>
+          <a:off x="0" y="0"/>
+          <a:ext cx="0" cy="0"/>
+          <a:chOff x="0" y="0"/>
+          <a:chExt cx="0" cy="0"/>
+        </a:xfrm>
+      </p:grpSpPr>
+      <p:sp>
+        <p:nvSpPr>
+          <p:cNvPr id="2" name="Title 1">
+            <a:extLst>
+              <a:ext uri="{FF2B5EF4-FFF2-40B4-BE49-F238E27FC236}">
+                <a16:creationId xmlns:a16="http://schemas.microsoft.com/office/drawing/2014/main" id="{605A21CA-9B37-4BCD-5DE5-E54E6274C30B}"/>
+              </a:ext>
+            </a:extLst>
+          </p:cNvPr>
+          <p:cNvSpPr>
+            <a:spLocks noGrp="1"/>
+          </p:cNvSpPr>
+          <p:nvPr>
+            <p:ph type="title"/>
+          </p:nvPr>
+        </p:nvSpPr>
+        <p:spPr/>
+        <p:txBody>
+          <a:bodyPr/>
+          <a:lstStyle/>
+          <a:p>
+            <a:r>
+              <a:rPr lang="en-US"/>
+              <a:t>Kruskal’s algorithm</a:t>
+            </a:r>
+          </a:p>
+        </p:txBody>
+      </p:sp>
+      <p:sp>
+        <p:nvSpPr>
+          <p:cNvPr id="3" name="Content Placeholder 2">
+            <a:extLst>
+              <a:ext uri="{FF2B5EF4-FFF2-40B4-BE49-F238E27FC236}">
+                <a16:creationId xmlns:a16="http://schemas.microsoft.com/office/drawing/2014/main" id="{32B1517A-6769-2550-EC77-1E9907073EBD}"/>
+              </a:ext>
+            </a:extLst>
+          </p:cNvPr>
+          <p:cNvSpPr>
+            <a:spLocks noGrp="1"/>
+          </p:cNvSpPr>
+          <p:nvPr>
+            <p:ph idx="1"/>
+          </p:nvPr>
+        </p:nvSpPr>
+        <p:spPr/>
+        <p:txBody>
+          <a:bodyPr/>
+          <a:lstStyle/>
+          <a:p>
+            <a:pPr marL="514350" indent="-514350">
+              <a:buFont typeface="+mj-lt"/>
+              <a:buAutoNum type="arabicPeriod"/>
+            </a:pPr>
+            <a:r>
+              <a:rPr lang="en-US" dirty="0"/>
+              <a:t>Sort the edges</a:t>
+            </a:r>
+          </a:p>
+          <a:p>
+            <a:pPr marL="514350" indent="-514350">
+              <a:buFont typeface="+mj-lt"/>
+              <a:buAutoNum type="arabicPeriod"/>
+            </a:pPr>
+            <a:r>
+              <a:rPr lang="en-US" dirty="0"/>
+              <a:t>Start with the cheapest</a:t>
+            </a:r>
+          </a:p>
+          <a:p>
+            <a:pPr marL="514350" indent="-514350">
+              <a:buFont typeface="+mj-lt"/>
+              <a:buAutoNum type="arabicPeriod"/>
+            </a:pPr>
+            <a:r>
+              <a:rPr lang="en-US" dirty="0"/>
+              <a:t>Keep building disjoint sets until they become one single set</a:t>
+            </a:r>
+          </a:p>
+          <a:p>
+            <a:endParaRPr lang="en-US" dirty="0"/>
+          </a:p>
+        </p:txBody>
+      </p:sp>
+    </p:spTree>
+    <p:extLst>
+      <p:ext uri="{BB962C8B-B14F-4D97-AF65-F5344CB8AC3E}">
+        <p14:creationId xmlns:p14="http://schemas.microsoft.com/office/powerpoint/2010/main" val="2106939796"/>
+      </p:ext>
+    </p:extLst>
+  </p:cSld>
+  <p:clrMapOvr>
+    <a:masterClrMapping/>
+  </p:clrMapOvr>
+</p:sld>
+</file>
+
+<file path=ppt/slides/slide9.xml><?xml version="1.0" encoding="utf-8"?>
+<p:sld xmlns:a="http://schemas.openxmlformats.org/drawingml/2006/main" xmlns:r="http://schemas.openxmlformats.org/officeDocument/2006/relationships" xmlns:p="http://schemas.openxmlformats.org/presentationml/2006/main">
+  <p:cSld>
+    <p:spTree>
+      <p:nvGrpSpPr>
+        <p:cNvPr id="1" name=""/>
+        <p:cNvGrpSpPr/>
+        <p:nvPr/>
+      </p:nvGrpSpPr>
+      <p:grpSpPr>
+        <a:xfrm>
+          <a:off x="0" y="0"/>
+          <a:ext cx="0" cy="0"/>
+          <a:chOff x="0" y="0"/>
+          <a:chExt cx="0" cy="0"/>
+        </a:xfrm>
+      </p:grpSpPr>
+      <p:pic>
+        <p:nvPicPr>
+          <p:cNvPr id="5" name="Content Placeholder 4" descr="A screenshot of a computer&#10;&#10;AI-generated content may be incorrect.">
+            <a:extLst>
+              <a:ext uri="{FF2B5EF4-FFF2-40B4-BE49-F238E27FC236}">
+                <a16:creationId xmlns:a16="http://schemas.microsoft.com/office/drawing/2014/main" id="{5FE42D37-254E-E008-262F-C962F043012D}"/>
+              </a:ext>
+            </a:extLst>
+          </p:cNvPr>
+          <p:cNvPicPr>
+            <a:picLocks noGrp="1" noChangeAspect="1"/>
+          </p:cNvPicPr>
+          <p:nvPr>
+            <p:ph idx="1"/>
+          </p:nvPr>
+        </p:nvPicPr>
+        <p:blipFill>
+          <a:blip r:embed="rId2">
+            <a:extLst>
+              <a:ext uri="{28A0092B-C50C-407E-A947-70E740481C1C}">
+                <a14:useLocalDpi xmlns:a14="http://schemas.microsoft.com/office/drawing/2010/main" val="0"/>
+              </a:ext>
+            </a:extLst>
+          </a:blip>
+          <a:stretch>
+            <a:fillRect/>
+          </a:stretch>
+        </p:blipFill>
+        <p:spPr>
+          <a:xfrm>
+            <a:off x="808132" y="569862"/>
+            <a:ext cx="10575735" cy="6064757"/>
+          </a:xfrm>
+        </p:spPr>
+      </p:pic>
+      <p:sp>
+        <p:nvSpPr>
+          <p:cNvPr id="9" name="TextBox 8">
+            <a:extLst>
+              <a:ext uri="{FF2B5EF4-FFF2-40B4-BE49-F238E27FC236}">
+                <a16:creationId xmlns:a16="http://schemas.microsoft.com/office/drawing/2014/main" id="{3BC321C8-72AB-55C0-74A6-29C6BD88AEF4}"/>
+              </a:ext>
+            </a:extLst>
+          </p:cNvPr>
+          <p:cNvSpPr txBox="1"/>
+          <p:nvPr/>
+        </p:nvSpPr>
+        <p:spPr>
+          <a:xfrm>
+            <a:off x="3531034" y="170110"/>
+            <a:ext cx="5129930" cy="646331"/>
+          </a:xfrm>
+          <a:prstGeom prst="rect">
+            <a:avLst/>
+          </a:prstGeom>
+          <a:noFill/>
+        </p:spPr>
+        <p:txBody>
+          <a:bodyPr wrap="none" rtlCol="0">
+            <a:spAutoFit/>
+          </a:bodyPr>
+          <a:lstStyle/>
+          <a:p>
+            <a:r>
+              <a:rPr lang="en-US" dirty="0">
+                <a:hlinkClick r:id="rId3"/>
+              </a:rPr>
+              <a:t>https://www.youtube.com/watch?v=JZBQLXgSGfs</a:t>
+            </a:r>
+            <a:endParaRPr lang="en-US" dirty="0"/>
+          </a:p>
+          <a:p>
+            <a:endParaRPr lang="en-US" dirty="0"/>
+          </a:p>
+        </p:txBody>
+      </p:sp>
+      <p:sp>
+        <p:nvSpPr>
+          <p:cNvPr id="10" name="Rectangle 9">
+            <a:extLst>
+              <a:ext uri="{FF2B5EF4-FFF2-40B4-BE49-F238E27FC236}">
+                <a16:creationId xmlns:a16="http://schemas.microsoft.com/office/drawing/2014/main" id="{A013550F-0B23-7074-DA2B-CBA8276257AB}"/>
+              </a:ext>
+            </a:extLst>
+          </p:cNvPr>
+          <p:cNvSpPr/>
+          <p:nvPr/>
+        </p:nvSpPr>
+        <p:spPr>
+          <a:xfrm>
+            <a:off x="6637867" y="569862"/>
+            <a:ext cx="2472267" cy="386871"/>
+          </a:xfrm>
+          <a:prstGeom prst="rect">
+            <a:avLst/>
+          </a:prstGeom>
+          <a:solidFill>
+            <a:schemeClr val="tx1"/>
+          </a:solidFill>
+          <a:ln>
+            <a:noFill/>
+          </a:ln>
+        </p:spPr>
+        <p:style>
+          <a:lnRef idx="2">
+            <a:schemeClr val="accent1">
+              <a:shade val="15000"/>
+            </a:schemeClr>
+          </a:lnRef>
+          <a:fillRef idx="1">
+            <a:schemeClr val="accent1"/>
+          </a:fillRef>
+          <a:effectRef idx="0">
+            <a:schemeClr val="accent1"/>
+          </a:effectRef>
+          <a:fontRef idx="minor">
+            <a:schemeClr val="lt1"/>
+          </a:fontRef>
+        </p:style>
+        <p:txBody>
+          <a:bodyPr rtlCol="0" anchor="ctr"/>
+          <a:lstStyle/>
+          <a:p>
+            <a:pPr algn="ctr"/>
+            <a:endParaRPr lang="en-US"/>
+          </a:p>
+        </p:txBody>
+      </p:sp>
+    </p:spTree>
+    <p:extLst>
+      <p:ext uri="{BB962C8B-B14F-4D97-AF65-F5344CB8AC3E}">
+        <p14:creationId xmlns:p14="http://schemas.microsoft.com/office/powerpoint/2010/main" val="2518017650"/>
       </p:ext>
     </p:extLst>
   </p:cSld>

--- a/MyOwnPresentations/pptx/Min_Span_Tree_Shortest_Path_X.pptx
+++ b/MyOwnPresentations/pptx/Min_Span_Tree_Shortest_Path_X.pptx
@@ -23,7 +23,21 @@
     <p:sldId id="272" r:id="rId17"/>
     <p:sldId id="273" r:id="rId18"/>
     <p:sldId id="274" r:id="rId19"/>
-    <p:sldId id="265" r:id="rId20"/>
+    <p:sldId id="275" r:id="rId20"/>
+    <p:sldId id="276" r:id="rId21"/>
+    <p:sldId id="277" r:id="rId22"/>
+    <p:sldId id="278" r:id="rId23"/>
+    <p:sldId id="279" r:id="rId24"/>
+    <p:sldId id="280" r:id="rId25"/>
+    <p:sldId id="281" r:id="rId26"/>
+    <p:sldId id="282" r:id="rId27"/>
+    <p:sldId id="283" r:id="rId28"/>
+    <p:sldId id="284" r:id="rId29"/>
+    <p:sldId id="286" r:id="rId30"/>
+    <p:sldId id="289" r:id="rId31"/>
+    <p:sldId id="288" r:id="rId32"/>
+    <p:sldId id="290" r:id="rId33"/>
+    <p:sldId id="291" r:id="rId34"/>
   </p:sldIdLst>
   <p:sldSz cx="12192000" cy="6858000"/>
   <p:notesSz cx="6858000" cy="9144000"/>
@@ -1059,6 +1073,788 @@
 </dgm:colorsDef>
 </file>
 
+<file path=ppt/diagrams/colors2.xml><?xml version="1.0" encoding="utf-8"?>
+<dgm:colorsDef xmlns:dgm="http://schemas.openxmlformats.org/drawingml/2006/diagram" xmlns:a="http://schemas.openxmlformats.org/drawingml/2006/main" uniqueId="urn:microsoft.com/office/officeart/2005/8/colors/colorful2">
+  <dgm:title val=""/>
+  <dgm:desc val=""/>
+  <dgm:catLst>
+    <dgm:cat type="colorful" pri="10200"/>
+  </dgm:catLst>
+  <dgm:styleLbl name="node0">
+    <dgm:fillClrLst meth="repeat">
+      <a:schemeClr val="accent1"/>
+    </dgm:fillClrLst>
+    <dgm:linClrLst meth="repeat">
+      <a:schemeClr val="lt1"/>
+    </dgm:linClrLst>
+    <dgm:effectClrLst/>
+    <dgm:txLinClrLst/>
+    <dgm:txFillClrLst/>
+    <dgm:txEffectClrLst/>
+  </dgm:styleLbl>
+  <dgm:styleLbl name="node1">
+    <dgm:fillClrLst>
+      <a:schemeClr val="accent2"/>
+      <a:schemeClr val="accent3"/>
+    </dgm:fillClrLst>
+    <dgm:linClrLst meth="repeat">
+      <a:schemeClr val="lt1"/>
+    </dgm:linClrLst>
+    <dgm:effectClrLst/>
+    <dgm:txLinClrLst/>
+    <dgm:txFillClrLst/>
+    <dgm:txEffectClrLst/>
+  </dgm:styleLbl>
+  <dgm:styleLbl name="alignNode1">
+    <dgm:fillClrLst>
+      <a:schemeClr val="accent2"/>
+      <a:schemeClr val="accent3"/>
+    </dgm:fillClrLst>
+    <dgm:linClrLst>
+      <a:schemeClr val="accent2"/>
+      <a:schemeClr val="accent3"/>
+    </dgm:linClrLst>
+    <dgm:effectClrLst/>
+    <dgm:txLinClrLst/>
+    <dgm:txFillClrLst/>
+    <dgm:txEffectClrLst/>
+  </dgm:styleLbl>
+  <dgm:styleLbl name="lnNode1">
+    <dgm:fillClrLst>
+      <a:schemeClr val="accent2"/>
+      <a:schemeClr val="accent3"/>
+    </dgm:fillClrLst>
+    <dgm:linClrLst meth="repeat">
+      <a:schemeClr val="lt1"/>
+    </dgm:linClrLst>
+    <dgm:effectClrLst/>
+    <dgm:txLinClrLst/>
+    <dgm:txFillClrLst/>
+    <dgm:txEffectClrLst/>
+  </dgm:styleLbl>
+  <dgm:styleLbl name="vennNode1">
+    <dgm:fillClrLst>
+      <a:schemeClr val="accent2">
+        <a:alpha val="50000"/>
+      </a:schemeClr>
+      <a:schemeClr val="accent3">
+        <a:alpha val="50000"/>
+      </a:schemeClr>
+    </dgm:fillClrLst>
+    <dgm:linClrLst meth="repeat">
+      <a:schemeClr val="lt1"/>
+    </dgm:linClrLst>
+    <dgm:effectClrLst/>
+    <dgm:txLinClrLst/>
+    <dgm:txFillClrLst/>
+    <dgm:txEffectClrLst/>
+  </dgm:styleLbl>
+  <dgm:styleLbl name="node2">
+    <dgm:fillClrLst>
+      <a:schemeClr val="accent3"/>
+    </dgm:fillClrLst>
+    <dgm:linClrLst meth="repeat">
+      <a:schemeClr val="lt1"/>
+    </dgm:linClrLst>
+    <dgm:effectClrLst/>
+    <dgm:txLinClrLst/>
+    <dgm:txFillClrLst/>
+    <dgm:txEffectClrLst/>
+  </dgm:styleLbl>
+  <dgm:styleLbl name="node3">
+    <dgm:fillClrLst>
+      <a:schemeClr val="accent4"/>
+    </dgm:fillClrLst>
+    <dgm:linClrLst meth="repeat">
+      <a:schemeClr val="lt1"/>
+    </dgm:linClrLst>
+    <dgm:effectClrLst/>
+    <dgm:txLinClrLst/>
+    <dgm:txFillClrLst/>
+    <dgm:txEffectClrLst/>
+  </dgm:styleLbl>
+  <dgm:styleLbl name="node4">
+    <dgm:fillClrLst>
+      <a:schemeClr val="accent5"/>
+    </dgm:fillClrLst>
+    <dgm:linClrLst meth="repeat">
+      <a:schemeClr val="lt1"/>
+    </dgm:linClrLst>
+    <dgm:effectClrLst/>
+    <dgm:txLinClrLst/>
+    <dgm:txFillClrLst/>
+    <dgm:txEffectClrLst/>
+  </dgm:styleLbl>
+  <dgm:styleLbl name="fgImgPlace1">
+    <dgm:fillClrLst>
+      <a:schemeClr val="accent2">
+        <a:tint val="50000"/>
+      </a:schemeClr>
+      <a:schemeClr val="accent3">
+        <a:tint val="50000"/>
+      </a:schemeClr>
+    </dgm:fillClrLst>
+    <dgm:linClrLst meth="repeat">
+      <a:schemeClr val="lt1"/>
+    </dgm:linClrLst>
+    <dgm:effectClrLst/>
+    <dgm:txLinClrLst/>
+    <dgm:txFillClrLst meth="repeat">
+      <a:schemeClr val="lt1"/>
+    </dgm:txFillClrLst>
+    <dgm:txEffectClrLst/>
+  </dgm:styleLbl>
+  <dgm:styleLbl name="alignImgPlace1">
+    <dgm:fillClrLst>
+      <a:schemeClr val="accent2">
+        <a:tint val="50000"/>
+      </a:schemeClr>
+      <a:schemeClr val="accent3">
+        <a:tint val="20000"/>
+      </a:schemeClr>
+    </dgm:fillClrLst>
+    <dgm:linClrLst meth="repeat">
+      <a:schemeClr val="lt1"/>
+    </dgm:linClrLst>
+    <dgm:effectClrLst/>
+    <dgm:txLinClrLst/>
+    <dgm:txFillClrLst meth="repeat">
+      <a:schemeClr val="lt1"/>
+    </dgm:txFillClrLst>
+    <dgm:txEffectClrLst/>
+  </dgm:styleLbl>
+  <dgm:styleLbl name="bgImgPlace1">
+    <dgm:fillClrLst>
+      <a:schemeClr val="accent2">
+        <a:tint val="50000"/>
+      </a:schemeClr>
+      <a:schemeClr val="accent3">
+        <a:tint val="20000"/>
+      </a:schemeClr>
+    </dgm:fillClrLst>
+    <dgm:linClrLst meth="repeat">
+      <a:schemeClr val="lt1"/>
+    </dgm:linClrLst>
+    <dgm:effectClrLst/>
+    <dgm:txLinClrLst/>
+    <dgm:txFillClrLst meth="repeat">
+      <a:schemeClr val="lt1"/>
+    </dgm:txFillClrLst>
+    <dgm:txEffectClrLst/>
+  </dgm:styleLbl>
+  <dgm:styleLbl name="sibTrans2D1">
+    <dgm:fillClrLst>
+      <a:schemeClr val="accent2"/>
+      <a:schemeClr val="accent3"/>
+    </dgm:fillClrLst>
+    <dgm:linClrLst meth="repeat">
+      <a:schemeClr val="lt1"/>
+    </dgm:linClrLst>
+    <dgm:effectClrLst/>
+    <dgm:txLinClrLst/>
+    <dgm:txFillClrLst/>
+    <dgm:txEffectClrLst/>
+  </dgm:styleLbl>
+  <dgm:styleLbl name="fgSibTrans2D1">
+    <dgm:fillClrLst>
+      <a:schemeClr val="accent2"/>
+      <a:schemeClr val="accent3"/>
+    </dgm:fillClrLst>
+    <dgm:linClrLst meth="repeat">
+      <a:schemeClr val="lt1"/>
+    </dgm:linClrLst>
+    <dgm:effectClrLst/>
+    <dgm:txLinClrLst/>
+    <dgm:txFillClrLst meth="repeat">
+      <a:schemeClr val="lt1"/>
+    </dgm:txFillClrLst>
+    <dgm:txEffectClrLst/>
+  </dgm:styleLbl>
+  <dgm:styleLbl name="bgSibTrans2D1">
+    <dgm:fillClrLst>
+      <a:schemeClr val="accent2"/>
+      <a:schemeClr val="accent3"/>
+    </dgm:fillClrLst>
+    <dgm:linClrLst meth="repeat">
+      <a:schemeClr val="lt1"/>
+    </dgm:linClrLst>
+    <dgm:effectClrLst/>
+    <dgm:txLinClrLst/>
+    <dgm:txFillClrLst meth="repeat">
+      <a:schemeClr val="lt1"/>
+    </dgm:txFillClrLst>
+    <dgm:txEffectClrLst/>
+  </dgm:styleLbl>
+  <dgm:styleLbl name="sibTrans1D1">
+    <dgm:fillClrLst/>
+    <dgm:linClrLst>
+      <a:schemeClr val="accent2"/>
+      <a:schemeClr val="accent3"/>
+    </dgm:linClrLst>
+    <dgm:effectClrLst/>
+    <dgm:txLinClrLst/>
+    <dgm:txFillClrLst meth="repeat">
+      <a:schemeClr val="tx1"/>
+    </dgm:txFillClrLst>
+    <dgm:txEffectClrLst/>
+  </dgm:styleLbl>
+  <dgm:styleLbl name="callout">
+    <dgm:fillClrLst meth="repeat">
+      <a:schemeClr val="accent2"/>
+    </dgm:fillClrLst>
+    <dgm:linClrLst meth="repeat">
+      <a:schemeClr val="accent2">
+        <a:tint val="50000"/>
+      </a:schemeClr>
+    </dgm:linClrLst>
+    <dgm:effectClrLst/>
+    <dgm:txLinClrLst/>
+    <dgm:txFillClrLst meth="repeat">
+      <a:schemeClr val="tx1"/>
+    </dgm:txFillClrLst>
+    <dgm:txEffectClrLst/>
+  </dgm:styleLbl>
+  <dgm:styleLbl name="asst0">
+    <dgm:fillClrLst meth="repeat">
+      <a:schemeClr val="accent2"/>
+    </dgm:fillClrLst>
+    <dgm:linClrLst meth="repeat">
+      <a:schemeClr val="lt1">
+        <a:shade val="80000"/>
+      </a:schemeClr>
+    </dgm:linClrLst>
+    <dgm:effectClrLst/>
+    <dgm:txLinClrLst/>
+    <dgm:txFillClrLst/>
+    <dgm:txEffectClrLst/>
+  </dgm:styleLbl>
+  <dgm:styleLbl name="asst1">
+    <dgm:fillClrLst meth="repeat">
+      <a:schemeClr val="accent3"/>
+    </dgm:fillClrLst>
+    <dgm:linClrLst meth="repeat">
+      <a:schemeClr val="lt1">
+        <a:shade val="80000"/>
+      </a:schemeClr>
+    </dgm:linClrLst>
+    <dgm:effectClrLst/>
+    <dgm:txLinClrLst/>
+    <dgm:txFillClrLst/>
+    <dgm:txEffectClrLst/>
+  </dgm:styleLbl>
+  <dgm:styleLbl name="asst2">
+    <dgm:fillClrLst>
+      <a:schemeClr val="accent4"/>
+    </dgm:fillClrLst>
+    <dgm:linClrLst meth="repeat">
+      <a:schemeClr val="lt1"/>
+    </dgm:linClrLst>
+    <dgm:effectClrLst/>
+    <dgm:txLinClrLst/>
+    <dgm:txFillClrLst/>
+    <dgm:txEffectClrLst/>
+  </dgm:styleLbl>
+  <dgm:styleLbl name="asst3">
+    <dgm:fillClrLst>
+      <a:schemeClr val="accent5"/>
+    </dgm:fillClrLst>
+    <dgm:linClrLst meth="repeat">
+      <a:schemeClr val="lt1"/>
+    </dgm:linClrLst>
+    <dgm:effectClrLst/>
+    <dgm:txLinClrLst/>
+    <dgm:txFillClrLst/>
+    <dgm:txEffectClrLst/>
+  </dgm:styleLbl>
+  <dgm:styleLbl name="asst4">
+    <dgm:fillClrLst>
+      <a:schemeClr val="accent6"/>
+    </dgm:fillClrLst>
+    <dgm:linClrLst meth="repeat">
+      <a:schemeClr val="lt1"/>
+    </dgm:linClrLst>
+    <dgm:effectClrLst/>
+    <dgm:txLinClrLst/>
+    <dgm:txFillClrLst/>
+    <dgm:txEffectClrLst/>
+  </dgm:styleLbl>
+  <dgm:styleLbl name="parChTrans2D1">
+    <dgm:fillClrLst meth="repeat">
+      <a:schemeClr val="accent2"/>
+    </dgm:fillClrLst>
+    <dgm:linClrLst meth="repeat">
+      <a:schemeClr val="lt1"/>
+    </dgm:linClrLst>
+    <dgm:effectClrLst/>
+    <dgm:txLinClrLst/>
+    <dgm:txFillClrLst meth="repeat">
+      <a:schemeClr val="lt1"/>
+    </dgm:txFillClrLst>
+    <dgm:txEffectClrLst/>
+  </dgm:styleLbl>
+  <dgm:styleLbl name="parChTrans2D2">
+    <dgm:fillClrLst meth="repeat">
+      <a:schemeClr val="accent3"/>
+    </dgm:fillClrLst>
+    <dgm:linClrLst meth="repeat">
+      <a:schemeClr val="lt1"/>
+    </dgm:linClrLst>
+    <dgm:effectClrLst/>
+    <dgm:txLinClrLst/>
+    <dgm:txFillClrLst/>
+    <dgm:txEffectClrLst/>
+  </dgm:styleLbl>
+  <dgm:styleLbl name="parChTrans2D3">
+    <dgm:fillClrLst meth="repeat">
+      <a:schemeClr val="accent4"/>
+    </dgm:fillClrLst>
+    <dgm:linClrLst meth="repeat">
+      <a:schemeClr val="lt1"/>
+    </dgm:linClrLst>
+    <dgm:effectClrLst/>
+    <dgm:txLinClrLst/>
+    <dgm:txFillClrLst/>
+    <dgm:txEffectClrLst/>
+  </dgm:styleLbl>
+  <dgm:styleLbl name="parChTrans2D4">
+    <dgm:fillClrLst meth="repeat">
+      <a:schemeClr val="accent5"/>
+    </dgm:fillClrLst>
+    <dgm:linClrLst meth="repeat">
+      <a:schemeClr val="lt1"/>
+    </dgm:linClrLst>
+    <dgm:effectClrLst/>
+    <dgm:txLinClrLst/>
+    <dgm:txFillClrLst meth="repeat">
+      <a:schemeClr val="lt1"/>
+    </dgm:txFillClrLst>
+    <dgm:txEffectClrLst/>
+  </dgm:styleLbl>
+  <dgm:styleLbl name="parChTrans1D1">
+    <dgm:fillClrLst meth="repeat">
+      <a:schemeClr val="accent2"/>
+    </dgm:fillClrLst>
+    <dgm:linClrLst meth="repeat">
+      <a:schemeClr val="accent2"/>
+    </dgm:linClrLst>
+    <dgm:effectClrLst/>
+    <dgm:txLinClrLst/>
+    <dgm:txFillClrLst meth="repeat">
+      <a:schemeClr val="tx1"/>
+    </dgm:txFillClrLst>
+    <dgm:txEffectClrLst/>
+  </dgm:styleLbl>
+  <dgm:styleLbl name="parChTrans1D2">
+    <dgm:fillClrLst meth="repeat">
+      <a:schemeClr val="accent2">
+        <a:tint val="90000"/>
+      </a:schemeClr>
+    </dgm:fillClrLst>
+    <dgm:linClrLst meth="repeat">
+      <a:schemeClr val="accent3"/>
+    </dgm:linClrLst>
+    <dgm:effectClrLst/>
+    <dgm:txLinClrLst/>
+    <dgm:txFillClrLst meth="repeat">
+      <a:schemeClr val="tx1"/>
+    </dgm:txFillClrLst>
+    <dgm:txEffectClrLst/>
+  </dgm:styleLbl>
+  <dgm:styleLbl name="parChTrans1D3">
+    <dgm:fillClrLst meth="repeat">
+      <a:schemeClr val="accent2">
+        <a:tint val="70000"/>
+      </a:schemeClr>
+    </dgm:fillClrLst>
+    <dgm:linClrLst meth="repeat">
+      <a:schemeClr val="accent4"/>
+    </dgm:linClrLst>
+    <dgm:effectClrLst/>
+    <dgm:txLinClrLst/>
+    <dgm:txFillClrLst meth="repeat">
+      <a:schemeClr val="tx1"/>
+    </dgm:txFillClrLst>
+    <dgm:txEffectClrLst/>
+  </dgm:styleLbl>
+  <dgm:styleLbl name="parChTrans1D4">
+    <dgm:fillClrLst meth="repeat">
+      <a:schemeClr val="accent2">
+        <a:tint val="50000"/>
+      </a:schemeClr>
+    </dgm:fillClrLst>
+    <dgm:linClrLst meth="repeat">
+      <a:schemeClr val="accent5"/>
+    </dgm:linClrLst>
+    <dgm:effectClrLst/>
+    <dgm:txLinClrLst/>
+    <dgm:txFillClrLst meth="repeat">
+      <a:schemeClr val="tx1"/>
+    </dgm:txFillClrLst>
+    <dgm:txEffectClrLst/>
+  </dgm:styleLbl>
+  <dgm:styleLbl name="fgAcc1">
+    <dgm:fillClrLst meth="repeat">
+      <a:schemeClr val="lt1">
+        <a:alpha val="90000"/>
+      </a:schemeClr>
+    </dgm:fillClrLst>
+    <dgm:linClrLst>
+      <a:schemeClr val="accent2"/>
+      <a:schemeClr val="accent3"/>
+    </dgm:linClrLst>
+    <dgm:effectClrLst/>
+    <dgm:txLinClrLst/>
+    <dgm:txFillClrLst meth="repeat">
+      <a:schemeClr val="dk1"/>
+    </dgm:txFillClrLst>
+    <dgm:txEffectClrLst/>
+  </dgm:styleLbl>
+  <dgm:styleLbl name="conFgAcc1">
+    <dgm:fillClrLst meth="repeat">
+      <a:schemeClr val="lt1">
+        <a:alpha val="90000"/>
+      </a:schemeClr>
+    </dgm:fillClrLst>
+    <dgm:linClrLst>
+      <a:schemeClr val="accent2"/>
+      <a:schemeClr val="accent3"/>
+    </dgm:linClrLst>
+    <dgm:effectClrLst/>
+    <dgm:txLinClrLst/>
+    <dgm:txFillClrLst meth="repeat">
+      <a:schemeClr val="dk1"/>
+    </dgm:txFillClrLst>
+    <dgm:txEffectClrLst/>
+  </dgm:styleLbl>
+  <dgm:styleLbl name="alignAcc1">
+    <dgm:fillClrLst meth="repeat">
+      <a:schemeClr val="lt1">
+        <a:alpha val="90000"/>
+      </a:schemeClr>
+    </dgm:fillClrLst>
+    <dgm:linClrLst>
+      <a:schemeClr val="accent2"/>
+      <a:schemeClr val="accent3"/>
+    </dgm:linClrLst>
+    <dgm:effectClrLst/>
+    <dgm:txLinClrLst/>
+    <dgm:txFillClrLst meth="repeat">
+      <a:schemeClr val="dk1"/>
+    </dgm:txFillClrLst>
+    <dgm:txEffectClrLst/>
+  </dgm:styleLbl>
+  <dgm:styleLbl name="trAlignAcc1">
+    <dgm:fillClrLst meth="repeat">
+      <a:schemeClr val="lt1">
+        <a:alpha val="40000"/>
+      </a:schemeClr>
+    </dgm:fillClrLst>
+    <dgm:linClrLst meth="repeat">
+      <a:schemeClr val="accent2"/>
+    </dgm:linClrLst>
+    <dgm:effectClrLst/>
+    <dgm:txLinClrLst/>
+    <dgm:txFillClrLst meth="repeat">
+      <a:schemeClr val="dk1"/>
+    </dgm:txFillClrLst>
+    <dgm:txEffectClrLst/>
+  </dgm:styleLbl>
+  <dgm:styleLbl name="bgAcc1">
+    <dgm:fillClrLst meth="repeat">
+      <a:schemeClr val="lt1">
+        <a:alpha val="90000"/>
+      </a:schemeClr>
+    </dgm:fillClrLst>
+    <dgm:linClrLst>
+      <a:schemeClr val="accent2"/>
+      <a:schemeClr val="accent3"/>
+    </dgm:linClrLst>
+    <dgm:effectClrLst/>
+    <dgm:txLinClrLst/>
+    <dgm:txFillClrLst meth="repeat">
+      <a:schemeClr val="dk1"/>
+    </dgm:txFillClrLst>
+    <dgm:txEffectClrLst/>
+  </dgm:styleLbl>
+  <dgm:styleLbl name="solidFgAcc1">
+    <dgm:fillClrLst meth="repeat">
+      <a:schemeClr val="lt1"/>
+    </dgm:fillClrLst>
+    <dgm:linClrLst>
+      <a:schemeClr val="accent2"/>
+      <a:schemeClr val="accent3"/>
+    </dgm:linClrLst>
+    <dgm:effectClrLst/>
+    <dgm:txLinClrLst/>
+    <dgm:txFillClrLst meth="repeat">
+      <a:schemeClr val="dk1"/>
+    </dgm:txFillClrLst>
+    <dgm:txEffectClrLst/>
+  </dgm:styleLbl>
+  <dgm:styleLbl name="solidAlignAcc1">
+    <dgm:fillClrLst meth="repeat">
+      <a:schemeClr val="lt1"/>
+    </dgm:fillClrLst>
+    <dgm:linClrLst>
+      <a:schemeClr val="accent2"/>
+      <a:schemeClr val="accent3"/>
+    </dgm:linClrLst>
+    <dgm:effectClrLst/>
+    <dgm:txLinClrLst/>
+    <dgm:txFillClrLst meth="repeat">
+      <a:schemeClr val="dk1"/>
+    </dgm:txFillClrLst>
+    <dgm:txEffectClrLst/>
+  </dgm:styleLbl>
+  <dgm:styleLbl name="solidBgAcc1">
+    <dgm:fillClrLst meth="repeat">
+      <a:schemeClr val="lt1"/>
+    </dgm:fillClrLst>
+    <dgm:linClrLst>
+      <a:schemeClr val="accent2"/>
+      <a:schemeClr val="accent3"/>
+    </dgm:linClrLst>
+    <dgm:effectClrLst/>
+    <dgm:txLinClrLst/>
+    <dgm:txFillClrLst meth="repeat">
+      <a:schemeClr val="dk1"/>
+    </dgm:txFillClrLst>
+    <dgm:txEffectClrLst/>
+  </dgm:styleLbl>
+  <dgm:styleLbl name="fgAccFollowNode1">
+    <dgm:fillClrLst>
+      <a:schemeClr val="accent2">
+        <a:tint val="40000"/>
+        <a:alpha val="90000"/>
+      </a:schemeClr>
+      <a:schemeClr val="accent3">
+        <a:tint val="40000"/>
+        <a:alpha val="90000"/>
+      </a:schemeClr>
+    </dgm:fillClrLst>
+    <dgm:linClrLst>
+      <a:schemeClr val="accent2">
+        <a:tint val="40000"/>
+        <a:alpha val="90000"/>
+      </a:schemeClr>
+      <a:schemeClr val="accent3">
+        <a:tint val="40000"/>
+        <a:alpha val="90000"/>
+      </a:schemeClr>
+    </dgm:linClrLst>
+    <dgm:effectClrLst/>
+    <dgm:txLinClrLst/>
+    <dgm:txFillClrLst meth="repeat">
+      <a:schemeClr val="dk1"/>
+    </dgm:txFillClrLst>
+    <dgm:txEffectClrLst/>
+  </dgm:styleLbl>
+  <dgm:styleLbl name="alignAccFollowNode1">
+    <dgm:fillClrLst>
+      <a:schemeClr val="accent2">
+        <a:tint val="40000"/>
+        <a:alpha val="90000"/>
+      </a:schemeClr>
+      <a:schemeClr val="accent3">
+        <a:tint val="40000"/>
+        <a:alpha val="90000"/>
+      </a:schemeClr>
+    </dgm:fillClrLst>
+    <dgm:linClrLst>
+      <a:schemeClr val="accent2">
+        <a:tint val="40000"/>
+        <a:alpha val="90000"/>
+      </a:schemeClr>
+      <a:schemeClr val="accent3">
+        <a:tint val="40000"/>
+        <a:alpha val="90000"/>
+      </a:schemeClr>
+    </dgm:linClrLst>
+    <dgm:effectClrLst/>
+    <dgm:txLinClrLst/>
+    <dgm:txFillClrLst meth="repeat">
+      <a:schemeClr val="dk1"/>
+    </dgm:txFillClrLst>
+    <dgm:txEffectClrLst/>
+  </dgm:styleLbl>
+  <dgm:styleLbl name="bgAccFollowNode1">
+    <dgm:fillClrLst>
+      <a:schemeClr val="accent2">
+        <a:tint val="40000"/>
+        <a:alpha val="90000"/>
+      </a:schemeClr>
+      <a:schemeClr val="accent3">
+        <a:tint val="40000"/>
+        <a:alpha val="90000"/>
+      </a:schemeClr>
+    </dgm:fillClrLst>
+    <dgm:linClrLst>
+      <a:schemeClr val="accent2">
+        <a:tint val="40000"/>
+        <a:alpha val="90000"/>
+      </a:schemeClr>
+      <a:schemeClr val="accent3">
+        <a:tint val="40000"/>
+        <a:alpha val="90000"/>
+      </a:schemeClr>
+    </dgm:linClrLst>
+    <dgm:effectClrLst/>
+    <dgm:txLinClrLst/>
+    <dgm:txFillClrLst meth="repeat">
+      <a:schemeClr val="dk1"/>
+    </dgm:txFillClrLst>
+    <dgm:txEffectClrLst/>
+  </dgm:styleLbl>
+  <dgm:styleLbl name="fgAcc0">
+    <dgm:fillClrLst meth="repeat">
+      <a:schemeClr val="lt1">
+        <a:alpha val="90000"/>
+      </a:schemeClr>
+    </dgm:fillClrLst>
+    <dgm:linClrLst>
+      <a:schemeClr val="accent1"/>
+    </dgm:linClrLst>
+    <dgm:effectClrLst/>
+    <dgm:txLinClrLst/>
+    <dgm:txFillClrLst meth="repeat">
+      <a:schemeClr val="dk1"/>
+    </dgm:txFillClrLst>
+    <dgm:txEffectClrLst/>
+  </dgm:styleLbl>
+  <dgm:styleLbl name="fgAcc2">
+    <dgm:fillClrLst meth="repeat">
+      <a:schemeClr val="lt1">
+        <a:alpha val="90000"/>
+      </a:schemeClr>
+    </dgm:fillClrLst>
+    <dgm:linClrLst>
+      <a:schemeClr val="accent3"/>
+    </dgm:linClrLst>
+    <dgm:effectClrLst/>
+    <dgm:txLinClrLst/>
+    <dgm:txFillClrLst meth="repeat">
+      <a:schemeClr val="dk1"/>
+    </dgm:txFillClrLst>
+    <dgm:txEffectClrLst/>
+  </dgm:styleLbl>
+  <dgm:styleLbl name="fgAcc3">
+    <dgm:fillClrLst meth="repeat">
+      <a:schemeClr val="lt1">
+        <a:alpha val="90000"/>
+      </a:schemeClr>
+    </dgm:fillClrLst>
+    <dgm:linClrLst>
+      <a:schemeClr val="accent4"/>
+    </dgm:linClrLst>
+    <dgm:effectClrLst/>
+    <dgm:txLinClrLst/>
+    <dgm:txFillClrLst meth="repeat">
+      <a:schemeClr val="dk1"/>
+    </dgm:txFillClrLst>
+    <dgm:txEffectClrLst/>
+  </dgm:styleLbl>
+  <dgm:styleLbl name="fgAcc4">
+    <dgm:fillClrLst meth="repeat">
+      <a:schemeClr val="lt1">
+        <a:alpha val="90000"/>
+      </a:schemeClr>
+    </dgm:fillClrLst>
+    <dgm:linClrLst>
+      <a:schemeClr val="accent5"/>
+    </dgm:linClrLst>
+    <dgm:effectClrLst/>
+    <dgm:txLinClrLst/>
+    <dgm:txFillClrLst meth="repeat">
+      <a:schemeClr val="dk1"/>
+    </dgm:txFillClrLst>
+    <dgm:txEffectClrLst/>
+  </dgm:styleLbl>
+  <dgm:styleLbl name="bgShp">
+    <dgm:fillClrLst meth="repeat">
+      <a:schemeClr val="accent2">
+        <a:tint val="40000"/>
+      </a:schemeClr>
+    </dgm:fillClrLst>
+    <dgm:linClrLst meth="repeat">
+      <a:schemeClr val="dk1"/>
+    </dgm:linClrLst>
+    <dgm:effectClrLst/>
+    <dgm:txLinClrLst/>
+    <dgm:txFillClrLst meth="repeat">
+      <a:schemeClr val="dk1"/>
+    </dgm:txFillClrLst>
+    <dgm:txEffectClrLst/>
+  </dgm:styleLbl>
+  <dgm:styleLbl name="dkBgShp">
+    <dgm:fillClrLst meth="repeat">
+      <a:schemeClr val="accent2">
+        <a:shade val="90000"/>
+      </a:schemeClr>
+    </dgm:fillClrLst>
+    <dgm:linClrLst meth="repeat">
+      <a:schemeClr val="dk1"/>
+    </dgm:linClrLst>
+    <dgm:effectClrLst/>
+    <dgm:txLinClrLst/>
+    <dgm:txFillClrLst meth="repeat">
+      <a:schemeClr val="lt1"/>
+    </dgm:txFillClrLst>
+    <dgm:txEffectClrLst/>
+  </dgm:styleLbl>
+  <dgm:styleLbl name="trBgShp">
+    <dgm:fillClrLst meth="repeat">
+      <a:schemeClr val="accent2">
+        <a:tint val="50000"/>
+        <a:alpha val="40000"/>
+      </a:schemeClr>
+    </dgm:fillClrLst>
+    <dgm:linClrLst meth="repeat">
+      <a:schemeClr val="accent2"/>
+    </dgm:linClrLst>
+    <dgm:effectClrLst/>
+    <dgm:txLinClrLst/>
+    <dgm:txFillClrLst meth="repeat">
+      <a:schemeClr val="lt1"/>
+    </dgm:txFillClrLst>
+    <dgm:txEffectClrLst/>
+  </dgm:styleLbl>
+  <dgm:styleLbl name="fgShp">
+    <dgm:fillClrLst meth="repeat">
+      <a:schemeClr val="accent2">
+        <a:tint val="40000"/>
+      </a:schemeClr>
+    </dgm:fillClrLst>
+    <dgm:linClrLst meth="repeat">
+      <a:schemeClr val="lt1"/>
+    </dgm:linClrLst>
+    <dgm:effectClrLst/>
+    <dgm:txLinClrLst/>
+    <dgm:txFillClrLst meth="repeat">
+      <a:schemeClr val="dk1"/>
+    </dgm:txFillClrLst>
+    <dgm:txEffectClrLst/>
+  </dgm:styleLbl>
+  <dgm:styleLbl name="revTx">
+    <dgm:fillClrLst meth="repeat">
+      <a:schemeClr val="lt1">
+        <a:alpha val="0"/>
+      </a:schemeClr>
+    </dgm:fillClrLst>
+    <dgm:linClrLst meth="repeat">
+      <a:schemeClr val="dk1">
+        <a:alpha val="0"/>
+      </a:schemeClr>
+    </dgm:linClrLst>
+    <dgm:effectClrLst/>
+    <dgm:txLinClrLst/>
+    <dgm:txFillClrLst meth="repeat">
+      <a:schemeClr val="tx1"/>
+    </dgm:txFillClrLst>
+    <dgm:txEffectClrLst/>
+  </dgm:styleLbl>
+</dgm:colorsDef>
+</file>
+
 <file path=ppt/diagrams/data1.xml><?xml version="1.0" encoding="utf-8"?>
 <dgm:dataModel xmlns:dgm="http://schemas.openxmlformats.org/drawingml/2006/diagram" xmlns:a="http://schemas.openxmlformats.org/drawingml/2006/main">
   <dgm:ptLst>
@@ -1519,6 +2315,821 @@
 </dgm:dataModel>
 </file>
 
+<file path=ppt/diagrams/data2.xml><?xml version="1.0" encoding="utf-8"?>
+<dgm:dataModel xmlns:dgm="http://schemas.openxmlformats.org/drawingml/2006/diagram" xmlns:a="http://schemas.openxmlformats.org/drawingml/2006/main">
+  <dgm:ptLst>
+    <dgm:pt modelId="{764385C4-7DCB-4466-9084-55A1619F0A11}" type="doc">
+      <dgm:prSet loTypeId="urn:microsoft.com/office/officeart/2005/8/layout/list1" loCatId="list" qsTypeId="urn:microsoft.com/office/officeart/2005/8/quickstyle/simple4" qsCatId="simple" csTypeId="urn:microsoft.com/office/officeart/2005/8/colors/colorful2" csCatId="colorful" phldr="1"/>
+      <dgm:spPr/>
+      <dgm:t>
+        <a:bodyPr/>
+        <a:lstStyle/>
+        <a:p>
+          <a:endParaRPr lang="en-US"/>
+        </a:p>
+      </dgm:t>
+    </dgm:pt>
+    <dgm:pt modelId="{F79DF15A-5AAC-4109-8E17-AF500353EB84}">
+      <dgm:prSet/>
+      <dgm:spPr/>
+      <dgm:t>
+        <a:bodyPr/>
+        <a:lstStyle/>
+        <a:p>
+          <a:r>
+            <a:rPr lang="en-US" dirty="0"/>
+            <a:t>Prim’s algorithm</a:t>
+          </a:r>
+        </a:p>
+      </dgm:t>
+    </dgm:pt>
+    <dgm:pt modelId="{209F7A84-1648-45C9-856E-2DB18BC8690B}" type="parTrans" cxnId="{F133693D-60EA-4F75-87BC-FDAE67383A15}">
+      <dgm:prSet/>
+      <dgm:spPr/>
+      <dgm:t>
+        <a:bodyPr/>
+        <a:lstStyle/>
+        <a:p>
+          <a:endParaRPr lang="en-US"/>
+        </a:p>
+      </dgm:t>
+    </dgm:pt>
+    <dgm:pt modelId="{B737E800-1613-4589-9ACD-C1C86FF5764E}" type="sibTrans" cxnId="{F133693D-60EA-4F75-87BC-FDAE67383A15}">
+      <dgm:prSet/>
+      <dgm:spPr/>
+      <dgm:t>
+        <a:bodyPr/>
+        <a:lstStyle/>
+        <a:p>
+          <a:endParaRPr lang="en-US"/>
+        </a:p>
+      </dgm:t>
+    </dgm:pt>
+    <dgm:pt modelId="{7653745F-0722-4F95-BB23-950FCDB38DDE}">
+      <dgm:prSet custT="1"/>
+      <dgm:spPr/>
+      <dgm:t>
+        <a:bodyPr/>
+        <a:lstStyle/>
+        <a:p>
+          <a:r>
+            <a:rPr lang="en-US" sz="3200" b="1" dirty="0"/>
+            <a:t>Priority queue </a:t>
+          </a:r>
+          <a:r>
+            <a:rPr lang="en-US" sz="3200" dirty="0"/>
+            <a:t>data structure</a:t>
+          </a:r>
+        </a:p>
+      </dgm:t>
+    </dgm:pt>
+    <dgm:pt modelId="{89C02F8D-C70E-45F4-B903-10123092F8D7}" type="parTrans" cxnId="{156ED257-2664-41EE-87F9-B5D98125EAA2}">
+      <dgm:prSet/>
+      <dgm:spPr/>
+      <dgm:t>
+        <a:bodyPr/>
+        <a:lstStyle/>
+        <a:p>
+          <a:endParaRPr lang="en-US"/>
+        </a:p>
+      </dgm:t>
+    </dgm:pt>
+    <dgm:pt modelId="{774950D5-F90D-4FEB-8808-CE6210C56062}" type="sibTrans" cxnId="{156ED257-2664-41EE-87F9-B5D98125EAA2}">
+      <dgm:prSet/>
+      <dgm:spPr/>
+      <dgm:t>
+        <a:bodyPr/>
+        <a:lstStyle/>
+        <a:p>
+          <a:endParaRPr lang="en-US"/>
+        </a:p>
+      </dgm:t>
+    </dgm:pt>
+    <mc:AlternateContent xmlns:mc="http://schemas.openxmlformats.org/markup-compatibility/2006">
+      <mc:Choice xmlns:a14="http://schemas.microsoft.com/office/drawing/2010/main" Requires="a14">
+        <dgm:pt modelId="{38409C4F-F91C-4935-90E8-EB934F0B1D42}">
+          <dgm:prSet custT="1"/>
+          <dgm:spPr/>
+          <dgm:t>
+            <a:bodyPr/>
+            <a:lstStyle/>
+            <a:p>
+              <a:r>
+                <a:rPr lang="en-US" sz="3200" dirty="0"/>
+                <a:t>Faster for </a:t>
+              </a:r>
+              <a:r>
+                <a:rPr lang="en-US" sz="3200" b="1" dirty="0"/>
+                <a:t>dense graphs (</a:t>
+              </a:r>
+              <a14:m>
+                <m:oMath xmlns:m="http://schemas.openxmlformats.org/officeDocument/2006/math">
+                  <m:r>
+                    <a:rPr lang="en-US" sz="3200" b="1" i="1" smtClean="0">
+                      <a:latin typeface="Cambria Math" panose="02040503050406030204" pitchFamily="18" charset="0"/>
+                    </a:rPr>
+                    <m:t>𝑬</m:t>
+                  </m:r>
+                  <m:r>
+                    <a:rPr lang="en-US" sz="3200" b="1" i="1" smtClean="0">
+                      <a:latin typeface="Cambria Math" panose="02040503050406030204" pitchFamily="18" charset="0"/>
+                      <a:ea typeface="Cambria Math" panose="02040503050406030204" pitchFamily="18" charset="0"/>
+                    </a:rPr>
+                    <m:t>≈</m:t>
+                  </m:r>
+                  <m:sSup>
+                    <m:sSupPr>
+                      <m:ctrlPr>
+                        <a:rPr lang="en-US" sz="3200" b="1" i="1" smtClean="0">
+                          <a:latin typeface="Cambria Math" panose="02040503050406030204" pitchFamily="18" charset="0"/>
+                          <a:ea typeface="Cambria Math" panose="02040503050406030204" pitchFamily="18" charset="0"/>
+                        </a:rPr>
+                      </m:ctrlPr>
+                    </m:sSupPr>
+                    <m:e>
+                      <m:r>
+                        <a:rPr lang="en-US" sz="3200" b="1" i="1" smtClean="0">
+                          <a:latin typeface="Cambria Math" panose="02040503050406030204" pitchFamily="18" charset="0"/>
+                          <a:ea typeface="Cambria Math" panose="02040503050406030204" pitchFamily="18" charset="0"/>
+                        </a:rPr>
+                        <m:t>𝑽</m:t>
+                      </m:r>
+                    </m:e>
+                    <m:sup>
+                      <m:r>
+                        <a:rPr lang="en-US" sz="3200" b="1" i="1" smtClean="0">
+                          <a:latin typeface="Cambria Math" panose="02040503050406030204" pitchFamily="18" charset="0"/>
+                          <a:ea typeface="Cambria Math" panose="02040503050406030204" pitchFamily="18" charset="0"/>
+                        </a:rPr>
+                        <m:t>𝟐</m:t>
+                      </m:r>
+                    </m:sup>
+                  </m:sSup>
+                </m:oMath>
+              </a14:m>
+              <a:r>
+                <a:rPr lang="en-US" sz="3200" b="1" dirty="0"/>
+                <a:t>)</a:t>
+              </a:r>
+            </a:p>
+          </dgm:t>
+        </dgm:pt>
+      </mc:Choice>
+      <mc:Fallback>
+        <dgm:pt modelId="{38409C4F-F91C-4935-90E8-EB934F0B1D42}">
+          <dgm:prSet custT="1"/>
+          <dgm:spPr/>
+          <dgm:t>
+            <a:bodyPr/>
+            <a:lstStyle/>
+            <a:p>
+              <a:r>
+                <a:rPr lang="en-US" sz="3200" dirty="0"/>
+                <a:t>Faster for </a:t>
+              </a:r>
+              <a:r>
+                <a:rPr lang="en-US" sz="3200" b="1" dirty="0"/>
+                <a:t>dense graphs (</a:t>
+              </a:r>
+              <a:r>
+                <a:rPr lang="en-US" sz="3200" b="1" i="0">
+                  <a:latin typeface="Cambria Math" panose="02040503050406030204" pitchFamily="18" charset="0"/>
+                </a:rPr>
+                <a:t>𝑬</a:t>
+              </a:r>
+              <a:r>
+                <a:rPr lang="en-US" sz="3200" b="1" i="0">
+                  <a:latin typeface="Cambria Math" panose="02040503050406030204" pitchFamily="18" charset="0"/>
+                  <a:ea typeface="Cambria Math" panose="02040503050406030204" pitchFamily="18" charset="0"/>
+                </a:rPr>
+                <a:t>≈𝑽^𝟐</a:t>
+              </a:r>
+              <a:r>
+                <a:rPr lang="en-US" sz="3200" b="1" dirty="0"/>
+                <a:t>)</a:t>
+              </a:r>
+            </a:p>
+          </dgm:t>
+        </dgm:pt>
+      </mc:Fallback>
+    </mc:AlternateContent>
+    <dgm:pt modelId="{63740E8B-922A-4600-88FE-9897D3BD7659}" type="parTrans" cxnId="{4582C525-1F64-4E9C-A946-E095F2696CD9}">
+      <dgm:prSet/>
+      <dgm:spPr/>
+      <dgm:t>
+        <a:bodyPr/>
+        <a:lstStyle/>
+        <a:p>
+          <a:endParaRPr lang="en-US"/>
+        </a:p>
+      </dgm:t>
+    </dgm:pt>
+    <dgm:pt modelId="{50DB3FB8-C156-423F-B96B-BA31A656B8E4}" type="sibTrans" cxnId="{4582C525-1F64-4E9C-A946-E095F2696CD9}">
+      <dgm:prSet/>
+      <dgm:spPr/>
+      <dgm:t>
+        <a:bodyPr/>
+        <a:lstStyle/>
+        <a:p>
+          <a:endParaRPr lang="en-US"/>
+        </a:p>
+      </dgm:t>
+    </dgm:pt>
+    <dgm:pt modelId="{85DC057B-C9CB-42E6-8309-8D7F57F02E82}">
+      <dgm:prSet/>
+      <dgm:spPr/>
+      <dgm:t>
+        <a:bodyPr/>
+        <a:lstStyle/>
+        <a:p>
+          <a:r>
+            <a:rPr lang="en-US" dirty="0"/>
+            <a:t>Kruskal’s algorithm</a:t>
+          </a:r>
+        </a:p>
+      </dgm:t>
+    </dgm:pt>
+    <dgm:pt modelId="{C491B2C7-23AD-4974-B294-B86041F4C6B2}" type="parTrans" cxnId="{1C081BFF-5DC3-4FE0-B605-72F93946AC6C}">
+      <dgm:prSet/>
+      <dgm:spPr/>
+      <dgm:t>
+        <a:bodyPr/>
+        <a:lstStyle/>
+        <a:p>
+          <a:endParaRPr lang="en-US"/>
+        </a:p>
+      </dgm:t>
+    </dgm:pt>
+    <dgm:pt modelId="{2E687EE5-0585-4F6E-A4B5-CDBF9FE70F23}" type="sibTrans" cxnId="{1C081BFF-5DC3-4FE0-B605-72F93946AC6C}">
+      <dgm:prSet/>
+      <dgm:spPr/>
+      <dgm:t>
+        <a:bodyPr/>
+        <a:lstStyle/>
+        <a:p>
+          <a:endParaRPr lang="en-US"/>
+        </a:p>
+      </dgm:t>
+    </dgm:pt>
+    <dgm:pt modelId="{D9875F65-79CC-405B-B4D2-C5F36D9DEFFF}">
+      <dgm:prSet custT="1"/>
+      <dgm:spPr/>
+      <dgm:t>
+        <a:bodyPr/>
+        <a:lstStyle/>
+        <a:p>
+          <a:r>
+            <a:rPr lang="en-US" sz="3200" b="1" dirty="0"/>
+            <a:t>Disjoint set </a:t>
+          </a:r>
+          <a:r>
+            <a:rPr lang="en-US" sz="3200" dirty="0"/>
+            <a:t>data structure</a:t>
+          </a:r>
+        </a:p>
+      </dgm:t>
+    </dgm:pt>
+    <dgm:pt modelId="{34DD0A60-ADF8-4ECD-B5FE-85155AA15016}" type="parTrans" cxnId="{8781CC3F-6CF3-4907-BE73-AAAFA5B45965}">
+      <dgm:prSet/>
+      <dgm:spPr/>
+      <dgm:t>
+        <a:bodyPr/>
+        <a:lstStyle/>
+        <a:p>
+          <a:endParaRPr lang="en-US"/>
+        </a:p>
+      </dgm:t>
+    </dgm:pt>
+    <dgm:pt modelId="{D5741691-D4EB-4F31-9FCB-6C7E93EC7158}" type="sibTrans" cxnId="{8781CC3F-6CF3-4907-BE73-AAAFA5B45965}">
+      <dgm:prSet/>
+      <dgm:spPr/>
+      <dgm:t>
+        <a:bodyPr/>
+        <a:lstStyle/>
+        <a:p>
+          <a:endParaRPr lang="en-US"/>
+        </a:p>
+      </dgm:t>
+    </dgm:pt>
+    <dgm:pt modelId="{70A5FACF-D043-46D2-B528-B21C2BEF872E}">
+      <dgm:prSet custT="1"/>
+      <dgm:spPr/>
+      <dgm:t>
+        <a:bodyPr/>
+        <a:lstStyle/>
+        <a:p>
+          <a:r>
+            <a:rPr lang="en-US" sz="3200" dirty="0"/>
+            <a:t>Faster </a:t>
+          </a:r>
+          <a:r>
+            <a:rPr lang="en-US" sz="3200" b="0" dirty="0"/>
+            <a:t>for</a:t>
+          </a:r>
+          <a:r>
+            <a:rPr lang="en-US" sz="3200" b="1" dirty="0"/>
+            <a:t> sparse graphs</a:t>
+          </a:r>
+        </a:p>
+      </dgm:t>
+    </dgm:pt>
+    <dgm:pt modelId="{1770FDEF-BA4A-40F4-8482-18F84D91C2B1}" type="parTrans" cxnId="{88872915-DFE3-4EF6-9148-2AF3EBF60DD5}">
+      <dgm:prSet/>
+      <dgm:spPr/>
+      <dgm:t>
+        <a:bodyPr/>
+        <a:lstStyle/>
+        <a:p>
+          <a:endParaRPr lang="en-US"/>
+        </a:p>
+      </dgm:t>
+    </dgm:pt>
+    <dgm:pt modelId="{A902CA57-4DBF-4AA6-B2D4-C0F5D1623FCF}" type="sibTrans" cxnId="{88872915-DFE3-4EF6-9148-2AF3EBF60DD5}">
+      <dgm:prSet/>
+      <dgm:spPr/>
+      <dgm:t>
+        <a:bodyPr/>
+        <a:lstStyle/>
+        <a:p>
+          <a:endParaRPr lang="en-US"/>
+        </a:p>
+      </dgm:t>
+    </dgm:pt>
+    <dgm:pt modelId="{71ABB878-495B-4A82-85CB-45E68EBA65B0}" type="pres">
+      <dgm:prSet presAssocID="{764385C4-7DCB-4466-9084-55A1619F0A11}" presName="linear" presStyleCnt="0">
+        <dgm:presLayoutVars>
+          <dgm:dir/>
+          <dgm:animLvl val="lvl"/>
+          <dgm:resizeHandles val="exact"/>
+        </dgm:presLayoutVars>
+      </dgm:prSet>
+      <dgm:spPr/>
+    </dgm:pt>
+    <dgm:pt modelId="{7361FB4F-5B04-47C4-8E30-35F5B7D39E3F}" type="pres">
+      <dgm:prSet presAssocID="{F79DF15A-5AAC-4109-8E17-AF500353EB84}" presName="parentLin" presStyleCnt="0"/>
+      <dgm:spPr/>
+    </dgm:pt>
+    <dgm:pt modelId="{CF71BE67-2F4D-4B9D-BD7F-0EB4B609B8E1}" type="pres">
+      <dgm:prSet presAssocID="{F79DF15A-5AAC-4109-8E17-AF500353EB84}" presName="parentLeftMargin" presStyleLbl="node1" presStyleIdx="0" presStyleCnt="2"/>
+      <dgm:spPr/>
+    </dgm:pt>
+    <dgm:pt modelId="{796B69CF-5244-413F-907A-192AA31A6DBC}" type="pres">
+      <dgm:prSet presAssocID="{F79DF15A-5AAC-4109-8E17-AF500353EB84}" presName="parentText" presStyleLbl="node1" presStyleIdx="0" presStyleCnt="2">
+        <dgm:presLayoutVars>
+          <dgm:chMax val="0"/>
+          <dgm:bulletEnabled val="1"/>
+        </dgm:presLayoutVars>
+      </dgm:prSet>
+      <dgm:spPr/>
+    </dgm:pt>
+    <dgm:pt modelId="{415DD675-3BC0-46B5-96AB-8BA3F473D198}" type="pres">
+      <dgm:prSet presAssocID="{F79DF15A-5AAC-4109-8E17-AF500353EB84}" presName="negativeSpace" presStyleCnt="0"/>
+      <dgm:spPr/>
+    </dgm:pt>
+    <dgm:pt modelId="{493E538C-1464-451C-A918-E4B2C82F1C53}" type="pres">
+      <dgm:prSet presAssocID="{F79DF15A-5AAC-4109-8E17-AF500353EB84}" presName="childText" presStyleLbl="conFgAcc1" presStyleIdx="0" presStyleCnt="2">
+        <dgm:presLayoutVars>
+          <dgm:bulletEnabled val="1"/>
+        </dgm:presLayoutVars>
+      </dgm:prSet>
+      <dgm:spPr/>
+    </dgm:pt>
+    <dgm:pt modelId="{D432E018-FF2C-446A-A35D-472270E82CE9}" type="pres">
+      <dgm:prSet presAssocID="{B737E800-1613-4589-9ACD-C1C86FF5764E}" presName="spaceBetweenRectangles" presStyleCnt="0"/>
+      <dgm:spPr/>
+    </dgm:pt>
+    <dgm:pt modelId="{C204C9B1-20CF-4A36-A122-A317FC56F8CB}" type="pres">
+      <dgm:prSet presAssocID="{85DC057B-C9CB-42E6-8309-8D7F57F02E82}" presName="parentLin" presStyleCnt="0"/>
+      <dgm:spPr/>
+    </dgm:pt>
+    <dgm:pt modelId="{EDFACC5F-157E-4449-8C39-38B82887EF93}" type="pres">
+      <dgm:prSet presAssocID="{85DC057B-C9CB-42E6-8309-8D7F57F02E82}" presName="parentLeftMargin" presStyleLbl="node1" presStyleIdx="0" presStyleCnt="2"/>
+      <dgm:spPr/>
+    </dgm:pt>
+    <dgm:pt modelId="{08D44FB7-BEF5-4125-AF41-115EE49B3BE8}" type="pres">
+      <dgm:prSet presAssocID="{85DC057B-C9CB-42E6-8309-8D7F57F02E82}" presName="parentText" presStyleLbl="node1" presStyleIdx="1" presStyleCnt="2">
+        <dgm:presLayoutVars>
+          <dgm:chMax val="0"/>
+          <dgm:bulletEnabled val="1"/>
+        </dgm:presLayoutVars>
+      </dgm:prSet>
+      <dgm:spPr/>
+    </dgm:pt>
+    <dgm:pt modelId="{3971C670-4783-45A6-A1C6-0B312A0BCEAA}" type="pres">
+      <dgm:prSet presAssocID="{85DC057B-C9CB-42E6-8309-8D7F57F02E82}" presName="negativeSpace" presStyleCnt="0"/>
+      <dgm:spPr/>
+    </dgm:pt>
+    <dgm:pt modelId="{22AC4078-0F3F-429E-8ECD-5F426AEAC6A7}" type="pres">
+      <dgm:prSet presAssocID="{85DC057B-C9CB-42E6-8309-8D7F57F02E82}" presName="childText" presStyleLbl="conFgAcc1" presStyleIdx="1" presStyleCnt="2">
+        <dgm:presLayoutVars>
+          <dgm:bulletEnabled val="1"/>
+        </dgm:presLayoutVars>
+      </dgm:prSet>
+      <dgm:spPr/>
+    </dgm:pt>
+  </dgm:ptLst>
+  <dgm:cxnLst>
+    <dgm:cxn modelId="{06491F0B-4BF0-4FFC-BA1E-F0F4CE765B9D}" type="presOf" srcId="{38409C4F-F91C-4935-90E8-EB934F0B1D42}" destId="{493E538C-1464-451C-A918-E4B2C82F1C53}" srcOrd="0" destOrd="1" presId="urn:microsoft.com/office/officeart/2005/8/layout/list1"/>
+    <dgm:cxn modelId="{88872915-DFE3-4EF6-9148-2AF3EBF60DD5}" srcId="{85DC057B-C9CB-42E6-8309-8D7F57F02E82}" destId="{70A5FACF-D043-46D2-B528-B21C2BEF872E}" srcOrd="1" destOrd="0" parTransId="{1770FDEF-BA4A-40F4-8482-18F84D91C2B1}" sibTransId="{A902CA57-4DBF-4AA6-B2D4-C0F5D1623FCF}"/>
+    <dgm:cxn modelId="{4582C525-1F64-4E9C-A946-E095F2696CD9}" srcId="{F79DF15A-5AAC-4109-8E17-AF500353EB84}" destId="{38409C4F-F91C-4935-90E8-EB934F0B1D42}" srcOrd="1" destOrd="0" parTransId="{63740E8B-922A-4600-88FE-9897D3BD7659}" sibTransId="{50DB3FB8-C156-423F-B96B-BA31A656B8E4}"/>
+    <dgm:cxn modelId="{F133693D-60EA-4F75-87BC-FDAE67383A15}" srcId="{764385C4-7DCB-4466-9084-55A1619F0A11}" destId="{F79DF15A-5AAC-4109-8E17-AF500353EB84}" srcOrd="0" destOrd="0" parTransId="{209F7A84-1648-45C9-856E-2DB18BC8690B}" sibTransId="{B737E800-1613-4589-9ACD-C1C86FF5764E}"/>
+    <dgm:cxn modelId="{8781CC3F-6CF3-4907-BE73-AAAFA5B45965}" srcId="{85DC057B-C9CB-42E6-8309-8D7F57F02E82}" destId="{D9875F65-79CC-405B-B4D2-C5F36D9DEFFF}" srcOrd="0" destOrd="0" parTransId="{34DD0A60-ADF8-4ECD-B5FE-85155AA15016}" sibTransId="{D5741691-D4EB-4F31-9FCB-6C7E93EC7158}"/>
+    <dgm:cxn modelId="{3B66605E-DAF0-4195-9745-68A60E288CF4}" type="presOf" srcId="{D9875F65-79CC-405B-B4D2-C5F36D9DEFFF}" destId="{22AC4078-0F3F-429E-8ECD-5F426AEAC6A7}" srcOrd="0" destOrd="0" presId="urn:microsoft.com/office/officeart/2005/8/layout/list1"/>
+    <dgm:cxn modelId="{7278486E-7946-4FF0-A3D0-6B5CD7481616}" type="presOf" srcId="{85DC057B-C9CB-42E6-8309-8D7F57F02E82}" destId="{EDFACC5F-157E-4449-8C39-38B82887EF93}" srcOrd="0" destOrd="0" presId="urn:microsoft.com/office/officeart/2005/8/layout/list1"/>
+    <dgm:cxn modelId="{69F04B54-14D6-4A81-81DE-1B8B91AD56C2}" type="presOf" srcId="{764385C4-7DCB-4466-9084-55A1619F0A11}" destId="{71ABB878-495B-4A82-85CB-45E68EBA65B0}" srcOrd="0" destOrd="0" presId="urn:microsoft.com/office/officeart/2005/8/layout/list1"/>
+    <dgm:cxn modelId="{156ED257-2664-41EE-87F9-B5D98125EAA2}" srcId="{F79DF15A-5AAC-4109-8E17-AF500353EB84}" destId="{7653745F-0722-4F95-BB23-950FCDB38DDE}" srcOrd="0" destOrd="0" parTransId="{89C02F8D-C70E-45F4-B903-10123092F8D7}" sibTransId="{774950D5-F90D-4FEB-8808-CE6210C56062}"/>
+    <dgm:cxn modelId="{7E2AD784-B240-4512-9C25-B0B0AF7C8E34}" type="presOf" srcId="{7653745F-0722-4F95-BB23-950FCDB38DDE}" destId="{493E538C-1464-451C-A918-E4B2C82F1C53}" srcOrd="0" destOrd="0" presId="urn:microsoft.com/office/officeart/2005/8/layout/list1"/>
+    <dgm:cxn modelId="{7ED168AB-4C0D-409E-94E9-32C43E1501DB}" type="presOf" srcId="{85DC057B-C9CB-42E6-8309-8D7F57F02E82}" destId="{08D44FB7-BEF5-4125-AF41-115EE49B3BE8}" srcOrd="1" destOrd="0" presId="urn:microsoft.com/office/officeart/2005/8/layout/list1"/>
+    <dgm:cxn modelId="{8DB26AAE-EAA7-4B60-B44E-BB2873C17E80}" type="presOf" srcId="{70A5FACF-D043-46D2-B528-B21C2BEF872E}" destId="{22AC4078-0F3F-429E-8ECD-5F426AEAC6A7}" srcOrd="0" destOrd="1" presId="urn:microsoft.com/office/officeart/2005/8/layout/list1"/>
+    <dgm:cxn modelId="{7679A8BE-7A8B-436C-826A-78D00CE426F7}" type="presOf" srcId="{F79DF15A-5AAC-4109-8E17-AF500353EB84}" destId="{796B69CF-5244-413F-907A-192AA31A6DBC}" srcOrd="1" destOrd="0" presId="urn:microsoft.com/office/officeart/2005/8/layout/list1"/>
+    <dgm:cxn modelId="{F1EEE9D8-9A5D-4E58-AA58-EE41338B8258}" type="presOf" srcId="{F79DF15A-5AAC-4109-8E17-AF500353EB84}" destId="{CF71BE67-2F4D-4B9D-BD7F-0EB4B609B8E1}" srcOrd="0" destOrd="0" presId="urn:microsoft.com/office/officeart/2005/8/layout/list1"/>
+    <dgm:cxn modelId="{1C081BFF-5DC3-4FE0-B605-72F93946AC6C}" srcId="{764385C4-7DCB-4466-9084-55A1619F0A11}" destId="{85DC057B-C9CB-42E6-8309-8D7F57F02E82}" srcOrd="1" destOrd="0" parTransId="{C491B2C7-23AD-4974-B294-B86041F4C6B2}" sibTransId="{2E687EE5-0585-4F6E-A4B5-CDBF9FE70F23}"/>
+    <dgm:cxn modelId="{C8F887C8-89AB-4A7D-A355-35F72CDD1C8C}" type="presParOf" srcId="{71ABB878-495B-4A82-85CB-45E68EBA65B0}" destId="{7361FB4F-5B04-47C4-8E30-35F5B7D39E3F}" srcOrd="0" destOrd="0" presId="urn:microsoft.com/office/officeart/2005/8/layout/list1"/>
+    <dgm:cxn modelId="{A0A422E8-711B-425E-8EFB-4BDC35A9A478}" type="presParOf" srcId="{7361FB4F-5B04-47C4-8E30-35F5B7D39E3F}" destId="{CF71BE67-2F4D-4B9D-BD7F-0EB4B609B8E1}" srcOrd="0" destOrd="0" presId="urn:microsoft.com/office/officeart/2005/8/layout/list1"/>
+    <dgm:cxn modelId="{CE9A46AD-3881-4C6B-AA21-039F87C8073D}" type="presParOf" srcId="{7361FB4F-5B04-47C4-8E30-35F5B7D39E3F}" destId="{796B69CF-5244-413F-907A-192AA31A6DBC}" srcOrd="1" destOrd="0" presId="urn:microsoft.com/office/officeart/2005/8/layout/list1"/>
+    <dgm:cxn modelId="{7B7D4E33-59F5-42A7-9207-B129679EF3D9}" type="presParOf" srcId="{71ABB878-495B-4A82-85CB-45E68EBA65B0}" destId="{415DD675-3BC0-46B5-96AB-8BA3F473D198}" srcOrd="1" destOrd="0" presId="urn:microsoft.com/office/officeart/2005/8/layout/list1"/>
+    <dgm:cxn modelId="{EB96E90D-1EE2-4C62-9983-94558836E4F2}" type="presParOf" srcId="{71ABB878-495B-4A82-85CB-45E68EBA65B0}" destId="{493E538C-1464-451C-A918-E4B2C82F1C53}" srcOrd="2" destOrd="0" presId="urn:microsoft.com/office/officeart/2005/8/layout/list1"/>
+    <dgm:cxn modelId="{047E583E-CF18-4099-9D4C-4642C5D2B86C}" type="presParOf" srcId="{71ABB878-495B-4A82-85CB-45E68EBA65B0}" destId="{D432E018-FF2C-446A-A35D-472270E82CE9}" srcOrd="3" destOrd="0" presId="urn:microsoft.com/office/officeart/2005/8/layout/list1"/>
+    <dgm:cxn modelId="{22B1ECD4-8353-4575-91AF-971A4A34A9B0}" type="presParOf" srcId="{71ABB878-495B-4A82-85CB-45E68EBA65B0}" destId="{C204C9B1-20CF-4A36-A122-A317FC56F8CB}" srcOrd="4" destOrd="0" presId="urn:microsoft.com/office/officeart/2005/8/layout/list1"/>
+    <dgm:cxn modelId="{18B2B5E6-5916-49C7-AFBE-8073E47B9667}" type="presParOf" srcId="{C204C9B1-20CF-4A36-A122-A317FC56F8CB}" destId="{EDFACC5F-157E-4449-8C39-38B82887EF93}" srcOrd="0" destOrd="0" presId="urn:microsoft.com/office/officeart/2005/8/layout/list1"/>
+    <dgm:cxn modelId="{80933E42-7689-4EFD-99F2-1E76BD665987}" type="presParOf" srcId="{C204C9B1-20CF-4A36-A122-A317FC56F8CB}" destId="{08D44FB7-BEF5-4125-AF41-115EE49B3BE8}" srcOrd="1" destOrd="0" presId="urn:microsoft.com/office/officeart/2005/8/layout/list1"/>
+    <dgm:cxn modelId="{A5DA2E3C-82FC-4CA9-8443-49A57A59A39C}" type="presParOf" srcId="{71ABB878-495B-4A82-85CB-45E68EBA65B0}" destId="{3971C670-4783-45A6-A1C6-0B312A0BCEAA}" srcOrd="5" destOrd="0" presId="urn:microsoft.com/office/officeart/2005/8/layout/list1"/>
+    <dgm:cxn modelId="{F91A952E-2F70-4731-A711-BDEBA98359C3}" type="presParOf" srcId="{71ABB878-495B-4A82-85CB-45E68EBA65B0}" destId="{22AC4078-0F3F-429E-8ECD-5F426AEAC6A7}" srcOrd="6" destOrd="0" presId="urn:microsoft.com/office/officeart/2005/8/layout/list1"/>
+  </dgm:cxnLst>
+  <dgm:bg/>
+  <dgm:whole/>
+  <dgm:extLst>
+    <a:ext uri="http://schemas.microsoft.com/office/drawing/2008/diagram">
+      <dsp:dataModelExt xmlns:dsp="http://schemas.microsoft.com/office/drawing/2008/diagram" relId="rId6" minVer="http://schemas.openxmlformats.org/drawingml/2006/diagram"/>
+    </a:ext>
+  </dgm:extLst>
+</dgm:dataModel>
+</file>
+
+<file path=ppt/diagrams/data3.xml><?xml version="1.0" encoding="utf-8"?>
+<dgm:dataModel xmlns:dgm="http://schemas.openxmlformats.org/drawingml/2006/diagram" xmlns:a="http://schemas.openxmlformats.org/drawingml/2006/main">
+  <dgm:ptLst>
+    <dgm:pt modelId="{764385C4-7DCB-4466-9084-55A1619F0A11}" type="doc">
+      <dgm:prSet loTypeId="urn:microsoft.com/office/officeart/2005/8/layout/list1" loCatId="list" qsTypeId="urn:microsoft.com/office/officeart/2005/8/quickstyle/simple4" qsCatId="simple" csTypeId="urn:microsoft.com/office/officeart/2005/8/colors/colorful2" csCatId="colorful" phldr="1"/>
+      <dgm:spPr/>
+      <dgm:t>
+        <a:bodyPr/>
+        <a:lstStyle/>
+        <a:p>
+          <a:endParaRPr lang="en-US"/>
+        </a:p>
+      </dgm:t>
+    </dgm:pt>
+    <dgm:pt modelId="{F79DF15A-5AAC-4109-8E17-AF500353EB84}">
+      <dgm:prSet/>
+      <dgm:spPr/>
+      <dgm:t>
+        <a:bodyPr/>
+        <a:lstStyle/>
+        <a:p>
+          <a:r>
+            <a:rPr lang="en-US" dirty="0"/>
+            <a:t>Prim’s algorithm</a:t>
+          </a:r>
+        </a:p>
+      </dgm:t>
+    </dgm:pt>
+    <dgm:pt modelId="{209F7A84-1648-45C9-856E-2DB18BC8690B}" type="parTrans" cxnId="{F133693D-60EA-4F75-87BC-FDAE67383A15}">
+      <dgm:prSet/>
+      <dgm:spPr/>
+      <dgm:t>
+        <a:bodyPr/>
+        <a:lstStyle/>
+        <a:p>
+          <a:endParaRPr lang="en-US"/>
+        </a:p>
+      </dgm:t>
+    </dgm:pt>
+    <dgm:pt modelId="{B737E800-1613-4589-9ACD-C1C86FF5764E}" type="sibTrans" cxnId="{F133693D-60EA-4F75-87BC-FDAE67383A15}">
+      <dgm:prSet/>
+      <dgm:spPr/>
+      <dgm:t>
+        <a:bodyPr/>
+        <a:lstStyle/>
+        <a:p>
+          <a:endParaRPr lang="en-US"/>
+        </a:p>
+      </dgm:t>
+    </dgm:pt>
+    <dgm:pt modelId="{7653745F-0722-4F95-BB23-950FCDB38DDE}">
+      <dgm:prSet custT="1"/>
+      <dgm:spPr>
+        <a:blipFill>
+          <a:blip xmlns:r="http://schemas.openxmlformats.org/officeDocument/2006/relationships" r:embed="rId1"/>
+          <a:stretch>
+            <a:fillRect/>
+          </a:stretch>
+        </a:blipFill>
+      </dgm:spPr>
+      <dgm:t>
+        <a:bodyPr/>
+        <a:lstStyle/>
+        <a:p>
+          <a:r>
+            <a:rPr lang="en-US">
+              <a:noFill/>
+            </a:rPr>
+            <a:t> </a:t>
+          </a:r>
+        </a:p>
+      </dgm:t>
+    </dgm:pt>
+    <dgm:pt modelId="{89C02F8D-C70E-45F4-B903-10123092F8D7}" type="parTrans" cxnId="{156ED257-2664-41EE-87F9-B5D98125EAA2}">
+      <dgm:prSet/>
+      <dgm:spPr/>
+      <dgm:t>
+        <a:bodyPr/>
+        <a:lstStyle/>
+        <a:p>
+          <a:endParaRPr lang="en-US"/>
+        </a:p>
+      </dgm:t>
+    </dgm:pt>
+    <dgm:pt modelId="{774950D5-F90D-4FEB-8808-CE6210C56062}" type="sibTrans" cxnId="{156ED257-2664-41EE-87F9-B5D98125EAA2}">
+      <dgm:prSet/>
+      <dgm:spPr/>
+      <dgm:t>
+        <a:bodyPr/>
+        <a:lstStyle/>
+        <a:p>
+          <a:endParaRPr lang="en-US"/>
+        </a:p>
+      </dgm:t>
+    </dgm:pt>
+    <dgm:pt modelId="{38409C4F-F91C-4935-90E8-EB934F0B1D42}">
+      <dgm:prSet custT="1"/>
+      <dgm:spPr/>
+      <dgm:t>
+        <a:bodyPr/>
+        <a:lstStyle/>
+        <a:p>
+          <a:r>
+            <a:rPr lang="en-US">
+              <a:noFill/>
+            </a:rPr>
+            <a:t> </a:t>
+          </a:r>
+        </a:p>
+      </dgm:t>
+    </dgm:pt>
+    <dgm:pt modelId="{63740E8B-922A-4600-88FE-9897D3BD7659}" type="parTrans" cxnId="{4582C525-1F64-4E9C-A946-E095F2696CD9}">
+      <dgm:prSet/>
+      <dgm:spPr/>
+      <dgm:t>
+        <a:bodyPr/>
+        <a:lstStyle/>
+        <a:p>
+          <a:endParaRPr lang="en-US"/>
+        </a:p>
+      </dgm:t>
+    </dgm:pt>
+    <dgm:pt modelId="{50DB3FB8-C156-423F-B96B-BA31A656B8E4}" type="sibTrans" cxnId="{4582C525-1F64-4E9C-A946-E095F2696CD9}">
+      <dgm:prSet/>
+      <dgm:spPr/>
+      <dgm:t>
+        <a:bodyPr/>
+        <a:lstStyle/>
+        <a:p>
+          <a:endParaRPr lang="en-US"/>
+        </a:p>
+      </dgm:t>
+    </dgm:pt>
+    <dgm:pt modelId="{85DC057B-C9CB-42E6-8309-8D7F57F02E82}">
+      <dgm:prSet/>
+      <dgm:spPr/>
+      <dgm:t>
+        <a:bodyPr/>
+        <a:lstStyle/>
+        <a:p>
+          <a:r>
+            <a:rPr lang="en-US" dirty="0"/>
+            <a:t>Kruskal’s algorithm</a:t>
+          </a:r>
+        </a:p>
+      </dgm:t>
+    </dgm:pt>
+    <dgm:pt modelId="{C491B2C7-23AD-4974-B294-B86041F4C6B2}" type="parTrans" cxnId="{1C081BFF-5DC3-4FE0-B605-72F93946AC6C}">
+      <dgm:prSet/>
+      <dgm:spPr/>
+      <dgm:t>
+        <a:bodyPr/>
+        <a:lstStyle/>
+        <a:p>
+          <a:endParaRPr lang="en-US"/>
+        </a:p>
+      </dgm:t>
+    </dgm:pt>
+    <dgm:pt modelId="{2E687EE5-0585-4F6E-A4B5-CDBF9FE70F23}" type="sibTrans" cxnId="{1C081BFF-5DC3-4FE0-B605-72F93946AC6C}">
+      <dgm:prSet/>
+      <dgm:spPr/>
+      <dgm:t>
+        <a:bodyPr/>
+        <a:lstStyle/>
+        <a:p>
+          <a:endParaRPr lang="en-US"/>
+        </a:p>
+      </dgm:t>
+    </dgm:pt>
+    <dgm:pt modelId="{D9875F65-79CC-405B-B4D2-C5F36D9DEFFF}">
+      <dgm:prSet custT="1"/>
+      <dgm:spPr/>
+      <dgm:t>
+        <a:bodyPr/>
+        <a:lstStyle/>
+        <a:p>
+          <a:r>
+            <a:rPr lang="en-US" sz="3200" b="1" dirty="0"/>
+            <a:t>Disjoint set </a:t>
+          </a:r>
+          <a:r>
+            <a:rPr lang="en-US" sz="3200" dirty="0"/>
+            <a:t>data structure</a:t>
+          </a:r>
+        </a:p>
+      </dgm:t>
+    </dgm:pt>
+    <dgm:pt modelId="{34DD0A60-ADF8-4ECD-B5FE-85155AA15016}" type="parTrans" cxnId="{8781CC3F-6CF3-4907-BE73-AAAFA5B45965}">
+      <dgm:prSet/>
+      <dgm:spPr/>
+      <dgm:t>
+        <a:bodyPr/>
+        <a:lstStyle/>
+        <a:p>
+          <a:endParaRPr lang="en-US"/>
+        </a:p>
+      </dgm:t>
+    </dgm:pt>
+    <dgm:pt modelId="{D5741691-D4EB-4F31-9FCB-6C7E93EC7158}" type="sibTrans" cxnId="{8781CC3F-6CF3-4907-BE73-AAAFA5B45965}">
+      <dgm:prSet/>
+      <dgm:spPr/>
+      <dgm:t>
+        <a:bodyPr/>
+        <a:lstStyle/>
+        <a:p>
+          <a:endParaRPr lang="en-US"/>
+        </a:p>
+      </dgm:t>
+    </dgm:pt>
+    <dgm:pt modelId="{70A5FACF-D043-46D2-B528-B21C2BEF872E}">
+      <dgm:prSet custT="1"/>
+      <dgm:spPr/>
+      <dgm:t>
+        <a:bodyPr/>
+        <a:lstStyle/>
+        <a:p>
+          <a:r>
+            <a:rPr lang="en-US" sz="3200" dirty="0"/>
+            <a:t>Faster </a:t>
+          </a:r>
+          <a:r>
+            <a:rPr lang="en-US" sz="3200" b="0" dirty="0"/>
+            <a:t>for</a:t>
+          </a:r>
+          <a:r>
+            <a:rPr lang="en-US" sz="3200" b="1" dirty="0"/>
+            <a:t> sparse graphs</a:t>
+          </a:r>
+        </a:p>
+      </dgm:t>
+    </dgm:pt>
+    <dgm:pt modelId="{1770FDEF-BA4A-40F4-8482-18F84D91C2B1}" type="parTrans" cxnId="{88872915-DFE3-4EF6-9148-2AF3EBF60DD5}">
+      <dgm:prSet/>
+      <dgm:spPr/>
+      <dgm:t>
+        <a:bodyPr/>
+        <a:lstStyle/>
+        <a:p>
+          <a:endParaRPr lang="en-US"/>
+        </a:p>
+      </dgm:t>
+    </dgm:pt>
+    <dgm:pt modelId="{A902CA57-4DBF-4AA6-B2D4-C0F5D1623FCF}" type="sibTrans" cxnId="{88872915-DFE3-4EF6-9148-2AF3EBF60DD5}">
+      <dgm:prSet/>
+      <dgm:spPr/>
+      <dgm:t>
+        <a:bodyPr/>
+        <a:lstStyle/>
+        <a:p>
+          <a:endParaRPr lang="en-US"/>
+        </a:p>
+      </dgm:t>
+    </dgm:pt>
+    <dgm:pt modelId="{71ABB878-495B-4A82-85CB-45E68EBA65B0}" type="pres">
+      <dgm:prSet presAssocID="{764385C4-7DCB-4466-9084-55A1619F0A11}" presName="linear" presStyleCnt="0">
+        <dgm:presLayoutVars>
+          <dgm:dir/>
+          <dgm:animLvl val="lvl"/>
+          <dgm:resizeHandles val="exact"/>
+        </dgm:presLayoutVars>
+      </dgm:prSet>
+      <dgm:spPr/>
+    </dgm:pt>
+    <dgm:pt modelId="{7361FB4F-5B04-47C4-8E30-35F5B7D39E3F}" type="pres">
+      <dgm:prSet presAssocID="{F79DF15A-5AAC-4109-8E17-AF500353EB84}" presName="parentLin" presStyleCnt="0"/>
+      <dgm:spPr/>
+    </dgm:pt>
+    <dgm:pt modelId="{CF71BE67-2F4D-4B9D-BD7F-0EB4B609B8E1}" type="pres">
+      <dgm:prSet presAssocID="{F79DF15A-5AAC-4109-8E17-AF500353EB84}" presName="parentLeftMargin" presStyleLbl="node1" presStyleIdx="0" presStyleCnt="2"/>
+      <dgm:spPr/>
+    </dgm:pt>
+    <dgm:pt modelId="{796B69CF-5244-413F-907A-192AA31A6DBC}" type="pres">
+      <dgm:prSet presAssocID="{F79DF15A-5AAC-4109-8E17-AF500353EB84}" presName="parentText" presStyleLbl="node1" presStyleIdx="0" presStyleCnt="2">
+        <dgm:presLayoutVars>
+          <dgm:chMax val="0"/>
+          <dgm:bulletEnabled val="1"/>
+        </dgm:presLayoutVars>
+      </dgm:prSet>
+      <dgm:spPr/>
+    </dgm:pt>
+    <dgm:pt modelId="{415DD675-3BC0-46B5-96AB-8BA3F473D198}" type="pres">
+      <dgm:prSet presAssocID="{F79DF15A-5AAC-4109-8E17-AF500353EB84}" presName="negativeSpace" presStyleCnt="0"/>
+      <dgm:spPr/>
+    </dgm:pt>
+    <dgm:pt modelId="{493E538C-1464-451C-A918-E4B2C82F1C53}" type="pres">
+      <dgm:prSet presAssocID="{F79DF15A-5AAC-4109-8E17-AF500353EB84}" presName="childText" presStyleLbl="conFgAcc1" presStyleIdx="0" presStyleCnt="2">
+        <dgm:presLayoutVars>
+          <dgm:bulletEnabled val="1"/>
+        </dgm:presLayoutVars>
+      </dgm:prSet>
+      <dgm:spPr/>
+    </dgm:pt>
+    <dgm:pt modelId="{D432E018-FF2C-446A-A35D-472270E82CE9}" type="pres">
+      <dgm:prSet presAssocID="{B737E800-1613-4589-9ACD-C1C86FF5764E}" presName="spaceBetweenRectangles" presStyleCnt="0"/>
+      <dgm:spPr/>
+    </dgm:pt>
+    <dgm:pt modelId="{C204C9B1-20CF-4A36-A122-A317FC56F8CB}" type="pres">
+      <dgm:prSet presAssocID="{85DC057B-C9CB-42E6-8309-8D7F57F02E82}" presName="parentLin" presStyleCnt="0"/>
+      <dgm:spPr/>
+    </dgm:pt>
+    <dgm:pt modelId="{EDFACC5F-157E-4449-8C39-38B82887EF93}" type="pres">
+      <dgm:prSet presAssocID="{85DC057B-C9CB-42E6-8309-8D7F57F02E82}" presName="parentLeftMargin" presStyleLbl="node1" presStyleIdx="0" presStyleCnt="2"/>
+      <dgm:spPr/>
+    </dgm:pt>
+    <dgm:pt modelId="{08D44FB7-BEF5-4125-AF41-115EE49B3BE8}" type="pres">
+      <dgm:prSet presAssocID="{85DC057B-C9CB-42E6-8309-8D7F57F02E82}" presName="parentText" presStyleLbl="node1" presStyleIdx="1" presStyleCnt="2">
+        <dgm:presLayoutVars>
+          <dgm:chMax val="0"/>
+          <dgm:bulletEnabled val="1"/>
+        </dgm:presLayoutVars>
+      </dgm:prSet>
+      <dgm:spPr/>
+    </dgm:pt>
+    <dgm:pt modelId="{3971C670-4783-45A6-A1C6-0B312A0BCEAA}" type="pres">
+      <dgm:prSet presAssocID="{85DC057B-C9CB-42E6-8309-8D7F57F02E82}" presName="negativeSpace" presStyleCnt="0"/>
+      <dgm:spPr/>
+    </dgm:pt>
+    <dgm:pt modelId="{22AC4078-0F3F-429E-8ECD-5F426AEAC6A7}" type="pres">
+      <dgm:prSet presAssocID="{85DC057B-C9CB-42E6-8309-8D7F57F02E82}" presName="childText" presStyleLbl="conFgAcc1" presStyleIdx="1" presStyleCnt="2">
+        <dgm:presLayoutVars>
+          <dgm:bulletEnabled val="1"/>
+        </dgm:presLayoutVars>
+      </dgm:prSet>
+      <dgm:spPr/>
+    </dgm:pt>
+  </dgm:ptLst>
+  <dgm:cxnLst>
+    <dgm:cxn modelId="{06491F0B-4BF0-4FFC-BA1E-F0F4CE765B9D}" type="presOf" srcId="{38409C4F-F91C-4935-90E8-EB934F0B1D42}" destId="{493E538C-1464-451C-A918-E4B2C82F1C53}" srcOrd="0" destOrd="1" presId="urn:microsoft.com/office/officeart/2005/8/layout/list1"/>
+    <dgm:cxn modelId="{88872915-DFE3-4EF6-9148-2AF3EBF60DD5}" srcId="{85DC057B-C9CB-42E6-8309-8D7F57F02E82}" destId="{70A5FACF-D043-46D2-B528-B21C2BEF872E}" srcOrd="1" destOrd="0" parTransId="{1770FDEF-BA4A-40F4-8482-18F84D91C2B1}" sibTransId="{A902CA57-4DBF-4AA6-B2D4-C0F5D1623FCF}"/>
+    <dgm:cxn modelId="{4582C525-1F64-4E9C-A946-E095F2696CD9}" srcId="{F79DF15A-5AAC-4109-8E17-AF500353EB84}" destId="{38409C4F-F91C-4935-90E8-EB934F0B1D42}" srcOrd="1" destOrd="0" parTransId="{63740E8B-922A-4600-88FE-9897D3BD7659}" sibTransId="{50DB3FB8-C156-423F-B96B-BA31A656B8E4}"/>
+    <dgm:cxn modelId="{F133693D-60EA-4F75-87BC-FDAE67383A15}" srcId="{764385C4-7DCB-4466-9084-55A1619F0A11}" destId="{F79DF15A-5AAC-4109-8E17-AF500353EB84}" srcOrd="0" destOrd="0" parTransId="{209F7A84-1648-45C9-856E-2DB18BC8690B}" sibTransId="{B737E800-1613-4589-9ACD-C1C86FF5764E}"/>
+    <dgm:cxn modelId="{8781CC3F-6CF3-4907-BE73-AAAFA5B45965}" srcId="{85DC057B-C9CB-42E6-8309-8D7F57F02E82}" destId="{D9875F65-79CC-405B-B4D2-C5F36D9DEFFF}" srcOrd="0" destOrd="0" parTransId="{34DD0A60-ADF8-4ECD-B5FE-85155AA15016}" sibTransId="{D5741691-D4EB-4F31-9FCB-6C7E93EC7158}"/>
+    <dgm:cxn modelId="{3B66605E-DAF0-4195-9745-68A60E288CF4}" type="presOf" srcId="{D9875F65-79CC-405B-B4D2-C5F36D9DEFFF}" destId="{22AC4078-0F3F-429E-8ECD-5F426AEAC6A7}" srcOrd="0" destOrd="0" presId="urn:microsoft.com/office/officeart/2005/8/layout/list1"/>
+    <dgm:cxn modelId="{7278486E-7946-4FF0-A3D0-6B5CD7481616}" type="presOf" srcId="{85DC057B-C9CB-42E6-8309-8D7F57F02E82}" destId="{EDFACC5F-157E-4449-8C39-38B82887EF93}" srcOrd="0" destOrd="0" presId="urn:microsoft.com/office/officeart/2005/8/layout/list1"/>
+    <dgm:cxn modelId="{69F04B54-14D6-4A81-81DE-1B8B91AD56C2}" type="presOf" srcId="{764385C4-7DCB-4466-9084-55A1619F0A11}" destId="{71ABB878-495B-4A82-85CB-45E68EBA65B0}" srcOrd="0" destOrd="0" presId="urn:microsoft.com/office/officeart/2005/8/layout/list1"/>
+    <dgm:cxn modelId="{156ED257-2664-41EE-87F9-B5D98125EAA2}" srcId="{F79DF15A-5AAC-4109-8E17-AF500353EB84}" destId="{7653745F-0722-4F95-BB23-950FCDB38DDE}" srcOrd="0" destOrd="0" parTransId="{89C02F8D-C70E-45F4-B903-10123092F8D7}" sibTransId="{774950D5-F90D-4FEB-8808-CE6210C56062}"/>
+    <dgm:cxn modelId="{7E2AD784-B240-4512-9C25-B0B0AF7C8E34}" type="presOf" srcId="{7653745F-0722-4F95-BB23-950FCDB38DDE}" destId="{493E538C-1464-451C-A918-E4B2C82F1C53}" srcOrd="0" destOrd="0" presId="urn:microsoft.com/office/officeart/2005/8/layout/list1"/>
+    <dgm:cxn modelId="{7ED168AB-4C0D-409E-94E9-32C43E1501DB}" type="presOf" srcId="{85DC057B-C9CB-42E6-8309-8D7F57F02E82}" destId="{08D44FB7-BEF5-4125-AF41-115EE49B3BE8}" srcOrd="1" destOrd="0" presId="urn:microsoft.com/office/officeart/2005/8/layout/list1"/>
+    <dgm:cxn modelId="{8DB26AAE-EAA7-4B60-B44E-BB2873C17E80}" type="presOf" srcId="{70A5FACF-D043-46D2-B528-B21C2BEF872E}" destId="{22AC4078-0F3F-429E-8ECD-5F426AEAC6A7}" srcOrd="0" destOrd="1" presId="urn:microsoft.com/office/officeart/2005/8/layout/list1"/>
+    <dgm:cxn modelId="{7679A8BE-7A8B-436C-826A-78D00CE426F7}" type="presOf" srcId="{F79DF15A-5AAC-4109-8E17-AF500353EB84}" destId="{796B69CF-5244-413F-907A-192AA31A6DBC}" srcOrd="1" destOrd="0" presId="urn:microsoft.com/office/officeart/2005/8/layout/list1"/>
+    <dgm:cxn modelId="{F1EEE9D8-9A5D-4E58-AA58-EE41338B8258}" type="presOf" srcId="{F79DF15A-5AAC-4109-8E17-AF500353EB84}" destId="{CF71BE67-2F4D-4B9D-BD7F-0EB4B609B8E1}" srcOrd="0" destOrd="0" presId="urn:microsoft.com/office/officeart/2005/8/layout/list1"/>
+    <dgm:cxn modelId="{1C081BFF-5DC3-4FE0-B605-72F93946AC6C}" srcId="{764385C4-7DCB-4466-9084-55A1619F0A11}" destId="{85DC057B-C9CB-42E6-8309-8D7F57F02E82}" srcOrd="1" destOrd="0" parTransId="{C491B2C7-23AD-4974-B294-B86041F4C6B2}" sibTransId="{2E687EE5-0585-4F6E-A4B5-CDBF9FE70F23}"/>
+    <dgm:cxn modelId="{C8F887C8-89AB-4A7D-A355-35F72CDD1C8C}" type="presParOf" srcId="{71ABB878-495B-4A82-85CB-45E68EBA65B0}" destId="{7361FB4F-5B04-47C4-8E30-35F5B7D39E3F}" srcOrd="0" destOrd="0" presId="urn:microsoft.com/office/officeart/2005/8/layout/list1"/>
+    <dgm:cxn modelId="{A0A422E8-711B-425E-8EFB-4BDC35A9A478}" type="presParOf" srcId="{7361FB4F-5B04-47C4-8E30-35F5B7D39E3F}" destId="{CF71BE67-2F4D-4B9D-BD7F-0EB4B609B8E1}" srcOrd="0" destOrd="0" presId="urn:microsoft.com/office/officeart/2005/8/layout/list1"/>
+    <dgm:cxn modelId="{CE9A46AD-3881-4C6B-AA21-039F87C8073D}" type="presParOf" srcId="{7361FB4F-5B04-47C4-8E30-35F5B7D39E3F}" destId="{796B69CF-5244-413F-907A-192AA31A6DBC}" srcOrd="1" destOrd="0" presId="urn:microsoft.com/office/officeart/2005/8/layout/list1"/>
+    <dgm:cxn modelId="{7B7D4E33-59F5-42A7-9207-B129679EF3D9}" type="presParOf" srcId="{71ABB878-495B-4A82-85CB-45E68EBA65B0}" destId="{415DD675-3BC0-46B5-96AB-8BA3F473D198}" srcOrd="1" destOrd="0" presId="urn:microsoft.com/office/officeart/2005/8/layout/list1"/>
+    <dgm:cxn modelId="{EB96E90D-1EE2-4C62-9983-94558836E4F2}" type="presParOf" srcId="{71ABB878-495B-4A82-85CB-45E68EBA65B0}" destId="{493E538C-1464-451C-A918-E4B2C82F1C53}" srcOrd="2" destOrd="0" presId="urn:microsoft.com/office/officeart/2005/8/layout/list1"/>
+    <dgm:cxn modelId="{047E583E-CF18-4099-9D4C-4642C5D2B86C}" type="presParOf" srcId="{71ABB878-495B-4A82-85CB-45E68EBA65B0}" destId="{D432E018-FF2C-446A-A35D-472270E82CE9}" srcOrd="3" destOrd="0" presId="urn:microsoft.com/office/officeart/2005/8/layout/list1"/>
+    <dgm:cxn modelId="{22B1ECD4-8353-4575-91AF-971A4A34A9B0}" type="presParOf" srcId="{71ABB878-495B-4A82-85CB-45E68EBA65B0}" destId="{C204C9B1-20CF-4A36-A122-A317FC56F8CB}" srcOrd="4" destOrd="0" presId="urn:microsoft.com/office/officeart/2005/8/layout/list1"/>
+    <dgm:cxn modelId="{18B2B5E6-5916-49C7-AFBE-8073E47B9667}" type="presParOf" srcId="{C204C9B1-20CF-4A36-A122-A317FC56F8CB}" destId="{EDFACC5F-157E-4449-8C39-38B82887EF93}" srcOrd="0" destOrd="0" presId="urn:microsoft.com/office/officeart/2005/8/layout/list1"/>
+    <dgm:cxn modelId="{80933E42-7689-4EFD-99F2-1E76BD665987}" type="presParOf" srcId="{C204C9B1-20CF-4A36-A122-A317FC56F8CB}" destId="{08D44FB7-BEF5-4125-AF41-115EE49B3BE8}" srcOrd="1" destOrd="0" presId="urn:microsoft.com/office/officeart/2005/8/layout/list1"/>
+    <dgm:cxn modelId="{A5DA2E3C-82FC-4CA9-8443-49A57A59A39C}" type="presParOf" srcId="{71ABB878-495B-4A82-85CB-45E68EBA65B0}" destId="{3971C670-4783-45A6-A1C6-0B312A0BCEAA}" srcOrd="5" destOrd="0" presId="urn:microsoft.com/office/officeart/2005/8/layout/list1"/>
+    <dgm:cxn modelId="{F91A952E-2F70-4731-A711-BDEBA98359C3}" type="presParOf" srcId="{71ABB878-495B-4A82-85CB-45E68EBA65B0}" destId="{22AC4078-0F3F-429E-8ECD-5F426AEAC6A7}" srcOrd="6" destOrd="0" presId="urn:microsoft.com/office/officeart/2005/8/layout/list1"/>
+  </dgm:cxnLst>
+  <dgm:bg/>
+  <dgm:whole/>
+  <dgm:extLst>
+    <a:ext uri="http://schemas.microsoft.com/office/drawing/2008/diagram">
+      <dsp:dataModelExt xmlns:dsp="http://schemas.microsoft.com/office/drawing/2008/diagram" relId="rId6" minVer="http://schemas.openxmlformats.org/drawingml/2006/diagram"/>
+    </a:ext>
+  </dgm:extLst>
+</dgm:dataModel>
+</file>
+
 <file path=ppt/diagrams/drawing1.xml><?xml version="1.0" encoding="utf-8"?>
 <dsp:drawing xmlns:dgm="http://schemas.openxmlformats.org/drawingml/2006/diagram" xmlns:dsp="http://schemas.microsoft.com/office/drawing/2008/diagram" xmlns:a="http://schemas.openxmlformats.org/drawingml/2006/main">
   <dsp:spTree>
@@ -2137,6 +3748,475 @@
       <dsp:txXfrm>
         <a:off x="8503241" y="2559250"/>
         <a:ext cx="2085244" cy="742500"/>
+      </dsp:txXfrm>
+    </dsp:sp>
+  </dsp:spTree>
+</dsp:drawing>
+</file>
+
+<file path=ppt/diagrams/drawing2.xml><?xml version="1.0" encoding="utf-8"?>
+<dsp:drawing xmlns:dgm="http://schemas.openxmlformats.org/drawingml/2006/diagram" xmlns:dsp="http://schemas.microsoft.com/office/drawing/2008/diagram" xmlns:a="http://schemas.openxmlformats.org/drawingml/2006/main">
+  <dsp:spTree>
+    <dsp:nvGrpSpPr>
+      <dsp:cNvPr id="0" name=""/>
+      <dsp:cNvGrpSpPr/>
+    </dsp:nvGrpSpPr>
+    <dsp:grpSpPr/>
+    <dsp:sp modelId="{493E538C-1464-451C-A918-E4B2C82F1C53}">
+      <dsp:nvSpPr>
+        <dsp:cNvPr id="0" name=""/>
+        <dsp:cNvSpPr/>
+      </dsp:nvSpPr>
+      <dsp:spPr>
+        <a:xfrm>
+          <a:off x="0" y="589459"/>
+          <a:ext cx="7286948" cy="2034900"/>
+        </a:xfrm>
+        <a:prstGeom prst="rect">
+          <a:avLst/>
+        </a:prstGeom>
+        <a:solidFill>
+          <a:schemeClr val="lt1">
+            <a:alpha val="90000"/>
+            <a:hueOff val="0"/>
+            <a:satOff val="0"/>
+            <a:lumOff val="0"/>
+            <a:alphaOff val="0"/>
+          </a:schemeClr>
+        </a:solidFill>
+        <a:ln w="12700" cap="flat" cmpd="sng" algn="ctr">
+          <a:solidFill>
+            <a:schemeClr val="accent2">
+              <a:hueOff val="0"/>
+              <a:satOff val="0"/>
+              <a:lumOff val="0"/>
+              <a:alphaOff val="0"/>
+            </a:schemeClr>
+          </a:solidFill>
+          <a:prstDash val="solid"/>
+          <a:miter lim="800000"/>
+        </a:ln>
+        <a:effectLst/>
+      </dsp:spPr>
+      <dsp:style>
+        <a:lnRef idx="1">
+          <a:scrgbClr r="0" g="0" b="0"/>
+        </a:lnRef>
+        <a:fillRef idx="1">
+          <a:scrgbClr r="0" g="0" b="0"/>
+        </a:fillRef>
+        <a:effectRef idx="0">
+          <a:scrgbClr r="0" g="0" b="0"/>
+        </a:effectRef>
+        <a:fontRef idx="minor"/>
+      </dsp:style>
+      <dsp:txBody>
+        <a:bodyPr spcFirstLastPara="0" vert="horz" wrap="square" lIns="565548" tIns="791464" rIns="565548" bIns="227584" numCol="1" spcCol="1270" anchor="t" anchorCtr="0">
+          <a:noAutofit/>
+        </a:bodyPr>
+        <a:lstStyle/>
+        <a:p>
+          <a:pPr marL="285750" lvl="1" indent="-285750" algn="l" defTabSz="1422400">
+            <a:lnSpc>
+              <a:spcPct val="90000"/>
+            </a:lnSpc>
+            <a:spcBef>
+              <a:spcPct val="0"/>
+            </a:spcBef>
+            <a:spcAft>
+              <a:spcPct val="15000"/>
+            </a:spcAft>
+            <a:buChar char="•"/>
+          </a:pPr>
+          <a:r>
+            <a:rPr lang="en-US" sz="3200" b="1" kern="1200" dirty="0"/>
+            <a:t>Priority queue </a:t>
+          </a:r>
+          <a:r>
+            <a:rPr lang="en-US" sz="3200" kern="1200" dirty="0"/>
+            <a:t>data structure</a:t>
+          </a:r>
+        </a:p>
+        <a:p>
+          <a:pPr marL="285750" lvl="1" indent="-285750" algn="l" defTabSz="1422400">
+            <a:lnSpc>
+              <a:spcPct val="90000"/>
+            </a:lnSpc>
+            <a:spcBef>
+              <a:spcPct val="0"/>
+            </a:spcBef>
+            <a:spcAft>
+              <a:spcPct val="15000"/>
+            </a:spcAft>
+            <a:buChar char="•"/>
+          </a:pPr>
+          <a:r>
+            <a:rPr lang="en-US" sz="3200" kern="1200" dirty="0"/>
+            <a:t>Faster for </a:t>
+          </a:r>
+          <a:r>
+            <a:rPr lang="en-US" sz="3200" b="1" kern="1200" dirty="0"/>
+            <a:t>dense graphs (</a:t>
+          </a:r>
+          <a14:m xmlns:a14="http://schemas.microsoft.com/office/drawing/2010/main">
+            <m:oMath xmlns:m="http://schemas.openxmlformats.org/officeDocument/2006/math">
+              <m:r>
+                <a:rPr lang="en-US" sz="3200" b="1" i="1" kern="1200" smtClean="0">
+                  <a:latin typeface="Cambria Math" panose="02040503050406030204" pitchFamily="18" charset="0"/>
+                </a:rPr>
+                <m:t>𝑬</m:t>
+              </m:r>
+              <m:r>
+                <a:rPr lang="en-US" sz="3200" b="1" i="1" kern="1200" smtClean="0">
+                  <a:latin typeface="Cambria Math" panose="02040503050406030204" pitchFamily="18" charset="0"/>
+                  <a:ea typeface="Cambria Math" panose="02040503050406030204" pitchFamily="18" charset="0"/>
+                </a:rPr>
+                <m:t>≈</m:t>
+              </m:r>
+              <m:sSup>
+                <m:sSupPr>
+                  <m:ctrlPr>
+                    <a:rPr lang="en-US" sz="3200" b="1" i="1" kern="1200" smtClean="0">
+                      <a:latin typeface="Cambria Math" panose="02040503050406030204" pitchFamily="18" charset="0"/>
+                      <a:ea typeface="Cambria Math" panose="02040503050406030204" pitchFamily="18" charset="0"/>
+                    </a:rPr>
+                  </m:ctrlPr>
+                </m:sSupPr>
+                <m:e>
+                  <m:r>
+                    <a:rPr lang="en-US" sz="3200" b="1" i="1" kern="1200" smtClean="0">
+                      <a:latin typeface="Cambria Math" panose="02040503050406030204" pitchFamily="18" charset="0"/>
+                      <a:ea typeface="Cambria Math" panose="02040503050406030204" pitchFamily="18" charset="0"/>
+                    </a:rPr>
+                    <m:t>𝑽</m:t>
+                  </m:r>
+                </m:e>
+                <m:sup>
+                  <m:r>
+                    <a:rPr lang="en-US" sz="3200" b="1" i="1" kern="1200" smtClean="0">
+                      <a:latin typeface="Cambria Math" panose="02040503050406030204" pitchFamily="18" charset="0"/>
+                      <a:ea typeface="Cambria Math" panose="02040503050406030204" pitchFamily="18" charset="0"/>
+                    </a:rPr>
+                    <m:t>𝟐</m:t>
+                  </m:r>
+                </m:sup>
+              </m:sSup>
+            </m:oMath>
+          </a14:m>
+          <a:r>
+            <a:rPr lang="en-US" sz="3200" b="1" kern="1200" dirty="0"/>
+            <a:t>)</a:t>
+          </a:r>
+        </a:p>
+      </dsp:txBody>
+      <dsp:txXfrm>
+        <a:off x="0" y="589459"/>
+        <a:ext cx="7286948" cy="2034900"/>
+      </dsp:txXfrm>
+    </dsp:sp>
+    <dsp:sp modelId="{796B69CF-5244-413F-907A-192AA31A6DBC}">
+      <dsp:nvSpPr>
+        <dsp:cNvPr id="0" name=""/>
+        <dsp:cNvSpPr/>
+      </dsp:nvSpPr>
+      <dsp:spPr>
+        <a:xfrm>
+          <a:off x="364347" y="28579"/>
+          <a:ext cx="5100863" cy="1121760"/>
+        </a:xfrm>
+        <a:prstGeom prst="roundRect">
+          <a:avLst/>
+        </a:prstGeom>
+        <a:gradFill rotWithShape="0">
+          <a:gsLst>
+            <a:gs pos="0">
+              <a:schemeClr val="accent2">
+                <a:hueOff val="0"/>
+                <a:satOff val="0"/>
+                <a:lumOff val="0"/>
+                <a:alphaOff val="0"/>
+                <a:satMod val="103000"/>
+                <a:lumMod val="102000"/>
+                <a:tint val="94000"/>
+              </a:schemeClr>
+            </a:gs>
+            <a:gs pos="50000">
+              <a:schemeClr val="accent2">
+                <a:hueOff val="0"/>
+                <a:satOff val="0"/>
+                <a:lumOff val="0"/>
+                <a:alphaOff val="0"/>
+                <a:satMod val="110000"/>
+                <a:lumMod val="100000"/>
+                <a:shade val="100000"/>
+              </a:schemeClr>
+            </a:gs>
+            <a:gs pos="100000">
+              <a:schemeClr val="accent2">
+                <a:hueOff val="0"/>
+                <a:satOff val="0"/>
+                <a:lumOff val="0"/>
+                <a:alphaOff val="0"/>
+                <a:lumMod val="99000"/>
+                <a:satMod val="120000"/>
+                <a:shade val="78000"/>
+              </a:schemeClr>
+            </a:gs>
+          </a:gsLst>
+          <a:lin ang="5400000" scaled="0"/>
+        </a:gradFill>
+        <a:ln>
+          <a:noFill/>
+        </a:ln>
+        <a:effectLst/>
+      </dsp:spPr>
+      <dsp:style>
+        <a:lnRef idx="0">
+          <a:scrgbClr r="0" g="0" b="0"/>
+        </a:lnRef>
+        <a:fillRef idx="3">
+          <a:scrgbClr r="0" g="0" b="0"/>
+        </a:fillRef>
+        <a:effectRef idx="2">
+          <a:scrgbClr r="0" g="0" b="0"/>
+        </a:effectRef>
+        <a:fontRef idx="minor">
+          <a:schemeClr val="lt1"/>
+        </a:fontRef>
+      </dsp:style>
+      <dsp:txBody>
+        <a:bodyPr spcFirstLastPara="0" vert="horz" wrap="square" lIns="192800" tIns="0" rIns="192800" bIns="0" numCol="1" spcCol="1270" anchor="ctr" anchorCtr="0">
+          <a:noAutofit/>
+        </a:bodyPr>
+        <a:lstStyle/>
+        <a:p>
+          <a:pPr marL="0" lvl="0" indent="0" algn="l" defTabSz="1689100">
+            <a:lnSpc>
+              <a:spcPct val="90000"/>
+            </a:lnSpc>
+            <a:spcBef>
+              <a:spcPct val="0"/>
+            </a:spcBef>
+            <a:spcAft>
+              <a:spcPct val="35000"/>
+            </a:spcAft>
+            <a:buNone/>
+          </a:pPr>
+          <a:r>
+            <a:rPr lang="en-US" sz="3800" kern="1200" dirty="0"/>
+            <a:t>Prim’s algorithm</a:t>
+          </a:r>
+        </a:p>
+      </dsp:txBody>
+      <dsp:txXfrm>
+        <a:off x="419107" y="83339"/>
+        <a:ext cx="4991343" cy="1012240"/>
+      </dsp:txXfrm>
+    </dsp:sp>
+    <dsp:sp modelId="{22AC4078-0F3F-429E-8ECD-5F426AEAC6A7}">
+      <dsp:nvSpPr>
+        <dsp:cNvPr id="0" name=""/>
+        <dsp:cNvSpPr/>
+      </dsp:nvSpPr>
+      <dsp:spPr>
+        <a:xfrm>
+          <a:off x="0" y="3390440"/>
+          <a:ext cx="7286948" cy="2034900"/>
+        </a:xfrm>
+        <a:prstGeom prst="rect">
+          <a:avLst/>
+        </a:prstGeom>
+        <a:solidFill>
+          <a:schemeClr val="lt1">
+            <a:alpha val="90000"/>
+            <a:hueOff val="0"/>
+            <a:satOff val="0"/>
+            <a:lumOff val="0"/>
+            <a:alphaOff val="0"/>
+          </a:schemeClr>
+        </a:solidFill>
+        <a:ln w="12700" cap="flat" cmpd="sng" algn="ctr">
+          <a:solidFill>
+            <a:schemeClr val="accent2">
+              <a:hueOff val="6443614"/>
+              <a:satOff val="-18493"/>
+              <a:lumOff val="-29609"/>
+              <a:alphaOff val="0"/>
+            </a:schemeClr>
+          </a:solidFill>
+          <a:prstDash val="solid"/>
+          <a:miter lim="800000"/>
+        </a:ln>
+        <a:effectLst/>
+      </dsp:spPr>
+      <dsp:style>
+        <a:lnRef idx="1">
+          <a:scrgbClr r="0" g="0" b="0"/>
+        </a:lnRef>
+        <a:fillRef idx="1">
+          <a:scrgbClr r="0" g="0" b="0"/>
+        </a:fillRef>
+        <a:effectRef idx="0">
+          <a:scrgbClr r="0" g="0" b="0"/>
+        </a:effectRef>
+        <a:fontRef idx="minor"/>
+      </dsp:style>
+      <dsp:txBody>
+        <a:bodyPr spcFirstLastPara="0" vert="horz" wrap="square" lIns="565548" tIns="791464" rIns="565548" bIns="227584" numCol="1" spcCol="1270" anchor="t" anchorCtr="0">
+          <a:noAutofit/>
+        </a:bodyPr>
+        <a:lstStyle/>
+        <a:p>
+          <a:pPr marL="285750" lvl="1" indent="-285750" algn="l" defTabSz="1422400">
+            <a:lnSpc>
+              <a:spcPct val="90000"/>
+            </a:lnSpc>
+            <a:spcBef>
+              <a:spcPct val="0"/>
+            </a:spcBef>
+            <a:spcAft>
+              <a:spcPct val="15000"/>
+            </a:spcAft>
+            <a:buChar char="•"/>
+          </a:pPr>
+          <a:r>
+            <a:rPr lang="en-US" sz="3200" b="1" kern="1200" dirty="0"/>
+            <a:t>Disjoint set </a:t>
+          </a:r>
+          <a:r>
+            <a:rPr lang="en-US" sz="3200" kern="1200" dirty="0"/>
+            <a:t>data structure</a:t>
+          </a:r>
+        </a:p>
+        <a:p>
+          <a:pPr marL="285750" lvl="1" indent="-285750" algn="l" defTabSz="1422400">
+            <a:lnSpc>
+              <a:spcPct val="90000"/>
+            </a:lnSpc>
+            <a:spcBef>
+              <a:spcPct val="0"/>
+            </a:spcBef>
+            <a:spcAft>
+              <a:spcPct val="15000"/>
+            </a:spcAft>
+            <a:buChar char="•"/>
+          </a:pPr>
+          <a:r>
+            <a:rPr lang="en-US" sz="3200" kern="1200" dirty="0"/>
+            <a:t>Faster </a:t>
+          </a:r>
+          <a:r>
+            <a:rPr lang="en-US" sz="3200" b="0" kern="1200" dirty="0"/>
+            <a:t>for</a:t>
+          </a:r>
+          <a:r>
+            <a:rPr lang="en-US" sz="3200" b="1" kern="1200" dirty="0"/>
+            <a:t> sparse graphs</a:t>
+          </a:r>
+        </a:p>
+      </dsp:txBody>
+      <dsp:txXfrm>
+        <a:off x="0" y="3390440"/>
+        <a:ext cx="7286948" cy="2034900"/>
+      </dsp:txXfrm>
+    </dsp:sp>
+    <dsp:sp modelId="{08D44FB7-BEF5-4125-AF41-115EE49B3BE8}">
+      <dsp:nvSpPr>
+        <dsp:cNvPr id="0" name=""/>
+        <dsp:cNvSpPr/>
+      </dsp:nvSpPr>
+      <dsp:spPr>
+        <a:xfrm>
+          <a:off x="364347" y="2829559"/>
+          <a:ext cx="5100863" cy="1121760"/>
+        </a:xfrm>
+        <a:prstGeom prst="roundRect">
+          <a:avLst/>
+        </a:prstGeom>
+        <a:gradFill rotWithShape="0">
+          <a:gsLst>
+            <a:gs pos="0">
+              <a:schemeClr val="accent2">
+                <a:hueOff val="6443614"/>
+                <a:satOff val="-18493"/>
+                <a:lumOff val="-29609"/>
+                <a:alphaOff val="0"/>
+                <a:satMod val="103000"/>
+                <a:lumMod val="102000"/>
+                <a:tint val="94000"/>
+              </a:schemeClr>
+            </a:gs>
+            <a:gs pos="50000">
+              <a:schemeClr val="accent2">
+                <a:hueOff val="6443614"/>
+                <a:satOff val="-18493"/>
+                <a:lumOff val="-29609"/>
+                <a:alphaOff val="0"/>
+                <a:satMod val="110000"/>
+                <a:lumMod val="100000"/>
+                <a:shade val="100000"/>
+              </a:schemeClr>
+            </a:gs>
+            <a:gs pos="100000">
+              <a:schemeClr val="accent2">
+                <a:hueOff val="6443614"/>
+                <a:satOff val="-18493"/>
+                <a:lumOff val="-29609"/>
+                <a:alphaOff val="0"/>
+                <a:lumMod val="99000"/>
+                <a:satMod val="120000"/>
+                <a:shade val="78000"/>
+              </a:schemeClr>
+            </a:gs>
+          </a:gsLst>
+          <a:lin ang="5400000" scaled="0"/>
+        </a:gradFill>
+        <a:ln>
+          <a:noFill/>
+        </a:ln>
+        <a:effectLst/>
+      </dsp:spPr>
+      <dsp:style>
+        <a:lnRef idx="0">
+          <a:scrgbClr r="0" g="0" b="0"/>
+        </a:lnRef>
+        <a:fillRef idx="3">
+          <a:scrgbClr r="0" g="0" b="0"/>
+        </a:fillRef>
+        <a:effectRef idx="2">
+          <a:scrgbClr r="0" g="0" b="0"/>
+        </a:effectRef>
+        <a:fontRef idx="minor">
+          <a:schemeClr val="lt1"/>
+        </a:fontRef>
+      </dsp:style>
+      <dsp:txBody>
+        <a:bodyPr spcFirstLastPara="0" vert="horz" wrap="square" lIns="192800" tIns="0" rIns="192800" bIns="0" numCol="1" spcCol="1270" anchor="ctr" anchorCtr="0">
+          <a:noAutofit/>
+        </a:bodyPr>
+        <a:lstStyle/>
+        <a:p>
+          <a:pPr marL="0" lvl="0" indent="0" algn="l" defTabSz="1689100">
+            <a:lnSpc>
+              <a:spcPct val="90000"/>
+            </a:lnSpc>
+            <a:spcBef>
+              <a:spcPct val="0"/>
+            </a:spcBef>
+            <a:spcAft>
+              <a:spcPct val="35000"/>
+            </a:spcAft>
+            <a:buNone/>
+          </a:pPr>
+          <a:r>
+            <a:rPr lang="en-US" sz="3800" kern="1200" dirty="0"/>
+            <a:t>Kruskal’s algorithm</a:t>
+          </a:r>
+        </a:p>
+      </dsp:txBody>
+      <dsp:txXfrm>
+        <a:off x="419107" y="2884319"/>
+        <a:ext cx="4991343" cy="1012240"/>
       </dsp:txXfrm>
     </dsp:sp>
   </dsp:spTree>
@@ -2370,6 +4450,231 @@
 </dgm:layoutDef>
 </file>
 
+<file path=ppt/diagrams/layout2.xml><?xml version="1.0" encoding="utf-8"?>
+<dgm:layoutDef xmlns:dgm="http://schemas.openxmlformats.org/drawingml/2006/diagram" xmlns:a="http://schemas.openxmlformats.org/drawingml/2006/main" uniqueId="urn:microsoft.com/office/officeart/2005/8/layout/list1">
+  <dgm:title val=""/>
+  <dgm:desc val=""/>
+  <dgm:catLst>
+    <dgm:cat type="list" pri="4000"/>
+  </dgm:catLst>
+  <dgm:sampData>
+    <dgm:dataModel>
+      <dgm:ptLst>
+        <dgm:pt modelId="0" type="doc"/>
+        <dgm:pt modelId="1">
+          <dgm:prSet phldr="1"/>
+        </dgm:pt>
+        <dgm:pt modelId="2">
+          <dgm:prSet phldr="1"/>
+        </dgm:pt>
+        <dgm:pt modelId="3">
+          <dgm:prSet phldr="1"/>
+        </dgm:pt>
+      </dgm:ptLst>
+      <dgm:cxnLst>
+        <dgm:cxn modelId="4" srcId="0" destId="1" srcOrd="0" destOrd="0"/>
+        <dgm:cxn modelId="5" srcId="0" destId="2" srcOrd="1" destOrd="0"/>
+        <dgm:cxn modelId="6" srcId="0" destId="3" srcOrd="2" destOrd="0"/>
+      </dgm:cxnLst>
+      <dgm:bg/>
+      <dgm:whole/>
+    </dgm:dataModel>
+  </dgm:sampData>
+  <dgm:styleData>
+    <dgm:dataModel>
+      <dgm:ptLst>
+        <dgm:pt modelId="0" type="doc"/>
+        <dgm:pt modelId="1"/>
+        <dgm:pt modelId="2"/>
+      </dgm:ptLst>
+      <dgm:cxnLst>
+        <dgm:cxn modelId="4" srcId="0" destId="1" srcOrd="0" destOrd="0"/>
+        <dgm:cxn modelId="5" srcId="0" destId="2" srcOrd="1" destOrd="0"/>
+      </dgm:cxnLst>
+      <dgm:bg/>
+      <dgm:whole/>
+    </dgm:dataModel>
+  </dgm:styleData>
+  <dgm:clrData>
+    <dgm:dataModel>
+      <dgm:ptLst>
+        <dgm:pt modelId="0" type="doc"/>
+        <dgm:pt modelId="1"/>
+        <dgm:pt modelId="2"/>
+        <dgm:pt modelId="3"/>
+        <dgm:pt modelId="4"/>
+      </dgm:ptLst>
+      <dgm:cxnLst>
+        <dgm:cxn modelId="5" srcId="0" destId="1" srcOrd="0" destOrd="0"/>
+        <dgm:cxn modelId="6" srcId="0" destId="2" srcOrd="1" destOrd="0"/>
+        <dgm:cxn modelId="7" srcId="0" destId="3" srcOrd="2" destOrd="0"/>
+        <dgm:cxn modelId="8" srcId="0" destId="4" srcOrd="3" destOrd="0"/>
+      </dgm:cxnLst>
+      <dgm:bg/>
+      <dgm:whole/>
+    </dgm:dataModel>
+  </dgm:clrData>
+  <dgm:layoutNode name="linear">
+    <dgm:varLst>
+      <dgm:dir/>
+      <dgm:animLvl val="lvl"/>
+      <dgm:resizeHandles val="exact"/>
+    </dgm:varLst>
+    <dgm:choose name="Name0">
+      <dgm:if name="Name1" func="var" arg="dir" op="equ" val="norm">
+        <dgm:alg type="lin">
+          <dgm:param type="linDir" val="fromT"/>
+          <dgm:param type="vertAlign" val="mid"/>
+          <dgm:param type="horzAlign" val="l"/>
+          <dgm:param type="nodeHorzAlign" val="l"/>
+        </dgm:alg>
+      </dgm:if>
+      <dgm:else name="Name2">
+        <dgm:alg type="lin">
+          <dgm:param type="linDir" val="fromT"/>
+          <dgm:param type="vertAlign" val="mid"/>
+          <dgm:param type="horzAlign" val="r"/>
+          <dgm:param type="nodeHorzAlign" val="r"/>
+        </dgm:alg>
+      </dgm:else>
+    </dgm:choose>
+    <dgm:shape xmlns:r="http://schemas.openxmlformats.org/officeDocument/2006/relationships" r:blip="">
+      <dgm:adjLst/>
+    </dgm:shape>
+    <dgm:presOf/>
+    <dgm:constrLst>
+      <dgm:constr type="w" for="ch" forName="parentLin" refType="w"/>
+      <dgm:constr type="h" for="ch" forName="parentLin" val="INF"/>
+      <dgm:constr type="w" for="des" forName="parentLeftMargin" refType="w" fact="0.05"/>
+      <dgm:constr type="w" for="des" forName="parentText" refType="w" fact="0.7"/>
+      <dgm:constr type="h" for="des" forName="parentText" refType="primFontSz" refFor="des" refForName="parentText" fact="0.82"/>
+      <dgm:constr type="h" for="ch" forName="negativeSpace" refType="primFontSz" refFor="des" refForName="parentText" fact="-0.41"/>
+      <dgm:constr type="h" for="ch" forName="negativeSpace" refType="h" refFor="des" refForName="parentText" op="lte" fact="-0.82"/>
+      <dgm:constr type="h" for="ch" forName="negativeSpace" refType="h" refFor="des" refForName="parentText" op="gte" fact="-0.82"/>
+      <dgm:constr type="w" for="ch" forName="childText" refType="w"/>
+      <dgm:constr type="h" for="ch" forName="childText" refType="primFontSz" refFor="des" refForName="parentText" fact="0.7"/>
+      <dgm:constr type="primFontSz" for="des" forName="parentText" val="65"/>
+      <dgm:constr type="primFontSz" for="ch" forName="childText" refType="primFontSz" refFor="des" refForName="parentText"/>
+      <dgm:constr type="tMarg" for="ch" forName="childText" refType="primFontSz" refFor="des" refForName="parentText" fact="1.64"/>
+      <dgm:constr type="tMarg" for="ch" forName="childText" refType="h" refFor="des" refForName="parentText" op="lte" fact="3.28"/>
+      <dgm:constr type="tMarg" for="ch" forName="childText" refType="h" refFor="des" refForName="parentText" op="gte" fact="3.28"/>
+      <dgm:constr type="lMarg" for="ch" forName="childText" refType="w" fact="0.22"/>
+      <dgm:constr type="rMarg" for="ch" forName="childText" refType="lMarg" refFor="ch" refForName="childText"/>
+      <dgm:constr type="lMarg" for="des" forName="parentText" refType="w" fact="0.075"/>
+      <dgm:constr type="rMarg" for="des" forName="parentText" refType="lMarg" refFor="des" refForName="parentText"/>
+      <dgm:constr type="h" for="ch" forName="spaceBetweenRectangles" refType="primFontSz" refFor="des" refForName="parentText" fact="0.15"/>
+    </dgm:constrLst>
+    <dgm:ruleLst>
+      <dgm:rule type="primFontSz" for="des" forName="parentText" val="5" fact="NaN" max="NaN"/>
+    </dgm:ruleLst>
+    <dgm:forEach name="Name3" axis="ch" ptType="node">
+      <dgm:layoutNode name="parentLin">
+        <dgm:choose name="Name4">
+          <dgm:if name="Name5" func="var" arg="dir" op="equ" val="norm">
+            <dgm:alg type="lin">
+              <dgm:param type="linDir" val="fromL"/>
+              <dgm:param type="horzAlign" val="l"/>
+              <dgm:param type="nodeHorzAlign" val="l"/>
+            </dgm:alg>
+          </dgm:if>
+          <dgm:else name="Name6">
+            <dgm:alg type="lin">
+              <dgm:param type="linDir" val="fromR"/>
+              <dgm:param type="horzAlign" val="r"/>
+              <dgm:param type="nodeHorzAlign" val="r"/>
+            </dgm:alg>
+          </dgm:else>
+        </dgm:choose>
+        <dgm:shape xmlns:r="http://schemas.openxmlformats.org/officeDocument/2006/relationships" r:blip="">
+          <dgm:adjLst/>
+        </dgm:shape>
+        <dgm:presOf/>
+        <dgm:constrLst/>
+        <dgm:ruleLst/>
+        <dgm:layoutNode name="parentLeftMargin">
+          <dgm:alg type="sp"/>
+          <dgm:shape xmlns:r="http://schemas.openxmlformats.org/officeDocument/2006/relationships" type="rect" r:blip="" hideGeom="1">
+            <dgm:adjLst/>
+          </dgm:shape>
+          <dgm:presOf axis="self"/>
+          <dgm:constrLst>
+            <dgm:constr type="h"/>
+          </dgm:constrLst>
+          <dgm:ruleLst/>
+        </dgm:layoutNode>
+        <dgm:layoutNode name="parentText" styleLbl="node1">
+          <dgm:varLst>
+            <dgm:chMax val="0"/>
+            <dgm:bulletEnabled val="1"/>
+          </dgm:varLst>
+          <dgm:choose name="Name7">
+            <dgm:if name="Name8" func="var" arg="dir" op="equ" val="norm">
+              <dgm:alg type="tx">
+                <dgm:param type="parTxLTRAlign" val="l"/>
+                <dgm:param type="parTxRTLAlign" val="l"/>
+              </dgm:alg>
+            </dgm:if>
+            <dgm:else name="Name9">
+              <dgm:alg type="tx">
+                <dgm:param type="parTxLTRAlign" val="r"/>
+                <dgm:param type="parTxRTLAlign" val="r"/>
+              </dgm:alg>
+            </dgm:else>
+          </dgm:choose>
+          <dgm:shape xmlns:r="http://schemas.openxmlformats.org/officeDocument/2006/relationships" type="roundRect" r:blip="">
+            <dgm:adjLst/>
+          </dgm:shape>
+          <dgm:presOf axis="self" ptType="node"/>
+          <dgm:constrLst>
+            <dgm:constr type="tMarg"/>
+            <dgm:constr type="bMarg"/>
+          </dgm:constrLst>
+          <dgm:ruleLst/>
+        </dgm:layoutNode>
+      </dgm:layoutNode>
+      <dgm:layoutNode name="negativeSpace">
+        <dgm:alg type="sp"/>
+        <dgm:shape xmlns:r="http://schemas.openxmlformats.org/officeDocument/2006/relationships" r:blip="">
+          <dgm:adjLst/>
+        </dgm:shape>
+        <dgm:presOf/>
+        <dgm:constrLst/>
+        <dgm:ruleLst/>
+      </dgm:layoutNode>
+      <dgm:layoutNode name="childText" styleLbl="conFgAcc1">
+        <dgm:varLst>
+          <dgm:bulletEnabled val="1"/>
+        </dgm:varLst>
+        <dgm:alg type="tx">
+          <dgm:param type="stBulletLvl" val="1"/>
+        </dgm:alg>
+        <dgm:shape xmlns:r="http://schemas.openxmlformats.org/officeDocument/2006/relationships" type="rect" r:blip="" zOrderOff="-2">
+          <dgm:adjLst/>
+        </dgm:shape>
+        <dgm:presOf axis="des" ptType="node"/>
+        <dgm:constrLst>
+          <dgm:constr type="secFontSz" refType="primFontSz"/>
+        </dgm:constrLst>
+        <dgm:ruleLst>
+          <dgm:rule type="h" val="INF" fact="NaN" max="NaN"/>
+        </dgm:ruleLst>
+      </dgm:layoutNode>
+      <dgm:forEach name="Name10" axis="followSib" ptType="sibTrans" cnt="1">
+        <dgm:layoutNode name="spaceBetweenRectangles">
+          <dgm:alg type="sp"/>
+          <dgm:shape xmlns:r="http://schemas.openxmlformats.org/officeDocument/2006/relationships" r:blip="">
+            <dgm:adjLst/>
+          </dgm:shape>
+          <dgm:presOf/>
+          <dgm:constrLst/>
+          <dgm:ruleLst/>
+        </dgm:layoutNode>
+      </dgm:forEach>
+    </dgm:forEach>
+  </dgm:layoutNode>
+</dgm:layoutDef>
+</file>
+
 <file path=ppt/diagrams/quickStyle1.xml><?xml version="1.0" encoding="utf-8"?>
 <dgm:styleDef xmlns:dgm="http://schemas.openxmlformats.org/drawingml/2006/diagram" xmlns:a="http://schemas.openxmlformats.org/drawingml/2006/main" uniqueId="urn:microsoft.com/office/officeart/2005/8/quickstyle/simple1">
   <dgm:title val=""/>
@@ -3376,6 +5681,1040 @@
         <a:scrgbClr r="0" g="0" b="0"/>
       </a:fillRef>
       <a:effectRef idx="0">
+        <a:scrgbClr r="0" g="0" b="0"/>
+      </a:effectRef>
+      <a:fontRef idx="minor"/>
+    </dgm:style>
+  </dgm:styleLbl>
+  <dgm:styleLbl name="revTx">
+    <dgm:scene3d>
+      <a:camera prst="orthographicFront"/>
+      <a:lightRig rig="threePt" dir="t"/>
+    </dgm:scene3d>
+    <dgm:sp3d/>
+    <dgm:txPr/>
+    <dgm:style>
+      <a:lnRef idx="0">
+        <a:scrgbClr r="0" g="0" b="0"/>
+      </a:lnRef>
+      <a:fillRef idx="0">
+        <a:scrgbClr r="0" g="0" b="0"/>
+      </a:fillRef>
+      <a:effectRef idx="0">
+        <a:scrgbClr r="0" g="0" b="0"/>
+      </a:effectRef>
+      <a:fontRef idx="minor"/>
+    </dgm:style>
+  </dgm:styleLbl>
+</dgm:styleDef>
+</file>
+
+<file path=ppt/diagrams/quickStyle2.xml><?xml version="1.0" encoding="utf-8"?>
+<dgm:styleDef xmlns:dgm="http://schemas.openxmlformats.org/drawingml/2006/diagram" xmlns:a="http://schemas.openxmlformats.org/drawingml/2006/main" uniqueId="urn:microsoft.com/office/officeart/2005/8/quickstyle/simple4">
+  <dgm:title val=""/>
+  <dgm:desc val=""/>
+  <dgm:catLst>
+    <dgm:cat type="simple" pri="10400"/>
+  </dgm:catLst>
+  <dgm:scene3d>
+    <a:camera prst="orthographicFront"/>
+    <a:lightRig rig="threePt" dir="t"/>
+  </dgm:scene3d>
+  <dgm:styleLbl name="node0">
+    <dgm:scene3d>
+      <a:camera prst="orthographicFront"/>
+      <a:lightRig rig="threePt" dir="t"/>
+    </dgm:scene3d>
+    <dgm:sp3d/>
+    <dgm:txPr/>
+    <dgm:style>
+      <a:lnRef idx="0">
+        <a:scrgbClr r="0" g="0" b="0"/>
+      </a:lnRef>
+      <a:fillRef idx="3">
+        <a:scrgbClr r="0" g="0" b="0"/>
+      </a:fillRef>
+      <a:effectRef idx="2">
+        <a:scrgbClr r="0" g="0" b="0"/>
+      </a:effectRef>
+      <a:fontRef idx="minor">
+        <a:schemeClr val="lt1"/>
+      </a:fontRef>
+    </dgm:style>
+  </dgm:styleLbl>
+  <dgm:styleLbl name="lnNode1">
+    <dgm:scene3d>
+      <a:camera prst="orthographicFront"/>
+      <a:lightRig rig="threePt" dir="t"/>
+    </dgm:scene3d>
+    <dgm:sp3d/>
+    <dgm:txPr/>
+    <dgm:style>
+      <a:lnRef idx="1">
+        <a:scrgbClr r="0" g="0" b="0"/>
+      </a:lnRef>
+      <a:fillRef idx="3">
+        <a:scrgbClr r="0" g="0" b="0"/>
+      </a:fillRef>
+      <a:effectRef idx="2">
+        <a:scrgbClr r="0" g="0" b="0"/>
+      </a:effectRef>
+      <a:fontRef idx="minor">
+        <a:schemeClr val="lt1"/>
+      </a:fontRef>
+    </dgm:style>
+  </dgm:styleLbl>
+  <dgm:styleLbl name="vennNode1">
+    <dgm:scene3d>
+      <a:camera prst="orthographicFront"/>
+      <a:lightRig rig="threePt" dir="t"/>
+    </dgm:scene3d>
+    <dgm:sp3d/>
+    <dgm:txPr/>
+    <dgm:style>
+      <a:lnRef idx="0">
+        <a:scrgbClr r="0" g="0" b="0"/>
+      </a:lnRef>
+      <a:fillRef idx="3">
+        <a:scrgbClr r="0" g="0" b="0"/>
+      </a:fillRef>
+      <a:effectRef idx="0">
+        <a:scrgbClr r="0" g="0" b="0"/>
+      </a:effectRef>
+      <a:fontRef idx="minor">
+        <a:schemeClr val="tx1"/>
+      </a:fontRef>
+    </dgm:style>
+  </dgm:styleLbl>
+  <dgm:styleLbl name="alignNode1">
+    <dgm:scene3d>
+      <a:camera prst="orthographicFront"/>
+      <a:lightRig rig="threePt" dir="t"/>
+    </dgm:scene3d>
+    <dgm:sp3d/>
+    <dgm:txPr/>
+    <dgm:style>
+      <a:lnRef idx="1">
+        <a:scrgbClr r="0" g="0" b="0"/>
+      </a:lnRef>
+      <a:fillRef idx="3">
+        <a:scrgbClr r="0" g="0" b="0"/>
+      </a:fillRef>
+      <a:effectRef idx="2">
+        <a:scrgbClr r="0" g="0" b="0"/>
+      </a:effectRef>
+      <a:fontRef idx="minor">
+        <a:schemeClr val="lt1"/>
+      </a:fontRef>
+    </dgm:style>
+  </dgm:styleLbl>
+  <dgm:styleLbl name="node1">
+    <dgm:scene3d>
+      <a:camera prst="orthographicFront"/>
+      <a:lightRig rig="threePt" dir="t"/>
+    </dgm:scene3d>
+    <dgm:sp3d/>
+    <dgm:txPr/>
+    <dgm:style>
+      <a:lnRef idx="0">
+        <a:scrgbClr r="0" g="0" b="0"/>
+      </a:lnRef>
+      <a:fillRef idx="3">
+        <a:scrgbClr r="0" g="0" b="0"/>
+      </a:fillRef>
+      <a:effectRef idx="2">
+        <a:scrgbClr r="0" g="0" b="0"/>
+      </a:effectRef>
+      <a:fontRef idx="minor">
+        <a:schemeClr val="lt1"/>
+      </a:fontRef>
+    </dgm:style>
+  </dgm:styleLbl>
+  <dgm:styleLbl name="node2">
+    <dgm:scene3d>
+      <a:camera prst="orthographicFront"/>
+      <a:lightRig rig="threePt" dir="t"/>
+    </dgm:scene3d>
+    <dgm:sp3d/>
+    <dgm:txPr/>
+    <dgm:style>
+      <a:lnRef idx="0">
+        <a:scrgbClr r="0" g="0" b="0"/>
+      </a:lnRef>
+      <a:fillRef idx="3">
+        <a:scrgbClr r="0" g="0" b="0"/>
+      </a:fillRef>
+      <a:effectRef idx="2">
+        <a:scrgbClr r="0" g="0" b="0"/>
+      </a:effectRef>
+      <a:fontRef idx="minor">
+        <a:schemeClr val="lt1"/>
+      </a:fontRef>
+    </dgm:style>
+  </dgm:styleLbl>
+  <dgm:styleLbl name="node3">
+    <dgm:scene3d>
+      <a:camera prst="orthographicFront"/>
+      <a:lightRig rig="threePt" dir="t"/>
+    </dgm:scene3d>
+    <dgm:sp3d/>
+    <dgm:txPr/>
+    <dgm:style>
+      <a:lnRef idx="0">
+        <a:scrgbClr r="0" g="0" b="0"/>
+      </a:lnRef>
+      <a:fillRef idx="3">
+        <a:scrgbClr r="0" g="0" b="0"/>
+      </a:fillRef>
+      <a:effectRef idx="2">
+        <a:scrgbClr r="0" g="0" b="0"/>
+      </a:effectRef>
+      <a:fontRef idx="minor">
+        <a:schemeClr val="lt1"/>
+      </a:fontRef>
+    </dgm:style>
+  </dgm:styleLbl>
+  <dgm:styleLbl name="node4">
+    <dgm:scene3d>
+      <a:camera prst="orthographicFront"/>
+      <a:lightRig rig="threePt" dir="t"/>
+    </dgm:scene3d>
+    <dgm:sp3d/>
+    <dgm:txPr/>
+    <dgm:style>
+      <a:lnRef idx="0">
+        <a:scrgbClr r="0" g="0" b="0"/>
+      </a:lnRef>
+      <a:fillRef idx="3">
+        <a:scrgbClr r="0" g="0" b="0"/>
+      </a:fillRef>
+      <a:effectRef idx="2">
+        <a:scrgbClr r="0" g="0" b="0"/>
+      </a:effectRef>
+      <a:fontRef idx="minor">
+        <a:schemeClr val="lt1"/>
+      </a:fontRef>
+    </dgm:style>
+  </dgm:styleLbl>
+  <dgm:styleLbl name="fgImgPlace1">
+    <dgm:scene3d>
+      <a:camera prst="orthographicFront"/>
+      <a:lightRig rig="threePt" dir="t"/>
+    </dgm:scene3d>
+    <dgm:sp3d/>
+    <dgm:txPr/>
+    <dgm:style>
+      <a:lnRef idx="0">
+        <a:scrgbClr r="0" g="0" b="0"/>
+      </a:lnRef>
+      <a:fillRef idx="1">
+        <a:scrgbClr r="0" g="0" b="0"/>
+      </a:fillRef>
+      <a:effectRef idx="2">
+        <a:scrgbClr r="0" g="0" b="0"/>
+      </a:effectRef>
+      <a:fontRef idx="minor"/>
+    </dgm:style>
+  </dgm:styleLbl>
+  <dgm:styleLbl name="alignImgPlace1">
+    <dgm:scene3d>
+      <a:camera prst="orthographicFront"/>
+      <a:lightRig rig="threePt" dir="t"/>
+    </dgm:scene3d>
+    <dgm:sp3d/>
+    <dgm:txPr/>
+    <dgm:style>
+      <a:lnRef idx="0">
+        <a:scrgbClr r="0" g="0" b="0"/>
+      </a:lnRef>
+      <a:fillRef idx="1">
+        <a:scrgbClr r="0" g="0" b="0"/>
+      </a:fillRef>
+      <a:effectRef idx="2">
+        <a:scrgbClr r="0" g="0" b="0"/>
+      </a:effectRef>
+      <a:fontRef idx="minor"/>
+    </dgm:style>
+  </dgm:styleLbl>
+  <dgm:styleLbl name="bgImgPlace1">
+    <dgm:scene3d>
+      <a:camera prst="orthographicFront"/>
+      <a:lightRig rig="threePt" dir="t"/>
+    </dgm:scene3d>
+    <dgm:sp3d/>
+    <dgm:txPr/>
+    <dgm:style>
+      <a:lnRef idx="0">
+        <a:scrgbClr r="0" g="0" b="0"/>
+      </a:lnRef>
+      <a:fillRef idx="1">
+        <a:scrgbClr r="0" g="0" b="0"/>
+      </a:fillRef>
+      <a:effectRef idx="2">
+        <a:scrgbClr r="0" g="0" b="0"/>
+      </a:effectRef>
+      <a:fontRef idx="minor"/>
+    </dgm:style>
+  </dgm:styleLbl>
+  <dgm:styleLbl name="sibTrans2D1">
+    <dgm:scene3d>
+      <a:camera prst="orthographicFront"/>
+      <a:lightRig rig="threePt" dir="t"/>
+    </dgm:scene3d>
+    <dgm:sp3d/>
+    <dgm:txPr/>
+    <dgm:style>
+      <a:lnRef idx="0">
+        <a:scrgbClr r="0" g="0" b="0"/>
+      </a:lnRef>
+      <a:fillRef idx="3">
+        <a:scrgbClr r="0" g="0" b="0"/>
+      </a:fillRef>
+      <a:effectRef idx="2">
+        <a:scrgbClr r="0" g="0" b="0"/>
+      </a:effectRef>
+      <a:fontRef idx="minor">
+        <a:schemeClr val="lt1"/>
+      </a:fontRef>
+    </dgm:style>
+  </dgm:styleLbl>
+  <dgm:styleLbl name="fgSibTrans2D1">
+    <dgm:scene3d>
+      <a:camera prst="orthographicFront"/>
+      <a:lightRig rig="threePt" dir="t"/>
+    </dgm:scene3d>
+    <dgm:sp3d/>
+    <dgm:txPr/>
+    <dgm:style>
+      <a:lnRef idx="0">
+        <a:scrgbClr r="0" g="0" b="0"/>
+      </a:lnRef>
+      <a:fillRef idx="3">
+        <a:scrgbClr r="0" g="0" b="0"/>
+      </a:fillRef>
+      <a:effectRef idx="2">
+        <a:scrgbClr r="0" g="0" b="0"/>
+      </a:effectRef>
+      <a:fontRef idx="minor">
+        <a:schemeClr val="lt1"/>
+      </a:fontRef>
+    </dgm:style>
+  </dgm:styleLbl>
+  <dgm:styleLbl name="bgSibTrans2D1">
+    <dgm:scene3d>
+      <a:camera prst="orthographicFront"/>
+      <a:lightRig rig="threePt" dir="t"/>
+    </dgm:scene3d>
+    <dgm:sp3d/>
+    <dgm:txPr/>
+    <dgm:style>
+      <a:lnRef idx="0">
+        <a:scrgbClr r="0" g="0" b="0"/>
+      </a:lnRef>
+      <a:fillRef idx="3">
+        <a:scrgbClr r="0" g="0" b="0"/>
+      </a:fillRef>
+      <a:effectRef idx="2">
+        <a:scrgbClr r="0" g="0" b="0"/>
+      </a:effectRef>
+      <a:fontRef idx="minor">
+        <a:schemeClr val="lt1"/>
+      </a:fontRef>
+    </dgm:style>
+  </dgm:styleLbl>
+  <dgm:styleLbl name="sibTrans1D1">
+    <dgm:scene3d>
+      <a:camera prst="orthographicFront"/>
+      <a:lightRig rig="threePt" dir="t"/>
+    </dgm:scene3d>
+    <dgm:sp3d/>
+    <dgm:txPr/>
+    <dgm:style>
+      <a:lnRef idx="1">
+        <a:scrgbClr r="0" g="0" b="0"/>
+      </a:lnRef>
+      <a:fillRef idx="0">
+        <a:scrgbClr r="0" g="0" b="0"/>
+      </a:fillRef>
+      <a:effectRef idx="0">
+        <a:scrgbClr r="0" g="0" b="0"/>
+      </a:effectRef>
+      <a:fontRef idx="minor"/>
+    </dgm:style>
+  </dgm:styleLbl>
+  <dgm:styleLbl name="callout">
+    <dgm:scene3d>
+      <a:camera prst="orthographicFront"/>
+      <a:lightRig rig="threePt" dir="t"/>
+    </dgm:scene3d>
+    <dgm:sp3d/>
+    <dgm:txPr/>
+    <dgm:style>
+      <a:lnRef idx="2">
+        <a:scrgbClr r="0" g="0" b="0"/>
+      </a:lnRef>
+      <a:fillRef idx="1">
+        <a:scrgbClr r="0" g="0" b="0"/>
+      </a:fillRef>
+      <a:effectRef idx="1">
+        <a:scrgbClr r="0" g="0" b="0"/>
+      </a:effectRef>
+      <a:fontRef idx="minor"/>
+    </dgm:style>
+  </dgm:styleLbl>
+  <dgm:styleLbl name="asst0">
+    <dgm:scene3d>
+      <a:camera prst="orthographicFront"/>
+      <a:lightRig rig="threePt" dir="t"/>
+    </dgm:scene3d>
+    <dgm:sp3d/>
+    <dgm:txPr/>
+    <dgm:style>
+      <a:lnRef idx="0">
+        <a:scrgbClr r="0" g="0" b="0"/>
+      </a:lnRef>
+      <a:fillRef idx="3">
+        <a:scrgbClr r="0" g="0" b="0"/>
+      </a:fillRef>
+      <a:effectRef idx="2">
+        <a:scrgbClr r="0" g="0" b="0"/>
+      </a:effectRef>
+      <a:fontRef idx="minor">
+        <a:schemeClr val="lt1"/>
+      </a:fontRef>
+    </dgm:style>
+  </dgm:styleLbl>
+  <dgm:styleLbl name="asst1">
+    <dgm:scene3d>
+      <a:camera prst="orthographicFront"/>
+      <a:lightRig rig="threePt" dir="t"/>
+    </dgm:scene3d>
+    <dgm:sp3d/>
+    <dgm:txPr/>
+    <dgm:style>
+      <a:lnRef idx="0">
+        <a:scrgbClr r="0" g="0" b="0"/>
+      </a:lnRef>
+      <a:fillRef idx="3">
+        <a:scrgbClr r="0" g="0" b="0"/>
+      </a:fillRef>
+      <a:effectRef idx="2">
+        <a:scrgbClr r="0" g="0" b="0"/>
+      </a:effectRef>
+      <a:fontRef idx="minor">
+        <a:schemeClr val="lt1"/>
+      </a:fontRef>
+    </dgm:style>
+  </dgm:styleLbl>
+  <dgm:styleLbl name="asst2">
+    <dgm:scene3d>
+      <a:camera prst="orthographicFront"/>
+      <a:lightRig rig="threePt" dir="t"/>
+    </dgm:scene3d>
+    <dgm:sp3d/>
+    <dgm:txPr/>
+    <dgm:style>
+      <a:lnRef idx="0">
+        <a:scrgbClr r="0" g="0" b="0"/>
+      </a:lnRef>
+      <a:fillRef idx="3">
+        <a:scrgbClr r="0" g="0" b="0"/>
+      </a:fillRef>
+      <a:effectRef idx="2">
+        <a:scrgbClr r="0" g="0" b="0"/>
+      </a:effectRef>
+      <a:fontRef idx="minor">
+        <a:schemeClr val="lt1"/>
+      </a:fontRef>
+    </dgm:style>
+  </dgm:styleLbl>
+  <dgm:styleLbl name="asst3">
+    <dgm:scene3d>
+      <a:camera prst="orthographicFront"/>
+      <a:lightRig rig="threePt" dir="t"/>
+    </dgm:scene3d>
+    <dgm:sp3d/>
+    <dgm:txPr/>
+    <dgm:style>
+      <a:lnRef idx="0">
+        <a:scrgbClr r="0" g="0" b="0"/>
+      </a:lnRef>
+      <a:fillRef idx="3">
+        <a:scrgbClr r="0" g="0" b="0"/>
+      </a:fillRef>
+      <a:effectRef idx="2">
+        <a:scrgbClr r="0" g="0" b="0"/>
+      </a:effectRef>
+      <a:fontRef idx="minor">
+        <a:schemeClr val="lt1"/>
+      </a:fontRef>
+    </dgm:style>
+  </dgm:styleLbl>
+  <dgm:styleLbl name="asst4">
+    <dgm:scene3d>
+      <a:camera prst="orthographicFront"/>
+      <a:lightRig rig="threePt" dir="t"/>
+    </dgm:scene3d>
+    <dgm:sp3d/>
+    <dgm:txPr/>
+    <dgm:style>
+      <a:lnRef idx="0">
+        <a:scrgbClr r="0" g="0" b="0"/>
+      </a:lnRef>
+      <a:fillRef idx="3">
+        <a:scrgbClr r="0" g="0" b="0"/>
+      </a:fillRef>
+      <a:effectRef idx="2">
+        <a:scrgbClr r="0" g="0" b="0"/>
+      </a:effectRef>
+      <a:fontRef idx="minor">
+        <a:schemeClr val="lt1"/>
+      </a:fontRef>
+    </dgm:style>
+  </dgm:styleLbl>
+  <dgm:styleLbl name="parChTrans2D1">
+    <dgm:scene3d>
+      <a:camera prst="orthographicFront"/>
+      <a:lightRig rig="threePt" dir="t"/>
+    </dgm:scene3d>
+    <dgm:sp3d/>
+    <dgm:txPr/>
+    <dgm:style>
+      <a:lnRef idx="0">
+        <a:scrgbClr r="0" g="0" b="0"/>
+      </a:lnRef>
+      <a:fillRef idx="3">
+        <a:scrgbClr r="0" g="0" b="0"/>
+      </a:fillRef>
+      <a:effectRef idx="2">
+        <a:scrgbClr r="0" g="0" b="0"/>
+      </a:effectRef>
+      <a:fontRef idx="minor">
+        <a:schemeClr val="lt1"/>
+      </a:fontRef>
+    </dgm:style>
+  </dgm:styleLbl>
+  <dgm:styleLbl name="parChTrans2D2">
+    <dgm:scene3d>
+      <a:camera prst="orthographicFront"/>
+      <a:lightRig rig="threePt" dir="t"/>
+    </dgm:scene3d>
+    <dgm:sp3d/>
+    <dgm:txPr/>
+    <dgm:style>
+      <a:lnRef idx="0">
+        <a:scrgbClr r="0" g="0" b="0"/>
+      </a:lnRef>
+      <a:fillRef idx="3">
+        <a:scrgbClr r="0" g="0" b="0"/>
+      </a:fillRef>
+      <a:effectRef idx="2">
+        <a:scrgbClr r="0" g="0" b="0"/>
+      </a:effectRef>
+      <a:fontRef idx="minor">
+        <a:schemeClr val="lt1"/>
+      </a:fontRef>
+    </dgm:style>
+  </dgm:styleLbl>
+  <dgm:styleLbl name="parChTrans2D3">
+    <dgm:scene3d>
+      <a:camera prst="orthographicFront"/>
+      <a:lightRig rig="threePt" dir="t"/>
+    </dgm:scene3d>
+    <dgm:sp3d/>
+    <dgm:txPr/>
+    <dgm:style>
+      <a:lnRef idx="1">
+        <a:scrgbClr r="0" g="0" b="0"/>
+      </a:lnRef>
+      <a:fillRef idx="3">
+        <a:scrgbClr r="0" g="0" b="0"/>
+      </a:fillRef>
+      <a:effectRef idx="2">
+        <a:scrgbClr r="0" g="0" b="0"/>
+      </a:effectRef>
+      <a:fontRef idx="minor">
+        <a:schemeClr val="lt1"/>
+      </a:fontRef>
+    </dgm:style>
+  </dgm:styleLbl>
+  <dgm:styleLbl name="parChTrans2D4">
+    <dgm:scene3d>
+      <a:camera prst="orthographicFront"/>
+      <a:lightRig rig="threePt" dir="t"/>
+    </dgm:scene3d>
+    <dgm:sp3d/>
+    <dgm:txPr/>
+    <dgm:style>
+      <a:lnRef idx="1">
+        <a:scrgbClr r="0" g="0" b="0"/>
+      </a:lnRef>
+      <a:fillRef idx="3">
+        <a:scrgbClr r="0" g="0" b="0"/>
+      </a:fillRef>
+      <a:effectRef idx="2">
+        <a:scrgbClr r="0" g="0" b="0"/>
+      </a:effectRef>
+      <a:fontRef idx="minor">
+        <a:schemeClr val="lt1"/>
+      </a:fontRef>
+    </dgm:style>
+  </dgm:styleLbl>
+  <dgm:styleLbl name="parChTrans1D1">
+    <dgm:scene3d>
+      <a:camera prst="orthographicFront"/>
+      <a:lightRig rig="threePt" dir="t"/>
+    </dgm:scene3d>
+    <dgm:sp3d/>
+    <dgm:txPr/>
+    <dgm:style>
+      <a:lnRef idx="1">
+        <a:scrgbClr r="0" g="0" b="0"/>
+      </a:lnRef>
+      <a:fillRef idx="0">
+        <a:scrgbClr r="0" g="0" b="0"/>
+      </a:fillRef>
+      <a:effectRef idx="0">
+        <a:scrgbClr r="0" g="0" b="0"/>
+      </a:effectRef>
+      <a:fontRef idx="minor"/>
+    </dgm:style>
+  </dgm:styleLbl>
+  <dgm:styleLbl name="parChTrans1D2">
+    <dgm:scene3d>
+      <a:camera prst="orthographicFront"/>
+      <a:lightRig rig="threePt" dir="t"/>
+    </dgm:scene3d>
+    <dgm:sp3d/>
+    <dgm:txPr/>
+    <dgm:style>
+      <a:lnRef idx="1">
+        <a:scrgbClr r="0" g="0" b="0"/>
+      </a:lnRef>
+      <a:fillRef idx="0">
+        <a:scrgbClr r="0" g="0" b="0"/>
+      </a:fillRef>
+      <a:effectRef idx="0">
+        <a:scrgbClr r="0" g="0" b="0"/>
+      </a:effectRef>
+      <a:fontRef idx="minor"/>
+    </dgm:style>
+  </dgm:styleLbl>
+  <dgm:styleLbl name="parChTrans1D3">
+    <dgm:scene3d>
+      <a:camera prst="orthographicFront"/>
+      <a:lightRig rig="threePt" dir="t"/>
+    </dgm:scene3d>
+    <dgm:sp3d/>
+    <dgm:txPr/>
+    <dgm:style>
+      <a:lnRef idx="1">
+        <a:scrgbClr r="0" g="0" b="0"/>
+      </a:lnRef>
+      <a:fillRef idx="0">
+        <a:scrgbClr r="0" g="0" b="0"/>
+      </a:fillRef>
+      <a:effectRef idx="0">
+        <a:scrgbClr r="0" g="0" b="0"/>
+      </a:effectRef>
+      <a:fontRef idx="minor"/>
+    </dgm:style>
+  </dgm:styleLbl>
+  <dgm:styleLbl name="parChTrans1D4">
+    <dgm:scene3d>
+      <a:camera prst="orthographicFront"/>
+      <a:lightRig rig="threePt" dir="t"/>
+    </dgm:scene3d>
+    <dgm:sp3d/>
+    <dgm:txPr/>
+    <dgm:style>
+      <a:lnRef idx="1">
+        <a:scrgbClr r="0" g="0" b="0"/>
+      </a:lnRef>
+      <a:fillRef idx="0">
+        <a:scrgbClr r="0" g="0" b="0"/>
+      </a:fillRef>
+      <a:effectRef idx="0">
+        <a:scrgbClr r="0" g="0" b="0"/>
+      </a:effectRef>
+      <a:fontRef idx="minor"/>
+    </dgm:style>
+  </dgm:styleLbl>
+  <dgm:styleLbl name="fgAcc1">
+    <dgm:scene3d>
+      <a:camera prst="orthographicFront"/>
+      <a:lightRig rig="threePt" dir="t"/>
+    </dgm:scene3d>
+    <dgm:sp3d/>
+    <dgm:txPr/>
+    <dgm:style>
+      <a:lnRef idx="1">
+        <a:scrgbClr r="0" g="0" b="0"/>
+      </a:lnRef>
+      <a:fillRef idx="1">
+        <a:scrgbClr r="0" g="0" b="0"/>
+      </a:fillRef>
+      <a:effectRef idx="0">
+        <a:scrgbClr r="0" g="0" b="0"/>
+      </a:effectRef>
+      <a:fontRef idx="minor"/>
+    </dgm:style>
+  </dgm:styleLbl>
+  <dgm:styleLbl name="conFgAcc1">
+    <dgm:scene3d>
+      <a:camera prst="orthographicFront"/>
+      <a:lightRig rig="threePt" dir="t"/>
+    </dgm:scene3d>
+    <dgm:sp3d/>
+    <dgm:txPr/>
+    <dgm:style>
+      <a:lnRef idx="1">
+        <a:scrgbClr r="0" g="0" b="0"/>
+      </a:lnRef>
+      <a:fillRef idx="1">
+        <a:scrgbClr r="0" g="0" b="0"/>
+      </a:fillRef>
+      <a:effectRef idx="0">
+        <a:scrgbClr r="0" g="0" b="0"/>
+      </a:effectRef>
+      <a:fontRef idx="minor"/>
+    </dgm:style>
+  </dgm:styleLbl>
+  <dgm:styleLbl name="alignAcc1">
+    <dgm:scene3d>
+      <a:camera prst="orthographicFront"/>
+      <a:lightRig rig="threePt" dir="t"/>
+    </dgm:scene3d>
+    <dgm:sp3d/>
+    <dgm:txPr/>
+    <dgm:style>
+      <a:lnRef idx="1">
+        <a:scrgbClr r="0" g="0" b="0"/>
+      </a:lnRef>
+      <a:fillRef idx="1">
+        <a:scrgbClr r="0" g="0" b="0"/>
+      </a:fillRef>
+      <a:effectRef idx="0">
+        <a:scrgbClr r="0" g="0" b="0"/>
+      </a:effectRef>
+      <a:fontRef idx="minor"/>
+    </dgm:style>
+  </dgm:styleLbl>
+  <dgm:styleLbl name="trAlignAcc1">
+    <dgm:scene3d>
+      <a:camera prst="orthographicFront"/>
+      <a:lightRig rig="threePt" dir="t"/>
+    </dgm:scene3d>
+    <dgm:sp3d/>
+    <dgm:txPr/>
+    <dgm:style>
+      <a:lnRef idx="1">
+        <a:scrgbClr r="0" g="0" b="0"/>
+      </a:lnRef>
+      <a:fillRef idx="1">
+        <a:scrgbClr r="0" g="0" b="0"/>
+      </a:fillRef>
+      <a:effectRef idx="0">
+        <a:scrgbClr r="0" g="0" b="0"/>
+      </a:effectRef>
+      <a:fontRef idx="minor"/>
+    </dgm:style>
+  </dgm:styleLbl>
+  <dgm:styleLbl name="bgAcc1">
+    <dgm:scene3d>
+      <a:camera prst="orthographicFront"/>
+      <a:lightRig rig="threePt" dir="t"/>
+    </dgm:scene3d>
+    <dgm:sp3d/>
+    <dgm:txPr/>
+    <dgm:style>
+      <a:lnRef idx="1">
+        <a:scrgbClr r="0" g="0" b="0"/>
+      </a:lnRef>
+      <a:fillRef idx="1">
+        <a:scrgbClr r="0" g="0" b="0"/>
+      </a:fillRef>
+      <a:effectRef idx="0">
+        <a:scrgbClr r="0" g="0" b="0"/>
+      </a:effectRef>
+      <a:fontRef idx="minor"/>
+    </dgm:style>
+  </dgm:styleLbl>
+  <dgm:styleLbl name="solidFgAcc1">
+    <dgm:scene3d>
+      <a:camera prst="orthographicFront"/>
+      <a:lightRig rig="threePt" dir="t"/>
+    </dgm:scene3d>
+    <dgm:sp3d/>
+    <dgm:txPr/>
+    <dgm:style>
+      <a:lnRef idx="1">
+        <a:scrgbClr r="0" g="0" b="0"/>
+      </a:lnRef>
+      <a:fillRef idx="1">
+        <a:scrgbClr r="0" g="0" b="0"/>
+      </a:fillRef>
+      <a:effectRef idx="0">
+        <a:scrgbClr r="0" g="0" b="0"/>
+      </a:effectRef>
+      <a:fontRef idx="minor"/>
+    </dgm:style>
+  </dgm:styleLbl>
+  <dgm:styleLbl name="solidAlignAcc1">
+    <dgm:scene3d>
+      <a:camera prst="orthographicFront"/>
+      <a:lightRig rig="threePt" dir="t"/>
+    </dgm:scene3d>
+    <dgm:sp3d/>
+    <dgm:txPr/>
+    <dgm:style>
+      <a:lnRef idx="1">
+        <a:scrgbClr r="0" g="0" b="0"/>
+      </a:lnRef>
+      <a:fillRef idx="1">
+        <a:scrgbClr r="0" g="0" b="0"/>
+      </a:fillRef>
+      <a:effectRef idx="0">
+        <a:scrgbClr r="0" g="0" b="0"/>
+      </a:effectRef>
+      <a:fontRef idx="minor"/>
+    </dgm:style>
+  </dgm:styleLbl>
+  <dgm:styleLbl name="solidBgAcc1">
+    <dgm:scene3d>
+      <a:camera prst="orthographicFront"/>
+      <a:lightRig rig="threePt" dir="t"/>
+    </dgm:scene3d>
+    <dgm:sp3d/>
+    <dgm:txPr/>
+    <dgm:style>
+      <a:lnRef idx="1">
+        <a:scrgbClr r="0" g="0" b="0"/>
+      </a:lnRef>
+      <a:fillRef idx="1">
+        <a:scrgbClr r="0" g="0" b="0"/>
+      </a:fillRef>
+      <a:effectRef idx="0">
+        <a:scrgbClr r="0" g="0" b="0"/>
+      </a:effectRef>
+      <a:fontRef idx="minor"/>
+    </dgm:style>
+  </dgm:styleLbl>
+  <dgm:styleLbl name="fgAccFollowNode1">
+    <dgm:scene3d>
+      <a:camera prst="orthographicFront"/>
+      <a:lightRig rig="threePt" dir="t"/>
+    </dgm:scene3d>
+    <dgm:sp3d/>
+    <dgm:txPr/>
+    <dgm:style>
+      <a:lnRef idx="1">
+        <a:scrgbClr r="0" g="0" b="0"/>
+      </a:lnRef>
+      <a:fillRef idx="1">
+        <a:scrgbClr r="0" g="0" b="0"/>
+      </a:fillRef>
+      <a:effectRef idx="0">
+        <a:scrgbClr r="0" g="0" b="0"/>
+      </a:effectRef>
+      <a:fontRef idx="minor"/>
+    </dgm:style>
+  </dgm:styleLbl>
+  <dgm:styleLbl name="alignAccFollowNode1">
+    <dgm:scene3d>
+      <a:camera prst="orthographicFront"/>
+      <a:lightRig rig="threePt" dir="t"/>
+    </dgm:scene3d>
+    <dgm:sp3d/>
+    <dgm:txPr/>
+    <dgm:style>
+      <a:lnRef idx="1">
+        <a:scrgbClr r="0" g="0" b="0"/>
+      </a:lnRef>
+      <a:fillRef idx="1">
+        <a:scrgbClr r="0" g="0" b="0"/>
+      </a:fillRef>
+      <a:effectRef idx="0">
+        <a:scrgbClr r="0" g="0" b="0"/>
+      </a:effectRef>
+      <a:fontRef idx="minor"/>
+    </dgm:style>
+  </dgm:styleLbl>
+  <dgm:styleLbl name="bgAccFollowNode1">
+    <dgm:scene3d>
+      <a:camera prst="orthographicFront"/>
+      <a:lightRig rig="threePt" dir="t"/>
+    </dgm:scene3d>
+    <dgm:sp3d/>
+    <dgm:txPr/>
+    <dgm:style>
+      <a:lnRef idx="1">
+        <a:scrgbClr r="0" g="0" b="0"/>
+      </a:lnRef>
+      <a:fillRef idx="1">
+        <a:scrgbClr r="0" g="0" b="0"/>
+      </a:fillRef>
+      <a:effectRef idx="0">
+        <a:scrgbClr r="0" g="0" b="0"/>
+      </a:effectRef>
+      <a:fontRef idx="minor"/>
+    </dgm:style>
+  </dgm:styleLbl>
+  <dgm:styleLbl name="fgAcc0">
+    <dgm:scene3d>
+      <a:camera prst="orthographicFront"/>
+      <a:lightRig rig="threePt" dir="t"/>
+    </dgm:scene3d>
+    <dgm:sp3d/>
+    <dgm:txPr/>
+    <dgm:style>
+      <a:lnRef idx="1">
+        <a:scrgbClr r="0" g="0" b="0"/>
+      </a:lnRef>
+      <a:fillRef idx="1">
+        <a:scrgbClr r="0" g="0" b="0"/>
+      </a:fillRef>
+      <a:effectRef idx="0">
+        <a:scrgbClr r="0" g="0" b="0"/>
+      </a:effectRef>
+      <a:fontRef idx="minor"/>
+    </dgm:style>
+  </dgm:styleLbl>
+  <dgm:styleLbl name="fgAcc2">
+    <dgm:scene3d>
+      <a:camera prst="orthographicFront"/>
+      <a:lightRig rig="threePt" dir="t"/>
+    </dgm:scene3d>
+    <dgm:sp3d/>
+    <dgm:txPr/>
+    <dgm:style>
+      <a:lnRef idx="1">
+        <a:scrgbClr r="0" g="0" b="0"/>
+      </a:lnRef>
+      <a:fillRef idx="1">
+        <a:scrgbClr r="0" g="0" b="0"/>
+      </a:fillRef>
+      <a:effectRef idx="0">
+        <a:scrgbClr r="0" g="0" b="0"/>
+      </a:effectRef>
+      <a:fontRef idx="minor"/>
+    </dgm:style>
+  </dgm:styleLbl>
+  <dgm:styleLbl name="fgAcc3">
+    <dgm:scene3d>
+      <a:camera prst="orthographicFront"/>
+      <a:lightRig rig="threePt" dir="t"/>
+    </dgm:scene3d>
+    <dgm:sp3d/>
+    <dgm:txPr/>
+    <dgm:style>
+      <a:lnRef idx="1">
+        <a:scrgbClr r="0" g="0" b="0"/>
+      </a:lnRef>
+      <a:fillRef idx="1">
+        <a:scrgbClr r="0" g="0" b="0"/>
+      </a:fillRef>
+      <a:effectRef idx="0">
+        <a:scrgbClr r="0" g="0" b="0"/>
+      </a:effectRef>
+      <a:fontRef idx="minor"/>
+    </dgm:style>
+  </dgm:styleLbl>
+  <dgm:styleLbl name="fgAcc4">
+    <dgm:scene3d>
+      <a:camera prst="orthographicFront"/>
+      <a:lightRig rig="threePt" dir="t"/>
+    </dgm:scene3d>
+    <dgm:sp3d/>
+    <dgm:txPr/>
+    <dgm:style>
+      <a:lnRef idx="1">
+        <a:scrgbClr r="0" g="0" b="0"/>
+      </a:lnRef>
+      <a:fillRef idx="1">
+        <a:scrgbClr r="0" g="0" b="0"/>
+      </a:fillRef>
+      <a:effectRef idx="0">
+        <a:scrgbClr r="0" g="0" b="0"/>
+      </a:effectRef>
+      <a:fontRef idx="minor"/>
+    </dgm:style>
+  </dgm:styleLbl>
+  <dgm:styleLbl name="bgShp">
+    <dgm:scene3d>
+      <a:camera prst="orthographicFront"/>
+      <a:lightRig rig="threePt" dir="t"/>
+    </dgm:scene3d>
+    <dgm:sp3d/>
+    <dgm:txPr/>
+    <dgm:style>
+      <a:lnRef idx="0">
+        <a:scrgbClr r="0" g="0" b="0"/>
+      </a:lnRef>
+      <a:fillRef idx="1">
+        <a:scrgbClr r="0" g="0" b="0"/>
+      </a:fillRef>
+      <a:effectRef idx="2">
+        <a:scrgbClr r="0" g="0" b="0"/>
+      </a:effectRef>
+      <a:fontRef idx="minor"/>
+    </dgm:style>
+  </dgm:styleLbl>
+  <dgm:styleLbl name="dkBgShp">
+    <dgm:scene3d>
+      <a:camera prst="orthographicFront"/>
+      <a:lightRig rig="threePt" dir="t"/>
+    </dgm:scene3d>
+    <dgm:sp3d/>
+    <dgm:txPr/>
+    <dgm:style>
+      <a:lnRef idx="0">
+        <a:scrgbClr r="0" g="0" b="0"/>
+      </a:lnRef>
+      <a:fillRef idx="1">
+        <a:scrgbClr r="0" g="0" b="0"/>
+      </a:fillRef>
+      <a:effectRef idx="2">
+        <a:scrgbClr r="0" g="0" b="0"/>
+      </a:effectRef>
+      <a:fontRef idx="minor"/>
+    </dgm:style>
+  </dgm:styleLbl>
+  <dgm:styleLbl name="trBgShp">
+    <dgm:scene3d>
+      <a:camera prst="orthographicFront"/>
+      <a:lightRig rig="threePt" dir="t"/>
+    </dgm:scene3d>
+    <dgm:sp3d/>
+    <dgm:txPr/>
+    <dgm:style>
+      <a:lnRef idx="0">
+        <a:scrgbClr r="0" g="0" b="0"/>
+      </a:lnRef>
+      <a:fillRef idx="1">
+        <a:scrgbClr r="0" g="0" b="0"/>
+      </a:fillRef>
+      <a:effectRef idx="0">
+        <a:scrgbClr r="0" g="0" b="0"/>
+      </a:effectRef>
+      <a:fontRef idx="minor"/>
+    </dgm:style>
+  </dgm:styleLbl>
+  <dgm:styleLbl name="fgShp">
+    <dgm:scene3d>
+      <a:camera prst="orthographicFront"/>
+      <a:lightRig rig="threePt" dir="t"/>
+    </dgm:scene3d>
+    <dgm:sp3d/>
+    <dgm:txPr/>
+    <dgm:style>
+      <a:lnRef idx="0">
+        <a:scrgbClr r="0" g="0" b="0"/>
+      </a:lnRef>
+      <a:fillRef idx="3">
+        <a:scrgbClr r="0" g="0" b="0"/>
+      </a:fillRef>
+      <a:effectRef idx="2">
         <a:scrgbClr r="0" g="0" b="0"/>
       </a:effectRef>
       <a:fontRef idx="minor"/>
@@ -3551,7 +6890,7 @@
           <a:p>
             <a:fld id="{9884AE41-8EDF-47E8-B64C-F9046FF5481A}" type="datetimeFigureOut">
               <a:rPr lang="en-US" smtClean="0"/>
-              <a:t>9/14/2025</a:t>
+              <a:t>9/16/2025</a:t>
             </a:fld>
             <a:endParaRPr lang="en-US"/>
           </a:p>
@@ -3749,7 +7088,7 @@
           <a:p>
             <a:fld id="{9884AE41-8EDF-47E8-B64C-F9046FF5481A}" type="datetimeFigureOut">
               <a:rPr lang="en-US" smtClean="0"/>
-              <a:t>9/14/2025</a:t>
+              <a:t>9/16/2025</a:t>
             </a:fld>
             <a:endParaRPr lang="en-US"/>
           </a:p>
@@ -3957,7 +7296,7 @@
           <a:p>
             <a:fld id="{9884AE41-8EDF-47E8-B64C-F9046FF5481A}" type="datetimeFigureOut">
               <a:rPr lang="en-US" smtClean="0"/>
-              <a:t>9/14/2025</a:t>
+              <a:t>9/16/2025</a:t>
             </a:fld>
             <a:endParaRPr lang="en-US"/>
           </a:p>
@@ -4177,7 +7516,7 @@
           <a:p>
             <a:fld id="{5C041930-F8FC-4542-827E-E504F4750562}" type="datetimeFigureOut">
               <a:rPr lang="en-US" smtClean="0"/>
-              <a:t>9/14/2025</a:t>
+              <a:t>9/16/2025</a:t>
             </a:fld>
             <a:endParaRPr lang="en-US"/>
           </a:p>
@@ -4375,7 +7714,7 @@
           <a:p>
             <a:fld id="{5C041930-F8FC-4542-827E-E504F4750562}" type="datetimeFigureOut">
               <a:rPr lang="en-US" smtClean="0"/>
-              <a:t>9/14/2025</a:t>
+              <a:t>9/16/2025</a:t>
             </a:fld>
             <a:endParaRPr lang="en-US"/>
           </a:p>
@@ -4650,7 +7989,7 @@
           <a:p>
             <a:fld id="{5C041930-F8FC-4542-827E-E504F4750562}" type="datetimeFigureOut">
               <a:rPr lang="en-US" smtClean="0"/>
-              <a:t>9/14/2025</a:t>
+              <a:t>9/16/2025</a:t>
             </a:fld>
             <a:endParaRPr lang="en-US"/>
           </a:p>
@@ -4915,7 +8254,7 @@
           <a:p>
             <a:fld id="{5C041930-F8FC-4542-827E-E504F4750562}" type="datetimeFigureOut">
               <a:rPr lang="en-US" smtClean="0"/>
-              <a:t>9/14/2025</a:t>
+              <a:t>9/16/2025</a:t>
             </a:fld>
             <a:endParaRPr lang="en-US"/>
           </a:p>
@@ -5327,7 +8666,7 @@
           <a:p>
             <a:fld id="{5C041930-F8FC-4542-827E-E504F4750562}" type="datetimeFigureOut">
               <a:rPr lang="en-US" smtClean="0"/>
-              <a:t>9/14/2025</a:t>
+              <a:t>9/16/2025</a:t>
             </a:fld>
             <a:endParaRPr lang="en-US"/>
           </a:p>
@@ -5468,7 +8807,7 @@
           <a:p>
             <a:fld id="{5C041930-F8FC-4542-827E-E504F4750562}" type="datetimeFigureOut">
               <a:rPr lang="en-US" smtClean="0"/>
-              <a:t>9/14/2025</a:t>
+              <a:t>9/16/2025</a:t>
             </a:fld>
             <a:endParaRPr lang="en-US"/>
           </a:p>
@@ -5581,7 +8920,7 @@
           <a:p>
             <a:fld id="{5C041930-F8FC-4542-827E-E504F4750562}" type="datetimeFigureOut">
               <a:rPr lang="en-US" smtClean="0"/>
-              <a:t>9/14/2025</a:t>
+              <a:t>9/16/2025</a:t>
             </a:fld>
             <a:endParaRPr lang="en-US"/>
           </a:p>
@@ -5892,7 +9231,7 @@
           <a:p>
             <a:fld id="{5C041930-F8FC-4542-827E-E504F4750562}" type="datetimeFigureOut">
               <a:rPr lang="en-US" smtClean="0"/>
-              <a:t>9/14/2025</a:t>
+              <a:t>9/16/2025</a:t>
             </a:fld>
             <a:endParaRPr lang="en-US"/>
           </a:p>
@@ -6090,7 +9429,7 @@
           <a:p>
             <a:fld id="{9884AE41-8EDF-47E8-B64C-F9046FF5481A}" type="datetimeFigureOut">
               <a:rPr lang="en-US" smtClean="0"/>
-              <a:t>9/14/2025</a:t>
+              <a:t>9/16/2025</a:t>
             </a:fld>
             <a:endParaRPr lang="en-US"/>
           </a:p>
@@ -6378,7 +9717,7 @@
           <a:p>
             <a:fld id="{5C041930-F8FC-4542-827E-E504F4750562}" type="datetimeFigureOut">
               <a:rPr lang="en-US" smtClean="0"/>
-              <a:t>9/14/2025</a:t>
+              <a:t>9/16/2025</a:t>
             </a:fld>
             <a:endParaRPr lang="en-US"/>
           </a:p>
@@ -6576,7 +9915,7 @@
           <a:p>
             <a:fld id="{5C041930-F8FC-4542-827E-E504F4750562}" type="datetimeFigureOut">
               <a:rPr lang="en-US" smtClean="0"/>
-              <a:t>9/14/2025</a:t>
+              <a:t>9/16/2025</a:t>
             </a:fld>
             <a:endParaRPr lang="en-US"/>
           </a:p>
@@ -6784,7 +10123,7 @@
           <a:p>
             <a:fld id="{5C041930-F8FC-4542-827E-E504F4750562}" type="datetimeFigureOut">
               <a:rPr lang="en-US" smtClean="0"/>
-              <a:t>9/14/2025</a:t>
+              <a:t>9/16/2025</a:t>
             </a:fld>
             <a:endParaRPr lang="en-US"/>
           </a:p>
@@ -7059,7 +10398,7 @@
           <a:p>
             <a:fld id="{9884AE41-8EDF-47E8-B64C-F9046FF5481A}" type="datetimeFigureOut">
               <a:rPr lang="en-US" smtClean="0"/>
-              <a:t>9/14/2025</a:t>
+              <a:t>9/16/2025</a:t>
             </a:fld>
             <a:endParaRPr lang="en-US"/>
           </a:p>
@@ -7324,7 +10663,7 @@
           <a:p>
             <a:fld id="{9884AE41-8EDF-47E8-B64C-F9046FF5481A}" type="datetimeFigureOut">
               <a:rPr lang="en-US" smtClean="0"/>
-              <a:t>9/14/2025</a:t>
+              <a:t>9/16/2025</a:t>
             </a:fld>
             <a:endParaRPr lang="en-US"/>
           </a:p>
@@ -7736,7 +11075,7 @@
           <a:p>
             <a:fld id="{9884AE41-8EDF-47E8-B64C-F9046FF5481A}" type="datetimeFigureOut">
               <a:rPr lang="en-US" smtClean="0"/>
-              <a:t>9/14/2025</a:t>
+              <a:t>9/16/2025</a:t>
             </a:fld>
             <a:endParaRPr lang="en-US"/>
           </a:p>
@@ -7877,7 +11216,7 @@
           <a:p>
             <a:fld id="{9884AE41-8EDF-47E8-B64C-F9046FF5481A}" type="datetimeFigureOut">
               <a:rPr lang="en-US" smtClean="0"/>
-              <a:t>9/14/2025</a:t>
+              <a:t>9/16/2025</a:t>
             </a:fld>
             <a:endParaRPr lang="en-US"/>
           </a:p>
@@ -7990,7 +11329,7 @@
           <a:p>
             <a:fld id="{9884AE41-8EDF-47E8-B64C-F9046FF5481A}" type="datetimeFigureOut">
               <a:rPr lang="en-US" smtClean="0"/>
-              <a:t>9/14/2025</a:t>
+              <a:t>9/16/2025</a:t>
             </a:fld>
             <a:endParaRPr lang="en-US"/>
           </a:p>
@@ -8301,7 +11640,7 @@
           <a:p>
             <a:fld id="{9884AE41-8EDF-47E8-B64C-F9046FF5481A}" type="datetimeFigureOut">
               <a:rPr lang="en-US" smtClean="0"/>
-              <a:t>9/14/2025</a:t>
+              <a:t>9/16/2025</a:t>
             </a:fld>
             <a:endParaRPr lang="en-US"/>
           </a:p>
@@ -8589,7 +11928,7 @@
           <a:p>
             <a:fld id="{9884AE41-8EDF-47E8-B64C-F9046FF5481A}" type="datetimeFigureOut">
               <a:rPr lang="en-US" smtClean="0"/>
-              <a:t>9/14/2025</a:t>
+              <a:t>9/16/2025</a:t>
             </a:fld>
             <a:endParaRPr lang="en-US"/>
           </a:p>
@@ -8830,7 +12169,7 @@
           <a:p>
             <a:fld id="{9884AE41-8EDF-47E8-B64C-F9046FF5481A}" type="datetimeFigureOut">
               <a:rPr lang="en-US" smtClean="0"/>
-              <a:t>9/14/2025</a:t>
+              <a:t>9/16/2025</a:t>
             </a:fld>
             <a:endParaRPr lang="en-US"/>
           </a:p>
@@ -9398,7 +12737,7 @@
           <a:p>
             <a:fld id="{5C041930-F8FC-4542-827E-E504F4750562}" type="datetimeFigureOut">
               <a:rPr lang="en-US" smtClean="0"/>
-              <a:t>9/14/2025</a:t>
+              <a:t>9/16/2025</a:t>
             </a:fld>
             <a:endParaRPr lang="en-US"/>
           </a:p>
@@ -12520,7 +15859,13 @@
   <p:cSld>
     <p:spTree>
       <p:nvGrpSpPr>
-        <p:cNvPr id="1" name=""/>
+        <p:cNvPr id="1" name="">
+          <a:extLst>
+            <a:ext uri="{FF2B5EF4-FFF2-40B4-BE49-F238E27FC236}">
+              <a16:creationId xmlns:a16="http://schemas.microsoft.com/office/drawing/2014/main" id="{7F38B559-AA3F-725B-0BC5-C2C084B646A6}"/>
+            </a:ext>
+          </a:extLst>
+        </p:cNvPr>
         <p:cNvGrpSpPr/>
         <p:nvPr/>
       </p:nvGrpSpPr>
@@ -12537,7 +15882,7 @@
           <p:cNvPr id="2" name="Title 1">
             <a:extLst>
               <a:ext uri="{FF2B5EF4-FFF2-40B4-BE49-F238E27FC236}">
-                <a16:creationId xmlns:a16="http://schemas.microsoft.com/office/drawing/2014/main" id="{E63FAA5A-37D9-74BF-E736-B01B8AF711FD}"/>
+                <a16:creationId xmlns:a16="http://schemas.microsoft.com/office/drawing/2014/main" id="{A85DAF7B-0C13-6F72-EE40-1CD937C97FDA}"/>
               </a:ext>
             </a:extLst>
           </p:cNvPr>
@@ -12548,7 +15893,12 @@
             <p:ph type="title"/>
           </p:nvPr>
         </p:nvSpPr>
-        <p:spPr/>
+        <p:spPr>
+          <a:xfrm>
+            <a:off x="163830" y="83707"/>
+            <a:ext cx="10515600" cy="827904"/>
+          </a:xfrm>
+        </p:spPr>
         <p:txBody>
           <a:bodyPr/>
           <a:lstStyle/>
@@ -12560,40 +15910,76 @@
           </a:p>
         </p:txBody>
       </p:sp>
-      <p:sp>
-        <p:nvSpPr>
-          <p:cNvPr id="3" name="Content Placeholder 2">
-            <a:extLst>
-              <a:ext uri="{FF2B5EF4-FFF2-40B4-BE49-F238E27FC236}">
-                <a16:creationId xmlns:a16="http://schemas.microsoft.com/office/drawing/2014/main" id="{0E49F7C0-68BD-7A1B-880A-099840BF0BA4}"/>
-              </a:ext>
-            </a:extLst>
-          </p:cNvPr>
-          <p:cNvSpPr>
-            <a:spLocks noGrp="1"/>
-          </p:cNvSpPr>
+      <p:pic>
+        <p:nvPicPr>
+          <p:cNvPr id="5" name="Content Placeholder 4" descr="A diagram of a network&#10;&#10;AI-generated content may be incorrect.">
+            <a:extLst>
+              <a:ext uri="{FF2B5EF4-FFF2-40B4-BE49-F238E27FC236}">
+                <a16:creationId xmlns:a16="http://schemas.microsoft.com/office/drawing/2014/main" id="{3E241356-B78B-5252-7E5A-A884C390E4F5}"/>
+              </a:ext>
+            </a:extLst>
+          </p:cNvPr>
+          <p:cNvPicPr>
+            <a:picLocks noGrp="1" noChangeAspect="1"/>
+          </p:cNvPicPr>
           <p:nvPr>
             <p:ph idx="1"/>
           </p:nvPr>
+        </p:nvPicPr>
+        <p:blipFill>
+          <a:blip r:embed="rId2">
+            <a:extLst>
+              <a:ext uri="{28A0092B-C50C-407E-A947-70E740481C1C}">
+                <a14:useLocalDpi xmlns:a14="http://schemas.microsoft.com/office/drawing/2010/main" val="0"/>
+              </a:ext>
+            </a:extLst>
+          </a:blip>
+          <a:stretch>
+            <a:fillRect/>
+          </a:stretch>
+        </p:blipFill>
+        <p:spPr>
+          <a:xfrm>
+            <a:off x="502355" y="1222058"/>
+            <a:ext cx="11187289" cy="5138283"/>
+          </a:xfrm>
+        </p:spPr>
+      </p:pic>
+      <p:sp>
+        <p:nvSpPr>
+          <p:cNvPr id="9" name="TextBox 8">
+            <a:extLst>
+              <a:ext uri="{FF2B5EF4-FFF2-40B4-BE49-F238E27FC236}">
+                <a16:creationId xmlns:a16="http://schemas.microsoft.com/office/drawing/2014/main" id="{2B739CF5-604C-AA0A-8597-82BD36389CEB}"/>
+              </a:ext>
+            </a:extLst>
+          </p:cNvPr>
+          <p:cNvSpPr txBox="1"/>
+          <p:nvPr/>
         </p:nvSpPr>
-        <p:spPr/>
+        <p:spPr>
+          <a:xfrm>
+            <a:off x="163830" y="743669"/>
+            <a:ext cx="8815618" cy="646331"/>
+          </a:xfrm>
+          <a:prstGeom prst="rect">
+            <a:avLst/>
+          </a:prstGeom>
+          <a:noFill/>
+        </p:spPr>
         <p:txBody>
-          <a:bodyPr/>
+          <a:bodyPr wrap="none" rtlCol="0">
+            <a:spAutoFit/>
+          </a:bodyPr>
           <a:lstStyle/>
           <a:p>
             <a:r>
               <a:rPr lang="en-US" dirty="0">
-                <a:hlinkClick r:id="rId2"/>
+                <a:hlinkClick r:id="rId3"/>
               </a:rPr>
-              <a:t>https://www.geeksforgeeks.org/dsa/</a:t>
+              <a:t>https://www.geeksforgeeks.org/dsa/prims-minimum-spanning-tree-mst-greedy-algo-5/</a:t>
             </a:r>
-            <a:r>
-              <a:rPr lang="en-US">
-                <a:hlinkClick r:id="rId2"/>
-              </a:rPr>
-              <a:t>prims-minimum-spanning-tree-mst-greedy-algo-5/</a:t>
-            </a:r>
-            <a:endParaRPr lang="en-US"/>
+            <a:endParaRPr lang="en-US" dirty="0"/>
           </a:p>
           <a:p>
             <a:endParaRPr lang="en-US" dirty="0"/>
@@ -12603,7 +15989,124 @@
     </p:spTree>
     <p:extLst>
       <p:ext uri="{BB962C8B-B14F-4D97-AF65-F5344CB8AC3E}">
-        <p14:creationId xmlns:p14="http://schemas.microsoft.com/office/powerpoint/2010/main" val="409665394"/>
+        <p14:creationId xmlns:p14="http://schemas.microsoft.com/office/powerpoint/2010/main" val="1517349084"/>
+      </p:ext>
+    </p:extLst>
+  </p:cSld>
+  <p:clrMapOvr>
+    <a:masterClrMapping/>
+  </p:clrMapOvr>
+</p:sld>
+</file>
+
+<file path=ppt/slides/slide19.xml><?xml version="1.0" encoding="utf-8"?>
+<p:sld xmlns:a="http://schemas.openxmlformats.org/drawingml/2006/main" xmlns:r="http://schemas.openxmlformats.org/officeDocument/2006/relationships" xmlns:p="http://schemas.openxmlformats.org/presentationml/2006/main">
+  <p:cSld>
+    <p:spTree>
+      <p:nvGrpSpPr>
+        <p:cNvPr id="1" name=""/>
+        <p:cNvGrpSpPr/>
+        <p:nvPr/>
+      </p:nvGrpSpPr>
+      <p:grpSpPr>
+        <a:xfrm>
+          <a:off x="0" y="0"/>
+          <a:ext cx="0" cy="0"/>
+          <a:chOff x="0" y="0"/>
+          <a:chExt cx="0" cy="0"/>
+        </a:xfrm>
+      </p:grpSpPr>
+      <p:pic>
+        <p:nvPicPr>
+          <p:cNvPr id="5" name="Content Placeholder 4" descr="A diagram of a algorithm&#10;&#10;AI-generated content may be incorrect.">
+            <a:extLst>
+              <a:ext uri="{FF2B5EF4-FFF2-40B4-BE49-F238E27FC236}">
+                <a16:creationId xmlns:a16="http://schemas.microsoft.com/office/drawing/2014/main" id="{ABB91611-D9A1-D71C-7445-9F8B6E5B2CFE}"/>
+              </a:ext>
+            </a:extLst>
+          </p:cNvPr>
+          <p:cNvPicPr>
+            <a:picLocks noGrp="1" noChangeAspect="1"/>
+          </p:cNvPicPr>
+          <p:nvPr>
+            <p:ph idx="1"/>
+          </p:nvPr>
+        </p:nvPicPr>
+        <p:blipFill>
+          <a:blip r:embed="rId2">
+            <a:extLst>
+              <a:ext uri="{28A0092B-C50C-407E-A947-70E740481C1C}">
+                <a14:useLocalDpi xmlns:a14="http://schemas.microsoft.com/office/drawing/2010/main" val="0"/>
+              </a:ext>
+            </a:extLst>
+          </a:blip>
+          <a:stretch>
+            <a:fillRect/>
+          </a:stretch>
+        </p:blipFill>
+        <p:spPr>
+          <a:xfrm>
+            <a:off x="202617" y="540543"/>
+            <a:ext cx="11786766" cy="5776913"/>
+          </a:xfrm>
+        </p:spPr>
+      </p:pic>
+      <p:sp>
+        <p:nvSpPr>
+          <p:cNvPr id="6" name="Rectangle 5">
+            <a:extLst>
+              <a:ext uri="{FF2B5EF4-FFF2-40B4-BE49-F238E27FC236}">
+                <a16:creationId xmlns:a16="http://schemas.microsoft.com/office/drawing/2014/main" id="{4E735EF3-22E3-1DEA-5657-BAC147A1F591}"/>
+              </a:ext>
+            </a:extLst>
+          </p:cNvPr>
+          <p:cNvSpPr/>
+          <p:nvPr/>
+        </p:nvSpPr>
+        <p:spPr>
+          <a:xfrm>
+            <a:off x="457200" y="571500"/>
+            <a:ext cx="10275570" cy="1017270"/>
+          </a:xfrm>
+          <a:prstGeom prst="rect">
+            <a:avLst/>
+          </a:prstGeom>
+          <a:solidFill>
+            <a:srgbClr val="F3F3F3"/>
+          </a:solidFill>
+          <a:ln>
+            <a:noFill/>
+          </a:ln>
+        </p:spPr>
+        <p:style>
+          <a:lnRef idx="2">
+            <a:schemeClr val="accent1">
+              <a:shade val="15000"/>
+            </a:schemeClr>
+          </a:lnRef>
+          <a:fillRef idx="1">
+            <a:schemeClr val="accent1"/>
+          </a:fillRef>
+          <a:effectRef idx="0">
+            <a:schemeClr val="accent1"/>
+          </a:effectRef>
+          <a:fontRef idx="minor">
+            <a:schemeClr val="lt1"/>
+          </a:fontRef>
+        </p:style>
+        <p:txBody>
+          <a:bodyPr rtlCol="0" anchor="ctr"/>
+          <a:lstStyle/>
+          <a:p>
+            <a:pPr algn="ctr"/>
+            <a:endParaRPr lang="en-US"/>
+          </a:p>
+        </p:txBody>
+      </p:sp>
+    </p:spTree>
+    <p:extLst>
+      <p:ext uri="{BB962C8B-B14F-4D97-AF65-F5344CB8AC3E}">
+        <p14:creationId xmlns:p14="http://schemas.microsoft.com/office/powerpoint/2010/main" val="1001411779"/>
       </p:ext>
     </p:extLst>
   </p:cSld>
@@ -12904,6 +16407,1743 @@
     <p:extLst>
       <p:ext uri="{BB962C8B-B14F-4D97-AF65-F5344CB8AC3E}">
         <p14:creationId xmlns:p14="http://schemas.microsoft.com/office/powerpoint/2010/main" val="2390993646"/>
+      </p:ext>
+    </p:extLst>
+  </p:cSld>
+  <p:clrMapOvr>
+    <a:masterClrMapping/>
+  </p:clrMapOvr>
+</p:sld>
+</file>
+
+<file path=ppt/slides/slide20.xml><?xml version="1.0" encoding="utf-8"?>
+<p:sld xmlns:a="http://schemas.openxmlformats.org/drawingml/2006/main" xmlns:r="http://schemas.openxmlformats.org/officeDocument/2006/relationships" xmlns:p="http://schemas.openxmlformats.org/presentationml/2006/main">
+  <p:cSld>
+    <p:spTree>
+      <p:nvGrpSpPr>
+        <p:cNvPr id="1" name="">
+          <a:extLst>
+            <a:ext uri="{FF2B5EF4-FFF2-40B4-BE49-F238E27FC236}">
+              <a16:creationId xmlns:a16="http://schemas.microsoft.com/office/drawing/2014/main" id="{61E7917F-5B65-93E9-BF97-70F2C062247A}"/>
+            </a:ext>
+          </a:extLst>
+        </p:cNvPr>
+        <p:cNvGrpSpPr/>
+        <p:nvPr/>
+      </p:nvGrpSpPr>
+      <p:grpSpPr>
+        <a:xfrm>
+          <a:off x="0" y="0"/>
+          <a:ext cx="0" cy="0"/>
+          <a:chOff x="0" y="0"/>
+          <a:chExt cx="0" cy="0"/>
+        </a:xfrm>
+      </p:grpSpPr>
+      <p:pic>
+        <p:nvPicPr>
+          <p:cNvPr id="5" name="Content Placeholder 4">
+            <a:extLst>
+              <a:ext uri="{FF2B5EF4-FFF2-40B4-BE49-F238E27FC236}">
+                <a16:creationId xmlns:a16="http://schemas.microsoft.com/office/drawing/2014/main" id="{74F8808C-BAF6-CECA-3AD4-3D0B98B77B23}"/>
+              </a:ext>
+            </a:extLst>
+          </p:cNvPr>
+          <p:cNvPicPr>
+            <a:picLocks noGrp="1" noChangeAspect="1"/>
+          </p:cNvPicPr>
+          <p:nvPr>
+            <p:ph idx="1"/>
+          </p:nvPr>
+        </p:nvPicPr>
+        <p:blipFill>
+          <a:blip r:embed="rId2">
+            <a:extLst>
+              <a:ext uri="{28A0092B-C50C-407E-A947-70E740481C1C}">
+                <a14:useLocalDpi xmlns:a14="http://schemas.microsoft.com/office/drawing/2010/main" val="0"/>
+              </a:ext>
+            </a:extLst>
+          </a:blip>
+          <a:srcRect/>
+          <a:stretch/>
+        </p:blipFill>
+        <p:spPr>
+          <a:xfrm>
+            <a:off x="202617" y="540543"/>
+            <a:ext cx="11786766" cy="5776913"/>
+          </a:xfrm>
+        </p:spPr>
+      </p:pic>
+      <p:sp>
+        <p:nvSpPr>
+          <p:cNvPr id="6" name="Rectangle 5">
+            <a:extLst>
+              <a:ext uri="{FF2B5EF4-FFF2-40B4-BE49-F238E27FC236}">
+                <a16:creationId xmlns:a16="http://schemas.microsoft.com/office/drawing/2014/main" id="{CC0CA75D-0BDD-6D99-6A84-BBA679696B26}"/>
+              </a:ext>
+            </a:extLst>
+          </p:cNvPr>
+          <p:cNvSpPr/>
+          <p:nvPr/>
+        </p:nvSpPr>
+        <p:spPr>
+          <a:xfrm>
+            <a:off x="457200" y="571500"/>
+            <a:ext cx="10275570" cy="1017270"/>
+          </a:xfrm>
+          <a:prstGeom prst="rect">
+            <a:avLst/>
+          </a:prstGeom>
+          <a:solidFill>
+            <a:srgbClr val="F3F3F3"/>
+          </a:solidFill>
+          <a:ln>
+            <a:noFill/>
+          </a:ln>
+        </p:spPr>
+        <p:style>
+          <a:lnRef idx="2">
+            <a:schemeClr val="accent1">
+              <a:shade val="15000"/>
+            </a:schemeClr>
+          </a:lnRef>
+          <a:fillRef idx="1">
+            <a:schemeClr val="accent1"/>
+          </a:fillRef>
+          <a:effectRef idx="0">
+            <a:schemeClr val="accent1"/>
+          </a:effectRef>
+          <a:fontRef idx="minor">
+            <a:schemeClr val="lt1"/>
+          </a:fontRef>
+        </p:style>
+        <p:txBody>
+          <a:bodyPr rtlCol="0" anchor="ctr"/>
+          <a:lstStyle/>
+          <a:p>
+            <a:pPr algn="ctr"/>
+            <a:endParaRPr lang="en-US"/>
+          </a:p>
+        </p:txBody>
+      </p:sp>
+    </p:spTree>
+    <p:extLst>
+      <p:ext uri="{BB962C8B-B14F-4D97-AF65-F5344CB8AC3E}">
+        <p14:creationId xmlns:p14="http://schemas.microsoft.com/office/powerpoint/2010/main" val="2359766831"/>
+      </p:ext>
+    </p:extLst>
+  </p:cSld>
+  <p:clrMapOvr>
+    <a:masterClrMapping/>
+  </p:clrMapOvr>
+</p:sld>
+</file>
+
+<file path=ppt/slides/slide21.xml><?xml version="1.0" encoding="utf-8"?>
+<p:sld xmlns:a="http://schemas.openxmlformats.org/drawingml/2006/main" xmlns:r="http://schemas.openxmlformats.org/officeDocument/2006/relationships" xmlns:p="http://schemas.openxmlformats.org/presentationml/2006/main">
+  <p:cSld>
+    <p:spTree>
+      <p:nvGrpSpPr>
+        <p:cNvPr id="1" name="">
+          <a:extLst>
+            <a:ext uri="{FF2B5EF4-FFF2-40B4-BE49-F238E27FC236}">
+              <a16:creationId xmlns:a16="http://schemas.microsoft.com/office/drawing/2014/main" id="{47E5D474-CC64-0755-22EC-DFECEB30807E}"/>
+            </a:ext>
+          </a:extLst>
+        </p:cNvPr>
+        <p:cNvGrpSpPr/>
+        <p:nvPr/>
+      </p:nvGrpSpPr>
+      <p:grpSpPr>
+        <a:xfrm>
+          <a:off x="0" y="0"/>
+          <a:ext cx="0" cy="0"/>
+          <a:chOff x="0" y="0"/>
+          <a:chExt cx="0" cy="0"/>
+        </a:xfrm>
+      </p:grpSpPr>
+      <p:pic>
+        <p:nvPicPr>
+          <p:cNvPr id="5" name="Content Placeholder 4">
+            <a:extLst>
+              <a:ext uri="{FF2B5EF4-FFF2-40B4-BE49-F238E27FC236}">
+                <a16:creationId xmlns:a16="http://schemas.microsoft.com/office/drawing/2014/main" id="{26B1E3D2-9785-DADD-F52F-54C342D2EB25}"/>
+              </a:ext>
+            </a:extLst>
+          </p:cNvPr>
+          <p:cNvPicPr>
+            <a:picLocks noGrp="1" noChangeAspect="1"/>
+          </p:cNvPicPr>
+          <p:nvPr>
+            <p:ph idx="1"/>
+          </p:nvPr>
+        </p:nvPicPr>
+        <p:blipFill>
+          <a:blip r:embed="rId2">
+            <a:extLst>
+              <a:ext uri="{28A0092B-C50C-407E-A947-70E740481C1C}">
+                <a14:useLocalDpi xmlns:a14="http://schemas.microsoft.com/office/drawing/2010/main" val="0"/>
+              </a:ext>
+            </a:extLst>
+          </a:blip>
+          <a:srcRect/>
+          <a:stretch/>
+        </p:blipFill>
+        <p:spPr>
+          <a:xfrm>
+            <a:off x="202617" y="540543"/>
+            <a:ext cx="11786766" cy="5776913"/>
+          </a:xfrm>
+        </p:spPr>
+      </p:pic>
+      <p:sp>
+        <p:nvSpPr>
+          <p:cNvPr id="6" name="Rectangle 5">
+            <a:extLst>
+              <a:ext uri="{FF2B5EF4-FFF2-40B4-BE49-F238E27FC236}">
+                <a16:creationId xmlns:a16="http://schemas.microsoft.com/office/drawing/2014/main" id="{BC8A2826-2C27-B203-1483-BE90F7E6269F}"/>
+              </a:ext>
+            </a:extLst>
+          </p:cNvPr>
+          <p:cNvSpPr/>
+          <p:nvPr/>
+        </p:nvSpPr>
+        <p:spPr>
+          <a:xfrm>
+            <a:off x="457200" y="571500"/>
+            <a:ext cx="10275570" cy="914400"/>
+          </a:xfrm>
+          <a:prstGeom prst="rect">
+            <a:avLst/>
+          </a:prstGeom>
+          <a:solidFill>
+            <a:srgbClr val="F3F3F3"/>
+          </a:solidFill>
+          <a:ln>
+            <a:noFill/>
+          </a:ln>
+        </p:spPr>
+        <p:style>
+          <a:lnRef idx="2">
+            <a:schemeClr val="accent1">
+              <a:shade val="15000"/>
+            </a:schemeClr>
+          </a:lnRef>
+          <a:fillRef idx="1">
+            <a:schemeClr val="accent1"/>
+          </a:fillRef>
+          <a:effectRef idx="0">
+            <a:schemeClr val="accent1"/>
+          </a:effectRef>
+          <a:fontRef idx="minor">
+            <a:schemeClr val="lt1"/>
+          </a:fontRef>
+        </p:style>
+        <p:txBody>
+          <a:bodyPr rtlCol="0" anchor="ctr"/>
+          <a:lstStyle/>
+          <a:p>
+            <a:pPr algn="ctr"/>
+            <a:endParaRPr lang="en-US"/>
+          </a:p>
+        </p:txBody>
+      </p:sp>
+    </p:spTree>
+    <p:extLst>
+      <p:ext uri="{BB962C8B-B14F-4D97-AF65-F5344CB8AC3E}">
+        <p14:creationId xmlns:p14="http://schemas.microsoft.com/office/powerpoint/2010/main" val="2642870269"/>
+      </p:ext>
+    </p:extLst>
+  </p:cSld>
+  <p:clrMapOvr>
+    <a:masterClrMapping/>
+  </p:clrMapOvr>
+</p:sld>
+</file>
+
+<file path=ppt/slides/slide22.xml><?xml version="1.0" encoding="utf-8"?>
+<p:sld xmlns:a="http://schemas.openxmlformats.org/drawingml/2006/main" xmlns:r="http://schemas.openxmlformats.org/officeDocument/2006/relationships" xmlns:p="http://schemas.openxmlformats.org/presentationml/2006/main">
+  <p:cSld>
+    <p:spTree>
+      <p:nvGrpSpPr>
+        <p:cNvPr id="1" name="">
+          <a:extLst>
+            <a:ext uri="{FF2B5EF4-FFF2-40B4-BE49-F238E27FC236}">
+              <a16:creationId xmlns:a16="http://schemas.microsoft.com/office/drawing/2014/main" id="{8B84C1BA-19E7-9BE5-06D4-486AE3F91C58}"/>
+            </a:ext>
+          </a:extLst>
+        </p:cNvPr>
+        <p:cNvGrpSpPr/>
+        <p:nvPr/>
+      </p:nvGrpSpPr>
+      <p:grpSpPr>
+        <a:xfrm>
+          <a:off x="0" y="0"/>
+          <a:ext cx="0" cy="0"/>
+          <a:chOff x="0" y="0"/>
+          <a:chExt cx="0" cy="0"/>
+        </a:xfrm>
+      </p:grpSpPr>
+      <p:pic>
+        <p:nvPicPr>
+          <p:cNvPr id="5" name="Content Placeholder 4">
+            <a:extLst>
+              <a:ext uri="{FF2B5EF4-FFF2-40B4-BE49-F238E27FC236}">
+                <a16:creationId xmlns:a16="http://schemas.microsoft.com/office/drawing/2014/main" id="{E3175E59-6FF5-4151-E511-015C8A5C55D5}"/>
+              </a:ext>
+            </a:extLst>
+          </p:cNvPr>
+          <p:cNvPicPr>
+            <a:picLocks noGrp="1" noChangeAspect="1"/>
+          </p:cNvPicPr>
+          <p:nvPr>
+            <p:ph idx="1"/>
+          </p:nvPr>
+        </p:nvPicPr>
+        <p:blipFill>
+          <a:blip r:embed="rId2">
+            <a:extLst>
+              <a:ext uri="{28A0092B-C50C-407E-A947-70E740481C1C}">
+                <a14:useLocalDpi xmlns:a14="http://schemas.microsoft.com/office/drawing/2010/main" val="0"/>
+              </a:ext>
+            </a:extLst>
+          </a:blip>
+          <a:srcRect/>
+          <a:stretch/>
+        </p:blipFill>
+        <p:spPr>
+          <a:xfrm>
+            <a:off x="202617" y="540543"/>
+            <a:ext cx="11786766" cy="5776913"/>
+          </a:xfrm>
+        </p:spPr>
+      </p:pic>
+      <p:sp>
+        <p:nvSpPr>
+          <p:cNvPr id="6" name="Rectangle 5">
+            <a:extLst>
+              <a:ext uri="{FF2B5EF4-FFF2-40B4-BE49-F238E27FC236}">
+                <a16:creationId xmlns:a16="http://schemas.microsoft.com/office/drawing/2014/main" id="{740B6B57-2549-5089-AB29-556BFCC7CF8B}"/>
+              </a:ext>
+            </a:extLst>
+          </p:cNvPr>
+          <p:cNvSpPr/>
+          <p:nvPr/>
+        </p:nvSpPr>
+        <p:spPr>
+          <a:xfrm>
+            <a:off x="457200" y="571500"/>
+            <a:ext cx="10275570" cy="982980"/>
+          </a:xfrm>
+          <a:prstGeom prst="rect">
+            <a:avLst/>
+          </a:prstGeom>
+          <a:solidFill>
+            <a:srgbClr val="F3F3F3"/>
+          </a:solidFill>
+          <a:ln>
+            <a:noFill/>
+          </a:ln>
+        </p:spPr>
+        <p:style>
+          <a:lnRef idx="2">
+            <a:schemeClr val="accent1">
+              <a:shade val="15000"/>
+            </a:schemeClr>
+          </a:lnRef>
+          <a:fillRef idx="1">
+            <a:schemeClr val="accent1"/>
+          </a:fillRef>
+          <a:effectRef idx="0">
+            <a:schemeClr val="accent1"/>
+          </a:effectRef>
+          <a:fontRef idx="minor">
+            <a:schemeClr val="lt1"/>
+          </a:fontRef>
+        </p:style>
+        <p:txBody>
+          <a:bodyPr rtlCol="0" anchor="ctr"/>
+          <a:lstStyle/>
+          <a:p>
+            <a:pPr algn="ctr"/>
+            <a:endParaRPr lang="en-US"/>
+          </a:p>
+        </p:txBody>
+      </p:sp>
+    </p:spTree>
+    <p:extLst>
+      <p:ext uri="{BB962C8B-B14F-4D97-AF65-F5344CB8AC3E}">
+        <p14:creationId xmlns:p14="http://schemas.microsoft.com/office/powerpoint/2010/main" val="721524814"/>
+      </p:ext>
+    </p:extLst>
+  </p:cSld>
+  <p:clrMapOvr>
+    <a:masterClrMapping/>
+  </p:clrMapOvr>
+</p:sld>
+</file>
+
+<file path=ppt/slides/slide23.xml><?xml version="1.0" encoding="utf-8"?>
+<p:sld xmlns:a="http://schemas.openxmlformats.org/drawingml/2006/main" xmlns:r="http://schemas.openxmlformats.org/officeDocument/2006/relationships" xmlns:p="http://schemas.openxmlformats.org/presentationml/2006/main">
+  <p:cSld>
+    <p:spTree>
+      <p:nvGrpSpPr>
+        <p:cNvPr id="1" name="">
+          <a:extLst>
+            <a:ext uri="{FF2B5EF4-FFF2-40B4-BE49-F238E27FC236}">
+              <a16:creationId xmlns:a16="http://schemas.microsoft.com/office/drawing/2014/main" id="{2684E342-CB5C-0FC7-857F-2AF8B57253B9}"/>
+            </a:ext>
+          </a:extLst>
+        </p:cNvPr>
+        <p:cNvGrpSpPr/>
+        <p:nvPr/>
+      </p:nvGrpSpPr>
+      <p:grpSpPr>
+        <a:xfrm>
+          <a:off x="0" y="0"/>
+          <a:ext cx="0" cy="0"/>
+          <a:chOff x="0" y="0"/>
+          <a:chExt cx="0" cy="0"/>
+        </a:xfrm>
+      </p:grpSpPr>
+      <p:pic>
+        <p:nvPicPr>
+          <p:cNvPr id="5" name="Content Placeholder 4">
+            <a:extLst>
+              <a:ext uri="{FF2B5EF4-FFF2-40B4-BE49-F238E27FC236}">
+                <a16:creationId xmlns:a16="http://schemas.microsoft.com/office/drawing/2014/main" id="{A15AB442-C9A0-68F6-BC91-0301DA5EC918}"/>
+              </a:ext>
+            </a:extLst>
+          </p:cNvPr>
+          <p:cNvPicPr>
+            <a:picLocks noGrp="1" noChangeAspect="1"/>
+          </p:cNvPicPr>
+          <p:nvPr>
+            <p:ph idx="1"/>
+          </p:nvPr>
+        </p:nvPicPr>
+        <p:blipFill>
+          <a:blip r:embed="rId2">
+            <a:extLst>
+              <a:ext uri="{28A0092B-C50C-407E-A947-70E740481C1C}">
+                <a14:useLocalDpi xmlns:a14="http://schemas.microsoft.com/office/drawing/2010/main" val="0"/>
+              </a:ext>
+            </a:extLst>
+          </a:blip>
+          <a:srcRect/>
+          <a:stretch/>
+        </p:blipFill>
+        <p:spPr>
+          <a:xfrm>
+            <a:off x="202617" y="540543"/>
+            <a:ext cx="11786766" cy="5776913"/>
+          </a:xfrm>
+        </p:spPr>
+      </p:pic>
+      <p:sp>
+        <p:nvSpPr>
+          <p:cNvPr id="6" name="Rectangle 5">
+            <a:extLst>
+              <a:ext uri="{FF2B5EF4-FFF2-40B4-BE49-F238E27FC236}">
+                <a16:creationId xmlns:a16="http://schemas.microsoft.com/office/drawing/2014/main" id="{C584A337-B718-A0EC-F7C5-1DF54D652BD2}"/>
+              </a:ext>
+            </a:extLst>
+          </p:cNvPr>
+          <p:cNvSpPr/>
+          <p:nvPr/>
+        </p:nvSpPr>
+        <p:spPr>
+          <a:xfrm>
+            <a:off x="457200" y="571500"/>
+            <a:ext cx="10275570" cy="1017270"/>
+          </a:xfrm>
+          <a:prstGeom prst="rect">
+            <a:avLst/>
+          </a:prstGeom>
+          <a:solidFill>
+            <a:srgbClr val="F3F3F3"/>
+          </a:solidFill>
+          <a:ln>
+            <a:noFill/>
+          </a:ln>
+        </p:spPr>
+        <p:style>
+          <a:lnRef idx="2">
+            <a:schemeClr val="accent1">
+              <a:shade val="15000"/>
+            </a:schemeClr>
+          </a:lnRef>
+          <a:fillRef idx="1">
+            <a:schemeClr val="accent1"/>
+          </a:fillRef>
+          <a:effectRef idx="0">
+            <a:schemeClr val="accent1"/>
+          </a:effectRef>
+          <a:fontRef idx="minor">
+            <a:schemeClr val="lt1"/>
+          </a:fontRef>
+        </p:style>
+        <p:txBody>
+          <a:bodyPr rtlCol="0" anchor="ctr"/>
+          <a:lstStyle/>
+          <a:p>
+            <a:pPr algn="ctr"/>
+            <a:endParaRPr lang="en-US"/>
+          </a:p>
+        </p:txBody>
+      </p:sp>
+    </p:spTree>
+    <p:extLst>
+      <p:ext uri="{BB962C8B-B14F-4D97-AF65-F5344CB8AC3E}">
+        <p14:creationId xmlns:p14="http://schemas.microsoft.com/office/powerpoint/2010/main" val="4025332541"/>
+      </p:ext>
+    </p:extLst>
+  </p:cSld>
+  <p:clrMapOvr>
+    <a:masterClrMapping/>
+  </p:clrMapOvr>
+</p:sld>
+</file>
+
+<file path=ppt/slides/slide24.xml><?xml version="1.0" encoding="utf-8"?>
+<p:sld xmlns:a="http://schemas.openxmlformats.org/drawingml/2006/main" xmlns:r="http://schemas.openxmlformats.org/officeDocument/2006/relationships" xmlns:p="http://schemas.openxmlformats.org/presentationml/2006/main">
+  <p:cSld>
+    <p:spTree>
+      <p:nvGrpSpPr>
+        <p:cNvPr id="1" name="">
+          <a:extLst>
+            <a:ext uri="{FF2B5EF4-FFF2-40B4-BE49-F238E27FC236}">
+              <a16:creationId xmlns:a16="http://schemas.microsoft.com/office/drawing/2014/main" id="{DD5F37D7-25CE-3BCF-83C9-D8AE8173726F}"/>
+            </a:ext>
+          </a:extLst>
+        </p:cNvPr>
+        <p:cNvGrpSpPr/>
+        <p:nvPr/>
+      </p:nvGrpSpPr>
+      <p:grpSpPr>
+        <a:xfrm>
+          <a:off x="0" y="0"/>
+          <a:ext cx="0" cy="0"/>
+          <a:chOff x="0" y="0"/>
+          <a:chExt cx="0" cy="0"/>
+        </a:xfrm>
+      </p:grpSpPr>
+      <p:pic>
+        <p:nvPicPr>
+          <p:cNvPr id="5" name="Content Placeholder 4">
+            <a:extLst>
+              <a:ext uri="{FF2B5EF4-FFF2-40B4-BE49-F238E27FC236}">
+                <a16:creationId xmlns:a16="http://schemas.microsoft.com/office/drawing/2014/main" id="{AC755C5D-B2E7-D563-F88A-770F227BF8DC}"/>
+              </a:ext>
+            </a:extLst>
+          </p:cNvPr>
+          <p:cNvPicPr>
+            <a:picLocks noGrp="1" noChangeAspect="1"/>
+          </p:cNvPicPr>
+          <p:nvPr>
+            <p:ph idx="1"/>
+          </p:nvPr>
+        </p:nvPicPr>
+        <p:blipFill>
+          <a:blip r:embed="rId2">
+            <a:extLst>
+              <a:ext uri="{28A0092B-C50C-407E-A947-70E740481C1C}">
+                <a14:useLocalDpi xmlns:a14="http://schemas.microsoft.com/office/drawing/2010/main" val="0"/>
+              </a:ext>
+            </a:extLst>
+          </a:blip>
+          <a:srcRect/>
+          <a:stretch/>
+        </p:blipFill>
+        <p:spPr>
+          <a:xfrm>
+            <a:off x="202617" y="540543"/>
+            <a:ext cx="11786766" cy="5776913"/>
+          </a:xfrm>
+        </p:spPr>
+      </p:pic>
+      <p:sp>
+        <p:nvSpPr>
+          <p:cNvPr id="6" name="Rectangle 5">
+            <a:extLst>
+              <a:ext uri="{FF2B5EF4-FFF2-40B4-BE49-F238E27FC236}">
+                <a16:creationId xmlns:a16="http://schemas.microsoft.com/office/drawing/2014/main" id="{199FF027-51E0-7A14-5347-AE3CEFA2D722}"/>
+              </a:ext>
+            </a:extLst>
+          </p:cNvPr>
+          <p:cNvSpPr/>
+          <p:nvPr/>
+        </p:nvSpPr>
+        <p:spPr>
+          <a:xfrm>
+            <a:off x="457200" y="571500"/>
+            <a:ext cx="10275570" cy="1017270"/>
+          </a:xfrm>
+          <a:prstGeom prst="rect">
+            <a:avLst/>
+          </a:prstGeom>
+          <a:solidFill>
+            <a:srgbClr val="F3F3F3"/>
+          </a:solidFill>
+          <a:ln>
+            <a:noFill/>
+          </a:ln>
+        </p:spPr>
+        <p:style>
+          <a:lnRef idx="2">
+            <a:schemeClr val="accent1">
+              <a:shade val="15000"/>
+            </a:schemeClr>
+          </a:lnRef>
+          <a:fillRef idx="1">
+            <a:schemeClr val="accent1"/>
+          </a:fillRef>
+          <a:effectRef idx="0">
+            <a:schemeClr val="accent1"/>
+          </a:effectRef>
+          <a:fontRef idx="minor">
+            <a:schemeClr val="lt1"/>
+          </a:fontRef>
+        </p:style>
+        <p:txBody>
+          <a:bodyPr rtlCol="0" anchor="ctr"/>
+          <a:lstStyle/>
+          <a:p>
+            <a:pPr algn="ctr"/>
+            <a:endParaRPr lang="en-US"/>
+          </a:p>
+        </p:txBody>
+      </p:sp>
+    </p:spTree>
+    <p:extLst>
+      <p:ext uri="{BB962C8B-B14F-4D97-AF65-F5344CB8AC3E}">
+        <p14:creationId xmlns:p14="http://schemas.microsoft.com/office/powerpoint/2010/main" val="951045066"/>
+      </p:ext>
+    </p:extLst>
+  </p:cSld>
+  <p:clrMapOvr>
+    <a:masterClrMapping/>
+  </p:clrMapOvr>
+</p:sld>
+</file>
+
+<file path=ppt/slides/slide25.xml><?xml version="1.0" encoding="utf-8"?>
+<p:sld xmlns:a="http://schemas.openxmlformats.org/drawingml/2006/main" xmlns:r="http://schemas.openxmlformats.org/officeDocument/2006/relationships" xmlns:p="http://schemas.openxmlformats.org/presentationml/2006/main">
+  <p:cSld>
+    <p:spTree>
+      <p:nvGrpSpPr>
+        <p:cNvPr id="1" name="">
+          <a:extLst>
+            <a:ext uri="{FF2B5EF4-FFF2-40B4-BE49-F238E27FC236}">
+              <a16:creationId xmlns:a16="http://schemas.microsoft.com/office/drawing/2014/main" id="{7800734A-2D25-339D-91B5-20171051FE10}"/>
+            </a:ext>
+          </a:extLst>
+        </p:cNvPr>
+        <p:cNvGrpSpPr/>
+        <p:nvPr/>
+      </p:nvGrpSpPr>
+      <p:grpSpPr>
+        <a:xfrm>
+          <a:off x="0" y="0"/>
+          <a:ext cx="0" cy="0"/>
+          <a:chOff x="0" y="0"/>
+          <a:chExt cx="0" cy="0"/>
+        </a:xfrm>
+      </p:grpSpPr>
+      <p:pic>
+        <p:nvPicPr>
+          <p:cNvPr id="5" name="Content Placeholder 4">
+            <a:extLst>
+              <a:ext uri="{FF2B5EF4-FFF2-40B4-BE49-F238E27FC236}">
+                <a16:creationId xmlns:a16="http://schemas.microsoft.com/office/drawing/2014/main" id="{6EE4D902-07E2-776D-471E-A5B572D3B98A}"/>
+              </a:ext>
+            </a:extLst>
+          </p:cNvPr>
+          <p:cNvPicPr>
+            <a:picLocks noGrp="1" noChangeAspect="1"/>
+          </p:cNvPicPr>
+          <p:nvPr>
+            <p:ph idx="1"/>
+          </p:nvPr>
+        </p:nvPicPr>
+        <p:blipFill>
+          <a:blip r:embed="rId2">
+            <a:extLst>
+              <a:ext uri="{28A0092B-C50C-407E-A947-70E740481C1C}">
+                <a14:useLocalDpi xmlns:a14="http://schemas.microsoft.com/office/drawing/2010/main" val="0"/>
+              </a:ext>
+            </a:extLst>
+          </a:blip>
+          <a:srcRect/>
+          <a:stretch/>
+        </p:blipFill>
+        <p:spPr>
+          <a:xfrm>
+            <a:off x="202617" y="540543"/>
+            <a:ext cx="11786766" cy="5776913"/>
+          </a:xfrm>
+        </p:spPr>
+      </p:pic>
+      <p:sp>
+        <p:nvSpPr>
+          <p:cNvPr id="6" name="Rectangle 5">
+            <a:extLst>
+              <a:ext uri="{FF2B5EF4-FFF2-40B4-BE49-F238E27FC236}">
+                <a16:creationId xmlns:a16="http://schemas.microsoft.com/office/drawing/2014/main" id="{A205AEC6-AD73-F46F-E91D-23E62AE50041}"/>
+              </a:ext>
+            </a:extLst>
+          </p:cNvPr>
+          <p:cNvSpPr/>
+          <p:nvPr/>
+        </p:nvSpPr>
+        <p:spPr>
+          <a:xfrm>
+            <a:off x="457200" y="571500"/>
+            <a:ext cx="10275570" cy="914400"/>
+          </a:xfrm>
+          <a:prstGeom prst="rect">
+            <a:avLst/>
+          </a:prstGeom>
+          <a:solidFill>
+            <a:srgbClr val="F3F3F3"/>
+          </a:solidFill>
+          <a:ln>
+            <a:noFill/>
+          </a:ln>
+        </p:spPr>
+        <p:style>
+          <a:lnRef idx="2">
+            <a:schemeClr val="accent1">
+              <a:shade val="15000"/>
+            </a:schemeClr>
+          </a:lnRef>
+          <a:fillRef idx="1">
+            <a:schemeClr val="accent1"/>
+          </a:fillRef>
+          <a:effectRef idx="0">
+            <a:schemeClr val="accent1"/>
+          </a:effectRef>
+          <a:fontRef idx="minor">
+            <a:schemeClr val="lt1"/>
+          </a:fontRef>
+        </p:style>
+        <p:txBody>
+          <a:bodyPr rtlCol="0" anchor="ctr"/>
+          <a:lstStyle/>
+          <a:p>
+            <a:pPr algn="ctr"/>
+            <a:endParaRPr lang="en-US"/>
+          </a:p>
+        </p:txBody>
+      </p:sp>
+    </p:spTree>
+    <p:extLst>
+      <p:ext uri="{BB962C8B-B14F-4D97-AF65-F5344CB8AC3E}">
+        <p14:creationId xmlns:p14="http://schemas.microsoft.com/office/powerpoint/2010/main" val="2499044674"/>
+      </p:ext>
+    </p:extLst>
+  </p:cSld>
+  <p:clrMapOvr>
+    <a:masterClrMapping/>
+  </p:clrMapOvr>
+</p:sld>
+</file>
+
+<file path=ppt/slides/slide26.xml><?xml version="1.0" encoding="utf-8"?>
+<p:sld xmlns:a="http://schemas.openxmlformats.org/drawingml/2006/main" xmlns:r="http://schemas.openxmlformats.org/officeDocument/2006/relationships" xmlns:p="http://schemas.openxmlformats.org/presentationml/2006/main">
+  <p:cSld>
+    <p:spTree>
+      <p:nvGrpSpPr>
+        <p:cNvPr id="1" name="">
+          <a:extLst>
+            <a:ext uri="{FF2B5EF4-FFF2-40B4-BE49-F238E27FC236}">
+              <a16:creationId xmlns:a16="http://schemas.microsoft.com/office/drawing/2014/main" id="{70A1EE85-BBC4-B30F-C62F-D6CCE778AA02}"/>
+            </a:ext>
+          </a:extLst>
+        </p:cNvPr>
+        <p:cNvGrpSpPr/>
+        <p:nvPr/>
+      </p:nvGrpSpPr>
+      <p:grpSpPr>
+        <a:xfrm>
+          <a:off x="0" y="0"/>
+          <a:ext cx="0" cy="0"/>
+          <a:chOff x="0" y="0"/>
+          <a:chExt cx="0" cy="0"/>
+        </a:xfrm>
+      </p:grpSpPr>
+      <p:pic>
+        <p:nvPicPr>
+          <p:cNvPr id="5" name="Content Placeholder 4">
+            <a:extLst>
+              <a:ext uri="{FF2B5EF4-FFF2-40B4-BE49-F238E27FC236}">
+                <a16:creationId xmlns:a16="http://schemas.microsoft.com/office/drawing/2014/main" id="{27864DA9-39AB-934C-6D4B-3D31CE728489}"/>
+              </a:ext>
+            </a:extLst>
+          </p:cNvPr>
+          <p:cNvPicPr>
+            <a:picLocks noGrp="1" noChangeAspect="1"/>
+          </p:cNvPicPr>
+          <p:nvPr>
+            <p:ph idx="1"/>
+          </p:nvPr>
+        </p:nvPicPr>
+        <p:blipFill>
+          <a:blip r:embed="rId2">
+            <a:extLst>
+              <a:ext uri="{28A0092B-C50C-407E-A947-70E740481C1C}">
+                <a14:useLocalDpi xmlns:a14="http://schemas.microsoft.com/office/drawing/2010/main" val="0"/>
+              </a:ext>
+            </a:extLst>
+          </a:blip>
+          <a:srcRect/>
+          <a:stretch/>
+        </p:blipFill>
+        <p:spPr>
+          <a:xfrm>
+            <a:off x="202617" y="540543"/>
+            <a:ext cx="11786766" cy="5776913"/>
+          </a:xfrm>
+        </p:spPr>
+      </p:pic>
+      <p:sp>
+        <p:nvSpPr>
+          <p:cNvPr id="6" name="Rectangle 5">
+            <a:extLst>
+              <a:ext uri="{FF2B5EF4-FFF2-40B4-BE49-F238E27FC236}">
+                <a16:creationId xmlns:a16="http://schemas.microsoft.com/office/drawing/2014/main" id="{7026483B-5229-BB0F-4837-A66DB540E130}"/>
+              </a:ext>
+            </a:extLst>
+          </p:cNvPr>
+          <p:cNvSpPr/>
+          <p:nvPr/>
+        </p:nvSpPr>
+        <p:spPr>
+          <a:xfrm>
+            <a:off x="411480" y="540543"/>
+            <a:ext cx="10321290" cy="853917"/>
+          </a:xfrm>
+          <a:prstGeom prst="rect">
+            <a:avLst/>
+          </a:prstGeom>
+          <a:solidFill>
+            <a:srgbClr val="F3F3F3"/>
+          </a:solidFill>
+          <a:ln>
+            <a:noFill/>
+          </a:ln>
+        </p:spPr>
+        <p:style>
+          <a:lnRef idx="2">
+            <a:schemeClr val="accent1">
+              <a:shade val="15000"/>
+            </a:schemeClr>
+          </a:lnRef>
+          <a:fillRef idx="1">
+            <a:schemeClr val="accent1"/>
+          </a:fillRef>
+          <a:effectRef idx="0">
+            <a:schemeClr val="accent1"/>
+          </a:effectRef>
+          <a:fontRef idx="minor">
+            <a:schemeClr val="lt1"/>
+          </a:fontRef>
+        </p:style>
+        <p:txBody>
+          <a:bodyPr rtlCol="0" anchor="ctr"/>
+          <a:lstStyle/>
+          <a:p>
+            <a:pPr algn="ctr"/>
+            <a:endParaRPr lang="en-US"/>
+          </a:p>
+        </p:txBody>
+      </p:sp>
+    </p:spTree>
+    <p:extLst>
+      <p:ext uri="{BB962C8B-B14F-4D97-AF65-F5344CB8AC3E}">
+        <p14:creationId xmlns:p14="http://schemas.microsoft.com/office/powerpoint/2010/main" val="4248702337"/>
+      </p:ext>
+    </p:extLst>
+  </p:cSld>
+  <p:clrMapOvr>
+    <a:masterClrMapping/>
+  </p:clrMapOvr>
+</p:sld>
+</file>
+
+<file path=ppt/slides/slide27.xml><?xml version="1.0" encoding="utf-8"?>
+<p:sld xmlns:a="http://schemas.openxmlformats.org/drawingml/2006/main" xmlns:r="http://schemas.openxmlformats.org/officeDocument/2006/relationships" xmlns:p="http://schemas.openxmlformats.org/presentationml/2006/main">
+  <p:cSld>
+    <p:spTree>
+      <p:nvGrpSpPr>
+        <p:cNvPr id="1" name="">
+          <a:extLst>
+            <a:ext uri="{FF2B5EF4-FFF2-40B4-BE49-F238E27FC236}">
+              <a16:creationId xmlns:a16="http://schemas.microsoft.com/office/drawing/2014/main" id="{457188D6-BCA6-660D-A395-4AE2DD036549}"/>
+            </a:ext>
+          </a:extLst>
+        </p:cNvPr>
+        <p:cNvGrpSpPr/>
+        <p:nvPr/>
+      </p:nvGrpSpPr>
+      <p:grpSpPr>
+        <a:xfrm>
+          <a:off x="0" y="0"/>
+          <a:ext cx="0" cy="0"/>
+          <a:chOff x="0" y="0"/>
+          <a:chExt cx="0" cy="0"/>
+        </a:xfrm>
+      </p:grpSpPr>
+      <p:pic>
+        <p:nvPicPr>
+          <p:cNvPr id="5" name="Content Placeholder 4">
+            <a:extLst>
+              <a:ext uri="{FF2B5EF4-FFF2-40B4-BE49-F238E27FC236}">
+                <a16:creationId xmlns:a16="http://schemas.microsoft.com/office/drawing/2014/main" id="{CD871249-8C77-8AC3-6584-92103B592015}"/>
+              </a:ext>
+            </a:extLst>
+          </p:cNvPr>
+          <p:cNvPicPr>
+            <a:picLocks noGrp="1" noChangeAspect="1"/>
+          </p:cNvPicPr>
+          <p:nvPr>
+            <p:ph idx="1"/>
+          </p:nvPr>
+        </p:nvPicPr>
+        <p:blipFill>
+          <a:blip r:embed="rId2">
+            <a:extLst>
+              <a:ext uri="{28A0092B-C50C-407E-A947-70E740481C1C}">
+                <a14:useLocalDpi xmlns:a14="http://schemas.microsoft.com/office/drawing/2010/main" val="0"/>
+              </a:ext>
+            </a:extLst>
+          </a:blip>
+          <a:srcRect/>
+          <a:stretch/>
+        </p:blipFill>
+        <p:spPr>
+          <a:xfrm>
+            <a:off x="202617" y="540543"/>
+            <a:ext cx="11786766" cy="5776913"/>
+          </a:xfrm>
+        </p:spPr>
+      </p:pic>
+      <p:sp>
+        <p:nvSpPr>
+          <p:cNvPr id="6" name="Rectangle 5">
+            <a:extLst>
+              <a:ext uri="{FF2B5EF4-FFF2-40B4-BE49-F238E27FC236}">
+                <a16:creationId xmlns:a16="http://schemas.microsoft.com/office/drawing/2014/main" id="{AFBE8EE6-B109-67C9-3F1B-5D882B39A088}"/>
+              </a:ext>
+            </a:extLst>
+          </p:cNvPr>
+          <p:cNvSpPr/>
+          <p:nvPr/>
+        </p:nvSpPr>
+        <p:spPr>
+          <a:xfrm>
+            <a:off x="411480" y="540543"/>
+            <a:ext cx="10321290" cy="956787"/>
+          </a:xfrm>
+          <a:prstGeom prst="rect">
+            <a:avLst/>
+          </a:prstGeom>
+          <a:solidFill>
+            <a:srgbClr val="F3F3F3"/>
+          </a:solidFill>
+          <a:ln>
+            <a:noFill/>
+          </a:ln>
+        </p:spPr>
+        <p:style>
+          <a:lnRef idx="2">
+            <a:schemeClr val="accent1">
+              <a:shade val="15000"/>
+            </a:schemeClr>
+          </a:lnRef>
+          <a:fillRef idx="1">
+            <a:schemeClr val="accent1"/>
+          </a:fillRef>
+          <a:effectRef idx="0">
+            <a:schemeClr val="accent1"/>
+          </a:effectRef>
+          <a:fontRef idx="minor">
+            <a:schemeClr val="lt1"/>
+          </a:fontRef>
+        </p:style>
+        <p:txBody>
+          <a:bodyPr rtlCol="0" anchor="ctr"/>
+          <a:lstStyle/>
+          <a:p>
+            <a:pPr algn="ctr"/>
+            <a:endParaRPr lang="en-US"/>
+          </a:p>
+        </p:txBody>
+      </p:sp>
+    </p:spTree>
+    <p:extLst>
+      <p:ext uri="{BB962C8B-B14F-4D97-AF65-F5344CB8AC3E}">
+        <p14:creationId xmlns:p14="http://schemas.microsoft.com/office/powerpoint/2010/main" val="172729670"/>
+      </p:ext>
+    </p:extLst>
+  </p:cSld>
+  <p:clrMapOvr>
+    <a:masterClrMapping/>
+  </p:clrMapOvr>
+</p:sld>
+</file>
+
+<file path=ppt/slides/slide28.xml><?xml version="1.0" encoding="utf-8"?>
+<p:sld xmlns:a="http://schemas.openxmlformats.org/drawingml/2006/main" xmlns:r="http://schemas.openxmlformats.org/officeDocument/2006/relationships" xmlns:p="http://schemas.openxmlformats.org/presentationml/2006/main">
+  <p:cSld>
+    <p:spTree>
+      <p:nvGrpSpPr>
+        <p:cNvPr id="1" name="">
+          <a:extLst>
+            <a:ext uri="{FF2B5EF4-FFF2-40B4-BE49-F238E27FC236}">
+              <a16:creationId xmlns:a16="http://schemas.microsoft.com/office/drawing/2014/main" id="{5C089E47-A49A-799F-0239-21A4C250EECC}"/>
+            </a:ext>
+          </a:extLst>
+        </p:cNvPr>
+        <p:cNvGrpSpPr/>
+        <p:nvPr/>
+      </p:nvGrpSpPr>
+      <p:grpSpPr>
+        <a:xfrm>
+          <a:off x="0" y="0"/>
+          <a:ext cx="0" cy="0"/>
+          <a:chOff x="0" y="0"/>
+          <a:chExt cx="0" cy="0"/>
+        </a:xfrm>
+      </p:grpSpPr>
+      <p:pic>
+        <p:nvPicPr>
+          <p:cNvPr id="5" name="Content Placeholder 4">
+            <a:extLst>
+              <a:ext uri="{FF2B5EF4-FFF2-40B4-BE49-F238E27FC236}">
+                <a16:creationId xmlns:a16="http://schemas.microsoft.com/office/drawing/2014/main" id="{78F4F017-54CC-1B4F-EF61-C49BB0CBF908}"/>
+              </a:ext>
+            </a:extLst>
+          </p:cNvPr>
+          <p:cNvPicPr>
+            <a:picLocks noGrp="1" noChangeAspect="1"/>
+          </p:cNvPicPr>
+          <p:nvPr>
+            <p:ph idx="1"/>
+          </p:nvPr>
+        </p:nvPicPr>
+        <p:blipFill>
+          <a:blip r:embed="rId2">
+            <a:extLst>
+              <a:ext uri="{28A0092B-C50C-407E-A947-70E740481C1C}">
+                <a14:useLocalDpi xmlns:a14="http://schemas.microsoft.com/office/drawing/2010/main" val="0"/>
+              </a:ext>
+            </a:extLst>
+          </a:blip>
+          <a:srcRect/>
+          <a:stretch/>
+        </p:blipFill>
+        <p:spPr>
+          <a:xfrm>
+            <a:off x="202617" y="870346"/>
+            <a:ext cx="11786766" cy="5277327"/>
+          </a:xfrm>
+        </p:spPr>
+      </p:pic>
+    </p:spTree>
+    <p:extLst>
+      <p:ext uri="{BB962C8B-B14F-4D97-AF65-F5344CB8AC3E}">
+        <p14:creationId xmlns:p14="http://schemas.microsoft.com/office/powerpoint/2010/main" val="104746528"/>
+      </p:ext>
+    </p:extLst>
+  </p:cSld>
+  <p:clrMapOvr>
+    <a:masterClrMapping/>
+  </p:clrMapOvr>
+</p:sld>
+</file>
+
+<file path=ppt/slides/slide29.xml><?xml version="1.0" encoding="utf-8"?>
+<p:sld xmlns:a="http://schemas.openxmlformats.org/drawingml/2006/main" xmlns:r="http://schemas.openxmlformats.org/officeDocument/2006/relationships" xmlns:p="http://schemas.openxmlformats.org/presentationml/2006/main">
+  <p:cSld>
+    <p:bg>
+      <p:bgPr>
+        <a:solidFill>
+          <a:schemeClr val="bg1"/>
+        </a:solidFill>
+        <a:effectLst/>
+      </p:bgPr>
+    </p:bg>
+    <p:spTree>
+      <p:nvGrpSpPr>
+        <p:cNvPr id="1" name=""/>
+        <p:cNvGrpSpPr/>
+        <p:nvPr/>
+      </p:nvGrpSpPr>
+      <p:grpSpPr>
+        <a:xfrm>
+          <a:off x="0" y="0"/>
+          <a:ext cx="0" cy="0"/>
+          <a:chOff x="0" y="0"/>
+          <a:chExt cx="0" cy="0"/>
+        </a:xfrm>
+      </p:grpSpPr>
+      <p:sp useBgFill="1">
+        <p:nvSpPr>
+          <p:cNvPr id="9" name="Rectangle 8">
+            <a:extLst>
+              <a:ext uri="{FF2B5EF4-FFF2-40B4-BE49-F238E27FC236}">
+                <a16:creationId xmlns:a16="http://schemas.microsoft.com/office/drawing/2014/main" id="{BACC6370-2D7E-4714-9D71-7542949D7D5D}"/>
+              </a:ext>
+              <a:ext uri="{C183D7F6-B498-43B3-948B-1728B52AA6E4}">
+                <adec:decorative xmlns:adec="http://schemas.microsoft.com/office/drawing/2017/decorative" val="1"/>
+              </a:ext>
+            </a:extLst>
+          </p:cNvPr>
+          <p:cNvSpPr>
+            <a:spLocks noGrp="1" noRot="1" noChangeAspect="1" noMove="1" noResize="1" noEditPoints="1" noAdjustHandles="1" noChangeArrowheads="1" noChangeShapeType="1" noTextEdit="1"/>
+          </p:cNvSpPr>
+          <p:nvPr>
+            <p:extLst>
+              <p:ext uri="{386F3935-93C4-4BCD-93E2-E3B085C9AB24}">
+                <p16:designElem xmlns:p16="http://schemas.microsoft.com/office/powerpoint/2015/main" val="1"/>
+              </p:ext>
+            </p:extLst>
+          </p:nvPr>
+        </p:nvSpPr>
+        <p:spPr>
+          <a:xfrm>
+            <a:off x="0" y="0"/>
+            <a:ext cx="12192000" cy="6858000"/>
+          </a:xfrm>
+          <a:prstGeom prst="rect">
+            <a:avLst/>
+          </a:prstGeom>
+          <a:ln w="12700" cap="flat" cmpd="sng" algn="ctr">
+            <a:noFill/>
+            <a:prstDash val="solid"/>
+            <a:miter lim="800000"/>
+          </a:ln>
+          <a:effectLst/>
+          <a:extLst>
+            <a:ext uri="{91240B29-F687-4F45-9708-019B960494DF}">
+              <a14:hiddenLine xmlns:a14="http://schemas.microsoft.com/office/drawing/2010/main" w="12700" cap="flat" cmpd="sng" algn="ctr">
+                <a:solidFill>
+                  <a:schemeClr val="accent1">
+                    <a:shade val="50000"/>
+                  </a:schemeClr>
+                </a:solidFill>
+                <a:prstDash val="solid"/>
+                <a:miter lim="800000"/>
+              </a14:hiddenLine>
+            </a:ext>
+          </a:extLst>
+        </p:spPr>
+        <p:style>
+          <a:lnRef idx="2">
+            <a:schemeClr val="accent1">
+              <a:shade val="50000"/>
+            </a:schemeClr>
+          </a:lnRef>
+          <a:fillRef idx="1">
+            <a:schemeClr val="accent1"/>
+          </a:fillRef>
+          <a:effectRef idx="0">
+            <a:schemeClr val="accent1"/>
+          </a:effectRef>
+          <a:fontRef idx="minor">
+            <a:schemeClr val="lt1"/>
+          </a:fontRef>
+        </p:style>
+        <p:txBody>
+          <a:bodyPr rtlCol="0" anchor="ctr"/>
+          <a:lstStyle/>
+          <a:p>
+            <a:pPr algn="ctr"/>
+            <a:endParaRPr lang="en-US"/>
+          </a:p>
+        </p:txBody>
+      </p:sp>
+      <p:sp>
+        <p:nvSpPr>
+          <p:cNvPr id="11" name="Rectangle 10">
+            <a:extLst>
+              <a:ext uri="{FF2B5EF4-FFF2-40B4-BE49-F238E27FC236}">
+                <a16:creationId xmlns:a16="http://schemas.microsoft.com/office/drawing/2014/main" id="{256B2C21-A230-48C0-8DF1-C46611373C44}"/>
+              </a:ext>
+              <a:ext uri="{C183D7F6-B498-43B3-948B-1728B52AA6E4}">
+                <adec:decorative xmlns:adec="http://schemas.microsoft.com/office/drawing/2017/decorative" val="1"/>
+              </a:ext>
+            </a:extLst>
+          </p:cNvPr>
+          <p:cNvSpPr>
+            <a:spLocks noGrp="1" noRot="1" noChangeAspect="1" noMove="1" noResize="1" noEditPoints="1" noAdjustHandles="1" noChangeArrowheads="1" noChangeShapeType="1" noTextEdit="1"/>
+          </p:cNvSpPr>
+          <p:nvPr>
+            <p:extLst>
+              <p:ext uri="{386F3935-93C4-4BCD-93E2-E3B085C9AB24}">
+                <p16:designElem xmlns:p16="http://schemas.microsoft.com/office/powerpoint/2015/main" val="1"/>
+              </p:ext>
+            </p:extLst>
+          </p:nvPr>
+        </p:nvSpPr>
+        <p:spPr>
+          <a:xfrm rot="5400000" flipH="1">
+            <a:off x="-1410084" y="1410082"/>
+            <a:ext cx="6858000" cy="4037836"/>
+          </a:xfrm>
+          <a:prstGeom prst="rect">
+            <a:avLst/>
+          </a:prstGeom>
+          <a:gradFill>
+            <a:gsLst>
+              <a:gs pos="8000">
+                <a:srgbClr val="000000"/>
+              </a:gs>
+              <a:gs pos="100000">
+                <a:schemeClr val="accent1">
+                  <a:lumMod val="75000"/>
+                </a:schemeClr>
+              </a:gs>
+            </a:gsLst>
+            <a:lin ang="3000000" scaled="0"/>
+          </a:gradFill>
+          <a:ln>
+            <a:noFill/>
+          </a:ln>
+        </p:spPr>
+        <p:style>
+          <a:lnRef idx="2">
+            <a:schemeClr val="accent1">
+              <a:shade val="50000"/>
+            </a:schemeClr>
+          </a:lnRef>
+          <a:fillRef idx="1">
+            <a:schemeClr val="accent1"/>
+          </a:fillRef>
+          <a:effectRef idx="0">
+            <a:schemeClr val="accent1"/>
+          </a:effectRef>
+          <a:fontRef idx="minor">
+            <a:schemeClr val="lt1"/>
+          </a:fontRef>
+        </p:style>
+        <p:txBody>
+          <a:bodyPr rtlCol="0" anchor="ctr"/>
+          <a:lstStyle/>
+          <a:p>
+            <a:pPr algn="ctr"/>
+            <a:endParaRPr lang="en-US"/>
+          </a:p>
+        </p:txBody>
+      </p:sp>
+      <p:sp>
+        <p:nvSpPr>
+          <p:cNvPr id="13" name="Rectangle 12">
+            <a:extLst>
+              <a:ext uri="{FF2B5EF4-FFF2-40B4-BE49-F238E27FC236}">
+                <a16:creationId xmlns:a16="http://schemas.microsoft.com/office/drawing/2014/main" id="{3847E18C-932D-4C95-AABA-FEC7C9499AD7}"/>
+              </a:ext>
+              <a:ext uri="{C183D7F6-B498-43B3-948B-1728B52AA6E4}">
+                <adec:decorative xmlns:adec="http://schemas.microsoft.com/office/drawing/2017/decorative" val="1"/>
+              </a:ext>
+            </a:extLst>
+          </p:cNvPr>
+          <p:cNvSpPr>
+            <a:spLocks noGrp="1" noRot="1" noChangeAspect="1" noMove="1" noResize="1" noEditPoints="1" noAdjustHandles="1" noChangeArrowheads="1" noChangeShapeType="1" noTextEdit="1"/>
+          </p:cNvSpPr>
+          <p:nvPr>
+            <p:extLst>
+              <p:ext uri="{386F3935-93C4-4BCD-93E2-E3B085C9AB24}">
+                <p16:designElem xmlns:p16="http://schemas.microsoft.com/office/powerpoint/2015/main" val="1"/>
+              </p:ext>
+            </p:extLst>
+          </p:nvPr>
+        </p:nvSpPr>
+        <p:spPr>
+          <a:xfrm rot="5400000" flipH="1">
+            <a:off x="-1410085" y="1420219"/>
+            <a:ext cx="6857999" cy="4037839"/>
+          </a:xfrm>
+          <a:prstGeom prst="rect">
+            <a:avLst/>
+          </a:prstGeom>
+          <a:gradFill>
+            <a:gsLst>
+              <a:gs pos="0">
+                <a:srgbClr val="000000">
+                  <a:alpha val="0"/>
+                </a:srgbClr>
+              </a:gs>
+              <a:gs pos="99000">
+                <a:schemeClr val="accent1">
+                  <a:alpha val="46000"/>
+                </a:schemeClr>
+              </a:gs>
+            </a:gsLst>
+            <a:lin ang="1800000" scaled="0"/>
+          </a:gradFill>
+          <a:ln>
+            <a:noFill/>
+          </a:ln>
+        </p:spPr>
+        <p:style>
+          <a:lnRef idx="2">
+            <a:schemeClr val="accent1">
+              <a:shade val="50000"/>
+            </a:schemeClr>
+          </a:lnRef>
+          <a:fillRef idx="1">
+            <a:schemeClr val="accent1"/>
+          </a:fillRef>
+          <a:effectRef idx="0">
+            <a:schemeClr val="accent1"/>
+          </a:effectRef>
+          <a:fontRef idx="minor">
+            <a:schemeClr val="lt1"/>
+          </a:fontRef>
+        </p:style>
+        <p:txBody>
+          <a:bodyPr rtlCol="0" anchor="ctr"/>
+          <a:lstStyle/>
+          <a:p>
+            <a:pPr algn="ctr"/>
+            <a:endParaRPr lang="en-US"/>
+          </a:p>
+        </p:txBody>
+      </p:sp>
+      <p:sp>
+        <p:nvSpPr>
+          <p:cNvPr id="15" name="Rectangle 14">
+            <a:extLst>
+              <a:ext uri="{FF2B5EF4-FFF2-40B4-BE49-F238E27FC236}">
+                <a16:creationId xmlns:a16="http://schemas.microsoft.com/office/drawing/2014/main" id="{3150CB11-0C61-439E-910F-5787759E72A0}"/>
+              </a:ext>
+              <a:ext uri="{C183D7F6-B498-43B3-948B-1728B52AA6E4}">
+                <adec:decorative xmlns:adec="http://schemas.microsoft.com/office/drawing/2017/decorative" val="1"/>
+              </a:ext>
+            </a:extLst>
+          </p:cNvPr>
+          <p:cNvSpPr>
+            <a:spLocks noGrp="1" noRot="1" noChangeAspect="1" noMove="1" noResize="1" noEditPoints="1" noAdjustHandles="1" noChangeArrowheads="1" noChangeShapeType="1" noTextEdit="1"/>
+          </p:cNvSpPr>
+          <p:nvPr>
+            <p:extLst>
+              <p:ext uri="{386F3935-93C4-4BCD-93E2-E3B085C9AB24}">
+                <p16:designElem xmlns:p16="http://schemas.microsoft.com/office/powerpoint/2015/main" val="1"/>
+              </p:ext>
+            </p:extLst>
+          </p:nvPr>
+        </p:nvSpPr>
+        <p:spPr>
+          <a:xfrm rot="5400000" flipH="1">
+            <a:off x="767923" y="3588085"/>
+            <a:ext cx="2501979" cy="4037841"/>
+          </a:xfrm>
+          <a:prstGeom prst="rect">
+            <a:avLst/>
+          </a:prstGeom>
+          <a:gradFill>
+            <a:gsLst>
+              <a:gs pos="2000">
+                <a:schemeClr val="accent1">
+                  <a:alpha val="29000"/>
+                </a:schemeClr>
+              </a:gs>
+              <a:gs pos="100000">
+                <a:srgbClr val="000000">
+                  <a:alpha val="30000"/>
+                </a:srgbClr>
+              </a:gs>
+            </a:gsLst>
+            <a:lin ang="7800000" scaled="0"/>
+          </a:gradFill>
+          <a:ln>
+            <a:noFill/>
+          </a:ln>
+        </p:spPr>
+        <p:style>
+          <a:lnRef idx="2">
+            <a:schemeClr val="accent1">
+              <a:shade val="50000"/>
+            </a:schemeClr>
+          </a:lnRef>
+          <a:fillRef idx="1">
+            <a:schemeClr val="accent1"/>
+          </a:fillRef>
+          <a:effectRef idx="0">
+            <a:schemeClr val="accent1"/>
+          </a:effectRef>
+          <a:fontRef idx="minor">
+            <a:schemeClr val="lt1"/>
+          </a:fontRef>
+        </p:style>
+        <p:txBody>
+          <a:bodyPr rtlCol="0" anchor="ctr"/>
+          <a:lstStyle/>
+          <a:p>
+            <a:pPr algn="ctr"/>
+            <a:endParaRPr lang="en-US" dirty="0"/>
+          </a:p>
+        </p:txBody>
+      </p:sp>
+      <p:sp>
+        <p:nvSpPr>
+          <p:cNvPr id="17" name="Freeform: Shape 16">
+            <a:extLst>
+              <a:ext uri="{FF2B5EF4-FFF2-40B4-BE49-F238E27FC236}">
+                <a16:creationId xmlns:a16="http://schemas.microsoft.com/office/drawing/2014/main" id="{43F8A58B-5155-44CE-A5FF-7647B47D0A7A}"/>
+              </a:ext>
+              <a:ext uri="{C183D7F6-B498-43B3-948B-1728B52AA6E4}">
+                <adec:decorative xmlns:adec="http://schemas.microsoft.com/office/drawing/2017/decorative" val="1"/>
+              </a:ext>
+            </a:extLst>
+          </p:cNvPr>
+          <p:cNvSpPr>
+            <a:spLocks noGrp="1" noRot="1" noChangeAspect="1" noMove="1" noResize="1" noEditPoints="1" noAdjustHandles="1" noChangeArrowheads="1" noChangeShapeType="1" noTextEdit="1"/>
+          </p:cNvSpPr>
+          <p:nvPr>
+            <p:extLst>
+              <p:ext uri="{386F3935-93C4-4BCD-93E2-E3B085C9AB24}">
+                <p16:designElem xmlns:p16="http://schemas.microsoft.com/office/powerpoint/2015/main" val="1"/>
+              </p:ext>
+            </p:extLst>
+          </p:nvPr>
+        </p:nvSpPr>
+        <p:spPr>
+          <a:xfrm rot="20635413">
+            <a:off x="-501737" y="969718"/>
+            <a:ext cx="3900357" cy="4178958"/>
+          </a:xfrm>
+          <a:custGeom>
+            <a:avLst/>
+            <a:gdLst>
+              <a:gd name="connsiteX0" fmla="*/ 2432225 w 3900357"/>
+              <a:gd name="connsiteY0" fmla="*/ 93939 h 4178958"/>
+              <a:gd name="connsiteX1" fmla="*/ 3900357 w 3900357"/>
+              <a:gd name="connsiteY1" fmla="*/ 2089479 h 4178958"/>
+              <a:gd name="connsiteX2" fmla="*/ 1810878 w 3900357"/>
+              <a:gd name="connsiteY2" fmla="*/ 4178958 h 4178958"/>
+              <a:gd name="connsiteX3" fmla="*/ 78249 w 3900357"/>
+              <a:gd name="connsiteY3" fmla="*/ 3257727 h 4178958"/>
+              <a:gd name="connsiteX4" fmla="*/ 0 w 3900357"/>
+              <a:gd name="connsiteY4" fmla="*/ 3128923 h 4178958"/>
+              <a:gd name="connsiteX5" fmla="*/ 831324 w 3900357"/>
+              <a:gd name="connsiteY5" fmla="*/ 244281 h 4178958"/>
+              <a:gd name="connsiteX6" fmla="*/ 997559 w 3900357"/>
+              <a:gd name="connsiteY6" fmla="*/ 164202 h 4178958"/>
+              <a:gd name="connsiteX7" fmla="*/ 1810878 w 3900357"/>
+              <a:gd name="connsiteY7" fmla="*/ 0 h 4178958"/>
+              <a:gd name="connsiteX8" fmla="*/ 2432225 w 3900357"/>
+              <a:gd name="connsiteY8" fmla="*/ 93939 h 4178958"/>
+            </a:gdLst>
+            <a:ahLst/>
+            <a:cxnLst>
+              <a:cxn ang="0">
+                <a:pos x="connsiteX0" y="connsiteY0"/>
+              </a:cxn>
+              <a:cxn ang="0">
+                <a:pos x="connsiteX1" y="connsiteY1"/>
+              </a:cxn>
+              <a:cxn ang="0">
+                <a:pos x="connsiteX2" y="connsiteY2"/>
+              </a:cxn>
+              <a:cxn ang="0">
+                <a:pos x="connsiteX3" y="connsiteY3"/>
+              </a:cxn>
+              <a:cxn ang="0">
+                <a:pos x="connsiteX4" y="connsiteY4"/>
+              </a:cxn>
+              <a:cxn ang="0">
+                <a:pos x="connsiteX5" y="connsiteY5"/>
+              </a:cxn>
+              <a:cxn ang="0">
+                <a:pos x="connsiteX6" y="connsiteY6"/>
+              </a:cxn>
+              <a:cxn ang="0">
+                <a:pos x="connsiteX7" y="connsiteY7"/>
+              </a:cxn>
+              <a:cxn ang="0">
+                <a:pos x="connsiteX8" y="connsiteY8"/>
+              </a:cxn>
+            </a:cxnLst>
+            <a:rect l="l" t="t" r="r" b="b"/>
+            <a:pathLst>
+              <a:path w="3900357" h="4178958">
+                <a:moveTo>
+                  <a:pt x="2432225" y="93939"/>
+                </a:moveTo>
+                <a:cubicBezTo>
+                  <a:pt x="3282786" y="358491"/>
+                  <a:pt x="3900357" y="1151865"/>
+                  <a:pt x="3900357" y="2089479"/>
+                </a:cubicBezTo>
+                <a:cubicBezTo>
+                  <a:pt x="3900357" y="3243466"/>
+                  <a:pt x="2964865" y="4178958"/>
+                  <a:pt x="1810878" y="4178958"/>
+                </a:cubicBezTo>
+                <a:cubicBezTo>
+                  <a:pt x="1089636" y="4178958"/>
+                  <a:pt x="453744" y="3813531"/>
+                  <a:pt x="78249" y="3257727"/>
+                </a:cubicBezTo>
+                <a:lnTo>
+                  <a:pt x="0" y="3128923"/>
+                </a:lnTo>
+                <a:lnTo>
+                  <a:pt x="831324" y="244281"/>
+                </a:lnTo>
+                <a:lnTo>
+                  <a:pt x="997559" y="164202"/>
+                </a:lnTo>
+                <a:cubicBezTo>
+                  <a:pt x="1247540" y="58468"/>
+                  <a:pt x="1522381" y="0"/>
+                  <a:pt x="1810878" y="0"/>
+                </a:cubicBezTo>
+                <a:cubicBezTo>
+                  <a:pt x="2027251" y="0"/>
+                  <a:pt x="2235942" y="32888"/>
+                  <a:pt x="2432225" y="93939"/>
+                </a:cubicBezTo>
+                <a:close/>
+              </a:path>
+            </a:pathLst>
+          </a:custGeom>
+          <a:gradFill>
+            <a:gsLst>
+              <a:gs pos="29000">
+                <a:srgbClr val="000000">
+                  <a:alpha val="0"/>
+                </a:srgbClr>
+              </a:gs>
+              <a:gs pos="100000">
+                <a:schemeClr val="accent1">
+                  <a:alpha val="43000"/>
+                </a:schemeClr>
+              </a:gs>
+            </a:gsLst>
+            <a:lin ang="1800000" scaled="0"/>
+          </a:gradFill>
+          <a:ln>
+            <a:noFill/>
+          </a:ln>
+        </p:spPr>
+        <p:style>
+          <a:lnRef idx="2">
+            <a:schemeClr val="accent1">
+              <a:shade val="50000"/>
+            </a:schemeClr>
+          </a:lnRef>
+          <a:fillRef idx="1">
+            <a:schemeClr val="accent1"/>
+          </a:fillRef>
+          <a:effectRef idx="0">
+            <a:schemeClr val="accent1"/>
+          </a:effectRef>
+          <a:fontRef idx="minor">
+            <a:schemeClr val="lt1"/>
+          </a:fontRef>
+        </p:style>
+        <p:txBody>
+          <a:bodyPr wrap="square" rtlCol="0" anchor="ctr">
+            <a:noAutofit/>
+          </a:bodyPr>
+          <a:lstStyle/>
+          <a:p>
+            <a:pPr algn="ctr"/>
+            <a:endParaRPr lang="en-US" dirty="0"/>
+          </a:p>
+        </p:txBody>
+      </p:sp>
+      <p:sp>
+        <p:nvSpPr>
+          <p:cNvPr id="19" name="Rectangle 18">
+            <a:extLst>
+              <a:ext uri="{FF2B5EF4-FFF2-40B4-BE49-F238E27FC236}">
+                <a16:creationId xmlns:a16="http://schemas.microsoft.com/office/drawing/2014/main" id="{443F2ACA-E6D6-4028-82DD-F03C262D5DE6}"/>
+              </a:ext>
+              <a:ext uri="{C183D7F6-B498-43B3-948B-1728B52AA6E4}">
+                <adec:decorative xmlns:adec="http://schemas.microsoft.com/office/drawing/2017/decorative" val="1"/>
+              </a:ext>
+            </a:extLst>
+          </p:cNvPr>
+          <p:cNvSpPr>
+            <a:spLocks noGrp="1" noRot="1" noChangeAspect="1" noMove="1" noResize="1" noEditPoints="1" noAdjustHandles="1" noChangeArrowheads="1" noChangeShapeType="1" noTextEdit="1"/>
+          </p:cNvSpPr>
+          <p:nvPr>
+            <p:extLst>
+              <p:ext uri="{386F3935-93C4-4BCD-93E2-E3B085C9AB24}">
+                <p16:designElem xmlns:p16="http://schemas.microsoft.com/office/powerpoint/2015/main" val="1"/>
+              </p:ext>
+            </p:extLst>
+          </p:nvPr>
+        </p:nvSpPr>
+        <p:spPr>
+          <a:xfrm rot="5400000" flipH="1">
+            <a:off x="-1410095" y="1410079"/>
+            <a:ext cx="6858003" cy="4037835"/>
+          </a:xfrm>
+          <a:prstGeom prst="rect">
+            <a:avLst/>
+          </a:prstGeom>
+          <a:gradFill>
+            <a:gsLst>
+              <a:gs pos="0">
+                <a:srgbClr val="000000">
+                  <a:alpha val="0"/>
+                </a:srgbClr>
+              </a:gs>
+              <a:gs pos="99000">
+                <a:schemeClr val="accent1">
+                  <a:lumMod val="60000"/>
+                  <a:lumOff val="40000"/>
+                  <a:alpha val="11000"/>
+                </a:schemeClr>
+              </a:gs>
+            </a:gsLst>
+            <a:lin ang="7200000" scaled="0"/>
+          </a:gradFill>
+          <a:ln>
+            <a:noFill/>
+          </a:ln>
+        </p:spPr>
+        <p:style>
+          <a:lnRef idx="2">
+            <a:schemeClr val="accent1">
+              <a:shade val="50000"/>
+            </a:schemeClr>
+          </a:lnRef>
+          <a:fillRef idx="1">
+            <a:schemeClr val="accent1"/>
+          </a:fillRef>
+          <a:effectRef idx="0">
+            <a:schemeClr val="accent1"/>
+          </a:effectRef>
+          <a:fontRef idx="minor">
+            <a:schemeClr val="lt1"/>
+          </a:fontRef>
+        </p:style>
+        <p:txBody>
+          <a:bodyPr rtlCol="0" anchor="ctr"/>
+          <a:lstStyle/>
+          <a:p>
+            <a:pPr algn="ctr"/>
+            <a:endParaRPr lang="en-US"/>
+          </a:p>
+        </p:txBody>
+      </p:sp>
+      <mc:AlternateContent xmlns:mc="http://schemas.openxmlformats.org/markup-compatibility/2006">
+        <mc:Choice xmlns:a14="http://schemas.microsoft.com/office/drawing/2010/main" Requires="a14">
+          <p:graphicFrame>
+            <p:nvGraphicFramePr>
+              <p:cNvPr id="5" name="Content Placeholder 2">
+                <a:extLst>
+                  <a:ext uri="{FF2B5EF4-FFF2-40B4-BE49-F238E27FC236}">
+                    <a16:creationId xmlns:a16="http://schemas.microsoft.com/office/drawing/2014/main" id="{F62ADB12-1BDB-4B8A-DEB8-D548DB401B9E}"/>
+                  </a:ext>
+                </a:extLst>
+              </p:cNvPr>
+              <p:cNvGraphicFramePr>
+                <a:graphicFrameLocks noGrp="1"/>
+              </p:cNvGraphicFramePr>
+              <p:nvPr>
+                <p:ph idx="1"/>
+                <p:extLst>
+                  <p:ext uri="{D42A27DB-BD31-4B8C-83A1-F6EECF244321}">
+                    <p14:modId xmlns:p14="http://schemas.microsoft.com/office/powerpoint/2010/main" val="170154942"/>
+                  </p:ext>
+                </p:extLst>
+              </p:nvPr>
+            </p:nvGraphicFramePr>
+            <p:xfrm>
+              <a:off x="4642162" y="762782"/>
+              <a:ext cx="7286948" cy="5453920"/>
+            </p:xfrm>
+            <a:graphic>
+              <a:graphicData uri="http://schemas.openxmlformats.org/drawingml/2006/diagram">
+                <dgm:relIds xmlns:dgm="http://schemas.openxmlformats.org/drawingml/2006/diagram" xmlns:r="http://schemas.openxmlformats.org/officeDocument/2006/relationships" r:dm="rId2" r:lo="rId3" r:qs="rId4" r:cs="rId5"/>
+              </a:graphicData>
+            </a:graphic>
+          </p:graphicFrame>
+        </mc:Choice>
+        <mc:Fallback>
+          <p:graphicFrame>
+            <p:nvGraphicFramePr>
+              <p:cNvPr id="5" name="Content Placeholder 2">
+                <a:extLst>
+                  <a:ext uri="{FF2B5EF4-FFF2-40B4-BE49-F238E27FC236}">
+                    <a16:creationId xmlns:a16="http://schemas.microsoft.com/office/drawing/2014/main" id="{F62ADB12-1BDB-4B8A-DEB8-D548DB401B9E}"/>
+                  </a:ext>
+                </a:extLst>
+              </p:cNvPr>
+              <p:cNvGraphicFramePr>
+                <a:graphicFrameLocks noGrp="1"/>
+              </p:cNvGraphicFramePr>
+              <p:nvPr>
+                <p:ph idx="1"/>
+                <p:extLst>
+                  <p:ext uri="{D42A27DB-BD31-4B8C-83A1-F6EECF244321}">
+                    <p14:modId xmlns:p14="http://schemas.microsoft.com/office/powerpoint/2010/main" val="170154942"/>
+                  </p:ext>
+                </p:extLst>
+              </p:nvPr>
+            </p:nvGraphicFramePr>
+            <p:xfrm>
+              <a:off x="4642162" y="762782"/>
+              <a:ext cx="7286948" cy="5453920"/>
+            </p:xfrm>
+            <a:graphic>
+              <a:graphicData uri="http://schemas.openxmlformats.org/drawingml/2006/diagram">
+                <dgm:relIds xmlns:dgm="http://schemas.openxmlformats.org/drawingml/2006/diagram" xmlns:r="http://schemas.openxmlformats.org/officeDocument/2006/relationships" r:dm="rId7" r:lo="rId3" r:qs="rId4" r:cs="rId5"/>
+              </a:graphicData>
+            </a:graphic>
+          </p:graphicFrame>
+        </mc:Fallback>
+      </mc:AlternateContent>
+      <p:sp>
+        <p:nvSpPr>
+          <p:cNvPr id="4" name="TextBox 3">
+            <a:extLst>
+              <a:ext uri="{FF2B5EF4-FFF2-40B4-BE49-F238E27FC236}">
+                <a16:creationId xmlns:a16="http://schemas.microsoft.com/office/drawing/2014/main" id="{93475825-3C4F-1E67-D440-11AC234ABA66}"/>
+              </a:ext>
+            </a:extLst>
+          </p:cNvPr>
+          <p:cNvSpPr txBox="1"/>
+          <p:nvPr/>
+        </p:nvSpPr>
+        <p:spPr>
+          <a:xfrm>
+            <a:off x="262890" y="2720301"/>
+            <a:ext cx="3203121" cy="769441"/>
+          </a:xfrm>
+          <a:prstGeom prst="rect">
+            <a:avLst/>
+          </a:prstGeom>
+          <a:noFill/>
+        </p:spPr>
+        <p:txBody>
+          <a:bodyPr wrap="none" rtlCol="0">
+            <a:spAutoFit/>
+          </a:bodyPr>
+          <a:lstStyle/>
+          <a:p>
+            <a:r>
+              <a:rPr lang="en-US" sz="4400" dirty="0">
+                <a:solidFill>
+                  <a:schemeClr val="bg1"/>
+                </a:solidFill>
+              </a:rPr>
+              <a:t>Comparison</a:t>
+            </a:r>
+          </a:p>
+        </p:txBody>
+      </p:sp>
+    </p:spTree>
+    <p:extLst>
+      <p:ext uri="{BB962C8B-B14F-4D97-AF65-F5344CB8AC3E}">
+        <p14:creationId xmlns:p14="http://schemas.microsoft.com/office/powerpoint/2010/main" val="1439893493"/>
       </p:ext>
     </p:extLst>
   </p:cSld>
@@ -13338,6 +18578,963 @@
     <p:extLst>
       <p:ext uri="{BB962C8B-B14F-4D97-AF65-F5344CB8AC3E}">
         <p14:creationId xmlns:p14="http://schemas.microsoft.com/office/powerpoint/2010/main" val="3522979363"/>
+      </p:ext>
+    </p:extLst>
+  </p:cSld>
+  <p:clrMapOvr>
+    <a:masterClrMapping/>
+  </p:clrMapOvr>
+</p:sld>
+</file>
+
+<file path=ppt/slides/slide30.xml><?xml version="1.0" encoding="utf-8"?>
+<p:sld xmlns:a="http://schemas.openxmlformats.org/drawingml/2006/main" xmlns:r="http://schemas.openxmlformats.org/officeDocument/2006/relationships" xmlns:p="http://schemas.openxmlformats.org/presentationml/2006/main">
+  <p:cSld>
+    <p:bg>
+      <p:bgPr>
+        <a:solidFill>
+          <a:srgbClr val="000000"/>
+        </a:solidFill>
+        <a:effectLst/>
+      </p:bgPr>
+    </p:bg>
+    <p:spTree>
+      <p:nvGrpSpPr>
+        <p:cNvPr id="1" name=""/>
+        <p:cNvGrpSpPr/>
+        <p:nvPr/>
+      </p:nvGrpSpPr>
+      <p:grpSpPr>
+        <a:xfrm>
+          <a:off x="0" y="0"/>
+          <a:ext cx="0" cy="0"/>
+          <a:chOff x="0" y="0"/>
+          <a:chExt cx="0" cy="0"/>
+        </a:xfrm>
+      </p:grpSpPr>
+      <p:sp>
+        <p:nvSpPr>
+          <p:cNvPr id="9" name="Rectangle 8">
+            <a:extLst>
+              <a:ext uri="{FF2B5EF4-FFF2-40B4-BE49-F238E27FC236}">
+                <a16:creationId xmlns:a16="http://schemas.microsoft.com/office/drawing/2014/main" id="{71B2258F-86CA-4D4D-8270-BC05FCDEBFB3}"/>
+              </a:ext>
+              <a:ext uri="{C183D7F6-B498-43B3-948B-1728B52AA6E4}">
+                <adec:decorative xmlns:adec="http://schemas.microsoft.com/office/drawing/2017/decorative" val="1"/>
+              </a:ext>
+            </a:extLst>
+          </p:cNvPr>
+          <p:cNvSpPr>
+            <a:spLocks noGrp="1" noRot="1" noChangeAspect="1" noMove="1" noResize="1" noEditPoints="1" noAdjustHandles="1" noChangeArrowheads="1" noChangeShapeType="1" noTextEdit="1"/>
+          </p:cNvSpPr>
+          <p:nvPr>
+            <p:extLst>
+              <p:ext uri="{386F3935-93C4-4BCD-93E2-E3B085C9AB24}">
+                <p16:designElem xmlns:p16="http://schemas.microsoft.com/office/powerpoint/2015/main" val="1"/>
+              </p:ext>
+            </p:extLst>
+          </p:nvPr>
+        </p:nvSpPr>
+        <p:spPr>
+          <a:xfrm>
+            <a:off x="0" y="0"/>
+            <a:ext cx="12192000" cy="6857999"/>
+          </a:xfrm>
+          <a:prstGeom prst="rect">
+            <a:avLst/>
+          </a:prstGeom>
+          <a:solidFill>
+            <a:srgbClr val="000000"/>
+          </a:solidFill>
+          <a:ln>
+            <a:noFill/>
+          </a:ln>
+        </p:spPr>
+        <p:style>
+          <a:lnRef idx="2">
+            <a:schemeClr val="accent1">
+              <a:shade val="50000"/>
+            </a:schemeClr>
+          </a:lnRef>
+          <a:fillRef idx="1">
+            <a:schemeClr val="accent1"/>
+          </a:fillRef>
+          <a:effectRef idx="0">
+            <a:schemeClr val="accent1"/>
+          </a:effectRef>
+          <a:fontRef idx="minor">
+            <a:schemeClr val="lt1"/>
+          </a:fontRef>
+        </p:style>
+        <p:txBody>
+          <a:bodyPr rtlCol="0" anchor="ctr"/>
+          <a:lstStyle/>
+          <a:p>
+            <a:pPr algn="ctr"/>
+            <a:endParaRPr lang="en-US"/>
+          </a:p>
+        </p:txBody>
+      </p:sp>
+      <p:pic>
+        <p:nvPicPr>
+          <p:cNvPr id="5" name="Picture 4" descr="White stairs with a blue arrow drawn in the middle pointing upwards">
+            <a:extLst>
+              <a:ext uri="{FF2B5EF4-FFF2-40B4-BE49-F238E27FC236}">
+                <a16:creationId xmlns:a16="http://schemas.microsoft.com/office/drawing/2014/main" id="{BCF80F5E-32CC-76BE-C8D6-85A537E09BA6}"/>
+              </a:ext>
+            </a:extLst>
+          </p:cNvPr>
+          <p:cNvPicPr>
+            <a:picLocks noChangeAspect="1"/>
+          </p:cNvPicPr>
+          <p:nvPr/>
+        </p:nvPicPr>
+        <p:blipFill>
+          <a:blip r:embed="rId2">
+            <a:alphaModFix amt="50000"/>
+          </a:blip>
+          <a:srcRect t="25252" b="18498"/>
+          <a:stretch>
+            <a:fillRect/>
+          </a:stretch>
+        </p:blipFill>
+        <p:spPr>
+          <a:xfrm>
+            <a:off x="20" y="1"/>
+            <a:ext cx="12191980" cy="6857999"/>
+          </a:xfrm>
+          <a:prstGeom prst="rect">
+            <a:avLst/>
+          </a:prstGeom>
+        </p:spPr>
+      </p:pic>
+      <p:sp>
+        <p:nvSpPr>
+          <p:cNvPr id="2" name="Title 1">
+            <a:extLst>
+              <a:ext uri="{FF2B5EF4-FFF2-40B4-BE49-F238E27FC236}">
+                <a16:creationId xmlns:a16="http://schemas.microsoft.com/office/drawing/2014/main" id="{C4992932-33FC-0435-98B5-1746814EC420}"/>
+              </a:ext>
+            </a:extLst>
+          </p:cNvPr>
+          <p:cNvSpPr>
+            <a:spLocks noGrp="1"/>
+          </p:cNvSpPr>
+          <p:nvPr>
+            <p:ph type="title"/>
+          </p:nvPr>
+        </p:nvSpPr>
+        <p:spPr>
+          <a:xfrm>
+            <a:off x="1524000" y="1122362"/>
+            <a:ext cx="9144000" cy="2900518"/>
+          </a:xfrm>
+        </p:spPr>
+        <p:txBody>
+          <a:bodyPr vert="horz" lIns="91440" tIns="45720" rIns="91440" bIns="45720" rtlCol="0" anchor="b">
+            <a:normAutofit/>
+          </a:bodyPr>
+          <a:lstStyle/>
+          <a:p>
+            <a:pPr algn="ctr"/>
+            <a:r>
+              <a:rPr lang="en-US" sz="6000" dirty="0">
+                <a:solidFill>
+                  <a:srgbClr val="FFFFFF"/>
+                </a:solidFill>
+              </a:rPr>
+              <a:t>Shortest path problem</a:t>
+            </a:r>
+          </a:p>
+        </p:txBody>
+      </p:sp>
+      <p:sp>
+        <p:nvSpPr>
+          <p:cNvPr id="3" name="Content Placeholder 2">
+            <a:extLst>
+              <a:ext uri="{FF2B5EF4-FFF2-40B4-BE49-F238E27FC236}">
+                <a16:creationId xmlns:a16="http://schemas.microsoft.com/office/drawing/2014/main" id="{FB86B496-4DC8-01EF-FED7-A3046C048A15}"/>
+              </a:ext>
+            </a:extLst>
+          </p:cNvPr>
+          <p:cNvSpPr>
+            <a:spLocks noGrp="1"/>
+          </p:cNvSpPr>
+          <p:nvPr>
+            <p:ph idx="1"/>
+          </p:nvPr>
+        </p:nvSpPr>
+        <p:spPr>
+          <a:xfrm>
+            <a:off x="1524000" y="4159404"/>
+            <a:ext cx="9144000" cy="1098395"/>
+          </a:xfrm>
+        </p:spPr>
+        <p:txBody>
+          <a:bodyPr vert="horz" lIns="91440" tIns="45720" rIns="91440" bIns="45720" rtlCol="0">
+            <a:normAutofit/>
+          </a:bodyPr>
+          <a:lstStyle/>
+          <a:p>
+            <a:pPr marL="0" indent="0" algn="ctr">
+              <a:buNone/>
+            </a:pPr>
+            <a:r>
+              <a:rPr lang="en-US" sz="2400" dirty="0">
+                <a:solidFill>
+                  <a:srgbClr val="FFFFFF"/>
+                </a:solidFill>
+              </a:rPr>
+              <a:t>Single source shortest path</a:t>
+            </a:r>
+          </a:p>
+        </p:txBody>
+      </p:sp>
+    </p:spTree>
+    <p:extLst>
+      <p:ext uri="{BB962C8B-B14F-4D97-AF65-F5344CB8AC3E}">
+        <p14:creationId xmlns:p14="http://schemas.microsoft.com/office/powerpoint/2010/main" val="2497714561"/>
+      </p:ext>
+    </p:extLst>
+  </p:cSld>
+  <p:clrMapOvr>
+    <a:overrideClrMapping bg1="dk1" tx1="lt1" bg2="dk2" tx2="lt2" accent1="accent1" accent2="accent2" accent3="accent3" accent4="accent4" accent5="accent5" accent6="accent6" hlink="hlink" folHlink="folHlink"/>
+  </p:clrMapOvr>
+</p:sld>
+</file>
+
+<file path=ppt/slides/slide31.xml><?xml version="1.0" encoding="utf-8"?>
+<p:sld xmlns:a="http://schemas.openxmlformats.org/drawingml/2006/main" xmlns:r="http://schemas.openxmlformats.org/officeDocument/2006/relationships" xmlns:p="http://schemas.openxmlformats.org/presentationml/2006/main">
+  <p:cSld>
+    <p:bg>
+      <p:bgPr>
+        <a:solidFill>
+          <a:schemeClr val="bg1"/>
+        </a:solidFill>
+        <a:effectLst/>
+      </p:bgPr>
+    </p:bg>
+    <p:spTree>
+      <p:nvGrpSpPr>
+        <p:cNvPr id="1" name=""/>
+        <p:cNvGrpSpPr/>
+        <p:nvPr/>
+      </p:nvGrpSpPr>
+      <p:grpSpPr>
+        <a:xfrm>
+          <a:off x="0" y="0"/>
+          <a:ext cx="0" cy="0"/>
+          <a:chOff x="0" y="0"/>
+          <a:chExt cx="0" cy="0"/>
+        </a:xfrm>
+      </p:grpSpPr>
+      <p:sp useBgFill="1">
+        <p:nvSpPr>
+          <p:cNvPr id="208" name="Rectangle 207">
+            <a:extLst>
+              <a:ext uri="{FF2B5EF4-FFF2-40B4-BE49-F238E27FC236}">
+                <a16:creationId xmlns:a16="http://schemas.microsoft.com/office/drawing/2014/main" id="{6F5A5072-7B47-4D32-B52A-4EBBF590B8A5}"/>
+              </a:ext>
+              <a:ext uri="{C183D7F6-B498-43B3-948B-1728B52AA6E4}">
+                <adec:decorative xmlns:adec="http://schemas.microsoft.com/office/drawing/2017/decorative" val="1"/>
+              </a:ext>
+            </a:extLst>
+          </p:cNvPr>
+          <p:cNvSpPr>
+            <a:spLocks noGrp="1" noRot="1" noChangeAspect="1" noMove="1" noResize="1" noEditPoints="1" noAdjustHandles="1" noChangeArrowheads="1" noChangeShapeType="1" noTextEdit="1"/>
+          </p:cNvSpPr>
+          <p:nvPr>
+            <p:extLst>
+              <p:ext uri="{386F3935-93C4-4BCD-93E2-E3B085C9AB24}">
+                <p16:designElem xmlns:p16="http://schemas.microsoft.com/office/powerpoint/2015/main" val="1"/>
+              </p:ext>
+            </p:extLst>
+          </p:nvPr>
+        </p:nvSpPr>
+        <p:spPr>
+          <a:xfrm>
+            <a:off x="0" y="0"/>
+            <a:ext cx="12192000" cy="6858000"/>
+          </a:xfrm>
+          <a:prstGeom prst="rect">
+            <a:avLst/>
+          </a:prstGeom>
+          <a:ln w="12700" cap="flat" cmpd="sng" algn="ctr">
+            <a:noFill/>
+            <a:prstDash val="solid"/>
+            <a:miter lim="800000"/>
+          </a:ln>
+          <a:effectLst/>
+          <a:extLst>
+            <a:ext uri="{91240B29-F687-4F45-9708-019B960494DF}">
+              <a14:hiddenLine xmlns:a14="http://schemas.microsoft.com/office/drawing/2010/main" w="12700" cap="flat" cmpd="sng" algn="ctr">
+                <a:solidFill>
+                  <a:schemeClr val="accent1">
+                    <a:shade val="50000"/>
+                  </a:schemeClr>
+                </a:solidFill>
+                <a:prstDash val="solid"/>
+                <a:miter lim="800000"/>
+              </a14:hiddenLine>
+            </a:ext>
+          </a:extLst>
+        </p:spPr>
+        <p:style>
+          <a:lnRef idx="2">
+            <a:schemeClr val="accent1">
+              <a:shade val="50000"/>
+            </a:schemeClr>
+          </a:lnRef>
+          <a:fillRef idx="1">
+            <a:schemeClr val="accent1"/>
+          </a:fillRef>
+          <a:effectRef idx="0">
+            <a:schemeClr val="accent1"/>
+          </a:effectRef>
+          <a:fontRef idx="minor">
+            <a:schemeClr val="lt1"/>
+          </a:fontRef>
+        </p:style>
+        <p:txBody>
+          <a:bodyPr rtlCol="0" anchor="ctr"/>
+          <a:lstStyle/>
+          <a:p>
+            <a:pPr algn="ctr"/>
+            <a:endParaRPr lang="en-US"/>
+          </a:p>
+        </p:txBody>
+      </p:sp>
+      <p:sp>
+        <p:nvSpPr>
+          <p:cNvPr id="210" name="Rectangle 209">
+            <a:extLst>
+              <a:ext uri="{FF2B5EF4-FFF2-40B4-BE49-F238E27FC236}">
+                <a16:creationId xmlns:a16="http://schemas.microsoft.com/office/drawing/2014/main" id="{9715DAF0-AE1B-46C9-8A6B-DB2AA05AB91D}"/>
+              </a:ext>
+              <a:ext uri="{C183D7F6-B498-43B3-948B-1728B52AA6E4}">
+                <adec:decorative xmlns:adec="http://schemas.microsoft.com/office/drawing/2017/decorative" val="1"/>
+              </a:ext>
+            </a:extLst>
+          </p:cNvPr>
+          <p:cNvSpPr>
+            <a:spLocks noGrp="1" noRot="1" noChangeAspect="1" noMove="1" noResize="1" noEditPoints="1" noAdjustHandles="1" noChangeArrowheads="1" noChangeShapeType="1" noTextEdit="1"/>
+          </p:cNvSpPr>
+          <p:nvPr>
+            <p:extLst>
+              <p:ext uri="{386F3935-93C4-4BCD-93E2-E3B085C9AB24}">
+                <p16:designElem xmlns:p16="http://schemas.microsoft.com/office/powerpoint/2015/main" val="1"/>
+              </p:ext>
+            </p:extLst>
+          </p:nvPr>
+        </p:nvSpPr>
+        <p:spPr>
+          <a:xfrm rot="10800000">
+            <a:off x="-2" y="-22693"/>
+            <a:ext cx="12191999" cy="4374129"/>
+          </a:xfrm>
+          <a:prstGeom prst="rect">
+            <a:avLst/>
+          </a:prstGeom>
+          <a:gradFill>
+            <a:gsLst>
+              <a:gs pos="0">
+                <a:schemeClr val="accent1">
+                  <a:lumMod val="75000"/>
+                </a:schemeClr>
+              </a:gs>
+              <a:gs pos="100000">
+                <a:srgbClr val="000000"/>
+              </a:gs>
+            </a:gsLst>
+            <a:lin ang="15000000" scaled="0"/>
+          </a:gradFill>
+          <a:ln>
+            <a:noFill/>
+          </a:ln>
+        </p:spPr>
+        <p:style>
+          <a:lnRef idx="2">
+            <a:schemeClr val="accent1">
+              <a:shade val="50000"/>
+            </a:schemeClr>
+          </a:lnRef>
+          <a:fillRef idx="1">
+            <a:schemeClr val="accent1"/>
+          </a:fillRef>
+          <a:effectRef idx="0">
+            <a:schemeClr val="accent1"/>
+          </a:effectRef>
+          <a:fontRef idx="minor">
+            <a:schemeClr val="lt1"/>
+          </a:fontRef>
+        </p:style>
+        <p:txBody>
+          <a:bodyPr rtlCol="0" anchor="ctr"/>
+          <a:lstStyle/>
+          <a:p>
+            <a:pPr algn="ctr"/>
+            <a:endParaRPr lang="en-US"/>
+          </a:p>
+        </p:txBody>
+      </p:sp>
+      <p:sp>
+        <p:nvSpPr>
+          <p:cNvPr id="212" name="Rectangle 211">
+            <a:extLst>
+              <a:ext uri="{FF2B5EF4-FFF2-40B4-BE49-F238E27FC236}">
+                <a16:creationId xmlns:a16="http://schemas.microsoft.com/office/drawing/2014/main" id="{6016219D-510E-4184-9090-6D5578A87BD1}"/>
+              </a:ext>
+              <a:ext uri="{C183D7F6-B498-43B3-948B-1728B52AA6E4}">
+                <adec:decorative xmlns:adec="http://schemas.microsoft.com/office/drawing/2017/decorative" val="1"/>
+              </a:ext>
+            </a:extLst>
+          </p:cNvPr>
+          <p:cNvSpPr>
+            <a:spLocks noGrp="1" noRot="1" noChangeAspect="1" noMove="1" noResize="1" noEditPoints="1" noAdjustHandles="1" noChangeArrowheads="1" noChangeShapeType="1" noTextEdit="1"/>
+          </p:cNvSpPr>
+          <p:nvPr>
+            <p:extLst>
+              <p:ext uri="{386F3935-93C4-4BCD-93E2-E3B085C9AB24}">
+                <p16:designElem xmlns:p16="http://schemas.microsoft.com/office/powerpoint/2015/main" val="1"/>
+              </p:ext>
+            </p:extLst>
+          </p:nvPr>
+        </p:nvSpPr>
+        <p:spPr>
+          <a:xfrm rot="5400000">
+            <a:off x="3908719" y="-3931841"/>
+            <a:ext cx="4374557" cy="12192000"/>
+          </a:xfrm>
+          <a:prstGeom prst="rect">
+            <a:avLst/>
+          </a:prstGeom>
+          <a:gradFill>
+            <a:gsLst>
+              <a:gs pos="40000">
+                <a:schemeClr val="accent1">
+                  <a:alpha val="0"/>
+                </a:schemeClr>
+              </a:gs>
+              <a:gs pos="100000">
+                <a:schemeClr val="accent1">
+                  <a:lumMod val="75000"/>
+                  <a:alpha val="52000"/>
+                </a:schemeClr>
+              </a:gs>
+            </a:gsLst>
+            <a:lin ang="2400000" scaled="0"/>
+          </a:gradFill>
+          <a:ln>
+            <a:noFill/>
+          </a:ln>
+        </p:spPr>
+        <p:style>
+          <a:lnRef idx="2">
+            <a:schemeClr val="accent1">
+              <a:shade val="50000"/>
+            </a:schemeClr>
+          </a:lnRef>
+          <a:fillRef idx="1">
+            <a:schemeClr val="accent1"/>
+          </a:fillRef>
+          <a:effectRef idx="0">
+            <a:schemeClr val="accent1"/>
+          </a:effectRef>
+          <a:fontRef idx="minor">
+            <a:schemeClr val="lt1"/>
+          </a:fontRef>
+        </p:style>
+        <p:txBody>
+          <a:bodyPr rtlCol="0" anchor="ctr"/>
+          <a:lstStyle/>
+          <a:p>
+            <a:pPr algn="ctr"/>
+            <a:endParaRPr lang="en-US"/>
+          </a:p>
+        </p:txBody>
+      </p:sp>
+      <p:sp>
+        <p:nvSpPr>
+          <p:cNvPr id="214" name="Rectangle 213">
+            <a:extLst>
+              <a:ext uri="{FF2B5EF4-FFF2-40B4-BE49-F238E27FC236}">
+                <a16:creationId xmlns:a16="http://schemas.microsoft.com/office/drawing/2014/main" id="{AFF4A713-7B75-4B21-90D7-5AB19547C728}"/>
+              </a:ext>
+              <a:ext uri="{C183D7F6-B498-43B3-948B-1728B52AA6E4}">
+                <adec:decorative xmlns:adec="http://schemas.microsoft.com/office/drawing/2017/decorative" val="1"/>
+              </a:ext>
+            </a:extLst>
+          </p:cNvPr>
+          <p:cNvSpPr>
+            <a:spLocks noGrp="1" noRot="1" noChangeAspect="1" noMove="1" noResize="1" noEditPoints="1" noAdjustHandles="1" noChangeArrowheads="1" noChangeShapeType="1" noTextEdit="1"/>
+          </p:cNvSpPr>
+          <p:nvPr>
+            <p:extLst>
+              <p:ext uri="{386F3935-93C4-4BCD-93E2-E3B085C9AB24}">
+                <p16:designElem xmlns:p16="http://schemas.microsoft.com/office/powerpoint/2015/main" val="1"/>
+              </p:ext>
+            </p:extLst>
+          </p:nvPr>
+        </p:nvSpPr>
+        <p:spPr>
+          <a:xfrm rot="5400000">
+            <a:off x="4136696" y="-3703868"/>
+            <a:ext cx="4374128" cy="11736479"/>
+          </a:xfrm>
+          <a:prstGeom prst="rect">
+            <a:avLst/>
+          </a:prstGeom>
+          <a:gradFill>
+            <a:gsLst>
+              <a:gs pos="17000">
+                <a:schemeClr val="accent1">
+                  <a:alpha val="0"/>
+                </a:schemeClr>
+              </a:gs>
+              <a:gs pos="100000">
+                <a:srgbClr val="000000">
+                  <a:alpha val="37000"/>
+                </a:srgbClr>
+              </a:gs>
+            </a:gsLst>
+            <a:lin ang="7800000" scaled="0"/>
+          </a:gradFill>
+          <a:ln>
+            <a:noFill/>
+          </a:ln>
+        </p:spPr>
+        <p:style>
+          <a:lnRef idx="2">
+            <a:schemeClr val="accent1">
+              <a:shade val="50000"/>
+            </a:schemeClr>
+          </a:lnRef>
+          <a:fillRef idx="1">
+            <a:schemeClr val="accent1"/>
+          </a:fillRef>
+          <a:effectRef idx="0">
+            <a:schemeClr val="accent1"/>
+          </a:effectRef>
+          <a:fontRef idx="minor">
+            <a:schemeClr val="lt1"/>
+          </a:fontRef>
+        </p:style>
+        <p:txBody>
+          <a:bodyPr rtlCol="0" anchor="ctr"/>
+          <a:lstStyle/>
+          <a:p>
+            <a:pPr algn="ctr"/>
+            <a:endParaRPr lang="en-US"/>
+          </a:p>
+        </p:txBody>
+      </p:sp>
+      <p:sp>
+        <p:nvSpPr>
+          <p:cNvPr id="216" name="Rectangle 215">
+            <a:extLst>
+              <a:ext uri="{FF2B5EF4-FFF2-40B4-BE49-F238E27FC236}">
+                <a16:creationId xmlns:a16="http://schemas.microsoft.com/office/drawing/2014/main" id="{DC631C0B-6DA6-4E57-8231-CE32B3434A7E}"/>
+              </a:ext>
+              <a:ext uri="{C183D7F6-B498-43B3-948B-1728B52AA6E4}">
+                <adec:decorative xmlns:adec="http://schemas.microsoft.com/office/drawing/2017/decorative" val="1"/>
+              </a:ext>
+            </a:extLst>
+          </p:cNvPr>
+          <p:cNvSpPr>
+            <a:spLocks noGrp="1" noRot="1" noChangeAspect="1" noMove="1" noResize="1" noEditPoints="1" noAdjustHandles="1" noChangeArrowheads="1" noChangeShapeType="1" noTextEdit="1"/>
+          </p:cNvSpPr>
+          <p:nvPr>
+            <p:extLst>
+              <p:ext uri="{386F3935-93C4-4BCD-93E2-E3B085C9AB24}">
+                <p16:designElem xmlns:p16="http://schemas.microsoft.com/office/powerpoint/2015/main" val="1"/>
+              </p:ext>
+            </p:extLst>
+          </p:nvPr>
+        </p:nvSpPr>
+        <p:spPr>
+          <a:xfrm>
+            <a:off x="-5" y="-22690"/>
+            <a:ext cx="8542485" cy="4374126"/>
+          </a:xfrm>
+          <a:prstGeom prst="rect">
+            <a:avLst/>
+          </a:prstGeom>
+          <a:gradFill>
+            <a:gsLst>
+              <a:gs pos="0">
+                <a:schemeClr val="accent1">
+                  <a:lumMod val="50000"/>
+                  <a:alpha val="0"/>
+                </a:schemeClr>
+              </a:gs>
+              <a:gs pos="100000">
+                <a:srgbClr val="000000">
+                  <a:alpha val="25000"/>
+                </a:srgbClr>
+              </a:gs>
+            </a:gsLst>
+            <a:lin ang="18600000" scaled="0"/>
+          </a:gradFill>
+          <a:ln>
+            <a:noFill/>
+          </a:ln>
+        </p:spPr>
+        <p:style>
+          <a:lnRef idx="2">
+            <a:schemeClr val="accent1">
+              <a:shade val="50000"/>
+            </a:schemeClr>
+          </a:lnRef>
+          <a:fillRef idx="1">
+            <a:schemeClr val="accent1"/>
+          </a:fillRef>
+          <a:effectRef idx="0">
+            <a:schemeClr val="accent1"/>
+          </a:effectRef>
+          <a:fontRef idx="minor">
+            <a:schemeClr val="lt1"/>
+          </a:fontRef>
+        </p:style>
+        <p:txBody>
+          <a:bodyPr rtlCol="0" anchor="ctr"/>
+          <a:lstStyle/>
+          <a:p>
+            <a:pPr algn="ctr"/>
+            <a:endParaRPr lang="en-US"/>
+          </a:p>
+        </p:txBody>
+      </p:sp>
+      <p:sp>
+        <p:nvSpPr>
+          <p:cNvPr id="218" name="Freeform: Shape 217">
+            <a:extLst>
+              <a:ext uri="{FF2B5EF4-FFF2-40B4-BE49-F238E27FC236}">
+                <a16:creationId xmlns:a16="http://schemas.microsoft.com/office/drawing/2014/main" id="{C29501E6-A978-4A61-9689-9085AF97A53A}"/>
+              </a:ext>
+              <a:ext uri="{C183D7F6-B498-43B3-948B-1728B52AA6E4}">
+                <adec:decorative xmlns:adec="http://schemas.microsoft.com/office/drawing/2017/decorative" val="1"/>
+              </a:ext>
+            </a:extLst>
+          </p:cNvPr>
+          <p:cNvSpPr>
+            <a:spLocks noGrp="1" noRot="1" noChangeAspect="1" noMove="1" noResize="1" noEditPoints="1" noAdjustHandles="1" noChangeArrowheads="1" noChangeShapeType="1" noTextEdit="1"/>
+          </p:cNvSpPr>
+          <p:nvPr>
+            <p:extLst>
+              <p:ext uri="{386F3935-93C4-4BCD-93E2-E3B085C9AB24}">
+                <p16:designElem xmlns:p16="http://schemas.microsoft.com/office/powerpoint/2015/main" val="1"/>
+              </p:ext>
+            </p:extLst>
+          </p:nvPr>
+        </p:nvSpPr>
+        <p:spPr>
+          <a:xfrm rot="12508972">
+            <a:off x="5945431" y="-1032053"/>
+            <a:ext cx="4990147" cy="4439131"/>
+          </a:xfrm>
+          <a:custGeom>
+            <a:avLst/>
+            <a:gdLst>
+              <a:gd name="connsiteX0" fmla="*/ 4990147 w 4990147"/>
+              <a:gd name="connsiteY0" fmla="*/ 2229378 h 4439131"/>
+              <a:gd name="connsiteX1" fmla="*/ 917384 w 4990147"/>
+              <a:gd name="connsiteY1" fmla="*/ 4439131 h 4439131"/>
+              <a:gd name="connsiteX2" fmla="*/ 910814 w 4990147"/>
+              <a:gd name="connsiteY2" fmla="*/ 4434219 h 4439131"/>
+              <a:gd name="connsiteX3" fmla="*/ 0 w 4990147"/>
+              <a:gd name="connsiteY3" fmla="*/ 2502877 h 4439131"/>
+              <a:gd name="connsiteX4" fmla="*/ 2502877 w 4990147"/>
+              <a:gd name="connsiteY4" fmla="*/ 0 h 4439131"/>
+              <a:gd name="connsiteX5" fmla="*/ 4954904 w 4990147"/>
+              <a:gd name="connsiteY5" fmla="*/ 1998460 h 4439131"/>
+            </a:gdLst>
+            <a:ahLst/>
+            <a:cxnLst>
+              <a:cxn ang="0">
+                <a:pos x="connsiteX0" y="connsiteY0"/>
+              </a:cxn>
+              <a:cxn ang="0">
+                <a:pos x="connsiteX1" y="connsiteY1"/>
+              </a:cxn>
+              <a:cxn ang="0">
+                <a:pos x="connsiteX2" y="connsiteY2"/>
+              </a:cxn>
+              <a:cxn ang="0">
+                <a:pos x="connsiteX3" y="connsiteY3"/>
+              </a:cxn>
+              <a:cxn ang="0">
+                <a:pos x="connsiteX4" y="connsiteY4"/>
+              </a:cxn>
+              <a:cxn ang="0">
+                <a:pos x="connsiteX5" y="connsiteY5"/>
+              </a:cxn>
+            </a:cxnLst>
+            <a:rect l="l" t="t" r="r" b="b"/>
+            <a:pathLst>
+              <a:path w="4990147" h="4439131">
+                <a:moveTo>
+                  <a:pt x="4990147" y="2229378"/>
+                </a:moveTo>
+                <a:lnTo>
+                  <a:pt x="917384" y="4439131"/>
+                </a:lnTo>
+                <a:lnTo>
+                  <a:pt x="910814" y="4434219"/>
+                </a:lnTo>
+                <a:cubicBezTo>
+                  <a:pt x="354557" y="3975154"/>
+                  <a:pt x="0" y="3280421"/>
+                  <a:pt x="0" y="2502877"/>
+                </a:cubicBezTo>
+                <a:cubicBezTo>
+                  <a:pt x="0" y="1120576"/>
+                  <a:pt x="1120576" y="0"/>
+                  <a:pt x="2502877" y="0"/>
+                </a:cubicBezTo>
+                <a:cubicBezTo>
+                  <a:pt x="3712390" y="0"/>
+                  <a:pt x="4721520" y="857941"/>
+                  <a:pt x="4954904" y="1998460"/>
+                </a:cubicBezTo>
+                <a:close/>
+              </a:path>
+            </a:pathLst>
+          </a:custGeom>
+          <a:gradFill>
+            <a:gsLst>
+              <a:gs pos="0">
+                <a:schemeClr val="accent1">
+                  <a:alpha val="22000"/>
+                </a:schemeClr>
+              </a:gs>
+              <a:gs pos="87000">
+                <a:schemeClr val="accent1">
+                  <a:lumMod val="60000"/>
+                  <a:lumOff val="40000"/>
+                  <a:alpha val="2000"/>
+                </a:schemeClr>
+              </a:gs>
+            </a:gsLst>
+            <a:lin ang="8400000" scaled="0"/>
+          </a:gradFill>
+          <a:ln>
+            <a:noFill/>
+          </a:ln>
+        </p:spPr>
+        <p:style>
+          <a:lnRef idx="2">
+            <a:schemeClr val="accent1">
+              <a:shade val="50000"/>
+            </a:schemeClr>
+          </a:lnRef>
+          <a:fillRef idx="1">
+            <a:schemeClr val="accent1"/>
+          </a:fillRef>
+          <a:effectRef idx="0">
+            <a:schemeClr val="accent1"/>
+          </a:effectRef>
+          <a:fontRef idx="minor">
+            <a:schemeClr val="lt1"/>
+          </a:fontRef>
+        </p:style>
+        <p:txBody>
+          <a:bodyPr wrap="square" rtlCol="0" anchor="ctr">
+            <a:noAutofit/>
+          </a:bodyPr>
+          <a:lstStyle/>
+          <a:p>
+            <a:pPr algn="ctr"/>
+            <a:endParaRPr lang="en-US" dirty="0"/>
+          </a:p>
+        </p:txBody>
+      </p:sp>
+      <p:sp>
+        <p:nvSpPr>
+          <p:cNvPr id="2" name="Title 1">
+            <a:extLst>
+              <a:ext uri="{FF2B5EF4-FFF2-40B4-BE49-F238E27FC236}">
+                <a16:creationId xmlns:a16="http://schemas.microsoft.com/office/drawing/2014/main" id="{3BB50E4C-340B-ED2D-F268-6E545473023E}"/>
+              </a:ext>
+            </a:extLst>
+          </p:cNvPr>
+          <p:cNvSpPr>
+            <a:spLocks noGrp="1"/>
+          </p:cNvSpPr>
+          <p:nvPr>
+            <p:ph type="title"/>
+          </p:nvPr>
+        </p:nvSpPr>
+        <p:spPr>
+          <a:xfrm>
+            <a:off x="1314824" y="735106"/>
+            <a:ext cx="10053763" cy="2928470"/>
+          </a:xfrm>
+        </p:spPr>
+        <p:txBody>
+          <a:bodyPr vert="horz" lIns="91440" tIns="45720" rIns="91440" bIns="45720" rtlCol="0" anchor="b">
+            <a:normAutofit/>
+          </a:bodyPr>
+          <a:lstStyle/>
+          <a:p>
+            <a:r>
+              <a:rPr lang="en-US" sz="4800" b="1" kern="1200">
+                <a:solidFill>
+                  <a:srgbClr val="FFFFFF"/>
+                </a:solidFill>
+                <a:latin typeface="+mj-lt"/>
+                <a:ea typeface="+mj-ea"/>
+                <a:cs typeface="+mj-cs"/>
+              </a:rPr>
+              <a:t>Dijkstra’s algorithm</a:t>
+            </a:r>
+          </a:p>
+        </p:txBody>
+      </p:sp>
+      <p:sp>
+        <p:nvSpPr>
+          <p:cNvPr id="3" name="Content Placeholder 2">
+            <a:extLst>
+              <a:ext uri="{FF2B5EF4-FFF2-40B4-BE49-F238E27FC236}">
+                <a16:creationId xmlns:a16="http://schemas.microsoft.com/office/drawing/2014/main" id="{21E0F285-6BA5-C114-A84D-C831014B4182}"/>
+              </a:ext>
+            </a:extLst>
+          </p:cNvPr>
+          <p:cNvSpPr>
+            <a:spLocks noGrp="1"/>
+          </p:cNvSpPr>
+          <p:nvPr>
+            <p:ph idx="1"/>
+          </p:nvPr>
+        </p:nvSpPr>
+        <p:spPr>
+          <a:xfrm>
+            <a:off x="1350682" y="4870824"/>
+            <a:ext cx="10005951" cy="1458258"/>
+          </a:xfrm>
+        </p:spPr>
+        <p:txBody>
+          <a:bodyPr vert="horz" lIns="91440" tIns="45720" rIns="91440" bIns="45720" rtlCol="0" anchor="ctr">
+            <a:normAutofit/>
+          </a:bodyPr>
+          <a:lstStyle/>
+          <a:p>
+            <a:pPr marL="0" indent="0">
+              <a:buNone/>
+            </a:pPr>
+            <a:r>
+              <a:rPr lang="en-US" sz="2400" kern="1200">
+                <a:solidFill>
+                  <a:schemeClr val="tx1"/>
+                </a:solidFill>
+                <a:latin typeface="+mn-lt"/>
+                <a:ea typeface="+mn-ea"/>
+                <a:cs typeface="+mn-cs"/>
+              </a:rPr>
+              <a:t>Shortest path to every other node from a single starting point</a:t>
+            </a:r>
+          </a:p>
+        </p:txBody>
+      </p:sp>
+    </p:spTree>
+    <p:extLst>
+      <p:ext uri="{BB962C8B-B14F-4D97-AF65-F5344CB8AC3E}">
+        <p14:creationId xmlns:p14="http://schemas.microsoft.com/office/powerpoint/2010/main" val="1154820175"/>
+      </p:ext>
+    </p:extLst>
+  </p:cSld>
+  <p:clrMapOvr>
+    <a:masterClrMapping/>
+  </p:clrMapOvr>
+</p:sld>
+</file>
+
+<file path=ppt/slides/slide32.xml><?xml version="1.0" encoding="utf-8"?>
+<p:sld xmlns:a="http://schemas.openxmlformats.org/drawingml/2006/main" xmlns:r="http://schemas.openxmlformats.org/officeDocument/2006/relationships" xmlns:p="http://schemas.openxmlformats.org/presentationml/2006/main">
+  <p:cSld>
+    <p:spTree>
+      <p:nvGrpSpPr>
+        <p:cNvPr id="1" name=""/>
+        <p:cNvGrpSpPr/>
+        <p:nvPr/>
+      </p:nvGrpSpPr>
+      <p:grpSpPr>
+        <a:xfrm>
+          <a:off x="0" y="0"/>
+          <a:ext cx="0" cy="0"/>
+          <a:chOff x="0" y="0"/>
+          <a:chExt cx="0" cy="0"/>
+        </a:xfrm>
+      </p:grpSpPr>
+      <p:sp>
+        <p:nvSpPr>
+          <p:cNvPr id="3" name="Content Placeholder 2">
+            <a:extLst>
+              <a:ext uri="{FF2B5EF4-FFF2-40B4-BE49-F238E27FC236}">
+                <a16:creationId xmlns:a16="http://schemas.microsoft.com/office/drawing/2014/main" id="{638BA892-8CFA-D4EB-7BC3-7B607A5C432A}"/>
+              </a:ext>
+            </a:extLst>
+          </p:cNvPr>
+          <p:cNvSpPr>
+            <a:spLocks noGrp="1"/>
+          </p:cNvSpPr>
+          <p:nvPr>
+            <p:ph idx="1"/>
+          </p:nvPr>
+        </p:nvSpPr>
+        <p:spPr/>
+        <p:txBody>
+          <a:bodyPr/>
+          <a:lstStyle/>
+          <a:p>
+            <a:endParaRPr lang="en-US"/>
+          </a:p>
+        </p:txBody>
+      </p:sp>
+      <p:sp>
+        <p:nvSpPr>
+          <p:cNvPr id="4" name="TextBox 3">
+            <a:extLst>
+              <a:ext uri="{FF2B5EF4-FFF2-40B4-BE49-F238E27FC236}">
+                <a16:creationId xmlns:a16="http://schemas.microsoft.com/office/drawing/2014/main" id="{A4CBEE49-4D44-90AF-A728-F679C984F5D5}"/>
+              </a:ext>
+            </a:extLst>
+          </p:cNvPr>
+          <p:cNvSpPr txBox="1"/>
+          <p:nvPr/>
+        </p:nvSpPr>
+        <p:spPr>
+          <a:xfrm>
+            <a:off x="838200" y="217170"/>
+            <a:ext cx="5256311" cy="646331"/>
+          </a:xfrm>
+          <a:prstGeom prst="rect">
+            <a:avLst/>
+          </a:prstGeom>
+          <a:noFill/>
+        </p:spPr>
+        <p:txBody>
+          <a:bodyPr wrap="none" rtlCol="0">
+            <a:spAutoFit/>
+          </a:bodyPr>
+          <a:lstStyle/>
+          <a:p>
+            <a:r>
+              <a:rPr lang="en-US" dirty="0">
+                <a:hlinkClick r:id="rId2"/>
+              </a:rPr>
+              <a:t>https://www.youtube.com/watch?v=CmIQ29cUGiE</a:t>
+            </a:r>
+            <a:endParaRPr lang="en-US" dirty="0"/>
+          </a:p>
+          <a:p>
+            <a:endParaRPr lang="en-US" dirty="0"/>
+          </a:p>
+        </p:txBody>
+      </p:sp>
+    </p:spTree>
+    <p:extLst>
+      <p:ext uri="{BB962C8B-B14F-4D97-AF65-F5344CB8AC3E}">
+        <p14:creationId xmlns:p14="http://schemas.microsoft.com/office/powerpoint/2010/main" val="1225617234"/>
       </p:ext>
     </p:extLst>
   </p:cSld>
